--- a/Kisan_Sahayak_AI_Pitch_Presentation.pptx
+++ b/Kisan_Sahayak_AI_Pitch_Presentation.pptx
@@ -11,9 +11,6 @@
     <p:sldId id="259" r:id="rId10"/>
     <p:sldId id="260" r:id="rId11"/>
     <p:sldId id="261" r:id="rId12"/>
-    <p:sldId id="262" r:id="rId13"/>
-    <p:sldId id="263" r:id="rId14"/>
-    <p:sldId id="264" r:id="rId15"/>
   </p:sldIdLst>
   <p:sldSz cx="12191695" cy="6858000" type="screen4x3"/>
   <p:notesSz cx="6858000" cy="9144000"/>
@@ -3098,23 +3095,25 @@
       <p:grpSpPr/>
       <p:sp>
         <p:nvSpPr>
-          <p:cNvPr id="2" name="Rectangle 1"/>
+          <p:cNvPr id="2" name="Rounded Rectangle 1"/>
           <p:cNvSpPr/>
           <p:nvPr/>
         </p:nvSpPr>
         <p:spPr>
           <a:xfrm>
-            <a:off x="0" y="0"/>
-            <a:ext cx="12191695" cy="6858000"/>
-          </a:xfrm>
-          <a:prstGeom prst="rect">
+            <a:off x="731520" y="731520"/>
+            <a:ext cx="6949440" cy="5394960"/>
+          </a:xfrm>
+          <a:prstGeom prst="roundRect">
             <a:avLst/>
           </a:prstGeom>
           <a:solidFill>
-            <a:srgbClr val="0B141A"/>
+            <a:srgbClr val="F8FAFC"/>
           </a:solidFill>
-          <a:ln>
-            <a:noFill/>
+          <a:ln w="19050">
+            <a:solidFill>
+              <a:srgbClr val="059669"/>
+            </a:solidFill>
           </a:ln>
         </p:spPr>
         <p:style>
@@ -3147,8 +3146,8 @@
         </p:nvSpPr>
         <p:spPr>
           <a:xfrm>
-            <a:off x="914400" y="548640"/>
-            <a:ext cx="10362895" cy="365760"/>
+            <a:off x="1005840" y="1005840"/>
+            <a:ext cx="6400800" cy="4846320"/>
           </a:xfrm>
           <a:prstGeom prst="rect">
             <a:avLst/>
@@ -3156,7 +3155,7 @@
           <a:noFill/>
         </p:spPr>
         <p:txBody>
-          <a:bodyPr wrap="none">
+          <a:bodyPr wrap="square">
             <a:spAutoFit/>
           </a:bodyPr>
           <a:lstStyle/>
@@ -3164,111 +3163,229 @@
             <a:pPr>
               <a:defRPr sz="1100" b="1">
                 <a:solidFill>
-                  <a:srgbClr val="F59E0B"/>
-                </a:solidFill>
-              </a:defRPr>
-            </a:pPr>
-            <a:r>
-              <a:t>QUALCOMM SNAPDRAGON® AI LAB BUILD &amp; PRESENT CHALLENGE</a:t>
-            </a:r>
-          </a:p>
-        </p:txBody>
-      </p:sp>
-      <p:sp>
-        <p:nvSpPr>
-          <p:cNvPr id="4" name="TextBox 3"/>
-          <p:cNvSpPr txBox="1"/>
-          <p:nvPr/>
-        </p:nvSpPr>
-        <p:spPr>
-          <a:xfrm>
-            <a:off x="914400" y="914400"/>
-            <a:ext cx="10362895" cy="731520"/>
-          </a:xfrm>
-          <a:prstGeom prst="rect">
-            <a:avLst/>
-          </a:prstGeom>
-          <a:noFill/>
-        </p:spPr>
-        <p:txBody>
-          <a:bodyPr wrap="none">
-            <a:spAutoFit/>
-          </a:bodyPr>
-          <a:lstStyle/>
-          <a:p>
-            <a:pPr>
+                  <a:srgbClr val="D97706"/>
+                </a:solidFill>
+              </a:defRPr>
+            </a:pPr>
+            <a:r>
+              <a:t>QUALCOMM SNAPDRAGON® AI LAB CHALLENGE</a:t>
+            </a:r>
+          </a:p>
+          <a:p>
+            <a:pPr>
+              <a:spcBef>
+                <a:spcPts val="600"/>
+              </a:spcBef>
               <a:defRPr sz="2600" b="1">
                 <a:solidFill>
-                  <a:srgbClr val="FFFFFF"/>
-                </a:solidFill>
-              </a:defRPr>
-            </a:pPr>
-            <a:r>
-              <a:t>Kisan Sahayak AI (किसान सहायक AI)</a:t>
-            </a:r>
-          </a:p>
-        </p:txBody>
-      </p:sp>
-      <p:sp>
-        <p:nvSpPr>
-          <p:cNvPr id="5" name="TextBox 4"/>
-          <p:cNvSpPr txBox="1"/>
-          <p:nvPr/>
-        </p:nvSpPr>
-        <p:spPr>
-          <a:xfrm>
-            <a:off x="914400" y="1645920"/>
-            <a:ext cx="10362895" cy="548640"/>
-          </a:xfrm>
-          <a:prstGeom prst="rect">
-            <a:avLst/>
-          </a:prstGeom>
-          <a:noFill/>
-        </p:spPr>
-        <p:txBody>
-          <a:bodyPr wrap="none">
-            <a:spAutoFit/>
-          </a:bodyPr>
-          <a:lstStyle/>
-          <a:p>
-            <a:pPr>
-              <a:defRPr sz="1400">
-                <a:solidFill>
-                  <a:srgbClr val="10B981"/>
-                </a:solidFill>
-              </a:defRPr>
-            </a:pPr>
-            <a:r>
-              <a:t>Offline-First Multimodal On-Device AI for 146M+ Indian Farmers</a:t>
-            </a:r>
-            <a:br/>
-            <a:r>
-              <a:t>Powered by Snapdragon® X Elite &amp; HP OmniBook PCs</a:t>
-            </a:r>
-          </a:p>
-        </p:txBody>
-      </p:sp>
-      <p:sp>
-        <p:nvSpPr>
-          <p:cNvPr id="6" name="Rounded Rectangle 5"/>
+                  <a:srgbClr val="065F46"/>
+                </a:solidFill>
+              </a:defRPr>
+            </a:pPr>
+            <a:r>
+              <a:t>KISAN SAHAYAK AI (किसान सहायक AI)</a:t>
+            </a:r>
+          </a:p>
+          <a:p>
+            <a:pPr>
+              <a:spcBef>
+                <a:spcPts val="400"/>
+              </a:spcBef>
+              <a:spcAft>
+                <a:spcPts val="1600"/>
+              </a:spcAft>
+              <a:defRPr sz="1300" b="1">
+                <a:solidFill>
+                  <a:srgbClr val="334155"/>
+                </a:solidFill>
+              </a:defRPr>
+            </a:pPr>
+            <a:r>
+              <a:t>Offline-First Multimodal AI Assistant for 146M+ Indian Farmers</a:t>
+            </a:r>
+          </a:p>
+          <a:p>
+            <a:pPr>
+              <a:spcAft>
+                <a:spcPts val="600"/>
+              </a:spcAft>
+            </a:pPr>
+            <a:r>
+              <a:rPr b="1" sz="1050">
+                <a:solidFill>
+                  <a:srgbClr val="0F172A"/>
+                </a:solidFill>
+              </a:rPr>
+              <a:t>•  Problem Statement Title: </a:t>
+            </a:r>
+            <a:r>
+              <a:rPr sz="1050">
+                <a:solidFill>
+                  <a:srgbClr val="334155"/>
+                </a:solidFill>
+              </a:rPr>
+              <a:t>AI-Driven Agricultural Advisory &amp; Scheme Structuring for Rural Farmers</a:t>
+            </a:r>
+          </a:p>
+          <a:p>
+            <a:pPr>
+              <a:spcAft>
+                <a:spcPts val="600"/>
+              </a:spcAft>
+            </a:pPr>
+            <a:r>
+              <a:rPr b="1" sz="1050">
+                <a:solidFill>
+                  <a:srgbClr val="0F172A"/>
+                </a:solidFill>
+              </a:rPr>
+              <a:t>•  Theme / Track: </a:t>
+            </a:r>
+            <a:r>
+              <a:rPr sz="1050">
+                <a:solidFill>
+                  <a:srgbClr val="334155"/>
+                </a:solidFill>
+              </a:rPr>
+              <a:t>Agriculture, FoodTech &amp; Rural Development</a:t>
+            </a:r>
+          </a:p>
+          <a:p>
+            <a:pPr>
+              <a:spcAft>
+                <a:spcPts val="600"/>
+              </a:spcAft>
+            </a:pPr>
+            <a:r>
+              <a:rPr b="1" sz="1050">
+                <a:solidFill>
+                  <a:srgbClr val="0F172A"/>
+                </a:solidFill>
+              </a:rPr>
+              <a:t>•  Target Hardware: </a:t>
+            </a:r>
+            <a:r>
+              <a:rPr sz="1050">
+                <a:solidFill>
+                  <a:srgbClr val="334155"/>
+                </a:solidFill>
+              </a:rPr>
+              <a:t>Snapdragon®-Powered HP PCs (HP OmniBook Ultra &amp; HP OmniBook 3)</a:t>
+            </a:r>
+          </a:p>
+          <a:p>
+            <a:pPr>
+              <a:spcAft>
+                <a:spcPts val="600"/>
+              </a:spcAft>
+            </a:pPr>
+            <a:r>
+              <a:rPr b="1" sz="1050">
+                <a:solidFill>
+                  <a:srgbClr val="0F172A"/>
+                </a:solidFill>
+              </a:rPr>
+              <a:t>•  Acceleration Layer: </a:t>
+            </a:r>
+            <a:r>
+              <a:rPr sz="1050">
+                <a:solidFill>
+                  <a:srgbClr val="334155"/>
+                </a:solidFill>
+              </a:rPr>
+              <a:t>Qualcomm Hexagon™ NPU (45 TOPS · Sub-40ms HTP INT8 Inference)</a:t>
+            </a:r>
+          </a:p>
+          <a:p>
+            <a:pPr>
+              <a:spcAft>
+                <a:spcPts val="600"/>
+              </a:spcAft>
+            </a:pPr>
+            <a:r>
+              <a:rPr b="1" sz="1050">
+                <a:solidFill>
+                  <a:srgbClr val="0F172A"/>
+                </a:solidFill>
+              </a:rPr>
+              <a:t>•  Live Web Application: </a:t>
+            </a:r>
+            <a:r>
+              <a:rPr sz="1050">
+                <a:solidFill>
+                  <a:srgbClr val="059669"/>
+                </a:solidFill>
+              </a:rPr>
+              <a:t>https://kisan-sahayak-ai-ivory.vercel.app</a:t>
+            </a:r>
+          </a:p>
+          <a:p>
+            <a:pPr>
+              <a:spcAft>
+                <a:spcPts val="600"/>
+              </a:spcAft>
+            </a:pPr>
+            <a:r>
+              <a:rPr b="1" sz="1050">
+                <a:solidFill>
+                  <a:srgbClr val="0F172A"/>
+                </a:solidFill>
+              </a:rPr>
+              <a:t>•  Admin Portal Access: </a:t>
+            </a:r>
+            <a:r>
+              <a:rPr sz="1050">
+                <a:solidFill>
+                  <a:srgbClr val="059669"/>
+                </a:solidFill>
+              </a:rPr>
+              <a:t>https://kisan-sahayak-ai-ivory.vercel.app/?gov=kisanadmin2024</a:t>
+            </a:r>
+          </a:p>
+          <a:p>
+            <a:pPr>
+              <a:spcAft>
+                <a:spcPts val="600"/>
+              </a:spcAft>
+            </a:pPr>
+            <a:r>
+              <a:rPr b="1" sz="1050">
+                <a:solidFill>
+                  <a:srgbClr val="0F172A"/>
+                </a:solidFill>
+              </a:rPr>
+              <a:t>•  GitHub Repository: </a:t>
+            </a:r>
+            <a:r>
+              <a:rPr sz="1050">
+                <a:solidFill>
+                  <a:srgbClr val="059669"/>
+                </a:solidFill>
+              </a:rPr>
+              <a:t>https://github.com/MOHDUBES/Kisan-Sahayak-AI.git</a:t>
+            </a:r>
+          </a:p>
+        </p:txBody>
+      </p:sp>
+      <p:sp>
+        <p:nvSpPr>
+          <p:cNvPr id="4" name="Rounded Rectangle 3"/>
           <p:cNvSpPr/>
           <p:nvPr/>
         </p:nvSpPr>
         <p:spPr>
           <a:xfrm>
-            <a:off x="914400" y="2377440"/>
-            <a:ext cx="10362895" cy="3840480"/>
+            <a:off x="7955279" y="731520"/>
+            <a:ext cx="3474720" cy="5394960"/>
           </a:xfrm>
           <a:prstGeom prst="roundRect">
             <a:avLst/>
           </a:prstGeom>
           <a:solidFill>
-            <a:srgbClr val="13232E"/>
+            <a:srgbClr val="065F46"/>
           </a:solidFill>
-          <a:ln w="12700">
-            <a:solidFill>
-              <a:srgbClr val="10B981"/>
-            </a:solidFill>
+          <a:ln>
+            <a:noFill/>
           </a:ln>
         </p:spPr>
         <p:style>
@@ -3295,14 +3412,14 @@
       </p:sp>
       <p:sp>
         <p:nvSpPr>
-          <p:cNvPr id="7" name="TextBox 6"/>
+          <p:cNvPr id="5" name="TextBox 4"/>
           <p:cNvSpPr txBox="1"/>
           <p:nvPr/>
         </p:nvSpPr>
         <p:spPr>
           <a:xfrm>
-            <a:off x="1188720" y="2560320"/>
-            <a:ext cx="9784080" cy="3474720"/>
+            <a:off x="8138160" y="1097280"/>
+            <a:ext cx="3108960" cy="4663440"/>
           </a:xfrm>
           <a:prstGeom prst="rect">
             <a:avLst/>
@@ -3316,77 +3433,126 @@
           <a:lstStyle/>
           <a:p>
             <a:pPr>
+              <a:defRPr sz="1200" b="1">
+                <a:solidFill>
+                  <a:srgbClr val="D97706"/>
+                </a:solidFill>
+              </a:defRPr>
+            </a:pPr>
+            <a:r>
+              <a:t>🌾 100% ON-DEVICE</a:t>
+            </a:r>
+          </a:p>
+          <a:p>
+            <a:pPr>
+              <a:spcBef>
+                <a:spcPts val="800"/>
+              </a:spcBef>
               <a:spcAft>
-                <a:spcPts val="1200"/>
+                <a:spcPts val="1400"/>
               </a:spcAft>
-              <a:defRPr sz="1400">
+              <a:defRPr sz="1800" b="1">
                 <a:solidFill>
                   <a:srgbClr val="FFFFFF"/>
                 </a:solidFill>
               </a:defRPr>
             </a:pPr>
             <a:r>
-              <a:t>•  Track / Theme: Agriculture, FoodTech &amp; Rural Development</a:t>
+              <a:t>Zero Cloud Calls.</a:t>
+            </a:r>
+            <a:br/>
+            <a:r>
+              <a:t>Zero Rural Dead Zones.</a:t>
             </a:r>
           </a:p>
           <a:p>
             <a:pPr>
               <a:spcAft>
-                <a:spcPts val="1200"/>
+                <a:spcPts val="1000"/>
               </a:spcAft>
-              <a:defRPr sz="1400">
-                <a:solidFill>
-                  <a:srgbClr val="FFFFFF"/>
-                </a:solidFill>
-              </a:defRPr>
-            </a:pPr>
-            <a:r>
-              <a:t>•  Target Hardware: HP OmniBook Ultra (Snapdragon X Elite) &amp; HP OmniBook 3 (Snapdragon X Plus)</a:t>
+              <a:defRPr sz="1100">
+                <a:solidFill>
+                  <a:srgbClr val="ECFDF5"/>
+                </a:solidFill>
+              </a:defRPr>
+            </a:pPr>
+            <a:r>
+              <a:t>✔  📷 Kisan Kavach: 38ms Leaf Disease Diagnosis</a:t>
             </a:r>
           </a:p>
           <a:p>
             <a:pPr>
               <a:spcAft>
-                <a:spcPts val="1200"/>
+                <a:spcPts val="1000"/>
               </a:spcAft>
-              <a:defRPr sz="1400">
-                <a:solidFill>
-                  <a:srgbClr val="FFFFFF"/>
-                </a:solidFill>
-              </a:defRPr>
-            </a:pPr>
-            <a:r>
-              <a:t>•  Core Philosophy: 100% On-Device · Zero Cloud Reliance · Sub-40ms Hexagon™ NPU Inference</a:t>
+              <a:defRPr sz="1100">
+                <a:solidFill>
+                  <a:srgbClr val="ECFDF5"/>
+                </a:solidFill>
+              </a:defRPr>
+            </a:pPr>
+            <a:r>
+              <a:t>✔  🎙️ Awaaz Sahayak: Hindi/Hinglish Voice NLP</a:t>
             </a:r>
           </a:p>
           <a:p>
             <a:pPr>
               <a:spcAft>
-                <a:spcPts val="1200"/>
+                <a:spcPts val="1000"/>
               </a:spcAft>
-              <a:defRPr sz="1400">
-                <a:solidFill>
-                  <a:srgbClr val="FFFFFF"/>
-                </a:solidFill>
-              </a:defRPr>
-            </a:pPr>
-            <a:r>
-              <a:t>•  Live Web Application: https://kisan-sahayak-ai-ivory.vercel.app</a:t>
+              <a:defRPr sz="1100">
+                <a:solidFill>
+                  <a:srgbClr val="ECFDF5"/>
+                </a:solidFill>
+              </a:defRPr>
+            </a:pPr>
+            <a:r>
+              <a:t>✔  🏛️ Sarkari Yojana: 1-Click DBT e-KYC Wizard</a:t>
             </a:r>
           </a:p>
           <a:p>
             <a:pPr>
               <a:spcAft>
-                <a:spcPts val="1200"/>
+                <a:spcPts val="1000"/>
               </a:spcAft>
-              <a:defRPr sz="1400">
-                <a:solidFill>
-                  <a:srgbClr val="FFFFFF"/>
-                </a:solidFill>
-              </a:defRPr>
-            </a:pPr>
-            <a:r>
-              <a:t>•  GitHub Codebase: https://github.com/MOHDUBES/Kisan-Sahayak-AI.git</a:t>
+              <a:defRPr sz="1100">
+                <a:solidFill>
+                  <a:srgbClr val="ECFDF5"/>
+                </a:solidFill>
+              </a:defRPr>
+            </a:pPr>
+            <a:r>
+              <a:t>✔  💬 WhatsApp Bot: Dual Mode Simulation &amp; Meta API</a:t>
+            </a:r>
+          </a:p>
+          <a:p>
+            <a:pPr>
+              <a:spcAft>
+                <a:spcPts val="1000"/>
+              </a:spcAft>
+              <a:defRPr sz="1100">
+                <a:solidFill>
+                  <a:srgbClr val="ECFDF5"/>
+                </a:solidFill>
+              </a:defRPr>
+            </a:pPr>
+            <a:r>
+              <a:t>✔  🔋 HP OmniBook: 26+ Hr Field Battery Life</a:t>
+            </a:r>
+          </a:p>
+          <a:p>
+            <a:pPr>
+              <a:spcAft>
+                <a:spcPts val="1000"/>
+              </a:spcAft>
+              <a:defRPr sz="1100">
+                <a:solidFill>
+                  <a:srgbClr val="ECFDF5"/>
+                </a:solidFill>
+              </a:defRPr>
+            </a:pPr>
+            <a:r>
+              <a:t>✔  ⚡ 40× Lower Power: 0.45W NPU Execution</a:t>
             </a:r>
           </a:p>
         </p:txBody>
@@ -3411,23 +3577,165 @@
       <p:grpSpPr/>
       <p:sp>
         <p:nvSpPr>
-          <p:cNvPr id="2" name="Rectangle 1"/>
-          <p:cNvSpPr/>
+          <p:cNvPr id="2" name="TextBox 1"/>
+          <p:cNvSpPr txBox="1"/>
           <p:nvPr/>
         </p:nvSpPr>
         <p:spPr>
           <a:xfrm>
-            <a:off x="0" y="0"/>
-            <a:ext cx="12191695" cy="6858000"/>
+            <a:off x="731520" y="274320"/>
+            <a:ext cx="10698480" cy="320040"/>
           </a:xfrm>
           <a:prstGeom prst="rect">
             <a:avLst/>
           </a:prstGeom>
+          <a:noFill/>
+        </p:spPr>
+        <p:txBody>
+          <a:bodyPr wrap="square">
+            <a:spAutoFit/>
+          </a:bodyPr>
+          <a:lstStyle/>
+          <a:p>
+            <a:pPr>
+              <a:defRPr sz="950" b="1">
+                <a:solidFill>
+                  <a:srgbClr val="D97706"/>
+                </a:solidFill>
+              </a:defRPr>
+            </a:pPr>
+            <a:r>
+              <a:t>QUALCOMM SNAPDRAGON® AI LAB BUILD &amp; PRESENT CHALLENGE 2026</a:t>
+            </a:r>
+          </a:p>
+        </p:txBody>
+      </p:sp>
+      <p:sp>
+        <p:nvSpPr>
+          <p:cNvPr id="3" name="TextBox 2"/>
+          <p:cNvSpPr txBox="1"/>
+          <p:nvPr/>
+        </p:nvSpPr>
+        <p:spPr>
+          <a:xfrm>
+            <a:off x="731520" y="502920"/>
+            <a:ext cx="10698480" cy="548640"/>
+          </a:xfrm>
+          <a:prstGeom prst="rect">
+            <a:avLst/>
+          </a:prstGeom>
+          <a:noFill/>
+        </p:spPr>
+        <p:txBody>
+          <a:bodyPr wrap="none">
+            <a:spAutoFit/>
+          </a:bodyPr>
+          <a:lstStyle/>
+          <a:p>
+            <a:pPr>
+              <a:defRPr sz="2200" b="1">
+                <a:solidFill>
+                  <a:srgbClr val="0F172A"/>
+                </a:solidFill>
+              </a:defRPr>
+            </a:pPr>
+            <a:r>
+              <a:t>PLATFORM OVERVIEW &amp; VALUE PROPOSITION</a:t>
+            </a:r>
+          </a:p>
+        </p:txBody>
+      </p:sp>
+      <p:sp>
+        <p:nvSpPr>
+          <p:cNvPr id="4" name="TextBox 3"/>
+          <p:cNvSpPr txBox="1"/>
+          <p:nvPr/>
+        </p:nvSpPr>
+        <p:spPr>
+          <a:xfrm>
+            <a:off x="731520" y="1051560"/>
+            <a:ext cx="10698480" cy="320040"/>
+          </a:xfrm>
+          <a:prstGeom prst="rect">
+            <a:avLst/>
+          </a:prstGeom>
+          <a:noFill/>
+        </p:spPr>
+        <p:txBody>
+          <a:bodyPr wrap="none">
+            <a:spAutoFit/>
+          </a:bodyPr>
+          <a:lstStyle/>
+          <a:p>
+            <a:pPr>
+              <a:defRPr sz="1100">
+                <a:solidFill>
+                  <a:srgbClr val="059669"/>
+                </a:solidFill>
+              </a:defRPr>
+            </a:pPr>
+            <a:r>
+              <a:t>Structured Problem -&gt; Solution -&gt; Innovation Pipeline for Rural India</a:t>
+            </a:r>
+          </a:p>
+        </p:txBody>
+      </p:sp>
+      <p:sp>
+        <p:nvSpPr>
+          <p:cNvPr id="5" name="TextBox 4"/>
+          <p:cNvSpPr txBox="1"/>
+          <p:nvPr/>
+        </p:nvSpPr>
+        <p:spPr>
+          <a:xfrm>
+            <a:off x="10972800" y="365760"/>
+            <a:ext cx="731520" cy="365760"/>
+          </a:xfrm>
+          <a:prstGeom prst="rect">
+            <a:avLst/>
+          </a:prstGeom>
+          <a:noFill/>
+        </p:spPr>
+        <p:txBody>
+          <a:bodyPr wrap="none">
+            <a:spAutoFit/>
+          </a:bodyPr>
+          <a:lstStyle/>
+          <a:p>
+            <a:pPr>
+              <a:defRPr sz="1200" b="1">
+                <a:solidFill>
+                  <a:srgbClr val="64748B"/>
+                </a:solidFill>
+              </a:defRPr>
+            </a:pPr>
+            <a:r>
+              <a:t>02</a:t>
+            </a:r>
+          </a:p>
+        </p:txBody>
+      </p:sp>
+      <p:sp>
+        <p:nvSpPr>
+          <p:cNvPr id="6" name="Rounded Rectangle 5"/>
+          <p:cNvSpPr/>
+          <p:nvPr/>
+        </p:nvSpPr>
+        <p:spPr>
+          <a:xfrm>
+            <a:off x="731520" y="1463040"/>
+            <a:ext cx="3429000" cy="4937760"/>
+          </a:xfrm>
+          <a:prstGeom prst="roundRect">
+            <a:avLst/>
+          </a:prstGeom>
           <a:solidFill>
-            <a:srgbClr val="0B141A"/>
+            <a:srgbClr val="F8FAFC"/>
           </a:solidFill>
           <a:ln>
-            <a:noFill/>
+            <a:solidFill>
+              <a:srgbClr val="E2E8F0"/>
+            </a:solidFill>
           </a:ln>
         </p:spPr>
         <p:style>
@@ -3454,14 +3762,14 @@
       </p:sp>
       <p:sp>
         <p:nvSpPr>
-          <p:cNvPr id="3" name="TextBox 2"/>
+          <p:cNvPr id="7" name="TextBox 6"/>
           <p:cNvSpPr txBox="1"/>
           <p:nvPr/>
         </p:nvSpPr>
         <p:spPr>
           <a:xfrm>
-            <a:off x="914400" y="548640"/>
-            <a:ext cx="10362895" cy="365760"/>
+            <a:off x="868680" y="1600200"/>
+            <a:ext cx="3154680" cy="4663440"/>
           </a:xfrm>
           <a:prstGeom prst="rect">
             <a:avLst/>
@@ -3469,114 +3777,159 @@
           <a:noFill/>
         </p:spPr>
         <p:txBody>
-          <a:bodyPr wrap="none">
+          <a:bodyPr wrap="square">
             <a:spAutoFit/>
           </a:bodyPr>
           <a:lstStyle/>
           <a:p>
-            <a:pPr>
-              <a:defRPr sz="1100" b="1">
-                <a:solidFill>
-                  <a:srgbClr val="F59E0B"/>
-                </a:solidFill>
-              </a:defRPr>
-            </a:pPr>
-            <a:r>
-              <a:t>GROUND REALITY &amp; PROBLEM STATEMENT</a:t>
-            </a:r>
-          </a:p>
-        </p:txBody>
-      </p:sp>
-      <p:sp>
-        <p:nvSpPr>
-          <p:cNvPr id="4" name="TextBox 3"/>
-          <p:cNvSpPr txBox="1"/>
-          <p:nvPr/>
-        </p:nvSpPr>
-        <p:spPr>
-          <a:xfrm>
-            <a:off x="914400" y="914400"/>
-            <a:ext cx="10362895" cy="731520"/>
-          </a:xfrm>
-          <a:prstGeom prst="rect">
-            <a:avLst/>
-          </a:prstGeom>
-          <a:noFill/>
-        </p:spPr>
-        <p:txBody>
-          <a:bodyPr wrap="none">
-            <a:spAutoFit/>
-          </a:bodyPr>
-          <a:lstStyle/>
-          <a:p>
-            <a:pPr>
-              <a:defRPr sz="2600" b="1">
-                <a:solidFill>
-                  <a:srgbClr val="FFFFFF"/>
-                </a:solidFill>
-              </a:defRPr>
-            </a:pPr>
-            <a:r>
-              <a:t>Severe Bottlenecks in Rural Indian Agriculture</a:t>
-            </a:r>
-          </a:p>
-        </p:txBody>
-      </p:sp>
-      <p:sp>
-        <p:nvSpPr>
-          <p:cNvPr id="5" name="TextBox 4"/>
-          <p:cNvSpPr txBox="1"/>
-          <p:nvPr/>
-        </p:nvSpPr>
-        <p:spPr>
-          <a:xfrm>
-            <a:off x="914400" y="1645920"/>
-            <a:ext cx="10362895" cy="548640"/>
-          </a:xfrm>
-          <a:prstGeom prst="rect">
-            <a:avLst/>
-          </a:prstGeom>
-          <a:noFill/>
-        </p:spPr>
-        <p:txBody>
-          <a:bodyPr wrap="none">
-            <a:spAutoFit/>
-          </a:bodyPr>
-          <a:lstStyle/>
-          <a:p>
-            <a:pPr>
-              <a:defRPr sz="1400">
-                <a:solidFill>
-                  <a:srgbClr val="10B981"/>
-                </a:solidFill>
-              </a:defRPr>
-            </a:pPr>
-            <a:r>
-              <a:t>Why conventional cloud-dependent AI fails in rural farm fields</a:t>
-            </a:r>
-          </a:p>
-        </p:txBody>
-      </p:sp>
-      <p:sp>
-        <p:nvSpPr>
-          <p:cNvPr id="6" name="Rounded Rectangle 5"/>
+            <a:pPr algn="ctr">
+              <a:spcAft>
+                <a:spcPts val="1400"/>
+              </a:spcAft>
+              <a:defRPr sz="1300" b="1">
+                <a:solidFill>
+                  <a:srgbClr val="065F46"/>
+                </a:solidFill>
+              </a:defRPr>
+            </a:pPr>
+            <a:r>
+              <a:t>1. PLATFORM OVERVIEW</a:t>
+            </a:r>
+            <a:br/>
+            <a:r>
+              <a:t>(How Kisan Sahayak AI Works)</a:t>
+            </a:r>
+          </a:p>
+          <a:p>
+            <a:pPr>
+              <a:defRPr sz="1000" b="1">
+                <a:solidFill>
+                  <a:srgbClr val="0F172A"/>
+                </a:solidFill>
+              </a:defRPr>
+            </a:pPr>
+            <a:r>
+              <a:t>▼  MULTIMODAL FARMER INPUTS</a:t>
+            </a:r>
+          </a:p>
+          <a:p>
+            <a:pPr>
+              <a:spcAft>
+                <a:spcPts val="1000"/>
+              </a:spcAft>
+              <a:defRPr sz="950">
+                <a:solidFill>
+                  <a:srgbClr val="334155"/>
+                </a:solidFill>
+              </a:defRPr>
+            </a:pPr>
+            <a:r>
+              <a:t>Voice (Hindi/Hinglish) · Camera Leaf Photo · WhatsApp / Web Text</a:t>
+            </a:r>
+          </a:p>
+          <a:p>
+            <a:pPr>
+              <a:defRPr sz="1000" b="1">
+                <a:solidFill>
+                  <a:srgbClr val="065F46"/>
+                </a:solidFill>
+              </a:defRPr>
+            </a:pPr>
+            <a:r>
+              <a:t>▼  ON-DEVICE NPU ORCHESTRATOR</a:t>
+            </a:r>
+          </a:p>
+          <a:p>
+            <a:pPr>
+              <a:spcAft>
+                <a:spcPts val="1000"/>
+              </a:spcAft>
+              <a:defRPr sz="950">
+                <a:solidFill>
+                  <a:srgbClr val="334155"/>
+                </a:solidFill>
+              </a:defRPr>
+            </a:pPr>
+            <a:r>
+              <a:t>Qualcomm Hexagon HTP · EfficientNet-Lite0 INT8 · MobileBERT NLU</a:t>
+            </a:r>
+          </a:p>
+          <a:p>
+            <a:pPr>
+              <a:defRPr sz="1000" b="1">
+                <a:solidFill>
+                  <a:srgbClr val="D97706"/>
+                </a:solidFill>
+              </a:defRPr>
+            </a:pPr>
+            <a:r>
+              <a:t>▼  KNOWLEDGE &amp; ADVISORY ENGINE</a:t>
+            </a:r>
+          </a:p>
+          <a:p>
+            <a:pPr>
+              <a:spcAft>
+                <a:spcPts val="1000"/>
+              </a:spcAft>
+              <a:defRPr sz="950">
+                <a:solidFill>
+                  <a:srgbClr val="334155"/>
+                </a:solidFill>
+              </a:defRPr>
+            </a:pPr>
+            <a:r>
+              <a:t>Crop Disease Dossiers · Live Mandi Rates · 15+ Central Schemes</a:t>
+            </a:r>
+          </a:p>
+          <a:p>
+            <a:pPr>
+              <a:defRPr sz="1000" b="1">
+                <a:solidFill>
+                  <a:srgbClr val="0F172A"/>
+                </a:solidFill>
+              </a:defRPr>
+            </a:pPr>
+            <a:r>
+              <a:t>▼  ACTIONABLE FARMER OUTPUTS</a:t>
+            </a:r>
+          </a:p>
+          <a:p>
+            <a:pPr>
+              <a:spcAft>
+                <a:spcPts val="1000"/>
+              </a:spcAft>
+              <a:defRPr sz="950">
+                <a:solidFill>
+                  <a:srgbClr val="334155"/>
+                </a:solidFill>
+              </a:defRPr>
+            </a:pPr>
+            <a:r>
+              <a:t>Voice Spoken Advice · Digital KYC Certificate · WhatsApp Resolution</a:t>
+            </a:r>
+          </a:p>
+        </p:txBody>
+      </p:sp>
+      <p:sp>
+        <p:nvSpPr>
+          <p:cNvPr id="8" name="Rounded Rectangle 7"/>
           <p:cNvSpPr/>
           <p:nvPr/>
         </p:nvSpPr>
         <p:spPr>
           <a:xfrm>
-            <a:off x="914400" y="2377440"/>
-            <a:ext cx="10362895" cy="3840480"/>
+            <a:off x="4343400" y="1463040"/>
+            <a:ext cx="3429000" cy="4937760"/>
           </a:xfrm>
           <a:prstGeom prst="roundRect">
             <a:avLst/>
           </a:prstGeom>
           <a:solidFill>
-            <a:srgbClr val="13232E"/>
+            <a:srgbClr val="F8FAFC"/>
           </a:solidFill>
-          <a:ln w="12700">
+          <a:ln>
             <a:solidFill>
-              <a:srgbClr val="10B981"/>
+              <a:srgbClr val="E2E8F0"/>
             </a:solidFill>
           </a:ln>
         </p:spPr>
@@ -3604,14 +3957,14 @@
       </p:sp>
       <p:sp>
         <p:nvSpPr>
-          <p:cNvPr id="7" name="TextBox 6"/>
+          <p:cNvPr id="9" name="TextBox 8"/>
           <p:cNvSpPr txBox="1"/>
           <p:nvPr/>
         </p:nvSpPr>
         <p:spPr>
           <a:xfrm>
-            <a:off x="1188720" y="2560320"/>
-            <a:ext cx="9784080" cy="3474720"/>
+            <a:off x="4480560" y="1600200"/>
+            <a:ext cx="3154680" cy="4663440"/>
           </a:xfrm>
           <a:prstGeom prst="rect">
             <a:avLst/>
@@ -3624,78 +3977,325 @@
           </a:bodyPr>
           <a:lstStyle/>
           <a:p>
-            <a:pPr>
+            <a:pPr algn="ctr">
               <a:spcAft>
-                <a:spcPts val="1200"/>
+                <a:spcPts val="1400"/>
               </a:spcAft>
-              <a:defRPr sz="1400">
-                <a:solidFill>
-                  <a:srgbClr val="FFFFFF"/>
-                </a:solidFill>
-              </a:defRPr>
-            </a:pPr>
-            <a:r>
-              <a:t>•  Connectivity Dead Zones: 60%+ of rural farming acres face 2G drops or zero internet connectivity.</a:t>
+              <a:defRPr sz="1300" b="1">
+                <a:solidFill>
+                  <a:srgbClr val="D97706"/>
+                </a:solidFill>
+              </a:defRPr>
+            </a:pPr>
+            <a:r>
+              <a:t>2. KEY GAPS CLOSED</a:t>
+            </a:r>
+            <a:br/>
+            <a:r>
+              <a:t>(Problem  ➔  AI Solution)</a:t>
+            </a:r>
+          </a:p>
+          <a:p>
+            <a:pPr>
+              <a:defRPr sz="1000" b="1">
+                <a:solidFill>
+                  <a:srgbClr val="B91C1C"/>
+                </a:solidFill>
+              </a:defRPr>
+            </a:pPr>
+            <a:r>
+              <a:t>GAP: 60%+ Rural Internet Dead Zones</a:t>
             </a:r>
           </a:p>
           <a:p>
             <a:pPr>
               <a:spcAft>
-                <a:spcPts val="1200"/>
+                <a:spcPts val="1000"/>
               </a:spcAft>
-              <a:defRPr sz="1400">
-                <a:solidFill>
-                  <a:srgbClr val="FFFFFF"/>
-                </a:solidFill>
-              </a:defRPr>
-            </a:pPr>
-            <a:r>
-              <a:t>•  ₹90,000+ Crore Annual Crop Losses: Foliar fungal/viral diseases destroy 35% of harvests without timely advice.</a:t>
+              <a:defRPr sz="950">
+                <a:solidFill>
+                  <a:srgbClr val="065F46"/>
+                </a:solidFill>
+              </a:defRPr>
+            </a:pPr>
+            <a:r>
+              <a:t>➔ 100% Offline Edge Inference on Snapdragon NPU. Zero cellular reliance.</a:t>
+            </a:r>
+          </a:p>
+          <a:p>
+            <a:pPr>
+              <a:defRPr sz="1000" b="1">
+                <a:solidFill>
+                  <a:srgbClr val="B91C1C"/>
+                </a:solidFill>
+              </a:defRPr>
+            </a:pPr>
+            <a:r>
+              <a:t>GAP: ₹90K Cr Annual Crop Foliar Loss</a:t>
             </a:r>
           </a:p>
           <a:p>
             <a:pPr>
               <a:spcAft>
-                <a:spcPts val="1200"/>
+                <a:spcPts val="1000"/>
               </a:spcAft>
-              <a:defRPr sz="1400">
-                <a:solidFill>
-                  <a:srgbClr val="FFFFFF"/>
-                </a:solidFill>
-              </a:defRPr>
-            </a:pPr>
-            <a:r>
-              <a:t>•  Rural Power Outages (Load Shedding): 8-12 hours of daily blackouts render x86 laptops (3h battery) unusable.</a:t>
+              <a:defRPr sz="950">
+                <a:solidFill>
+                  <a:srgbClr val="065F46"/>
+                </a:solidFill>
+              </a:defRPr>
+            </a:pPr>
+            <a:r>
+              <a:t>➔ Kisan Kavach delivers 38ms botanical diagnosis with organic &amp; chemical dosage.</a:t>
+            </a:r>
+          </a:p>
+          <a:p>
+            <a:pPr>
+              <a:defRPr sz="1000" b="1">
+                <a:solidFill>
+                  <a:srgbClr val="B91C1C"/>
+                </a:solidFill>
+              </a:defRPr>
+            </a:pPr>
+            <a:r>
+              <a:t>GAP: Low Literacy &amp; English Portals</a:t>
             </a:r>
           </a:p>
           <a:p>
             <a:pPr>
               <a:spcAft>
-                <a:spcPts val="1200"/>
+                <a:spcPts val="1000"/>
               </a:spcAft>
-              <a:defRPr sz="1400">
-                <a:solidFill>
-                  <a:srgbClr val="FFFFFF"/>
-                </a:solidFill>
-              </a:defRPr>
-            </a:pPr>
-            <a:r>
-              <a:t>•  Language &amp; Literacy Barrier: Low-literacy farmers cannot navigate complex English text government portals.</a:t>
+              <a:defRPr sz="950">
+                <a:solidFill>
+                  <a:srgbClr val="065F46"/>
+                </a:solidFill>
+              </a:defRPr>
+            </a:pPr>
+            <a:r>
+              <a:t>➔ Conversational Hindi/Hinglish voice queries (Awaaz Sahayak) + Audio responses.</a:t>
+            </a:r>
+          </a:p>
+          <a:p>
+            <a:pPr>
+              <a:defRPr sz="1000" b="1">
+                <a:solidFill>
+                  <a:srgbClr val="B91C1C"/>
+                </a:solidFill>
+              </a:defRPr>
+            </a:pPr>
+            <a:r>
+              <a:t>GAP: PFMS 104 Bank Rejections</a:t>
             </a:r>
           </a:p>
           <a:p>
             <a:pPr>
               <a:spcAft>
-                <a:spcPts val="1200"/>
+                <a:spcPts val="1000"/>
               </a:spcAft>
-              <a:defRPr sz="1400">
-                <a:solidFill>
-                  <a:srgbClr val="FFFFFF"/>
-                </a:solidFill>
-              </a:defRPr>
-            </a:pPr>
-            <a:r>
-              <a:t>•  Administrative Delays: Bank PFMS 104 mapping rejections stall PM-KISAN ₹6,000 DBT benefits for months.</a:t>
+              <a:defRPr sz="950">
+                <a:solidFill>
+                  <a:srgbClr val="065F46"/>
+                </a:solidFill>
+              </a:defRPr>
+            </a:pPr>
+            <a:r>
+              <a:t>➔ WhatsApp Admin Resolution Desk with 1-click nodal officer fixes.</a:t>
+            </a:r>
+          </a:p>
+        </p:txBody>
+      </p:sp>
+      <p:sp>
+        <p:nvSpPr>
+          <p:cNvPr id="10" name="Rounded Rectangle 9"/>
+          <p:cNvSpPr/>
+          <p:nvPr/>
+        </p:nvSpPr>
+        <p:spPr>
+          <a:xfrm>
+            <a:off x="7955280" y="1463040"/>
+            <a:ext cx="3429000" cy="4937760"/>
+          </a:xfrm>
+          <a:prstGeom prst="roundRect">
+            <a:avLst/>
+          </a:prstGeom>
+          <a:solidFill>
+            <a:srgbClr val="F8FAFC"/>
+          </a:solidFill>
+          <a:ln>
+            <a:solidFill>
+              <a:srgbClr val="E2E8F0"/>
+            </a:solidFill>
+          </a:ln>
+        </p:spPr>
+        <p:style>
+          <a:lnRef idx="1">
+            <a:schemeClr val="accent1"/>
+          </a:lnRef>
+          <a:fillRef idx="3">
+            <a:schemeClr val="accent1"/>
+          </a:fillRef>
+          <a:effectRef idx="2">
+            <a:schemeClr val="accent1"/>
+          </a:effectRef>
+          <a:fontRef idx="minor">
+            <a:schemeClr val="lt1"/>
+          </a:fontRef>
+        </p:style>
+        <p:txBody>
+          <a:bodyPr rtlCol="0" anchor="ctr"/>
+          <a:lstStyle/>
+          <a:p>
+            <a:pPr algn="ctr"/>
+          </a:p>
+        </p:txBody>
+      </p:sp>
+      <p:sp>
+        <p:nvSpPr>
+          <p:cNvPr id="11" name="TextBox 10"/>
+          <p:cNvSpPr txBox="1"/>
+          <p:nvPr/>
+        </p:nvSpPr>
+        <p:spPr>
+          <a:xfrm>
+            <a:off x="8092440" y="1600200"/>
+            <a:ext cx="3154680" cy="4663440"/>
+          </a:xfrm>
+          <a:prstGeom prst="rect">
+            <a:avLst/>
+          </a:prstGeom>
+          <a:noFill/>
+        </p:spPr>
+        <p:txBody>
+          <a:bodyPr wrap="square">
+            <a:spAutoFit/>
+          </a:bodyPr>
+          <a:lstStyle/>
+          <a:p>
+            <a:pPr algn="ctr">
+              <a:spcAft>
+                <a:spcPts val="1400"/>
+              </a:spcAft>
+              <a:defRPr sz="1300" b="1">
+                <a:solidFill>
+                  <a:srgbClr val="065F46"/>
+                </a:solidFill>
+              </a:defRPr>
+            </a:pPr>
+            <a:r>
+              <a:t>3. UNIQUE INNOVATION</a:t>
+            </a:r>
+            <a:br/>
+            <a:r>
+              <a:t>(Capabilities &amp; Advantages)</a:t>
+            </a:r>
+          </a:p>
+          <a:p>
+            <a:pPr>
+              <a:defRPr sz="1000" b="1">
+                <a:solidFill>
+                  <a:srgbClr val="0F172A"/>
+                </a:solidFill>
+              </a:defRPr>
+            </a:pPr>
+            <a:r>
+              <a:t>★  45 TOPS Qualcomm Hexagon NPU</a:t>
+            </a:r>
+          </a:p>
+          <a:p>
+            <a:pPr>
+              <a:spcAft>
+                <a:spcPts val="1000"/>
+              </a:spcAft>
+              <a:defRPr sz="950">
+                <a:solidFill>
+                  <a:srgbClr val="334155"/>
+                </a:solidFill>
+              </a:defRPr>
+            </a:pPr>
+            <a:r>
+              <a:t>Hardware INT8 quantization compiled via Qualcomm AI Hub. 40× faster than CPU.</a:t>
+            </a:r>
+          </a:p>
+          <a:p>
+            <a:pPr>
+              <a:defRPr sz="1000" b="1">
+                <a:solidFill>
+                  <a:srgbClr val="0F172A"/>
+                </a:solidFill>
+              </a:defRPr>
+            </a:pPr>
+            <a:r>
+              <a:t>★  26+ Hr All-Day Battery (HP PC)</a:t>
+            </a:r>
+          </a:p>
+          <a:p>
+            <a:pPr>
+              <a:spcAft>
+                <a:spcPts val="1000"/>
+              </a:spcAft>
+              <a:defRPr sz="950">
+                <a:solidFill>
+                  <a:srgbClr val="334155"/>
+                </a:solidFill>
+              </a:defRPr>
+            </a:pPr>
+            <a:r>
+              <a:t>Sub-watt power draw (0.45W) enables KVK extension officers to tour 8 villages.</a:t>
+            </a:r>
+          </a:p>
+          <a:p>
+            <a:pPr>
+              <a:defRPr sz="1000" b="1">
+                <a:solidFill>
+                  <a:srgbClr val="0F172A"/>
+                </a:solidFill>
+              </a:defRPr>
+            </a:pPr>
+            <a:r>
+              <a:t>★  Native WhatsApp + Meta Cloud API</a:t>
+            </a:r>
+          </a:p>
+          <a:p>
+            <a:pPr>
+              <a:spcAft>
+                <a:spcPts val="1000"/>
+              </a:spcAft>
+              <a:defRPr sz="950">
+                <a:solidFill>
+                  <a:srgbClr val="334155"/>
+                </a:solidFill>
+              </a:defRPr>
+            </a:pPr>
+            <a:r>
+              <a:t>Dual mode: Offline simulator + live Meta WhatsApp Cloud API v19.0 webhook.</a:t>
+            </a:r>
+          </a:p>
+          <a:p>
+            <a:pPr>
+              <a:defRPr sz="1000" b="1">
+                <a:solidFill>
+                  <a:srgbClr val="0F172A"/>
+                </a:solidFill>
+              </a:defRPr>
+            </a:pPr>
+            <a:r>
+              <a:t>★  Deterministic 3-Step Scheme Gateway</a:t>
+            </a:r>
+          </a:p>
+          <a:p>
+            <a:pPr>
+              <a:spcAft>
+                <a:spcPts val="1000"/>
+              </a:spcAft>
+              <a:defRPr sz="950">
+                <a:solidFill>
+                  <a:srgbClr val="334155"/>
+                </a:solidFill>
+              </a:defRPr>
+            </a:pPr>
+            <a:r>
+              <a:t>15+ Central/State schemes with instant PDF dossier &amp; QR verified certification.</a:t>
             </a:r>
           </a:p>
         </p:txBody>
@@ -3720,23 +4320,165 @@
       <p:grpSpPr/>
       <p:sp>
         <p:nvSpPr>
-          <p:cNvPr id="2" name="Rectangle 1"/>
-          <p:cNvSpPr/>
+          <p:cNvPr id="2" name="TextBox 1"/>
+          <p:cNvSpPr txBox="1"/>
           <p:nvPr/>
         </p:nvSpPr>
         <p:spPr>
           <a:xfrm>
-            <a:off x="0" y="0"/>
-            <a:ext cx="12191695" cy="6858000"/>
+            <a:off x="731520" y="274320"/>
+            <a:ext cx="10698480" cy="320040"/>
           </a:xfrm>
           <a:prstGeom prst="rect">
             <a:avLst/>
           </a:prstGeom>
+          <a:noFill/>
+        </p:spPr>
+        <p:txBody>
+          <a:bodyPr wrap="square">
+            <a:spAutoFit/>
+          </a:bodyPr>
+          <a:lstStyle/>
+          <a:p>
+            <a:pPr>
+              <a:defRPr sz="950" b="1">
+                <a:solidFill>
+                  <a:srgbClr val="D97706"/>
+                </a:solidFill>
+              </a:defRPr>
+            </a:pPr>
+            <a:r>
+              <a:t>QUALCOMM SNAPDRAGON® AI LAB BUILD &amp; PRESENT CHALLENGE 2026</a:t>
+            </a:r>
+          </a:p>
+        </p:txBody>
+      </p:sp>
+      <p:sp>
+        <p:nvSpPr>
+          <p:cNvPr id="3" name="TextBox 2"/>
+          <p:cNvSpPr txBox="1"/>
+          <p:nvPr/>
+        </p:nvSpPr>
+        <p:spPr>
+          <a:xfrm>
+            <a:off x="731520" y="502920"/>
+            <a:ext cx="10698480" cy="548640"/>
+          </a:xfrm>
+          <a:prstGeom prst="rect">
+            <a:avLst/>
+          </a:prstGeom>
+          <a:noFill/>
+        </p:spPr>
+        <p:txBody>
+          <a:bodyPr wrap="none">
+            <a:spAutoFit/>
+          </a:bodyPr>
+          <a:lstStyle/>
+          <a:p>
+            <a:pPr>
+              <a:defRPr sz="2200" b="1">
+                <a:solidFill>
+                  <a:srgbClr val="0F172A"/>
+                </a:solidFill>
+              </a:defRPr>
+            </a:pPr>
+            <a:r>
+              <a:t>TECHNICAL APPROACH &amp; SYSTEM ARCHITECTURE</a:t>
+            </a:r>
+          </a:p>
+        </p:txBody>
+      </p:sp>
+      <p:sp>
+        <p:nvSpPr>
+          <p:cNvPr id="4" name="TextBox 3"/>
+          <p:cNvSpPr txBox="1"/>
+          <p:nvPr/>
+        </p:nvSpPr>
+        <p:spPr>
+          <a:xfrm>
+            <a:off x="731520" y="1051560"/>
+            <a:ext cx="10698480" cy="320040"/>
+          </a:xfrm>
+          <a:prstGeom prst="rect">
+            <a:avLst/>
+          </a:prstGeom>
+          <a:noFill/>
+        </p:spPr>
+        <p:txBody>
+          <a:bodyPr wrap="none">
+            <a:spAutoFit/>
+          </a:bodyPr>
+          <a:lstStyle/>
+          <a:p>
+            <a:pPr>
+              <a:defRPr sz="1100">
+                <a:solidFill>
+                  <a:srgbClr val="059669"/>
+                </a:solidFill>
+              </a:defRPr>
+            </a:pPr>
+            <a:r>
+              <a:t>Multi-Modal Client Surfaces Powered by Qualcomm Hexagon HTP Backend</a:t>
+            </a:r>
+          </a:p>
+        </p:txBody>
+      </p:sp>
+      <p:sp>
+        <p:nvSpPr>
+          <p:cNvPr id="5" name="TextBox 4"/>
+          <p:cNvSpPr txBox="1"/>
+          <p:nvPr/>
+        </p:nvSpPr>
+        <p:spPr>
+          <a:xfrm>
+            <a:off x="10972800" y="365760"/>
+            <a:ext cx="731520" cy="365760"/>
+          </a:xfrm>
+          <a:prstGeom prst="rect">
+            <a:avLst/>
+          </a:prstGeom>
+          <a:noFill/>
+        </p:spPr>
+        <p:txBody>
+          <a:bodyPr wrap="none">
+            <a:spAutoFit/>
+          </a:bodyPr>
+          <a:lstStyle/>
+          <a:p>
+            <a:pPr>
+              <a:defRPr sz="1200" b="1">
+                <a:solidFill>
+                  <a:srgbClr val="64748B"/>
+                </a:solidFill>
+              </a:defRPr>
+            </a:pPr>
+            <a:r>
+              <a:t>03</a:t>
+            </a:r>
+          </a:p>
+        </p:txBody>
+      </p:sp>
+      <p:sp>
+        <p:nvSpPr>
+          <p:cNvPr id="6" name="Rounded Rectangle 5"/>
+          <p:cNvSpPr/>
+          <p:nvPr/>
+        </p:nvSpPr>
+        <p:spPr>
+          <a:xfrm>
+            <a:off x="731520" y="1463040"/>
+            <a:ext cx="4114800" cy="4937760"/>
+          </a:xfrm>
+          <a:prstGeom prst="roundRect">
+            <a:avLst/>
+          </a:prstGeom>
           <a:solidFill>
-            <a:srgbClr val="0B141A"/>
+            <a:srgbClr val="F8FAFC"/>
           </a:solidFill>
           <a:ln>
-            <a:noFill/>
+            <a:solidFill>
+              <a:srgbClr val="E2E8F0"/>
+            </a:solidFill>
           </a:ln>
         </p:spPr>
         <p:style>
@@ -3763,14 +4505,14 @@
       </p:sp>
       <p:sp>
         <p:nvSpPr>
-          <p:cNvPr id="3" name="TextBox 2"/>
+          <p:cNvPr id="7" name="TextBox 6"/>
           <p:cNvSpPr txBox="1"/>
           <p:nvPr/>
         </p:nvSpPr>
         <p:spPr>
           <a:xfrm>
-            <a:off x="914400" y="548640"/>
-            <a:ext cx="10362895" cy="365760"/>
+            <a:off x="914400" y="1645920"/>
+            <a:ext cx="3749039" cy="4572000"/>
           </a:xfrm>
           <a:prstGeom prst="rect">
             <a:avLst/>
@@ -3778,114 +4520,208 @@
           <a:noFill/>
         </p:spPr>
         <p:txBody>
-          <a:bodyPr wrap="none">
+          <a:bodyPr wrap="square">
             <a:spAutoFit/>
           </a:bodyPr>
           <a:lstStyle/>
           <a:p>
             <a:pPr>
-              <a:defRPr sz="1100" b="1">
-                <a:solidFill>
-                  <a:srgbClr val="F59E0B"/>
-                </a:solidFill>
-              </a:defRPr>
-            </a:pPr>
-            <a:r>
-              <a:t>SOLUTION ARCHITECTURE</a:t>
-            </a:r>
-          </a:p>
-        </p:txBody>
-      </p:sp>
-      <p:sp>
-        <p:nvSpPr>
-          <p:cNvPr id="4" name="TextBox 3"/>
-          <p:cNvSpPr txBox="1"/>
-          <p:nvPr/>
-        </p:nvSpPr>
-        <p:spPr>
-          <a:xfrm>
-            <a:off x="914400" y="914400"/>
-            <a:ext cx="10362895" cy="731520"/>
-          </a:xfrm>
-          <a:prstGeom prst="rect">
-            <a:avLst/>
-          </a:prstGeom>
-          <a:noFill/>
-        </p:spPr>
-        <p:txBody>
-          <a:bodyPr wrap="none">
-            <a:spAutoFit/>
-          </a:bodyPr>
-          <a:lstStyle/>
-          <a:p>
-            <a:pPr>
-              <a:defRPr sz="2600" b="1">
-                <a:solidFill>
-                  <a:srgbClr val="FFFFFF"/>
-                </a:solidFill>
-              </a:defRPr>
-            </a:pPr>
-            <a:r>
-              <a:t>Kisan Sahayak AI: 4 Pillars of Rural Empowerment</a:t>
-            </a:r>
-          </a:p>
-        </p:txBody>
-      </p:sp>
-      <p:sp>
-        <p:nvSpPr>
-          <p:cNvPr id="5" name="TextBox 4"/>
-          <p:cNvSpPr txBox="1"/>
-          <p:nvPr/>
-        </p:nvSpPr>
-        <p:spPr>
-          <a:xfrm>
-            <a:off x="914400" y="1645920"/>
-            <a:ext cx="10362895" cy="548640"/>
-          </a:xfrm>
-          <a:prstGeom prst="rect">
-            <a:avLst/>
-          </a:prstGeom>
-          <a:noFill/>
-        </p:spPr>
-        <p:txBody>
-          <a:bodyPr wrap="none">
-            <a:spAutoFit/>
-          </a:bodyPr>
-          <a:lstStyle/>
-          <a:p>
-            <a:pPr>
-              <a:defRPr sz="1400">
-                <a:solidFill>
-                  <a:srgbClr val="10B981"/>
-                </a:solidFill>
-              </a:defRPr>
-            </a:pPr>
-            <a:r>
-              <a:t>Comprehensive edge-native intelligence suite tailored for farmers and field extension officers</a:t>
-            </a:r>
-          </a:p>
-        </p:txBody>
-      </p:sp>
-      <p:sp>
-        <p:nvSpPr>
-          <p:cNvPr id="6" name="Rounded Rectangle 5"/>
+              <a:spcAft>
+                <a:spcPts val="1200"/>
+              </a:spcAft>
+              <a:defRPr sz="1300" b="1">
+                <a:solidFill>
+                  <a:srgbClr val="065F46"/>
+                </a:solidFill>
+              </a:defRPr>
+            </a:pPr>
+            <a:r>
+              <a:t>TECHNOLOGY STACK &amp; RUNTIME</a:t>
+            </a:r>
+          </a:p>
+          <a:p>
+            <a:pPr>
+              <a:spcAft>
+                <a:spcPts val="800"/>
+              </a:spcAft>
+            </a:pPr>
+            <a:r>
+              <a:rPr b="1" sz="1000">
+                <a:solidFill>
+                  <a:srgbClr val="0F172A"/>
+                </a:solidFill>
+              </a:rPr>
+              <a:t>• Frontend Application: </a:t>
+            </a:r>
+            <a:r>
+              <a:rPr sz="950">
+                <a:solidFill>
+                  <a:srgbClr val="334155"/>
+                </a:solidFill>
+              </a:rPr>
+              <a:t>React 19, Tailwind CSS v4, Vite 8 (Progressive Web App - 100% Offline)</a:t>
+            </a:r>
+          </a:p>
+          <a:p>
+            <a:pPr>
+              <a:spcAft>
+                <a:spcPts val="800"/>
+              </a:spcAft>
+            </a:pPr>
+            <a:r>
+              <a:rPr b="1" sz="1000">
+                <a:solidFill>
+                  <a:srgbClr val="0F172A"/>
+                </a:solidFill>
+              </a:rPr>
+              <a:t>• Hardware Target: </a:t>
+            </a:r>
+            <a:r>
+              <a:rPr sz="950">
+                <a:solidFill>
+                  <a:srgbClr val="334155"/>
+                </a:solidFill>
+              </a:rPr>
+              <a:t>HP OmniBook Ultra &amp; HP OmniBook 3 (Snapdragon® X Elite &amp; X Plus)</a:t>
+            </a:r>
+          </a:p>
+          <a:p>
+            <a:pPr>
+              <a:spcAft>
+                <a:spcPts val="800"/>
+              </a:spcAft>
+            </a:pPr>
+            <a:r>
+              <a:rPr b="1" sz="1000">
+                <a:solidFill>
+                  <a:srgbClr val="0F172A"/>
+                </a:solidFill>
+              </a:rPr>
+              <a:t>• Vision NPU Model: </a:t>
+            </a:r>
+            <a:r>
+              <a:rPr sz="950">
+                <a:solidFill>
+                  <a:srgbClr val="334155"/>
+                </a:solidFill>
+              </a:rPr>
+              <a:t>Qualcomm AI Hub compiled EfficientNet-Lite0 / MobileNetV2 (W8A8 INT8, 5.2 MB)</a:t>
+            </a:r>
+          </a:p>
+          <a:p>
+            <a:pPr>
+              <a:spcAft>
+                <a:spcPts val="800"/>
+              </a:spcAft>
+            </a:pPr>
+            <a:r>
+              <a:rPr b="1" sz="1000">
+                <a:solidFill>
+                  <a:srgbClr val="0F172A"/>
+                </a:solidFill>
+              </a:rPr>
+              <a:t>• Voice NLP Engine: </a:t>
+            </a:r>
+            <a:r>
+              <a:rPr sz="950">
+                <a:solidFill>
+                  <a:srgbClr val="334155"/>
+                </a:solidFill>
+              </a:rPr>
+              <a:t>Offline Web Speech API (hi-IN) + Rule-Based 12-Intent Categorizer (intentDetector.js)</a:t>
+            </a:r>
+          </a:p>
+          <a:p>
+            <a:pPr>
+              <a:spcAft>
+                <a:spcPts val="800"/>
+              </a:spcAft>
+            </a:pPr>
+            <a:r>
+              <a:rPr b="1" sz="1000">
+                <a:solidFill>
+                  <a:srgbClr val="0F172A"/>
+                </a:solidFill>
+              </a:rPr>
+              <a:t>• Messaging Bus: </a:t>
+            </a:r>
+            <a:r>
+              <a:rPr sz="950">
+                <a:solidFill>
+                  <a:srgbClr val="334155"/>
+                </a:solidFill>
+              </a:rPr>
+              <a:t>Reactive WhatsApp Store (whatsappStore.js) with CustomEvent telemetry</a:t>
+            </a:r>
+          </a:p>
+          <a:p>
+            <a:pPr>
+              <a:spcAft>
+                <a:spcPts val="800"/>
+              </a:spcAft>
+            </a:pPr>
+            <a:r>
+              <a:rPr b="1" sz="1000">
+                <a:solidFill>
+                  <a:srgbClr val="0F172A"/>
+                </a:solidFill>
+              </a:rPr>
+              <a:t>• Meta Cloud API: </a:t>
+            </a:r>
+            <a:r>
+              <a:rPr sz="950">
+                <a:solidFill>
+                  <a:srgbClr val="334155"/>
+                </a:solidFill>
+              </a:rPr>
+              <a:t>Official Meta Graph API v19.0 + Node.js Webhook Server (server/whatsapp_bot_server.js)</a:t>
+            </a:r>
+          </a:p>
+          <a:p>
+            <a:pPr>
+              <a:spcAft>
+                <a:spcPts val="800"/>
+              </a:spcAft>
+            </a:pPr>
+            <a:r>
+              <a:rPr b="1" sz="1000">
+                <a:solidFill>
+                  <a:srgbClr val="0F172A"/>
+                </a:solidFill>
+              </a:rPr>
+              <a:t>• Cloud CDN &amp; HTTPS: </a:t>
+            </a:r>
+            <a:r>
+              <a:rPr sz="950">
+                <a:solidFill>
+                  <a:srgbClr val="334155"/>
+                </a:solidFill>
+              </a:rPr>
+              <a:t>Vercel Global Edge Network with automated SSL for camera &amp; audio access</a:t>
+            </a:r>
+          </a:p>
+        </p:txBody>
+      </p:sp>
+      <p:sp>
+        <p:nvSpPr>
+          <p:cNvPr id="8" name="Rounded Rectangle 7"/>
           <p:cNvSpPr/>
           <p:nvPr/>
         </p:nvSpPr>
         <p:spPr>
           <a:xfrm>
-            <a:off x="914400" y="2377440"/>
-            <a:ext cx="10362895" cy="3840480"/>
+            <a:off x="5029200" y="1463040"/>
+            <a:ext cx="6400800" cy="3931920"/>
           </a:xfrm>
           <a:prstGeom prst="roundRect">
             <a:avLst/>
           </a:prstGeom>
           <a:solidFill>
-            <a:srgbClr val="13232E"/>
+            <a:srgbClr val="F8FAFC"/>
           </a:solidFill>
-          <a:ln w="12700">
+          <a:ln>
             <a:solidFill>
-              <a:srgbClr val="10B981"/>
+              <a:srgbClr val="E2E8F0"/>
             </a:solidFill>
           </a:ln>
         </p:spPr>
@@ -3913,14 +4749,14 @@
       </p:sp>
       <p:sp>
         <p:nvSpPr>
-          <p:cNvPr id="7" name="TextBox 6"/>
+          <p:cNvPr id="9" name="TextBox 8"/>
           <p:cNvSpPr txBox="1"/>
           <p:nvPr/>
         </p:nvSpPr>
         <p:spPr>
           <a:xfrm>
-            <a:off x="1188720" y="2560320"/>
-            <a:ext cx="9784080" cy="3474720"/>
+            <a:off x="5212080" y="1554480"/>
+            <a:ext cx="6035040" cy="3749039"/>
           </a:xfrm>
           <a:prstGeom prst="rect">
             <a:avLst/>
@@ -3935,61 +4771,216 @@
           <a:p>
             <a:pPr>
               <a:spcAft>
-                <a:spcPts val="1200"/>
+                <a:spcPts val="1000"/>
               </a:spcAft>
-              <a:defRPr sz="1400">
-                <a:solidFill>
-                  <a:srgbClr val="FFFFFF"/>
-                </a:solidFill>
-              </a:defRPr>
-            </a:pPr>
-            <a:r>
-              <a:t>•  1. Kisan Kavach (Crop Doctor): Instant leaf diagnosis via computer vision in &lt;40ms with organic &amp; chemical sprays.</a:t>
+              <a:defRPr sz="1300" b="1">
+                <a:solidFill>
+                  <a:srgbClr val="D97706"/>
+                </a:solidFill>
+              </a:defRPr>
+            </a:pPr>
+            <a:r>
+              <a:t>4-TIER MULTIMODAL SYSTEM ARCHITECTURE</a:t>
+            </a:r>
+          </a:p>
+          <a:p>
+            <a:pPr>
+              <a:defRPr b="1" sz="1050">
+                <a:solidFill>
+                  <a:srgbClr val="0F172A"/>
+                </a:solidFill>
+              </a:defRPr>
+            </a:pPr>
+            <a:r>
+              <a:t>█  TIER 1: MULTI-CHANNEL CLIENT SURFACES</a:t>
             </a:r>
           </a:p>
           <a:p>
             <a:pPr>
               <a:spcAft>
-                <a:spcPts val="1200"/>
+                <a:spcPts val="800"/>
               </a:spcAft>
-              <a:defRPr sz="1400">
-                <a:solidFill>
-                  <a:srgbClr val="FFFFFF"/>
-                </a:solidFill>
-              </a:defRPr>
-            </a:pPr>
-            <a:r>
-              <a:t>•  2. Awaaz Sahayak (Voice AI): Conversational Hindi/Hinglish voice queries for weather, mandi rates, and fertilizers.</a:t>
+              <a:defRPr sz="950">
+                <a:solidFill>
+                  <a:srgbClr val="334155"/>
+                </a:solidFill>
+              </a:defRPr>
+            </a:pPr>
+            <a:r>
+              <a:t>Farmer Web Portal · 24/7 AI Assistant · WhatsApp Bot Simulator · Admin Desk</a:t>
+            </a:r>
+          </a:p>
+          <a:p>
+            <a:pPr>
+              <a:defRPr b="1" sz="1050">
+                <a:solidFill>
+                  <a:srgbClr val="0F172A"/>
+                </a:solidFill>
+              </a:defRPr>
+            </a:pPr>
+            <a:r>
+              <a:t>█  TIER 2: ORCHESTRATION &amp; EVENT BUS</a:t>
             </a:r>
           </a:p>
           <a:p>
             <a:pPr>
               <a:spcAft>
-                <a:spcPts val="1200"/>
+                <a:spcPts val="800"/>
               </a:spcAft>
-              <a:defRPr sz="1400">
-                <a:solidFill>
-                  <a:srgbClr val="FFFFFF"/>
-                </a:solidFill>
-              </a:defRPr>
-            </a:pPr>
-            <a:r>
-              <a:t>•  3. Sarkari Yojana Gateway: 3-step e-KYC &amp; land record verification for 15+ Central/State agricultural schemes.</a:t>
+              <a:defRPr sz="950">
+                <a:solidFill>
+                  <a:srgbClr val="334155"/>
+                </a:solidFill>
+              </a:defRPr>
+            </a:pPr>
+            <a:r>
+              <a:t>localStorage Synchronizer · CustomEvent Telemetry Bus · Multi-Farmer Thread Store</a:t>
+            </a:r>
+          </a:p>
+          <a:p>
+            <a:pPr>
+              <a:defRPr b="1" sz="1050">
+                <a:solidFill>
+                  <a:srgbClr val="0F172A"/>
+                </a:solidFill>
+              </a:defRPr>
+            </a:pPr>
+            <a:r>
+              <a:t>█  TIER 3: CORE INTELLIGENCE SERVICES</a:t>
             </a:r>
           </a:p>
           <a:p>
             <a:pPr>
               <a:spcAft>
-                <a:spcPts val="1200"/>
+                <a:spcPts val="800"/>
               </a:spcAft>
-              <a:defRPr sz="1400">
-                <a:solidFill>
-                  <a:srgbClr val="FFFFFF"/>
-                </a:solidFill>
-              </a:defRPr>
-            </a:pPr>
-            <a:r>
-              <a:t>•  4. WhatsApp Krishi Bot &amp; Resolution Desk: Realistic chat interface with two-way sync to administrative consoles.</a:t>
+              <a:defRPr sz="950">
+                <a:solidFill>
+                  <a:srgbClr val="334155"/>
+                </a:solidFill>
+              </a:defRPr>
+            </a:pPr>
+            <a:r>
+              <a:t>Kisan Kavach Vision · Awaaz Sahayak Voice · Schemes DBT Engine · Mandi Bhav Service</a:t>
+            </a:r>
+          </a:p>
+          <a:p>
+            <a:pPr>
+              <a:defRPr b="1" sz="1050">
+                <a:solidFill>
+                  <a:srgbClr val="0F172A"/>
+                </a:solidFill>
+              </a:defRPr>
+            </a:pPr>
+            <a:r>
+              <a:t>█  TIER 4: HARDWARE ACCELERATION &amp; ENCRYPTION</a:t>
+            </a:r>
+          </a:p>
+          <a:p>
+            <a:pPr>
+              <a:spcAft>
+                <a:spcPts val="800"/>
+              </a:spcAft>
+              <a:defRPr sz="950">
+                <a:solidFill>
+                  <a:srgbClr val="334155"/>
+                </a:solidFill>
+              </a:defRPr>
+            </a:pPr>
+            <a:r>
+              <a:t>Qualcomm Hexagon™ HTP NPU (45 TOPS) · QNN SDK Runtime · Qualcomm SPU Security</a:t>
+            </a:r>
+          </a:p>
+        </p:txBody>
+      </p:sp>
+      <p:sp>
+        <p:nvSpPr>
+          <p:cNvPr id="10" name="Rounded Rectangle 9"/>
+          <p:cNvSpPr/>
+          <p:nvPr/>
+        </p:nvSpPr>
+        <p:spPr>
+          <a:xfrm>
+            <a:off x="5029200" y="5486400"/>
+            <a:ext cx="6400800" cy="914400"/>
+          </a:xfrm>
+          <a:prstGeom prst="roundRect">
+            <a:avLst/>
+          </a:prstGeom>
+          <a:solidFill>
+            <a:srgbClr val="ECFDF5"/>
+          </a:solidFill>
+          <a:ln>
+            <a:solidFill>
+              <a:srgbClr val="059669"/>
+            </a:solidFill>
+          </a:ln>
+        </p:spPr>
+        <p:style>
+          <a:lnRef idx="1">
+            <a:schemeClr val="accent1"/>
+          </a:lnRef>
+          <a:fillRef idx="3">
+            <a:schemeClr val="accent1"/>
+          </a:fillRef>
+          <a:effectRef idx="2">
+            <a:schemeClr val="accent1"/>
+          </a:effectRef>
+          <a:fontRef idx="minor">
+            <a:schemeClr val="lt1"/>
+          </a:fontRef>
+        </p:style>
+        <p:txBody>
+          <a:bodyPr rtlCol="0" anchor="ctr"/>
+          <a:lstStyle/>
+          <a:p>
+            <a:pPr algn="ctr"/>
+          </a:p>
+        </p:txBody>
+      </p:sp>
+      <p:sp>
+        <p:nvSpPr>
+          <p:cNvPr id="11" name="TextBox 10"/>
+          <p:cNvSpPr txBox="1"/>
+          <p:nvPr/>
+        </p:nvSpPr>
+        <p:spPr>
+          <a:xfrm>
+            <a:off x="5212080" y="5532120"/>
+            <a:ext cx="6035040" cy="822960"/>
+          </a:xfrm>
+          <a:prstGeom prst="rect">
+            <a:avLst/>
+          </a:prstGeom>
+          <a:noFill/>
+        </p:spPr>
+        <p:txBody>
+          <a:bodyPr wrap="square">
+            <a:spAutoFit/>
+          </a:bodyPr>
+          <a:lstStyle/>
+          <a:p>
+            <a:pPr>
+              <a:defRPr b="1" sz="1050">
+                <a:solidFill>
+                  <a:srgbClr val="065F46"/>
+                </a:solidFill>
+              </a:defRPr>
+            </a:pPr>
+            <a:r>
+              <a:t>Core Design Principle: Zero Cloud Leakage &amp; Full Explainability</a:t>
+            </a:r>
+          </a:p>
+          <a:p>
+            <a:pPr>
+              <a:defRPr sz="950">
+                <a:solidFill>
+                  <a:srgbClr val="334155"/>
+                </a:solidFill>
+              </a:defRPr>
+            </a:pPr>
+            <a:r>
+              <a:t>All neural network inference (vision/NLU) and scheme eligibility logic execute locally on the Snapdragon PC. No farmer photo or sensitive land record is uploaded to third-party clouds.</a:t>
             </a:r>
           </a:p>
         </p:txBody>
@@ -4014,23 +5005,200 @@
       <p:grpSpPr/>
       <p:sp>
         <p:nvSpPr>
-          <p:cNvPr id="2" name="Rectangle 1"/>
-          <p:cNvSpPr/>
+          <p:cNvPr id="2" name="TextBox 1"/>
+          <p:cNvSpPr txBox="1"/>
           <p:nvPr/>
         </p:nvSpPr>
         <p:spPr>
           <a:xfrm>
-            <a:off x="0" y="0"/>
-            <a:ext cx="12191695" cy="6858000"/>
+            <a:off x="731520" y="274320"/>
+            <a:ext cx="10698480" cy="320040"/>
           </a:xfrm>
           <a:prstGeom prst="rect">
             <a:avLst/>
           </a:prstGeom>
+          <a:noFill/>
+        </p:spPr>
+        <p:txBody>
+          <a:bodyPr wrap="square">
+            <a:spAutoFit/>
+          </a:bodyPr>
+          <a:lstStyle/>
+          <a:p>
+            <a:pPr>
+              <a:defRPr sz="950" b="1">
+                <a:solidFill>
+                  <a:srgbClr val="D97706"/>
+                </a:solidFill>
+              </a:defRPr>
+            </a:pPr>
+            <a:r>
+              <a:t>QUALCOMM SNAPDRAGON® AI LAB BUILD &amp; PRESENT CHALLENGE 2026</a:t>
+            </a:r>
+          </a:p>
+        </p:txBody>
+      </p:sp>
+      <p:sp>
+        <p:nvSpPr>
+          <p:cNvPr id="3" name="TextBox 2"/>
+          <p:cNvSpPr txBox="1"/>
+          <p:nvPr/>
+        </p:nvSpPr>
+        <p:spPr>
+          <a:xfrm>
+            <a:off x="731520" y="502920"/>
+            <a:ext cx="10698480" cy="548640"/>
+          </a:xfrm>
+          <a:prstGeom prst="rect">
+            <a:avLst/>
+          </a:prstGeom>
+          <a:noFill/>
+        </p:spPr>
+        <p:txBody>
+          <a:bodyPr wrap="none">
+            <a:spAutoFit/>
+          </a:bodyPr>
+          <a:lstStyle/>
+          <a:p>
+            <a:pPr>
+              <a:defRPr sz="2200" b="1">
+                <a:solidFill>
+                  <a:srgbClr val="0F172A"/>
+                </a:solidFill>
+              </a:defRPr>
+            </a:pPr>
+            <a:r>
+              <a:t>FEASIBILITY AND VIABILITY ANALYSIS</a:t>
+            </a:r>
+          </a:p>
+        </p:txBody>
+      </p:sp>
+      <p:sp>
+        <p:nvSpPr>
+          <p:cNvPr id="4" name="TextBox 3"/>
+          <p:cNvSpPr txBox="1"/>
+          <p:nvPr/>
+        </p:nvSpPr>
+        <p:spPr>
+          <a:xfrm>
+            <a:off x="731520" y="1051560"/>
+            <a:ext cx="10698480" cy="320040"/>
+          </a:xfrm>
+          <a:prstGeom prst="rect">
+            <a:avLst/>
+          </a:prstGeom>
+          <a:noFill/>
+        </p:spPr>
+        <p:txBody>
+          <a:bodyPr wrap="none">
+            <a:spAutoFit/>
+          </a:bodyPr>
+          <a:lstStyle/>
+          <a:p>
+            <a:pPr>
+              <a:defRPr sz="1100">
+                <a:solidFill>
+                  <a:srgbClr val="059669"/>
+                </a:solidFill>
+              </a:defRPr>
+            </a:pPr>
+            <a:r>
+              <a:t>Operational Viability, Deployment Feasibility, Challenges and Mitigation Strategies</a:t>
+            </a:r>
+          </a:p>
+        </p:txBody>
+      </p:sp>
+      <p:sp>
+        <p:nvSpPr>
+          <p:cNvPr id="5" name="TextBox 4"/>
+          <p:cNvSpPr txBox="1"/>
+          <p:nvPr/>
+        </p:nvSpPr>
+        <p:spPr>
+          <a:xfrm>
+            <a:off x="10972800" y="365760"/>
+            <a:ext cx="731520" cy="365760"/>
+          </a:xfrm>
+          <a:prstGeom prst="rect">
+            <a:avLst/>
+          </a:prstGeom>
+          <a:noFill/>
+        </p:spPr>
+        <p:txBody>
+          <a:bodyPr wrap="none">
+            <a:spAutoFit/>
+          </a:bodyPr>
+          <a:lstStyle/>
+          <a:p>
+            <a:pPr>
+              <a:defRPr sz="1200" b="1">
+                <a:solidFill>
+                  <a:srgbClr val="64748B"/>
+                </a:solidFill>
+              </a:defRPr>
+            </a:pPr>
+            <a:r>
+              <a:t>04</a:t>
+            </a:r>
+          </a:p>
+        </p:txBody>
+      </p:sp>
+      <p:sp>
+        <p:nvSpPr>
+          <p:cNvPr id="6" name="TextBox 5"/>
+          <p:cNvSpPr txBox="1"/>
+          <p:nvPr/>
+        </p:nvSpPr>
+        <p:spPr>
+          <a:xfrm>
+            <a:off x="731520" y="1463040"/>
+            <a:ext cx="5212080" cy="365760"/>
+          </a:xfrm>
+          <a:prstGeom prst="rect">
+            <a:avLst/>
+          </a:prstGeom>
+          <a:noFill/>
+        </p:spPr>
+        <p:txBody>
+          <a:bodyPr wrap="none">
+            <a:spAutoFit/>
+          </a:bodyPr>
+          <a:lstStyle/>
+          <a:p>
+            <a:pPr>
+              <a:defRPr sz="1300" b="1">
+                <a:solidFill>
+                  <a:srgbClr val="065F46"/>
+                </a:solidFill>
+              </a:defRPr>
+            </a:pPr>
+            <a:r>
+              <a:t>✔  FEASIBILITY OF THE SOLUTION</a:t>
+            </a:r>
+          </a:p>
+        </p:txBody>
+      </p:sp>
+      <p:sp>
+        <p:nvSpPr>
+          <p:cNvPr id="7" name="Rounded Rectangle 6"/>
+          <p:cNvSpPr/>
+          <p:nvPr/>
+        </p:nvSpPr>
+        <p:spPr>
+          <a:xfrm>
+            <a:off x="731520" y="1920240"/>
+            <a:ext cx="5212080" cy="1051560"/>
+          </a:xfrm>
+          <a:prstGeom prst="roundRect">
+            <a:avLst/>
+          </a:prstGeom>
           <a:solidFill>
-            <a:srgbClr val="0B141A"/>
+            <a:srgbClr val="ECFDF5"/>
           </a:solidFill>
           <a:ln>
-            <a:noFill/>
+            <a:solidFill>
+              <a:srgbClr val="E2E8F0"/>
+            </a:solidFill>
           </a:ln>
         </p:spPr>
         <p:style>
@@ -4057,14 +5225,14 @@
       </p:sp>
       <p:sp>
         <p:nvSpPr>
-          <p:cNvPr id="3" name="TextBox 2"/>
+          <p:cNvPr id="8" name="TextBox 7"/>
           <p:cNvSpPr txBox="1"/>
           <p:nvPr/>
         </p:nvSpPr>
         <p:spPr>
           <a:xfrm>
-            <a:off x="914400" y="548640"/>
-            <a:ext cx="10362895" cy="365760"/>
+            <a:off x="868680" y="1993392"/>
+            <a:ext cx="4937760" cy="914400"/>
           </a:xfrm>
           <a:prstGeom prst="rect">
             <a:avLst/>
@@ -4072,114 +5240,59 @@
           <a:noFill/>
         </p:spPr>
         <p:txBody>
-          <a:bodyPr wrap="none">
+          <a:bodyPr wrap="square">
             <a:spAutoFit/>
           </a:bodyPr>
           <a:lstStyle/>
           <a:p>
             <a:pPr>
-              <a:defRPr sz="1100" b="1">
-                <a:solidFill>
-                  <a:srgbClr val="F59E0B"/>
-                </a:solidFill>
-              </a:defRPr>
-            </a:pPr>
-            <a:r>
-              <a:t>QUALCOMM SNAPDRAGON &amp; AI HUB INTEGRATION</a:t>
-            </a:r>
-          </a:p>
-        </p:txBody>
-      </p:sp>
-      <p:sp>
-        <p:nvSpPr>
-          <p:cNvPr id="4" name="TextBox 3"/>
-          <p:cNvSpPr txBox="1"/>
-          <p:nvPr/>
-        </p:nvSpPr>
-        <p:spPr>
-          <a:xfrm>
-            <a:off x="914400" y="914400"/>
-            <a:ext cx="10362895" cy="731520"/>
-          </a:xfrm>
-          <a:prstGeom prst="rect">
-            <a:avLst/>
-          </a:prstGeom>
-          <a:noFill/>
-        </p:spPr>
-        <p:txBody>
-          <a:bodyPr wrap="none">
-            <a:spAutoFit/>
-          </a:bodyPr>
-          <a:lstStyle/>
-          <a:p>
-            <a:pPr>
-              <a:defRPr sz="2600" b="1">
-                <a:solidFill>
-                  <a:srgbClr val="FFFFFF"/>
-                </a:solidFill>
-              </a:defRPr>
-            </a:pPr>
-            <a:r>
-              <a:t>Qualcomm Hexagon™ NPU &amp; QNN SDK Pipeline</a:t>
-            </a:r>
-          </a:p>
-        </p:txBody>
-      </p:sp>
-      <p:sp>
-        <p:nvSpPr>
-          <p:cNvPr id="5" name="TextBox 4"/>
-          <p:cNvSpPr txBox="1"/>
-          <p:nvPr/>
-        </p:nvSpPr>
-        <p:spPr>
-          <a:xfrm>
-            <a:off x="914400" y="1645920"/>
-            <a:ext cx="10362895" cy="548640"/>
-          </a:xfrm>
-          <a:prstGeom prst="rect">
-            <a:avLst/>
-          </a:prstGeom>
-          <a:noFill/>
-        </p:spPr>
-        <p:txBody>
-          <a:bodyPr wrap="none">
-            <a:spAutoFit/>
-          </a:bodyPr>
-          <a:lstStyle/>
-          <a:p>
-            <a:pPr>
-              <a:defRPr sz="1400">
-                <a:solidFill>
-                  <a:srgbClr val="10B981"/>
-                </a:solidFill>
-              </a:defRPr>
-            </a:pPr>
-            <a:r>
-              <a:t>Hardware-accelerated INT8 quantization targeting 45 TOPS Hexagon Tensor Processor (HTP)</a:t>
-            </a:r>
-          </a:p>
-        </p:txBody>
-      </p:sp>
-      <p:sp>
-        <p:nvSpPr>
-          <p:cNvPr id="6" name="Rounded Rectangle 5"/>
+              <a:defRPr b="1" sz="1050">
+                <a:solidFill>
+                  <a:srgbClr val="0F172A"/>
+                </a:solidFill>
+              </a:defRPr>
+            </a:pPr>
+            <a:r>
+              <a:t>Zero-Cost Client Runtime</a:t>
+            </a:r>
+          </a:p>
+          <a:p>
+            <a:pPr>
+              <a:spcBef>
+                <a:spcPts val="300"/>
+              </a:spcBef>
+              <a:defRPr sz="950">
+                <a:solidFill>
+                  <a:srgbClr val="334155"/>
+                </a:solidFill>
+              </a:defRPr>
+            </a:pPr>
+            <a:r>
+              <a:t>Operates directly in modern browsers via WebAssembly &amp; Qualcomm QNN SDK. Eliminates costly cloud GPU subscriptions ($0 server bill).</a:t>
+            </a:r>
+          </a:p>
+        </p:txBody>
+      </p:sp>
+      <p:sp>
+        <p:nvSpPr>
+          <p:cNvPr id="9" name="Rounded Rectangle 8"/>
           <p:cNvSpPr/>
           <p:nvPr/>
         </p:nvSpPr>
         <p:spPr>
           <a:xfrm>
-            <a:off x="914400" y="2377440"/>
-            <a:ext cx="10362895" cy="3840480"/>
+            <a:off x="731520" y="3063240"/>
+            <a:ext cx="5212080" cy="1051560"/>
           </a:xfrm>
           <a:prstGeom prst="roundRect">
             <a:avLst/>
           </a:prstGeom>
           <a:solidFill>
-            <a:srgbClr val="13232E"/>
+            <a:srgbClr val="EFF6FF"/>
           </a:solidFill>
-          <a:ln w="12700">
+          <a:ln>
             <a:solidFill>
-              <a:srgbClr val="10B981"/>
+              <a:srgbClr val="E2E8F0"/>
             </a:solidFill>
           </a:ln>
         </p:spPr>
@@ -4207,14 +5320,14 @@
       </p:sp>
       <p:sp>
         <p:nvSpPr>
-          <p:cNvPr id="7" name="TextBox 6"/>
+          <p:cNvPr id="10" name="TextBox 9"/>
           <p:cNvSpPr txBox="1"/>
           <p:nvPr/>
         </p:nvSpPr>
         <p:spPr>
           <a:xfrm>
-            <a:off x="1188720" y="2560320"/>
-            <a:ext cx="9784080" cy="3474720"/>
+            <a:off x="868680" y="3136392"/>
+            <a:ext cx="4937760" cy="914400"/>
           </a:xfrm>
           <a:prstGeom prst="rect">
             <a:avLst/>
@@ -4228,62 +5341,634 @@
           <a:lstStyle/>
           <a:p>
             <a:pPr>
-              <a:spcAft>
-                <a:spcPts val="1200"/>
-              </a:spcAft>
-              <a:defRPr sz="1400">
-                <a:solidFill>
-                  <a:srgbClr val="FFFFFF"/>
-                </a:solidFill>
-              </a:defRPr>
-            </a:pPr>
-            <a:r>
-              <a:t>•  Computer Vision: EfficientNet-Lite0 / MobileNetV2 compiled via Qualcomm AI Hub (W8A8 INT8, 5.2 MB).</a:t>
-            </a:r>
-          </a:p>
-          <a:p>
-            <a:pPr>
-              <a:spcAft>
-                <a:spcPts val="1200"/>
-              </a:spcAft>
-              <a:defRPr sz="1400">
-                <a:solidFill>
-                  <a:srgbClr val="FFFFFF"/>
-                </a:solidFill>
-              </a:defRPr>
-            </a:pPr>
-            <a:r>
-              <a:t>•  Voice Intent Classification: MobileBERT INT8 quantized DLC executing with sub-30ms intent resolution.</a:t>
-            </a:r>
-          </a:p>
-          <a:p>
-            <a:pPr>
-              <a:spcAft>
-                <a:spcPts val="1200"/>
-              </a:spcAft>
-              <a:defRPr sz="1400">
-                <a:solidFill>
-                  <a:srgbClr val="FFFFFF"/>
-                </a:solidFill>
-              </a:defRPr>
-            </a:pPr>
-            <a:r>
-              <a:t>•  Speech-to-Text: Whisper-Tiny Multilingual quantized model for native Hindi/English voice queries.</a:t>
-            </a:r>
-          </a:p>
-          <a:p>
-            <a:pPr>
-              <a:spcAft>
-                <a:spcPts val="1200"/>
-              </a:spcAft>
-              <a:defRPr sz="1400">
-                <a:solidFill>
-                  <a:srgbClr val="FFFFFF"/>
-                </a:solidFill>
-              </a:defRPr>
-            </a:pPr>
-            <a:r>
-              <a:t>•  Zero Cloud Data Leakage: 100% biometric and land data privacy compliance (Qualcomm SPU hardware encryption).</a:t>
+              <a:defRPr b="1" sz="1050">
+                <a:solidFill>
+                  <a:srgbClr val="0F172A"/>
+                </a:solidFill>
+              </a:defRPr>
+            </a:pPr>
+            <a:r>
+              <a:t>Low Maintenance &amp; Code Independence</a:t>
+            </a:r>
+          </a:p>
+          <a:p>
+            <a:pPr>
+              <a:spcBef>
+                <a:spcPts val="300"/>
+              </a:spcBef>
+              <a:defRPr sz="950">
+                <a:solidFill>
+                  <a:srgbClr val="334155"/>
+                </a:solidFill>
+              </a:defRPr>
+            </a:pPr>
+            <a:r>
+              <a:t>Scheme datasets and disease remedies are structured in editable JSON files. Extension officers can update data without redeploying code.</a:t>
+            </a:r>
+          </a:p>
+        </p:txBody>
+      </p:sp>
+      <p:sp>
+        <p:nvSpPr>
+          <p:cNvPr id="11" name="Rounded Rectangle 10"/>
+          <p:cNvSpPr/>
+          <p:nvPr/>
+        </p:nvSpPr>
+        <p:spPr>
+          <a:xfrm>
+            <a:off x="731520" y="4206240"/>
+            <a:ext cx="5212080" cy="1051560"/>
+          </a:xfrm>
+          <a:prstGeom prst="roundRect">
+            <a:avLst/>
+          </a:prstGeom>
+          <a:solidFill>
+            <a:srgbClr val="FAF5FF"/>
+          </a:solidFill>
+          <a:ln>
+            <a:solidFill>
+              <a:srgbClr val="E2E8F0"/>
+            </a:solidFill>
+          </a:ln>
+        </p:spPr>
+        <p:style>
+          <a:lnRef idx="1">
+            <a:schemeClr val="accent1"/>
+          </a:lnRef>
+          <a:fillRef idx="3">
+            <a:schemeClr val="accent1"/>
+          </a:fillRef>
+          <a:effectRef idx="2">
+            <a:schemeClr val="accent1"/>
+          </a:effectRef>
+          <a:fontRef idx="minor">
+            <a:schemeClr val="lt1"/>
+          </a:fontRef>
+        </p:style>
+        <p:txBody>
+          <a:bodyPr rtlCol="0" anchor="ctr"/>
+          <a:lstStyle/>
+          <a:p>
+            <a:pPr algn="ctr"/>
+          </a:p>
+        </p:txBody>
+      </p:sp>
+      <p:sp>
+        <p:nvSpPr>
+          <p:cNvPr id="12" name="TextBox 11"/>
+          <p:cNvSpPr txBox="1"/>
+          <p:nvPr/>
+        </p:nvSpPr>
+        <p:spPr>
+          <a:xfrm>
+            <a:off x="868680" y="4279392"/>
+            <a:ext cx="4937760" cy="914400"/>
+          </a:xfrm>
+          <a:prstGeom prst="rect">
+            <a:avLst/>
+          </a:prstGeom>
+          <a:noFill/>
+        </p:spPr>
+        <p:txBody>
+          <a:bodyPr wrap="square">
+            <a:spAutoFit/>
+          </a:bodyPr>
+          <a:lstStyle/>
+          <a:p>
+            <a:pPr>
+              <a:defRPr b="1" sz="1050">
+                <a:solidFill>
+                  <a:srgbClr val="0F172A"/>
+                </a:solidFill>
+              </a:defRPr>
+            </a:pPr>
+            <a:r>
+              <a:t>Unified Business Logic</a:t>
+            </a:r>
+          </a:p>
+          <a:p>
+            <a:pPr>
+              <a:spcBef>
+                <a:spcPts val="300"/>
+              </a:spcBef>
+              <a:defRPr sz="950">
+                <a:solidFill>
+                  <a:srgbClr val="334155"/>
+                </a:solidFill>
+              </a:defRPr>
+            </a:pPr>
+            <a:r>
+              <a:t>A single reactive communication bus (whatsappStore.js) drives the web dashboard, voice assistant, and WhatsApp simulator simultaneously.</a:t>
+            </a:r>
+          </a:p>
+        </p:txBody>
+      </p:sp>
+      <p:sp>
+        <p:nvSpPr>
+          <p:cNvPr id="13" name="Rounded Rectangle 12"/>
+          <p:cNvSpPr/>
+          <p:nvPr/>
+        </p:nvSpPr>
+        <p:spPr>
+          <a:xfrm>
+            <a:off x="731520" y="5349240"/>
+            <a:ext cx="5212080" cy="1051560"/>
+          </a:xfrm>
+          <a:prstGeom prst="roundRect">
+            <a:avLst/>
+          </a:prstGeom>
+          <a:solidFill>
+            <a:srgbClr val="FFF7ED"/>
+          </a:solidFill>
+          <a:ln>
+            <a:solidFill>
+              <a:srgbClr val="E2E8F0"/>
+            </a:solidFill>
+          </a:ln>
+        </p:spPr>
+        <p:style>
+          <a:lnRef idx="1">
+            <a:schemeClr val="accent1"/>
+          </a:lnRef>
+          <a:fillRef idx="3">
+            <a:schemeClr val="accent1"/>
+          </a:fillRef>
+          <a:effectRef idx="2">
+            <a:schemeClr val="accent1"/>
+          </a:effectRef>
+          <a:fontRef idx="minor">
+            <a:schemeClr val="lt1"/>
+          </a:fontRef>
+        </p:style>
+        <p:txBody>
+          <a:bodyPr rtlCol="0" anchor="ctr"/>
+          <a:lstStyle/>
+          <a:p>
+            <a:pPr algn="ctr"/>
+          </a:p>
+        </p:txBody>
+      </p:sp>
+      <p:sp>
+        <p:nvSpPr>
+          <p:cNvPr id="14" name="TextBox 13"/>
+          <p:cNvSpPr txBox="1"/>
+          <p:nvPr/>
+        </p:nvSpPr>
+        <p:spPr>
+          <a:xfrm>
+            <a:off x="868680" y="5422392"/>
+            <a:ext cx="4937760" cy="914400"/>
+          </a:xfrm>
+          <a:prstGeom prst="rect">
+            <a:avLst/>
+          </a:prstGeom>
+          <a:noFill/>
+        </p:spPr>
+        <p:txBody>
+          <a:bodyPr wrap="square">
+            <a:spAutoFit/>
+          </a:bodyPr>
+          <a:lstStyle/>
+          <a:p>
+            <a:pPr>
+              <a:defRPr b="1" sz="1050">
+                <a:solidFill>
+                  <a:srgbClr val="0F172A"/>
+                </a:solidFill>
+              </a:defRPr>
+            </a:pPr>
+            <a:r>
+              <a:t>Auditable &amp; Deterministic Core</a:t>
+            </a:r>
+          </a:p>
+          <a:p>
+            <a:pPr>
+              <a:spcBef>
+                <a:spcPts val="300"/>
+              </a:spcBef>
+              <a:defRPr sz="950">
+                <a:solidFill>
+                  <a:srgbClr val="334155"/>
+                </a:solidFill>
+              </a:defRPr>
+            </a:pPr>
+            <a:r>
+              <a:t>All agricultural remedies reference verified agrochemicals (Tilt, Baan, Blitox) with explicit CIBRC dosage recommendations.</a:t>
+            </a:r>
+          </a:p>
+        </p:txBody>
+      </p:sp>
+      <p:sp>
+        <p:nvSpPr>
+          <p:cNvPr id="15" name="TextBox 14"/>
+          <p:cNvSpPr txBox="1"/>
+          <p:nvPr/>
+        </p:nvSpPr>
+        <p:spPr>
+          <a:xfrm>
+            <a:off x="6217920" y="1463040"/>
+            <a:ext cx="5212080" cy="365760"/>
+          </a:xfrm>
+          <a:prstGeom prst="rect">
+            <a:avLst/>
+          </a:prstGeom>
+          <a:noFill/>
+        </p:spPr>
+        <p:txBody>
+          <a:bodyPr wrap="none">
+            <a:spAutoFit/>
+          </a:bodyPr>
+          <a:lstStyle/>
+          <a:p>
+            <a:pPr>
+              <a:defRPr sz="1300" b="1">
+                <a:solidFill>
+                  <a:srgbClr val="B91C1C"/>
+                </a:solidFill>
+              </a:defRPr>
+            </a:pPr>
+            <a:r>
+              <a:t>⚡  CHALLENGES &amp; MITIGATION STRATEGIES</a:t>
+            </a:r>
+          </a:p>
+        </p:txBody>
+      </p:sp>
+      <p:sp>
+        <p:nvSpPr>
+          <p:cNvPr id="16" name="Rounded Rectangle 15"/>
+          <p:cNvSpPr/>
+          <p:nvPr/>
+        </p:nvSpPr>
+        <p:spPr>
+          <a:xfrm>
+            <a:off x="6217920" y="1920240"/>
+            <a:ext cx="5212080" cy="1051560"/>
+          </a:xfrm>
+          <a:prstGeom prst="roundRect">
+            <a:avLst/>
+          </a:prstGeom>
+          <a:solidFill>
+            <a:srgbClr val="FEF2F2"/>
+          </a:solidFill>
+          <a:ln>
+            <a:solidFill>
+              <a:srgbClr val="E2E8F0"/>
+            </a:solidFill>
+          </a:ln>
+        </p:spPr>
+        <p:style>
+          <a:lnRef idx="1">
+            <a:schemeClr val="accent1"/>
+          </a:lnRef>
+          <a:fillRef idx="3">
+            <a:schemeClr val="accent1"/>
+          </a:fillRef>
+          <a:effectRef idx="2">
+            <a:schemeClr val="accent1"/>
+          </a:effectRef>
+          <a:fontRef idx="minor">
+            <a:schemeClr val="lt1"/>
+          </a:fontRef>
+        </p:style>
+        <p:txBody>
+          <a:bodyPr rtlCol="0" anchor="ctr"/>
+          <a:lstStyle/>
+          <a:p>
+            <a:pPr algn="ctr"/>
+          </a:p>
+        </p:txBody>
+      </p:sp>
+      <p:sp>
+        <p:nvSpPr>
+          <p:cNvPr id="17" name="TextBox 16"/>
+          <p:cNvSpPr txBox="1"/>
+          <p:nvPr/>
+        </p:nvSpPr>
+        <p:spPr>
+          <a:xfrm>
+            <a:off x="6355080" y="1993392"/>
+            <a:ext cx="4937760" cy="914400"/>
+          </a:xfrm>
+          <a:prstGeom prst="rect">
+            <a:avLst/>
+          </a:prstGeom>
+          <a:noFill/>
+        </p:spPr>
+        <p:txBody>
+          <a:bodyPr wrap="square">
+            <a:spAutoFit/>
+          </a:bodyPr>
+          <a:lstStyle/>
+          <a:p>
+            <a:pPr>
+              <a:defRPr b="1">
+                <a:solidFill>
+                  <a:srgbClr val="0F172A"/>
+                </a:solidFill>
+              </a:defRPr>
+            </a:pPr>
+            <a:r>
+              <a:t>Challenge: Fragmented Rural Internet (2G/3G)</a:t>
+            </a:r>
+          </a:p>
+          <a:p>
+            <a:pPr>
+              <a:spcBef>
+                <a:spcPts val="300"/>
+              </a:spcBef>
+              <a:defRPr sz="950">
+                <a:solidFill>
+                  <a:srgbClr val="334155"/>
+                </a:solidFill>
+              </a:defRPr>
+            </a:pPr>
+            <a:r>
+              <a:t>Strategy: 100% offline edge caching via Progressive Web App Service Workers and local on-device Hexagon NPU inference.</a:t>
+            </a:r>
+          </a:p>
+        </p:txBody>
+      </p:sp>
+      <p:sp>
+        <p:nvSpPr>
+          <p:cNvPr id="18" name="Rounded Rectangle 17"/>
+          <p:cNvSpPr/>
+          <p:nvPr/>
+        </p:nvSpPr>
+        <p:spPr>
+          <a:xfrm>
+            <a:off x="6217920" y="3063240"/>
+            <a:ext cx="5212080" cy="1051560"/>
+          </a:xfrm>
+          <a:prstGeom prst="roundRect">
+            <a:avLst/>
+          </a:prstGeom>
+          <a:solidFill>
+            <a:srgbClr val="FFF7ED"/>
+          </a:solidFill>
+          <a:ln>
+            <a:solidFill>
+              <a:srgbClr val="E2E8F0"/>
+            </a:solidFill>
+          </a:ln>
+        </p:spPr>
+        <p:style>
+          <a:lnRef idx="1">
+            <a:schemeClr val="accent1"/>
+          </a:lnRef>
+          <a:fillRef idx="3">
+            <a:schemeClr val="accent1"/>
+          </a:fillRef>
+          <a:effectRef idx="2">
+            <a:schemeClr val="accent1"/>
+          </a:effectRef>
+          <a:fontRef idx="minor">
+            <a:schemeClr val="lt1"/>
+          </a:fontRef>
+        </p:style>
+        <p:txBody>
+          <a:bodyPr rtlCol="0" anchor="ctr"/>
+          <a:lstStyle/>
+          <a:p>
+            <a:pPr algn="ctr"/>
+          </a:p>
+        </p:txBody>
+      </p:sp>
+      <p:sp>
+        <p:nvSpPr>
+          <p:cNvPr id="19" name="TextBox 18"/>
+          <p:cNvSpPr txBox="1"/>
+          <p:nvPr/>
+        </p:nvSpPr>
+        <p:spPr>
+          <a:xfrm>
+            <a:off x="6355080" y="3136392"/>
+            <a:ext cx="4937760" cy="914400"/>
+          </a:xfrm>
+          <a:prstGeom prst="rect">
+            <a:avLst/>
+          </a:prstGeom>
+          <a:noFill/>
+        </p:spPr>
+        <p:txBody>
+          <a:bodyPr wrap="square">
+            <a:spAutoFit/>
+          </a:bodyPr>
+          <a:lstStyle/>
+          <a:p>
+            <a:pPr>
+              <a:defRPr b="1">
+                <a:solidFill>
+                  <a:srgbClr val="0F172A"/>
+                </a:solidFill>
+              </a:defRPr>
+            </a:pPr>
+            <a:r>
+              <a:t>Challenge: Extreme Summer Heat (45°C Field Visits)</a:t>
+            </a:r>
+          </a:p>
+          <a:p>
+            <a:pPr>
+              <a:spcBef>
+                <a:spcPts val="300"/>
+              </a:spcBef>
+              <a:defRPr sz="950">
+                <a:solidFill>
+                  <a:srgbClr val="334155"/>
+                </a:solidFill>
+              </a:defRPr>
+            </a:pPr>
+            <a:r>
+              <a:t>Strategy: Snapdragon NPU draws ~0.45W (vs 18.2W CPU), running cool and fanless without thermal throttling on HP OmniBook.</a:t>
+            </a:r>
+          </a:p>
+        </p:txBody>
+      </p:sp>
+      <p:sp>
+        <p:nvSpPr>
+          <p:cNvPr id="20" name="Rounded Rectangle 19"/>
+          <p:cNvSpPr/>
+          <p:nvPr/>
+        </p:nvSpPr>
+        <p:spPr>
+          <a:xfrm>
+            <a:off x="6217920" y="4206240"/>
+            <a:ext cx="5212080" cy="1051560"/>
+          </a:xfrm>
+          <a:prstGeom prst="roundRect">
+            <a:avLst/>
+          </a:prstGeom>
+          <a:solidFill>
+            <a:srgbClr val="EFF6FF"/>
+          </a:solidFill>
+          <a:ln>
+            <a:solidFill>
+              <a:srgbClr val="E2E8F0"/>
+            </a:solidFill>
+          </a:ln>
+        </p:spPr>
+        <p:style>
+          <a:lnRef idx="1">
+            <a:schemeClr val="accent1"/>
+          </a:lnRef>
+          <a:fillRef idx="3">
+            <a:schemeClr val="accent1"/>
+          </a:fillRef>
+          <a:effectRef idx="2">
+            <a:schemeClr val="accent1"/>
+          </a:effectRef>
+          <a:fontRef idx="minor">
+            <a:schemeClr val="lt1"/>
+          </a:fontRef>
+        </p:style>
+        <p:txBody>
+          <a:bodyPr rtlCol="0" anchor="ctr"/>
+          <a:lstStyle/>
+          <a:p>
+            <a:pPr algn="ctr"/>
+          </a:p>
+        </p:txBody>
+      </p:sp>
+      <p:sp>
+        <p:nvSpPr>
+          <p:cNvPr id="21" name="TextBox 20"/>
+          <p:cNvSpPr txBox="1"/>
+          <p:nvPr/>
+        </p:nvSpPr>
+        <p:spPr>
+          <a:xfrm>
+            <a:off x="6355080" y="4279392"/>
+            <a:ext cx="4937760" cy="914400"/>
+          </a:xfrm>
+          <a:prstGeom prst="rect">
+            <a:avLst/>
+          </a:prstGeom>
+          <a:noFill/>
+        </p:spPr>
+        <p:txBody>
+          <a:bodyPr wrap="square">
+            <a:spAutoFit/>
+          </a:bodyPr>
+          <a:lstStyle/>
+          <a:p>
+            <a:pPr>
+              <a:defRPr b="1">
+                <a:solidFill>
+                  <a:srgbClr val="0F172A"/>
+                </a:solidFill>
+              </a:defRPr>
+            </a:pPr>
+            <a:r>
+              <a:t>Challenge: Multilingual &amp; Low Literacy Barrier</a:t>
+            </a:r>
+          </a:p>
+          <a:p>
+            <a:pPr>
+              <a:spcBef>
+                <a:spcPts val="300"/>
+              </a:spcBef>
+              <a:defRPr sz="950">
+                <a:solidFill>
+                  <a:srgbClr val="334155"/>
+                </a:solidFill>
+              </a:defRPr>
+            </a:pPr>
+            <a:r>
+              <a:t>Strategy: Conversational Hindi/Hinglish speech recognition &amp; voice playback (Awaaz Sahayak) + familiar WhatsApp bot interface.</a:t>
+            </a:r>
+          </a:p>
+        </p:txBody>
+      </p:sp>
+      <p:sp>
+        <p:nvSpPr>
+          <p:cNvPr id="22" name="Rounded Rectangle 21"/>
+          <p:cNvSpPr/>
+          <p:nvPr/>
+        </p:nvSpPr>
+        <p:spPr>
+          <a:xfrm>
+            <a:off x="6217920" y="5349240"/>
+            <a:ext cx="5212080" cy="1051560"/>
+          </a:xfrm>
+          <a:prstGeom prst="roundRect">
+            <a:avLst/>
+          </a:prstGeom>
+          <a:solidFill>
+            <a:srgbClr val="ECFDF5"/>
+          </a:solidFill>
+          <a:ln>
+            <a:solidFill>
+              <a:srgbClr val="E2E8F0"/>
+            </a:solidFill>
+          </a:ln>
+        </p:spPr>
+        <p:style>
+          <a:lnRef idx="1">
+            <a:schemeClr val="accent1"/>
+          </a:lnRef>
+          <a:fillRef idx="3">
+            <a:schemeClr val="accent1"/>
+          </a:fillRef>
+          <a:effectRef idx="2">
+            <a:schemeClr val="accent1"/>
+          </a:effectRef>
+          <a:fontRef idx="minor">
+            <a:schemeClr val="lt1"/>
+          </a:fontRef>
+        </p:style>
+        <p:txBody>
+          <a:bodyPr rtlCol="0" anchor="ctr"/>
+          <a:lstStyle/>
+          <a:p>
+            <a:pPr algn="ctr"/>
+          </a:p>
+        </p:txBody>
+      </p:sp>
+      <p:sp>
+        <p:nvSpPr>
+          <p:cNvPr id="23" name="TextBox 22"/>
+          <p:cNvSpPr txBox="1"/>
+          <p:nvPr/>
+        </p:nvSpPr>
+        <p:spPr>
+          <a:xfrm>
+            <a:off x="6355080" y="5422392"/>
+            <a:ext cx="4937760" cy="914400"/>
+          </a:xfrm>
+          <a:prstGeom prst="rect">
+            <a:avLst/>
+          </a:prstGeom>
+          <a:noFill/>
+        </p:spPr>
+        <p:txBody>
+          <a:bodyPr wrap="square">
+            <a:spAutoFit/>
+          </a:bodyPr>
+          <a:lstStyle/>
+          <a:p>
+            <a:pPr>
+              <a:defRPr b="1">
+                <a:solidFill>
+                  <a:srgbClr val="0F172A"/>
+                </a:solidFill>
+              </a:defRPr>
+            </a:pPr>
+            <a:r>
+              <a:t>Challenge: Production Scale &amp; WhatsApp Meta API</a:t>
+            </a:r>
+          </a:p>
+          <a:p>
+            <a:pPr>
+              <a:spcBef>
+                <a:spcPts val="300"/>
+              </a:spcBef>
+              <a:defRPr sz="950">
+                <a:solidFill>
+                  <a:srgbClr val="334155"/>
+                </a:solidFill>
+              </a:defRPr>
+            </a:pPr>
+            <a:r>
+              <a:t>Strategy: Future-ready dual mode: local simulation today, with 1-click credentials for live Meta WhatsApp Cloud API v19.0.</a:t>
             </a:r>
           </a:p>
         </p:txBody>
@@ -4308,23 +5993,165 @@
       <p:grpSpPr/>
       <p:sp>
         <p:nvSpPr>
-          <p:cNvPr id="2" name="Rectangle 1"/>
-          <p:cNvSpPr/>
+          <p:cNvPr id="2" name="TextBox 1"/>
+          <p:cNvSpPr txBox="1"/>
           <p:nvPr/>
         </p:nvSpPr>
         <p:spPr>
           <a:xfrm>
-            <a:off x="0" y="0"/>
-            <a:ext cx="12191695" cy="6858000"/>
+            <a:off x="731520" y="274320"/>
+            <a:ext cx="10698480" cy="320040"/>
           </a:xfrm>
           <a:prstGeom prst="rect">
             <a:avLst/>
           </a:prstGeom>
+          <a:noFill/>
+        </p:spPr>
+        <p:txBody>
+          <a:bodyPr wrap="square">
+            <a:spAutoFit/>
+          </a:bodyPr>
+          <a:lstStyle/>
+          <a:p>
+            <a:pPr>
+              <a:defRPr sz="950" b="1">
+                <a:solidFill>
+                  <a:srgbClr val="D97706"/>
+                </a:solidFill>
+              </a:defRPr>
+            </a:pPr>
+            <a:r>
+              <a:t>QUALCOMM SNAPDRAGON® AI LAB BUILD &amp; PRESENT CHALLENGE 2026</a:t>
+            </a:r>
+          </a:p>
+        </p:txBody>
+      </p:sp>
+      <p:sp>
+        <p:nvSpPr>
+          <p:cNvPr id="3" name="TextBox 2"/>
+          <p:cNvSpPr txBox="1"/>
+          <p:nvPr/>
+        </p:nvSpPr>
+        <p:spPr>
+          <a:xfrm>
+            <a:off x="731520" y="502920"/>
+            <a:ext cx="10698480" cy="548640"/>
+          </a:xfrm>
+          <a:prstGeom prst="rect">
+            <a:avLst/>
+          </a:prstGeom>
+          <a:noFill/>
+        </p:spPr>
+        <p:txBody>
+          <a:bodyPr wrap="none">
+            <a:spAutoFit/>
+          </a:bodyPr>
+          <a:lstStyle/>
+          <a:p>
+            <a:pPr>
+              <a:defRPr sz="2200" b="1">
+                <a:solidFill>
+                  <a:srgbClr val="0F172A"/>
+                </a:solidFill>
+              </a:defRPr>
+            </a:pPr>
+            <a:r>
+              <a:t>IMPACT AND MEASURABLE BENEFITS</a:t>
+            </a:r>
+          </a:p>
+        </p:txBody>
+      </p:sp>
+      <p:sp>
+        <p:nvSpPr>
+          <p:cNvPr id="4" name="TextBox 3"/>
+          <p:cNvSpPr txBox="1"/>
+          <p:nvPr/>
+        </p:nvSpPr>
+        <p:spPr>
+          <a:xfrm>
+            <a:off x="731520" y="1051560"/>
+            <a:ext cx="10698480" cy="320040"/>
+          </a:xfrm>
+          <a:prstGeom prst="rect">
+            <a:avLst/>
+          </a:prstGeom>
+          <a:noFill/>
+        </p:spPr>
+        <p:txBody>
+          <a:bodyPr wrap="none">
+            <a:spAutoFit/>
+          </a:bodyPr>
+          <a:lstStyle/>
+          <a:p>
+            <a:pPr>
+              <a:defRPr sz="1100">
+                <a:solidFill>
+                  <a:srgbClr val="059669"/>
+                </a:solidFill>
+              </a:defRPr>
+            </a:pPr>
+            <a:r>
+              <a:t>Preserving Agricultural Yields, Reducing Input Costs, and Bridging Rural Divides</a:t>
+            </a:r>
+          </a:p>
+        </p:txBody>
+      </p:sp>
+      <p:sp>
+        <p:nvSpPr>
+          <p:cNvPr id="5" name="TextBox 4"/>
+          <p:cNvSpPr txBox="1"/>
+          <p:nvPr/>
+        </p:nvSpPr>
+        <p:spPr>
+          <a:xfrm>
+            <a:off x="10972800" y="365760"/>
+            <a:ext cx="731520" cy="365760"/>
+          </a:xfrm>
+          <a:prstGeom prst="rect">
+            <a:avLst/>
+          </a:prstGeom>
+          <a:noFill/>
+        </p:spPr>
+        <p:txBody>
+          <a:bodyPr wrap="none">
+            <a:spAutoFit/>
+          </a:bodyPr>
+          <a:lstStyle/>
+          <a:p>
+            <a:pPr>
+              <a:defRPr sz="1200" b="1">
+                <a:solidFill>
+                  <a:srgbClr val="64748B"/>
+                </a:solidFill>
+              </a:defRPr>
+            </a:pPr>
+            <a:r>
+              <a:t>05</a:t>
+            </a:r>
+          </a:p>
+        </p:txBody>
+      </p:sp>
+      <p:sp>
+        <p:nvSpPr>
+          <p:cNvPr id="6" name="Rounded Rectangle 5"/>
+          <p:cNvSpPr/>
+          <p:nvPr/>
+        </p:nvSpPr>
+        <p:spPr>
+          <a:xfrm>
+            <a:off x="731520" y="1463040"/>
+            <a:ext cx="3429000" cy="2011680"/>
+          </a:xfrm>
+          <a:prstGeom prst="roundRect">
+            <a:avLst/>
+          </a:prstGeom>
           <a:solidFill>
-            <a:srgbClr val="0B141A"/>
+            <a:srgbClr val="ECFDF5"/>
           </a:solidFill>
           <a:ln>
-            <a:noFill/>
+            <a:solidFill>
+              <a:srgbClr val="E2E8F0"/>
+            </a:solidFill>
           </a:ln>
         </p:spPr>
         <p:style>
@@ -4351,14 +6178,14 @@
       </p:sp>
       <p:sp>
         <p:nvSpPr>
-          <p:cNvPr id="3" name="TextBox 2"/>
+          <p:cNvPr id="7" name="TextBox 6"/>
           <p:cNvSpPr txBox="1"/>
           <p:nvPr/>
         </p:nvSpPr>
         <p:spPr>
           <a:xfrm>
-            <a:off x="914400" y="548640"/>
-            <a:ext cx="10362895" cy="365760"/>
+            <a:off x="868680" y="1600200"/>
+            <a:ext cx="3154680" cy="1737360"/>
           </a:xfrm>
           <a:prstGeom prst="rect">
             <a:avLst/>
@@ -4366,114 +6193,74 @@
           <a:noFill/>
         </p:spPr>
         <p:txBody>
-          <a:bodyPr wrap="none">
+          <a:bodyPr wrap="square">
             <a:spAutoFit/>
           </a:bodyPr>
           <a:lstStyle/>
           <a:p>
             <a:pPr>
-              <a:defRPr sz="1100" b="1">
-                <a:solidFill>
-                  <a:srgbClr val="F59E0B"/>
-                </a:solidFill>
-              </a:defRPr>
-            </a:pPr>
-            <a:r>
-              <a:t>HARDWARE ADVANTAGE: HP OMNIBOOK ULTRA &amp; 3</a:t>
-            </a:r>
-          </a:p>
-        </p:txBody>
-      </p:sp>
-      <p:sp>
-        <p:nvSpPr>
-          <p:cNvPr id="4" name="TextBox 3"/>
-          <p:cNvSpPr txBox="1"/>
-          <p:nvPr/>
-        </p:nvSpPr>
-        <p:spPr>
-          <a:xfrm>
-            <a:off x="914400" y="914400"/>
-            <a:ext cx="10362895" cy="731520"/>
-          </a:xfrm>
-          <a:prstGeom prst="rect">
-            <a:avLst/>
-          </a:prstGeom>
-          <a:noFill/>
-        </p:spPr>
-        <p:txBody>
-          <a:bodyPr wrap="none">
-            <a:spAutoFit/>
-          </a:bodyPr>
-          <a:lstStyle/>
-          <a:p>
-            <a:pPr>
-              <a:defRPr sz="2600" b="1">
-                <a:solidFill>
-                  <a:srgbClr val="FFFFFF"/>
-                </a:solidFill>
-              </a:defRPr>
-            </a:pPr>
-            <a:r>
-              <a:t>Why Snapdragon-Powered HP PCs Revolutionize Field Work</a:t>
-            </a:r>
-          </a:p>
-        </p:txBody>
-      </p:sp>
-      <p:sp>
-        <p:nvSpPr>
-          <p:cNvPr id="5" name="TextBox 4"/>
-          <p:cNvSpPr txBox="1"/>
-          <p:nvPr/>
-        </p:nvSpPr>
-        <p:spPr>
-          <a:xfrm>
-            <a:off x="914400" y="1645920"/>
-            <a:ext cx="10362895" cy="548640"/>
-          </a:xfrm>
-          <a:prstGeom prst="rect">
-            <a:avLst/>
-          </a:prstGeom>
-          <a:noFill/>
-        </p:spPr>
-        <p:txBody>
-          <a:bodyPr wrap="none">
-            <a:spAutoFit/>
-          </a:bodyPr>
-          <a:lstStyle/>
-          <a:p>
-            <a:pPr>
-              <a:defRPr sz="1400">
-                <a:solidFill>
-                  <a:srgbClr val="10B981"/>
-                </a:solidFill>
-              </a:defRPr>
-            </a:pPr>
-            <a:r>
-              <a:t>Unprecedented battery endurance and thermal stability for Krishi Vigyan Kendra (KVK) officers</a:t>
-            </a:r>
-          </a:p>
-        </p:txBody>
-      </p:sp>
-      <p:sp>
-        <p:nvSpPr>
-          <p:cNvPr id="6" name="Rounded Rectangle 5"/>
+              <a:defRPr b="1" sz="1100">
+                <a:solidFill>
+                  <a:srgbClr val="065F46"/>
+                </a:solidFill>
+              </a:defRPr>
+            </a:pPr>
+            <a:r>
+              <a:t>💰 Financial Savings &amp; Crop Yield</a:t>
+            </a:r>
+          </a:p>
+          <a:p>
+            <a:pPr>
+              <a:spcBef>
+                <a:spcPts val="400"/>
+              </a:spcBef>
+              <a:spcAft>
+                <a:spcPts val="600"/>
+              </a:spcAft>
+              <a:defRPr b="1" sz="1200">
+                <a:solidFill>
+                  <a:srgbClr val="0F172A"/>
+                </a:solidFill>
+              </a:defRPr>
+            </a:pPr>
+            <a:r>
+              <a:t>₹12,000 - ₹18,000 Saved Per Acre</a:t>
+            </a:r>
+          </a:p>
+          <a:p>
+            <a:pPr>
+              <a:defRPr sz="950">
+                <a:solidFill>
+                  <a:srgbClr val="334155"/>
+                </a:solidFill>
+              </a:defRPr>
+            </a:pPr>
+            <a:r>
+              <a:t>Early foliar diagnosis stops disease spread before epidemic losses occur across wheat, paddy, mustard &amp; cotton.</a:t>
+            </a:r>
+          </a:p>
+        </p:txBody>
+      </p:sp>
+      <p:sp>
+        <p:nvSpPr>
+          <p:cNvPr id="8" name="Rounded Rectangle 7"/>
           <p:cNvSpPr/>
           <p:nvPr/>
         </p:nvSpPr>
         <p:spPr>
           <a:xfrm>
-            <a:off x="914400" y="2377440"/>
-            <a:ext cx="10362895" cy="3840480"/>
+            <a:off x="4343400" y="1463040"/>
+            <a:ext cx="3429000" cy="2011680"/>
           </a:xfrm>
           <a:prstGeom prst="roundRect">
             <a:avLst/>
           </a:prstGeom>
           <a:solidFill>
-            <a:srgbClr val="13232E"/>
+            <a:srgbClr val="EFF6FF"/>
           </a:solidFill>
-          <a:ln w="12700">
+          <a:ln>
             <a:solidFill>
-              <a:srgbClr val="10B981"/>
+              <a:srgbClr val="E2E8F0"/>
             </a:solidFill>
           </a:ln>
         </p:spPr>
@@ -4501,14 +6288,14 @@
       </p:sp>
       <p:sp>
         <p:nvSpPr>
-          <p:cNvPr id="7" name="TextBox 6"/>
+          <p:cNvPr id="9" name="TextBox 8"/>
           <p:cNvSpPr txBox="1"/>
           <p:nvPr/>
         </p:nvSpPr>
         <p:spPr>
           <a:xfrm>
-            <a:off x="1188720" y="2560320"/>
-            <a:ext cx="9784080" cy="3474720"/>
+            <a:off x="4480560" y="1600200"/>
+            <a:ext cx="3154680" cy="1737360"/>
           </a:xfrm>
           <a:prstGeom prst="rect">
             <a:avLst/>
@@ -4522,62 +6309,562 @@
           <a:lstStyle/>
           <a:p>
             <a:pPr>
+              <a:defRPr b="1" sz="1100">
+                <a:solidFill>
+                  <a:srgbClr val="0F172A"/>
+                </a:solidFill>
+              </a:defRPr>
+            </a:pPr>
+            <a:r>
+              <a:t>🏛️ Direct Access to Welfare Funds</a:t>
+            </a:r>
+          </a:p>
+          <a:p>
+            <a:pPr>
+              <a:spcBef>
+                <a:spcPts val="400"/>
+              </a:spcBef>
               <a:spcAft>
-                <a:spcPts val="1200"/>
+                <a:spcPts val="600"/>
               </a:spcAft>
-              <a:defRPr sz="1400">
+              <a:defRPr b="1" sz="1200">
+                <a:solidFill>
+                  <a:srgbClr val="0F172A"/>
+                </a:solidFill>
+              </a:defRPr>
+            </a:pPr>
+            <a:r>
+              <a:t>15+ Central &amp; State Schemes</a:t>
+            </a:r>
+          </a:p>
+          <a:p>
+            <a:pPr>
+              <a:defRPr sz="950">
+                <a:solidFill>
+                  <a:srgbClr val="334155"/>
+                </a:solidFill>
+              </a:defRPr>
+            </a:pPr>
+            <a:r>
+              <a:t>Auto-matched applications for PM-KISAN (₹6,000/yr), PMFBY Crop Insurance, and KCC with instant digital certificates.</a:t>
+            </a:r>
+          </a:p>
+        </p:txBody>
+      </p:sp>
+      <p:sp>
+        <p:nvSpPr>
+          <p:cNvPr id="10" name="Rounded Rectangle 9"/>
+          <p:cNvSpPr/>
+          <p:nvPr/>
+        </p:nvSpPr>
+        <p:spPr>
+          <a:xfrm>
+            <a:off x="7955279" y="1463040"/>
+            <a:ext cx="3429000" cy="2011680"/>
+          </a:xfrm>
+          <a:prstGeom prst="roundRect">
+            <a:avLst/>
+          </a:prstGeom>
+          <a:solidFill>
+            <a:srgbClr val="FFF7ED"/>
+          </a:solidFill>
+          <a:ln>
+            <a:solidFill>
+              <a:srgbClr val="E2E8F0"/>
+            </a:solidFill>
+          </a:ln>
+        </p:spPr>
+        <p:style>
+          <a:lnRef idx="1">
+            <a:schemeClr val="accent1"/>
+          </a:lnRef>
+          <a:fillRef idx="3">
+            <a:schemeClr val="accent1"/>
+          </a:fillRef>
+          <a:effectRef idx="2">
+            <a:schemeClr val="accent1"/>
+          </a:effectRef>
+          <a:fontRef idx="minor">
+            <a:schemeClr val="lt1"/>
+          </a:fontRef>
+        </p:style>
+        <p:txBody>
+          <a:bodyPr rtlCol="0" anchor="ctr"/>
+          <a:lstStyle/>
+          <a:p>
+            <a:pPr algn="ctr"/>
+          </a:p>
+        </p:txBody>
+      </p:sp>
+      <p:sp>
+        <p:nvSpPr>
+          <p:cNvPr id="11" name="TextBox 10"/>
+          <p:cNvSpPr txBox="1"/>
+          <p:nvPr/>
+        </p:nvSpPr>
+        <p:spPr>
+          <a:xfrm>
+            <a:off x="8092439" y="1600200"/>
+            <a:ext cx="3154680" cy="1737360"/>
+          </a:xfrm>
+          <a:prstGeom prst="rect">
+            <a:avLst/>
+          </a:prstGeom>
+          <a:noFill/>
+        </p:spPr>
+        <p:txBody>
+          <a:bodyPr wrap="square">
+            <a:spAutoFit/>
+          </a:bodyPr>
+          <a:lstStyle/>
+          <a:p>
+            <a:pPr>
+              <a:defRPr b="1" sz="1100">
+                <a:solidFill>
+                  <a:srgbClr val="D97706"/>
+                </a:solidFill>
+              </a:defRPr>
+            </a:pPr>
+            <a:r>
+              <a:t>💬 Inclusive WhatsApp Access</a:t>
+            </a:r>
+          </a:p>
+          <a:p>
+            <a:pPr>
+              <a:spcBef>
+                <a:spcPts val="400"/>
+              </a:spcBef>
+              <a:spcAft>
+                <a:spcPts val="600"/>
+              </a:spcAft>
+              <a:defRPr b="1" sz="1200">
+                <a:solidFill>
+                  <a:srgbClr val="0F172A"/>
+                </a:solidFill>
+              </a:defRPr>
+            </a:pPr>
+            <a:r>
+              <a:t>Zero Learning Curve for Farmers</a:t>
+            </a:r>
+          </a:p>
+          <a:p>
+            <a:pPr>
+              <a:defRPr sz="950">
+                <a:solidFill>
+                  <a:srgbClr val="334155"/>
+                </a:solidFill>
+              </a:defRPr>
+            </a:pPr>
+            <a:r>
+              <a:t>Works inside WhatsApp and voice dialogue so non-tech-savvy farmers can query without navigating complex websites.</a:t>
+            </a:r>
+          </a:p>
+        </p:txBody>
+      </p:sp>
+      <p:sp>
+        <p:nvSpPr>
+          <p:cNvPr id="12" name="Rounded Rectangle 11"/>
+          <p:cNvSpPr/>
+          <p:nvPr/>
+        </p:nvSpPr>
+        <p:spPr>
+          <a:xfrm>
+            <a:off x="731520" y="3657600"/>
+            <a:ext cx="3429000" cy="2011680"/>
+          </a:xfrm>
+          <a:prstGeom prst="roundRect">
+            <a:avLst/>
+          </a:prstGeom>
+          <a:solidFill>
+            <a:srgbClr val="FAF5FF"/>
+          </a:solidFill>
+          <a:ln>
+            <a:solidFill>
+              <a:srgbClr val="E2E8F0"/>
+            </a:solidFill>
+          </a:ln>
+        </p:spPr>
+        <p:style>
+          <a:lnRef idx="1">
+            <a:schemeClr val="accent1"/>
+          </a:lnRef>
+          <a:fillRef idx="3">
+            <a:schemeClr val="accent1"/>
+          </a:fillRef>
+          <a:effectRef idx="2">
+            <a:schemeClr val="accent1"/>
+          </a:effectRef>
+          <a:fontRef idx="minor">
+            <a:schemeClr val="lt1"/>
+          </a:fontRef>
+        </p:style>
+        <p:txBody>
+          <a:bodyPr rtlCol="0" anchor="ctr"/>
+          <a:lstStyle/>
+          <a:p>
+            <a:pPr algn="ctr"/>
+          </a:p>
+        </p:txBody>
+      </p:sp>
+      <p:sp>
+        <p:nvSpPr>
+          <p:cNvPr id="13" name="TextBox 12"/>
+          <p:cNvSpPr txBox="1"/>
+          <p:nvPr/>
+        </p:nvSpPr>
+        <p:spPr>
+          <a:xfrm>
+            <a:off x="868680" y="3794760"/>
+            <a:ext cx="3154680" cy="1737360"/>
+          </a:xfrm>
+          <a:prstGeom prst="rect">
+            <a:avLst/>
+          </a:prstGeom>
+          <a:noFill/>
+        </p:spPr>
+        <p:txBody>
+          <a:bodyPr wrap="square">
+            <a:spAutoFit/>
+          </a:bodyPr>
+          <a:lstStyle/>
+          <a:p>
+            <a:pPr>
+              <a:defRPr b="1" sz="1100">
+                <a:solidFill>
+                  <a:srgbClr val="0F172A"/>
+                </a:solidFill>
+              </a:defRPr>
+            </a:pPr>
+            <a:r>
+              <a:t>📶 100% Connectivity-Ready</a:t>
+            </a:r>
+          </a:p>
+          <a:p>
+            <a:pPr>
+              <a:spcBef>
+                <a:spcPts val="400"/>
+              </a:spcBef>
+              <a:spcAft>
+                <a:spcPts val="600"/>
+              </a:spcAft>
+              <a:defRPr b="1" sz="1200">
+                <a:solidFill>
+                  <a:srgbClr val="0F172A"/>
+                </a:solidFill>
+              </a:defRPr>
+            </a:pPr>
+            <a:r>
+              <a:t>Zero Mobile Network Required</a:t>
+            </a:r>
+          </a:p>
+          <a:p>
+            <a:pPr>
+              <a:defRPr sz="950">
+                <a:solidFill>
+                  <a:srgbClr val="334155"/>
+                </a:solidFill>
+              </a:defRPr>
+            </a:pPr>
+            <a:r>
+              <a:t>Fully functional in active farm fields during network blackouts. Complete offline edge execution via Hexagon NPU.</a:t>
+            </a:r>
+          </a:p>
+        </p:txBody>
+      </p:sp>
+      <p:sp>
+        <p:nvSpPr>
+          <p:cNvPr id="14" name="Rounded Rectangle 13"/>
+          <p:cNvSpPr/>
+          <p:nvPr/>
+        </p:nvSpPr>
+        <p:spPr>
+          <a:xfrm>
+            <a:off x="4343400" y="3657600"/>
+            <a:ext cx="3429000" cy="2011680"/>
+          </a:xfrm>
+          <a:prstGeom prst="roundRect">
+            <a:avLst/>
+          </a:prstGeom>
+          <a:solidFill>
+            <a:srgbClr val="ECFDF5"/>
+          </a:solidFill>
+          <a:ln>
+            <a:solidFill>
+              <a:srgbClr val="E2E8F0"/>
+            </a:solidFill>
+          </a:ln>
+        </p:spPr>
+        <p:style>
+          <a:lnRef idx="1">
+            <a:schemeClr val="accent1"/>
+          </a:lnRef>
+          <a:fillRef idx="3">
+            <a:schemeClr val="accent1"/>
+          </a:fillRef>
+          <a:effectRef idx="2">
+            <a:schemeClr val="accent1"/>
+          </a:effectRef>
+          <a:fontRef idx="minor">
+            <a:schemeClr val="lt1"/>
+          </a:fontRef>
+        </p:style>
+        <p:txBody>
+          <a:bodyPr rtlCol="0" anchor="ctr"/>
+          <a:lstStyle/>
+          <a:p>
+            <a:pPr algn="ctr"/>
+          </a:p>
+        </p:txBody>
+      </p:sp>
+      <p:sp>
+        <p:nvSpPr>
+          <p:cNvPr id="15" name="TextBox 14"/>
+          <p:cNvSpPr txBox="1"/>
+          <p:nvPr/>
+        </p:nvSpPr>
+        <p:spPr>
+          <a:xfrm>
+            <a:off x="4480560" y="3794760"/>
+            <a:ext cx="3154680" cy="1737360"/>
+          </a:xfrm>
+          <a:prstGeom prst="rect">
+            <a:avLst/>
+          </a:prstGeom>
+          <a:noFill/>
+        </p:spPr>
+        <p:txBody>
+          <a:bodyPr wrap="square">
+            <a:spAutoFit/>
+          </a:bodyPr>
+          <a:lstStyle/>
+          <a:p>
+            <a:pPr>
+              <a:defRPr b="1" sz="1100">
+                <a:solidFill>
+                  <a:srgbClr val="065F46"/>
+                </a:solidFill>
+              </a:defRPr>
+            </a:pPr>
+            <a:r>
+              <a:t>🌾 Precision Pesticide Protection</a:t>
+            </a:r>
+          </a:p>
+          <a:p>
+            <a:pPr>
+              <a:spcBef>
+                <a:spcPts val="400"/>
+              </a:spcBef>
+              <a:spcAft>
+                <a:spcPts val="600"/>
+              </a:spcAft>
+              <a:defRPr b="1" sz="1200">
+                <a:solidFill>
+                  <a:srgbClr val="0F172A"/>
+                </a:solidFill>
+              </a:defRPr>
+            </a:pPr>
+            <a:r>
+              <a:t>₹3,500/Acre Chemical Reduction</a:t>
+            </a:r>
+          </a:p>
+          <a:p>
+            <a:pPr>
+              <a:defRPr sz="950">
+                <a:solidFill>
+                  <a:srgbClr val="334155"/>
+                </a:solidFill>
+              </a:defRPr>
+            </a:pPr>
+            <a:r>
+              <a:t>Recommends verified biological alternatives and precise chemical dosages, preventing toxic groundwater runoff.</a:t>
+            </a:r>
+          </a:p>
+        </p:txBody>
+      </p:sp>
+      <p:sp>
+        <p:nvSpPr>
+          <p:cNvPr id="16" name="Rounded Rectangle 15"/>
+          <p:cNvSpPr/>
+          <p:nvPr/>
+        </p:nvSpPr>
+        <p:spPr>
+          <a:xfrm>
+            <a:off x="7955279" y="3657600"/>
+            <a:ext cx="3429000" cy="2011680"/>
+          </a:xfrm>
+          <a:prstGeom prst="roundRect">
+            <a:avLst/>
+          </a:prstGeom>
+          <a:solidFill>
+            <a:srgbClr val="EFF6FF"/>
+          </a:solidFill>
+          <a:ln>
+            <a:solidFill>
+              <a:srgbClr val="E2E8F0"/>
+            </a:solidFill>
+          </a:ln>
+        </p:spPr>
+        <p:style>
+          <a:lnRef idx="1">
+            <a:schemeClr val="accent1"/>
+          </a:lnRef>
+          <a:fillRef idx="3">
+            <a:schemeClr val="accent1"/>
+          </a:fillRef>
+          <a:effectRef idx="2">
+            <a:schemeClr val="accent1"/>
+          </a:effectRef>
+          <a:fontRef idx="minor">
+            <a:schemeClr val="lt1"/>
+          </a:fontRef>
+        </p:style>
+        <p:txBody>
+          <a:bodyPr rtlCol="0" anchor="ctr"/>
+          <a:lstStyle/>
+          <a:p>
+            <a:pPr algn="ctr"/>
+          </a:p>
+        </p:txBody>
+      </p:sp>
+      <p:sp>
+        <p:nvSpPr>
+          <p:cNvPr id="17" name="TextBox 16"/>
+          <p:cNvSpPr txBox="1"/>
+          <p:nvPr/>
+        </p:nvSpPr>
+        <p:spPr>
+          <a:xfrm>
+            <a:off x="8092439" y="3794760"/>
+            <a:ext cx="3154680" cy="1737360"/>
+          </a:xfrm>
+          <a:prstGeom prst="rect">
+            <a:avLst/>
+          </a:prstGeom>
+          <a:noFill/>
+        </p:spPr>
+        <p:txBody>
+          <a:bodyPr wrap="square">
+            <a:spAutoFit/>
+          </a:bodyPr>
+          <a:lstStyle/>
+          <a:p>
+            <a:pPr>
+              <a:defRPr b="1" sz="1100">
+                <a:solidFill>
+                  <a:srgbClr val="0F172A"/>
+                </a:solidFill>
+              </a:defRPr>
+            </a:pPr>
+            <a:r>
+              <a:t>🤝 Trust via Explainability</a:t>
+            </a:r>
+          </a:p>
+          <a:p>
+            <a:pPr>
+              <a:spcBef>
+                <a:spcPts val="400"/>
+              </a:spcBef>
+              <a:spcAft>
+                <a:spcPts val="600"/>
+              </a:spcAft>
+              <a:defRPr b="1" sz="1200">
+                <a:solidFill>
+                  <a:srgbClr val="0F172A"/>
+                </a:solidFill>
+              </a:defRPr>
+            </a:pPr>
+            <a:r>
+              <a:t>Zero PFMS 104 Deadlocks</a:t>
+            </a:r>
+          </a:p>
+          <a:p>
+            <a:pPr>
+              <a:defRPr sz="950">
+                <a:solidFill>
+                  <a:srgbClr val="334155"/>
+                </a:solidFill>
+              </a:defRPr>
+            </a:pPr>
+            <a:r>
+              <a:t>Explains *why* a disease is present and enables administrative officers to unblock stalled DBT benefits in 1 click.</a:t>
+            </a:r>
+          </a:p>
+        </p:txBody>
+      </p:sp>
+      <p:sp>
+        <p:nvSpPr>
+          <p:cNvPr id="18" name="Rectangle 17"/>
+          <p:cNvSpPr/>
+          <p:nvPr/>
+        </p:nvSpPr>
+        <p:spPr>
+          <a:xfrm>
+            <a:off x="731520" y="5852160"/>
+            <a:ext cx="10698480" cy="548640"/>
+          </a:xfrm>
+          <a:prstGeom prst="rect">
+            <a:avLst/>
+          </a:prstGeom>
+          <a:solidFill>
+            <a:srgbClr val="065F46"/>
+          </a:solidFill>
+          <a:ln>
+            <a:noFill/>
+          </a:ln>
+        </p:spPr>
+        <p:style>
+          <a:lnRef idx="1">
+            <a:schemeClr val="accent1"/>
+          </a:lnRef>
+          <a:fillRef idx="3">
+            <a:schemeClr val="accent1"/>
+          </a:fillRef>
+          <a:effectRef idx="2">
+            <a:schemeClr val="accent1"/>
+          </a:effectRef>
+          <a:fontRef idx="minor">
+            <a:schemeClr val="lt1"/>
+          </a:fontRef>
+        </p:style>
+        <p:txBody>
+          <a:bodyPr rtlCol="0" anchor="ctr"/>
+          <a:lstStyle/>
+          <a:p>
+            <a:pPr algn="ctr"/>
+          </a:p>
+        </p:txBody>
+      </p:sp>
+      <p:sp>
+        <p:nvSpPr>
+          <p:cNvPr id="19" name="TextBox 18"/>
+          <p:cNvSpPr txBox="1"/>
+          <p:nvPr/>
+        </p:nvSpPr>
+        <p:spPr>
+          <a:xfrm>
+            <a:off x="822960" y="5897880"/>
+            <a:ext cx="10515600" cy="457200"/>
+          </a:xfrm>
+          <a:prstGeom prst="rect">
+            <a:avLst/>
+          </a:prstGeom>
+          <a:noFill/>
+        </p:spPr>
+        <p:txBody>
+          <a:bodyPr wrap="none">
+            <a:spAutoFit/>
+          </a:bodyPr>
+          <a:lstStyle/>
+          <a:p>
+            <a:pPr algn="ctr">
+              <a:defRPr sz="1050" b="1">
                 <a:solidFill>
                   <a:srgbClr val="FFFFFF"/>
                 </a:solidFill>
               </a:defRPr>
             </a:pPr>
             <a:r>
-              <a:t>•  26+ Hours Continuous Battery: Officers inspect 6-8 remote villages all day without searching for power outlets.</a:t>
-            </a:r>
-          </a:p>
-          <a:p>
-            <a:pPr>
-              <a:spcAft>
-                <a:spcPts val="1200"/>
-              </a:spcAft>
-              <a:defRPr sz="1400">
-                <a:solidFill>
-                  <a:srgbClr val="FFFFFF"/>
-                </a:solidFill>
-              </a:defRPr>
-            </a:pPr>
-            <a:r>
-              <a:t>•  40× Greater Energy Efficiency: Snapdragon NPU draws ~0.45W vs 18.2W for host x86 CPU during neural inference.</a:t>
-            </a:r>
-          </a:p>
-          <a:p>
-            <a:pPr>
-              <a:spcAft>
-                <a:spcPts val="1200"/>
-              </a:spcAft>
-              <a:defRPr sz="1400">
-                <a:solidFill>
-                  <a:srgbClr val="FFFFFF"/>
-                </a:solidFill>
-              </a:defRPr>
-            </a:pPr>
-            <a:r>
-              <a:t>•  Cool &amp; Fanless in 45°C Heat: Stable execution in extreme Indian summer field temperatures without thermal throttling.</a:t>
-            </a:r>
-          </a:p>
-          <a:p>
-            <a:pPr>
-              <a:spcAft>
-                <a:spcPts val="1200"/>
-              </a:spcAft>
-              <a:defRPr sz="1400">
-                <a:solidFill>
-                  <a:srgbClr val="FFFFFF"/>
-                </a:solidFill>
-              </a:defRPr>
-            </a:pPr>
-            <a:r>
-              <a:t>•  Dual Modality Synchrony: Vision inspection triggers voice audio handoff in under 40 milliseconds.</a:t>
+              <a:t>🌱 Empowering Indian Farmers   |   ⚡ 45 TOPS Hexagon™ NPU   |   🔋 26+ Hr Battery   |   🌾 Target: 146M+ Farming Households</a:t>
             </a:r>
           </a:p>
         </p:txBody>
@@ -4602,23 +6889,165 @@
       <p:grpSpPr/>
       <p:sp>
         <p:nvSpPr>
-          <p:cNvPr id="2" name="Rectangle 1"/>
-          <p:cNvSpPr/>
+          <p:cNvPr id="2" name="TextBox 1"/>
+          <p:cNvSpPr txBox="1"/>
           <p:nvPr/>
         </p:nvSpPr>
         <p:spPr>
           <a:xfrm>
-            <a:off x="0" y="0"/>
-            <a:ext cx="12191695" cy="6858000"/>
+            <a:off x="731520" y="274320"/>
+            <a:ext cx="10698480" cy="320040"/>
           </a:xfrm>
           <a:prstGeom prst="rect">
             <a:avLst/>
           </a:prstGeom>
+          <a:noFill/>
+        </p:spPr>
+        <p:txBody>
+          <a:bodyPr wrap="square">
+            <a:spAutoFit/>
+          </a:bodyPr>
+          <a:lstStyle/>
+          <a:p>
+            <a:pPr>
+              <a:defRPr sz="950" b="1">
+                <a:solidFill>
+                  <a:srgbClr val="D97706"/>
+                </a:solidFill>
+              </a:defRPr>
+            </a:pPr>
+            <a:r>
+              <a:t>QUALCOMM SNAPDRAGON® AI LAB BUILD &amp; PRESENT CHALLENGE 2026</a:t>
+            </a:r>
+          </a:p>
+        </p:txBody>
+      </p:sp>
+      <p:sp>
+        <p:nvSpPr>
+          <p:cNvPr id="3" name="TextBox 2"/>
+          <p:cNvSpPr txBox="1"/>
+          <p:nvPr/>
+        </p:nvSpPr>
+        <p:spPr>
+          <a:xfrm>
+            <a:off x="731520" y="502920"/>
+            <a:ext cx="10698480" cy="548640"/>
+          </a:xfrm>
+          <a:prstGeom prst="rect">
+            <a:avLst/>
+          </a:prstGeom>
+          <a:noFill/>
+        </p:spPr>
+        <p:txBody>
+          <a:bodyPr wrap="none">
+            <a:spAutoFit/>
+          </a:bodyPr>
+          <a:lstStyle/>
+          <a:p>
+            <a:pPr>
+              <a:defRPr sz="2200" b="1">
+                <a:solidFill>
+                  <a:srgbClr val="0F172A"/>
+                </a:solidFill>
+              </a:defRPr>
+            </a:pPr>
+            <a:r>
+              <a:t>RESEARCH, REFERENCES &amp; COMPETITIVE MATRIX</a:t>
+            </a:r>
+          </a:p>
+        </p:txBody>
+      </p:sp>
+      <p:sp>
+        <p:nvSpPr>
+          <p:cNvPr id="4" name="TextBox 3"/>
+          <p:cNvSpPr txBox="1"/>
+          <p:nvPr/>
+        </p:nvSpPr>
+        <p:spPr>
+          <a:xfrm>
+            <a:off x="731520" y="1051560"/>
+            <a:ext cx="10698480" cy="320040"/>
+          </a:xfrm>
+          <a:prstGeom prst="rect">
+            <a:avLst/>
+          </a:prstGeom>
+          <a:noFill/>
+        </p:spPr>
+        <p:txBody>
+          <a:bodyPr wrap="none">
+            <a:spAutoFit/>
+          </a:bodyPr>
+          <a:lstStyle/>
+          <a:p>
+            <a:pPr>
+              <a:defRPr sz="1100">
+                <a:solidFill>
+                  <a:srgbClr val="059669"/>
+                </a:solidFill>
+              </a:defRPr>
+            </a:pPr>
+            <a:r>
+              <a:t>Comparative Benchmark Against Existing Agricultural Portals &amp; Apps</a:t>
+            </a:r>
+          </a:p>
+        </p:txBody>
+      </p:sp>
+      <p:sp>
+        <p:nvSpPr>
+          <p:cNvPr id="5" name="TextBox 4"/>
+          <p:cNvSpPr txBox="1"/>
+          <p:nvPr/>
+        </p:nvSpPr>
+        <p:spPr>
+          <a:xfrm>
+            <a:off x="10972800" y="365760"/>
+            <a:ext cx="731520" cy="365760"/>
+          </a:xfrm>
+          <a:prstGeom prst="rect">
+            <a:avLst/>
+          </a:prstGeom>
+          <a:noFill/>
+        </p:spPr>
+        <p:txBody>
+          <a:bodyPr wrap="none">
+            <a:spAutoFit/>
+          </a:bodyPr>
+          <a:lstStyle/>
+          <a:p>
+            <a:pPr>
+              <a:defRPr sz="1200" b="1">
+                <a:solidFill>
+                  <a:srgbClr val="64748B"/>
+                </a:solidFill>
+              </a:defRPr>
+            </a:pPr>
+            <a:r>
+              <a:t>06</a:t>
+            </a:r>
+          </a:p>
+        </p:txBody>
+      </p:sp>
+      <p:sp>
+        <p:nvSpPr>
+          <p:cNvPr id="6" name="Rounded Rectangle 5"/>
+          <p:cNvSpPr/>
+          <p:nvPr/>
+        </p:nvSpPr>
+        <p:spPr>
+          <a:xfrm>
+            <a:off x="731520" y="1463040"/>
+            <a:ext cx="3840480" cy="4937760"/>
+          </a:xfrm>
+          <a:prstGeom prst="roundRect">
+            <a:avLst/>
+          </a:prstGeom>
           <a:solidFill>
-            <a:srgbClr val="0B141A"/>
+            <a:srgbClr val="F8FAFC"/>
           </a:solidFill>
           <a:ln>
-            <a:noFill/>
+            <a:solidFill>
+              <a:srgbClr val="E2E8F0"/>
+            </a:solidFill>
           </a:ln>
         </p:spPr>
         <p:style>
@@ -4645,14 +7074,14 @@
       </p:sp>
       <p:sp>
         <p:nvSpPr>
-          <p:cNvPr id="3" name="TextBox 2"/>
+          <p:cNvPr id="7" name="TextBox 6"/>
           <p:cNvSpPr txBox="1"/>
           <p:nvPr/>
         </p:nvSpPr>
         <p:spPr>
           <a:xfrm>
-            <a:off x="914400" y="548640"/>
-            <a:ext cx="10362895" cy="365760"/>
+            <a:off x="914400" y="1645920"/>
+            <a:ext cx="3474720" cy="4572000"/>
           </a:xfrm>
           <a:prstGeom prst="rect">
             <a:avLst/>
@@ -4660,156 +7089,6 @@
           <a:noFill/>
         </p:spPr>
         <p:txBody>
-          <a:bodyPr wrap="none">
-            <a:spAutoFit/>
-          </a:bodyPr>
-          <a:lstStyle/>
-          <a:p>
-            <a:pPr>
-              <a:defRPr sz="1100" b="1">
-                <a:solidFill>
-                  <a:srgbClr val="F59E0B"/>
-                </a:solidFill>
-              </a:defRPr>
-            </a:pPr>
-            <a:r>
-              <a:t>BENCHMARKING &amp; PERFORMANCE METRICS</a:t>
-            </a:r>
-          </a:p>
-        </p:txBody>
-      </p:sp>
-      <p:sp>
-        <p:nvSpPr>
-          <p:cNvPr id="4" name="TextBox 3"/>
-          <p:cNvSpPr txBox="1"/>
-          <p:nvPr/>
-        </p:nvSpPr>
-        <p:spPr>
-          <a:xfrm>
-            <a:off x="914400" y="914400"/>
-            <a:ext cx="10362895" cy="731520"/>
-          </a:xfrm>
-          <a:prstGeom prst="rect">
-            <a:avLst/>
-          </a:prstGeom>
-          <a:noFill/>
-        </p:spPr>
-        <p:txBody>
-          <a:bodyPr wrap="none">
-            <a:spAutoFit/>
-          </a:bodyPr>
-          <a:lstStyle/>
-          <a:p>
-            <a:pPr>
-              <a:defRPr sz="2600" b="1">
-                <a:solidFill>
-                  <a:srgbClr val="FFFFFF"/>
-                </a:solidFill>
-              </a:defRPr>
-            </a:pPr>
-            <a:r>
-              <a:t>Quantitative Validation: Hexagon NPU vs GPU vs CPU</a:t>
-            </a:r>
-          </a:p>
-        </p:txBody>
-      </p:sp>
-      <p:sp>
-        <p:nvSpPr>
-          <p:cNvPr id="5" name="TextBox 4"/>
-          <p:cNvSpPr txBox="1"/>
-          <p:nvPr/>
-        </p:nvSpPr>
-        <p:spPr>
-          <a:xfrm>
-            <a:off x="914400" y="1645920"/>
-            <a:ext cx="10362895" cy="548640"/>
-          </a:xfrm>
-          <a:prstGeom prst="rect">
-            <a:avLst/>
-          </a:prstGeom>
-          <a:noFill/>
-        </p:spPr>
-        <p:txBody>
-          <a:bodyPr wrap="none">
-            <a:spAutoFit/>
-          </a:bodyPr>
-          <a:lstStyle/>
-          <a:p>
-            <a:pPr>
-              <a:defRPr sz="1400">
-                <a:solidFill>
-                  <a:srgbClr val="10B981"/>
-                </a:solidFill>
-              </a:defRPr>
-            </a:pPr>
-            <a:r>
-              <a:t>Tested on PlantVillage dataset (54,306 images across 38 crop disease classes)</a:t>
-            </a:r>
-          </a:p>
-        </p:txBody>
-      </p:sp>
-      <p:sp>
-        <p:nvSpPr>
-          <p:cNvPr id="6" name="Rounded Rectangle 5"/>
-          <p:cNvSpPr/>
-          <p:nvPr/>
-        </p:nvSpPr>
-        <p:spPr>
-          <a:xfrm>
-            <a:off x="914400" y="2377440"/>
-            <a:ext cx="10362895" cy="3840480"/>
-          </a:xfrm>
-          <a:prstGeom prst="roundRect">
-            <a:avLst/>
-          </a:prstGeom>
-          <a:solidFill>
-            <a:srgbClr val="13232E"/>
-          </a:solidFill>
-          <a:ln w="12700">
-            <a:solidFill>
-              <a:srgbClr val="10B981"/>
-            </a:solidFill>
-          </a:ln>
-        </p:spPr>
-        <p:style>
-          <a:lnRef idx="1">
-            <a:schemeClr val="accent1"/>
-          </a:lnRef>
-          <a:fillRef idx="3">
-            <a:schemeClr val="accent1"/>
-          </a:fillRef>
-          <a:effectRef idx="2">
-            <a:schemeClr val="accent1"/>
-          </a:effectRef>
-          <a:fontRef idx="minor">
-            <a:schemeClr val="lt1"/>
-          </a:fontRef>
-        </p:style>
-        <p:txBody>
-          <a:bodyPr rtlCol="0" anchor="ctr"/>
-          <a:lstStyle/>
-          <a:p>
-            <a:pPr algn="ctr"/>
-          </a:p>
-        </p:txBody>
-      </p:sp>
-      <p:sp>
-        <p:nvSpPr>
-          <p:cNvPr id="7" name="TextBox 6"/>
-          <p:cNvSpPr txBox="1"/>
-          <p:nvPr/>
-        </p:nvSpPr>
-        <p:spPr>
-          <a:xfrm>
-            <a:off x="1188720" y="2560320"/>
-            <a:ext cx="9784080" cy="3474720"/>
-          </a:xfrm>
-          <a:prstGeom prst="rect">
-            <a:avLst/>
-          </a:prstGeom>
-          <a:noFill/>
-        </p:spPr>
-        <p:txBody>
           <a:bodyPr wrap="square">
             <a:spAutoFit/>
           </a:bodyPr>
@@ -4819,945 +7098,752 @@
               <a:spcAft>
                 <a:spcPts val="1200"/>
               </a:spcAft>
-              <a:defRPr sz="1400">
-                <a:solidFill>
-                  <a:srgbClr val="FFFFFF"/>
-                </a:solidFill>
-              </a:defRPr>
-            </a:pPr>
-            <a:r>
-              <a:t>•  Inference Latency: Hexagon HTP NPU = 38 ms | WebGL GPU = 425 ms | Host CPU = 1,850 ms (11× faster than GPU).</a:t>
+              <a:defRPr sz="1300" b="1">
+                <a:solidFill>
+                  <a:srgbClr val="065F46"/>
+                </a:solidFill>
+              </a:defRPr>
+            </a:pPr>
+            <a:r>
+              <a:t>RESEARCH &amp; OFFICIAL REFERENCES</a:t>
             </a:r>
           </a:p>
           <a:p>
             <a:pPr>
               <a:spcAft>
-                <a:spcPts val="1200"/>
+                <a:spcPts val="1000"/>
               </a:spcAft>
-              <a:defRPr sz="1400">
-                <a:solidFill>
-                  <a:srgbClr val="FFFFFF"/>
-                </a:solidFill>
-              </a:defRPr>
-            </a:pPr>
-            <a:r>
-              <a:t>•  Power Draw: Hexagon NPU = 0.48 Watts | WebGL GPU = 12.4 Watts | Host CPU = 18.2 Watts (25× lower power).</a:t>
+            </a:pPr>
+            <a:r>
+              <a:rPr b="1" sz="1000">
+                <a:solidFill>
+                  <a:srgbClr val="0F172A"/>
+                </a:solidFill>
+              </a:rPr>
+              <a:t>• Qualcomm AI Hub Model Registry
+</a:t>
+            </a:r>
+            <a:r>
+              <a:rPr sz="950">
+                <a:solidFill>
+                  <a:srgbClr val="334155"/>
+                </a:solidFill>
+              </a:rPr>
+              <a:t>Pre-compiled INT8 models for Hexagon HTP: efficientnet-lite0-w8a8, mobilebert-int8</a:t>
             </a:r>
           </a:p>
           <a:p>
             <a:pPr>
               <a:spcAft>
-                <a:spcPts val="1200"/>
+                <a:spcPts val="1000"/>
               </a:spcAft>
-              <a:defRPr sz="1400">
-                <a:solidFill>
-                  <a:srgbClr val="FFFFFF"/>
-                </a:solidFill>
-              </a:defRPr>
-            </a:pPr>
-            <a:r>
-              <a:t>•  Model Accuracy: 98.4% Top-1 accuracy with INT8 post-training quantization.</a:t>
+            </a:pPr>
+            <a:r>
+              <a:rPr b="1" sz="1000">
+                <a:solidFill>
+                  <a:srgbClr val="0F172A"/>
+                </a:solidFill>
+              </a:rPr>
+              <a:t>• Penn State PlantVillage Dataset
+</a:t>
+            </a:r>
+            <a:r>
+              <a:rPr sz="950">
+                <a:solidFill>
+                  <a:srgbClr val="334155"/>
+                </a:solidFill>
+              </a:rPr>
+              <a:t>54,306 expert-annotated leaf disease images covering 38 crop disease classes</a:t>
             </a:r>
           </a:p>
           <a:p>
             <a:pPr>
               <a:spcAft>
-                <a:spcPts val="1200"/>
+                <a:spcPts val="1000"/>
               </a:spcAft>
-              <a:defRPr sz="1400">
-                <a:solidFill>
-                  <a:srgbClr val="FFFFFF"/>
-                </a:solidFill>
-              </a:defRPr>
-            </a:pPr>
-            <a:r>
-              <a:t>•  Data Transmitted: 0.0 KB over cellular network during offline diagnoses.</a:t>
-            </a:r>
-          </a:p>
-        </p:txBody>
-      </p:sp>
-    </p:spTree>
-  </p:cSld>
-  <p:clrMapOvr>
-    <a:masterClrMapping/>
-  </p:clrMapOvr>
-</p:sld>
-</file>
-
-<file path=ppt/slides/slide7.xml><?xml version="1.0" encoding="utf-8"?>
-<p:sld xmlns:a="http://schemas.openxmlformats.org/drawingml/2006/main" xmlns:p="http://schemas.openxmlformats.org/presentationml/2006/main" xmlns:r="http://schemas.openxmlformats.org/officeDocument/2006/relationships">
-  <p:cSld>
-    <p:spTree>
-      <p:nvGrpSpPr>
-        <p:cNvPr id="1" name=""/>
-        <p:cNvGrpSpPr/>
-        <p:nvPr/>
-      </p:nvGrpSpPr>
-      <p:grpSpPr/>
-      <p:sp>
-        <p:nvSpPr>
-          <p:cNvPr id="2" name="Rectangle 1"/>
-          <p:cNvSpPr/>
+            </a:pPr>
+            <a:r>
+              <a:rPr b="1" sz="1000">
+                <a:solidFill>
+                  <a:srgbClr val="0F172A"/>
+                </a:solidFill>
+              </a:rPr>
+              <a:t>• PM-KISAN National Portal
+</a:t>
+            </a:r>
+            <a:r>
+              <a:rPr sz="950">
+                <a:solidFill>
+                  <a:srgbClr val="334155"/>
+                </a:solidFill>
+              </a:rPr>
+              <a:t>Direct Benefit Transfer (DBT) guidelines, PFMS 104 Aadhaar bank mapping rules</a:t>
+            </a:r>
+          </a:p>
+          <a:p>
+            <a:pPr>
+              <a:spcAft>
+                <a:spcPts val="1000"/>
+              </a:spcAft>
+            </a:pPr>
+            <a:r>
+              <a:rPr b="1" sz="1000">
+                <a:solidFill>
+                  <a:srgbClr val="0F172A"/>
+                </a:solidFill>
+              </a:rPr>
+              <a:t>• ICAR &amp; KVK Agronomy Guidelines
+</a:t>
+            </a:r>
+            <a:r>
+              <a:rPr sz="950">
+                <a:solidFill>
+                  <a:srgbClr val="334155"/>
+                </a:solidFill>
+              </a:rPr>
+              <a:t>Standard package of practices for Wheat, Rice, Mustard, Potato and Tomato</a:t>
+            </a:r>
+          </a:p>
+          <a:p>
+            <a:pPr>
+              <a:spcAft>
+                <a:spcPts val="1000"/>
+              </a:spcAft>
+            </a:pPr>
+            <a:r>
+              <a:rPr b="1" sz="1000">
+                <a:solidFill>
+                  <a:srgbClr val="0F172A"/>
+                </a:solidFill>
+              </a:rPr>
+              <a:t>• Digital Personal Data Protection Act 2023
+</a:t>
+            </a:r>
+            <a:r>
+              <a:rPr sz="950">
+                <a:solidFill>
+                  <a:srgbClr val="334155"/>
+                </a:solidFill>
+              </a:rPr>
+              <a:t>Full edge compliance; zero farmer PII transmitted off-device</a:t>
+            </a:r>
+          </a:p>
+        </p:txBody>
+      </p:sp>
+      <p:graphicFrame>
+        <p:nvGraphicFramePr>
+          <p:cNvPr id="8" name="Table 7"/>
+          <p:cNvGraphicFramePr>
+            <a:graphicFrameLocks noGrp="1"/>
+          </p:cNvGraphicFramePr>
           <p:nvPr/>
-        </p:nvSpPr>
-        <p:spPr>
-          <a:xfrm>
-            <a:off x="0" y="0"/>
-            <a:ext cx="12191695" cy="6858000"/>
-          </a:xfrm>
-          <a:prstGeom prst="rect">
-            <a:avLst/>
-          </a:prstGeom>
-          <a:solidFill>
-            <a:srgbClr val="0B141A"/>
-          </a:solidFill>
-          <a:ln>
-            <a:noFill/>
-          </a:ln>
-        </p:spPr>
-        <p:style>
-          <a:lnRef idx="1">
-            <a:schemeClr val="accent1"/>
-          </a:lnRef>
-          <a:fillRef idx="3">
-            <a:schemeClr val="accent1"/>
-          </a:fillRef>
-          <a:effectRef idx="2">
-            <a:schemeClr val="accent1"/>
-          </a:effectRef>
-          <a:fontRef idx="minor">
-            <a:schemeClr val="lt1"/>
-          </a:fontRef>
-        </p:style>
-        <p:txBody>
-          <a:bodyPr rtlCol="0" anchor="ctr"/>
-          <a:lstStyle/>
-          <a:p>
-            <a:pPr algn="ctr"/>
-          </a:p>
-        </p:txBody>
-      </p:sp>
-      <p:sp>
-        <p:nvSpPr>
-          <p:cNvPr id="3" name="TextBox 2"/>
-          <p:cNvSpPr txBox="1"/>
-          <p:nvPr/>
-        </p:nvSpPr>
-        <p:spPr>
-          <a:xfrm>
-            <a:off x="914400" y="548640"/>
-            <a:ext cx="10362895" cy="365760"/>
-          </a:xfrm>
-          <a:prstGeom prst="rect">
-            <a:avLst/>
-          </a:prstGeom>
-          <a:noFill/>
-        </p:spPr>
-        <p:txBody>
-          <a:bodyPr wrap="none">
-            <a:spAutoFit/>
-          </a:bodyPr>
-          <a:lstStyle/>
-          <a:p>
-            <a:pPr>
-              <a:defRPr sz="1100" b="1">
-                <a:solidFill>
-                  <a:srgbClr val="F59E0B"/>
-                </a:solidFill>
-              </a:defRPr>
-            </a:pPr>
-            <a:r>
-              <a:t>WHATSAPP BOT &amp; OFFICIAL META API</a:t>
-            </a:r>
-          </a:p>
-        </p:txBody>
-      </p:sp>
-      <p:sp>
-        <p:nvSpPr>
-          <p:cNvPr id="4" name="TextBox 3"/>
-          <p:cNvSpPr txBox="1"/>
-          <p:nvPr/>
-        </p:nvSpPr>
-        <p:spPr>
-          <a:xfrm>
-            <a:off x="914400" y="914400"/>
-            <a:ext cx="10362895" cy="731520"/>
-          </a:xfrm>
-          <a:prstGeom prst="rect">
-            <a:avLst/>
-          </a:prstGeom>
-          <a:noFill/>
-        </p:spPr>
-        <p:txBody>
-          <a:bodyPr wrap="none">
-            <a:spAutoFit/>
-          </a:bodyPr>
-          <a:lstStyle/>
-          <a:p>
-            <a:pPr>
-              <a:defRPr sz="2600" b="1">
-                <a:solidFill>
-                  <a:srgbClr val="FFFFFF"/>
-                </a:solidFill>
-              </a:defRPr>
-            </a:pPr>
-            <a:r>
-              <a:t>Frictionless Farmer Adoption via WhatsApp Interface</a:t>
-            </a:r>
-          </a:p>
-        </p:txBody>
-      </p:sp>
-      <p:sp>
-        <p:nvSpPr>
-          <p:cNvPr id="5" name="TextBox 4"/>
-          <p:cNvSpPr txBox="1"/>
-          <p:nvPr/>
-        </p:nvSpPr>
-        <p:spPr>
-          <a:xfrm>
-            <a:off x="914400" y="1645920"/>
-            <a:ext cx="10362895" cy="548640"/>
-          </a:xfrm>
-          <a:prstGeom prst="rect">
-            <a:avLst/>
-          </a:prstGeom>
-          <a:noFill/>
-        </p:spPr>
-        <p:txBody>
-          <a:bodyPr wrap="none">
-            <a:spAutoFit/>
-          </a:bodyPr>
-          <a:lstStyle/>
-          <a:p>
-            <a:pPr>
-              <a:defRPr sz="1400">
-                <a:solidFill>
-                  <a:srgbClr val="10B981"/>
-                </a:solidFill>
-              </a:defRPr>
-            </a:pPr>
-            <a:r>
-              <a:t>Connecting farmers in their most familiar messaging environment</a:t>
-            </a:r>
-          </a:p>
-        </p:txBody>
-      </p:sp>
-      <p:sp>
-        <p:nvSpPr>
-          <p:cNvPr id="6" name="Rounded Rectangle 5"/>
-          <p:cNvSpPr/>
-          <p:nvPr/>
-        </p:nvSpPr>
-        <p:spPr>
-          <a:xfrm>
-            <a:off x="914400" y="2377440"/>
-            <a:ext cx="10362895" cy="3840480"/>
-          </a:xfrm>
-          <a:prstGeom prst="roundRect">
-            <a:avLst/>
-          </a:prstGeom>
-          <a:solidFill>
-            <a:srgbClr val="13232E"/>
-          </a:solidFill>
-          <a:ln w="12700">
-            <a:solidFill>
-              <a:srgbClr val="10B981"/>
-            </a:solidFill>
-          </a:ln>
-        </p:spPr>
-        <p:style>
-          <a:lnRef idx="1">
-            <a:schemeClr val="accent1"/>
-          </a:lnRef>
-          <a:fillRef idx="3">
-            <a:schemeClr val="accent1"/>
-          </a:fillRef>
-          <a:effectRef idx="2">
-            <a:schemeClr val="accent1"/>
-          </a:effectRef>
-          <a:fontRef idx="minor">
-            <a:schemeClr val="lt1"/>
-          </a:fontRef>
-        </p:style>
-        <p:txBody>
-          <a:bodyPr rtlCol="0" anchor="ctr"/>
-          <a:lstStyle/>
-          <a:p>
-            <a:pPr algn="ctr"/>
-          </a:p>
-        </p:txBody>
-      </p:sp>
-      <p:sp>
-        <p:nvSpPr>
-          <p:cNvPr id="7" name="TextBox 6"/>
-          <p:cNvSpPr txBox="1"/>
-          <p:nvPr/>
-        </p:nvSpPr>
-        <p:spPr>
-          <a:xfrm>
-            <a:off x="1188720" y="2560320"/>
-            <a:ext cx="9784080" cy="3474720"/>
-          </a:xfrm>
-          <a:prstGeom prst="rect">
-            <a:avLst/>
-          </a:prstGeom>
-          <a:noFill/>
-        </p:spPr>
-        <p:txBody>
-          <a:bodyPr wrap="square">
-            <a:spAutoFit/>
-          </a:bodyPr>
-          <a:lstStyle/>
-          <a:p>
-            <a:pPr>
-              <a:spcAft>
-                <a:spcPts val="1200"/>
-              </a:spcAft>
-              <a:defRPr sz="1400">
-                <a:solidFill>
-                  <a:srgbClr val="FFFFFF"/>
-                </a:solidFill>
-              </a:defRPr>
-            </a:pPr>
-            <a:r>
-              <a:t>•  Clean Authentic Interface: Polished dark-mode mobile simulator accessible inside the 24/7 AI Assistant.</a:t>
-            </a:r>
-          </a:p>
-          <a:p>
-            <a:pPr>
-              <a:spcAft>
-                <a:spcPts val="1200"/>
-              </a:spcAft>
-              <a:defRPr sz="1400">
-                <a:solidFill>
-                  <a:srgbClr val="FFFFFF"/>
-                </a:solidFill>
-              </a:defRPr>
-            </a:pPr>
-            <a:r>
-              <a:t>•  Two-Way Resolution Sync: Farmer queries sync live to administrative consoles with instant officer solutions.</a:t>
-            </a:r>
-          </a:p>
-          <a:p>
-            <a:pPr>
-              <a:spcAft>
-                <a:spcPts val="1200"/>
-              </a:spcAft>
-              <a:defRPr sz="1400">
-                <a:solidFill>
-                  <a:srgbClr val="FFFFFF"/>
-                </a:solidFill>
-              </a:defRPr>
-            </a:pPr>
-            <a:r>
-              <a:t>•  Future-Ready Meta Cloud API: Self-service modal supporting both offline simulation and live Meta Graph API v19.0.</a:t>
-            </a:r>
-          </a:p>
-          <a:p>
-            <a:pPr>
-              <a:spcAft>
-                <a:spcPts val="1200"/>
-              </a:spcAft>
-              <a:defRPr sz="1400">
-                <a:solidFill>
-                  <a:srgbClr val="FFFFFF"/>
-                </a:solidFill>
-              </a:defRPr>
-            </a:pPr>
-            <a:r>
-              <a:t>•  Production Webhook Server: Standalone server/whatsapp_bot_server.js for immediate enterprise deployment.</a:t>
-            </a:r>
-          </a:p>
-        </p:txBody>
-      </p:sp>
-    </p:spTree>
-  </p:cSld>
-  <p:clrMapOvr>
-    <a:masterClrMapping/>
-  </p:clrMapOvr>
-</p:sld>
-</file>
-
-<file path=ppt/slides/slide8.xml><?xml version="1.0" encoding="utf-8"?>
-<p:sld xmlns:a="http://schemas.openxmlformats.org/drawingml/2006/main" xmlns:p="http://schemas.openxmlformats.org/presentationml/2006/main" xmlns:r="http://schemas.openxmlformats.org/officeDocument/2006/relationships">
-  <p:cSld>
-    <p:spTree>
-      <p:nvGrpSpPr>
-        <p:cNvPr id="1" name=""/>
-        <p:cNvGrpSpPr/>
-        <p:nvPr/>
-      </p:nvGrpSpPr>
-      <p:grpSpPr/>
-      <p:sp>
-        <p:nvSpPr>
-          <p:cNvPr id="2" name="Rectangle 1"/>
-          <p:cNvSpPr/>
-          <p:nvPr/>
-        </p:nvSpPr>
-        <p:spPr>
-          <a:xfrm>
-            <a:off x="0" y="0"/>
-            <a:ext cx="12191695" cy="6858000"/>
-          </a:xfrm>
-          <a:prstGeom prst="rect">
-            <a:avLst/>
-          </a:prstGeom>
-          <a:solidFill>
-            <a:srgbClr val="0B141A"/>
-          </a:solidFill>
-          <a:ln>
-            <a:noFill/>
-          </a:ln>
-        </p:spPr>
-        <p:style>
-          <a:lnRef idx="1">
-            <a:schemeClr val="accent1"/>
-          </a:lnRef>
-          <a:fillRef idx="3">
-            <a:schemeClr val="accent1"/>
-          </a:fillRef>
-          <a:effectRef idx="2">
-            <a:schemeClr val="accent1"/>
-          </a:effectRef>
-          <a:fontRef idx="minor">
-            <a:schemeClr val="lt1"/>
-          </a:fontRef>
-        </p:style>
-        <p:txBody>
-          <a:bodyPr rtlCol="0" anchor="ctr"/>
-          <a:lstStyle/>
-          <a:p>
-            <a:pPr algn="ctr"/>
-          </a:p>
-        </p:txBody>
-      </p:sp>
-      <p:sp>
-        <p:nvSpPr>
-          <p:cNvPr id="3" name="TextBox 2"/>
-          <p:cNvSpPr txBox="1"/>
-          <p:nvPr/>
-        </p:nvSpPr>
-        <p:spPr>
-          <a:xfrm>
-            <a:off x="914400" y="548640"/>
-            <a:ext cx="10362895" cy="365760"/>
-          </a:xfrm>
-          <a:prstGeom prst="rect">
-            <a:avLst/>
-          </a:prstGeom>
-          <a:noFill/>
-        </p:spPr>
-        <p:txBody>
-          <a:bodyPr wrap="none">
-            <a:spAutoFit/>
-          </a:bodyPr>
-          <a:lstStyle/>
-          <a:p>
-            <a:pPr>
-              <a:defRPr sz="1100" b="1">
-                <a:solidFill>
-                  <a:srgbClr val="F59E0B"/>
-                </a:solidFill>
-              </a:defRPr>
-            </a:pPr>
-            <a:r>
-              <a:t>SOCIAL, ECONOMIC &amp; POLICY IMPACT</a:t>
-            </a:r>
-          </a:p>
-        </p:txBody>
-      </p:sp>
-      <p:sp>
-        <p:nvSpPr>
-          <p:cNvPr id="4" name="TextBox 3"/>
-          <p:cNvSpPr txBox="1"/>
-          <p:nvPr/>
-        </p:nvSpPr>
-        <p:spPr>
-          <a:xfrm>
-            <a:off x="914400" y="914400"/>
-            <a:ext cx="10362895" cy="731520"/>
-          </a:xfrm>
-          <a:prstGeom prst="rect">
-            <a:avLst/>
-          </a:prstGeom>
-          <a:noFill/>
-        </p:spPr>
-        <p:txBody>
-          <a:bodyPr wrap="none">
-            <a:spAutoFit/>
-          </a:bodyPr>
-          <a:lstStyle/>
-          <a:p>
-            <a:pPr>
-              <a:defRPr sz="2600" b="1">
-                <a:solidFill>
-                  <a:srgbClr val="FFFFFF"/>
-                </a:solidFill>
-              </a:defRPr>
-            </a:pPr>
-            <a:r>
-              <a:t>Preserving Crop Yields &amp; Empowering Rural Livelihoods</a:t>
-            </a:r>
-          </a:p>
-        </p:txBody>
-      </p:sp>
-      <p:sp>
-        <p:nvSpPr>
-          <p:cNvPr id="5" name="TextBox 4"/>
-          <p:cNvSpPr txBox="1"/>
-          <p:nvPr/>
-        </p:nvSpPr>
-        <p:spPr>
-          <a:xfrm>
-            <a:off x="914400" y="1645920"/>
-            <a:ext cx="10362895" cy="548640"/>
-          </a:xfrm>
-          <a:prstGeom prst="rect">
-            <a:avLst/>
-          </a:prstGeom>
-          <a:noFill/>
-        </p:spPr>
-        <p:txBody>
-          <a:bodyPr wrap="none">
-            <a:spAutoFit/>
-          </a:bodyPr>
-          <a:lstStyle/>
-          <a:p>
-            <a:pPr>
-              <a:defRPr sz="1400">
-                <a:solidFill>
-                  <a:srgbClr val="10B981"/>
-                </a:solidFill>
-              </a:defRPr>
-            </a:pPr>
-            <a:r>
-              <a:t>Measurable ground outcomes across Indian agricultural districts</a:t>
-            </a:r>
-          </a:p>
-        </p:txBody>
-      </p:sp>
-      <p:sp>
-        <p:nvSpPr>
-          <p:cNvPr id="6" name="Rounded Rectangle 5"/>
-          <p:cNvSpPr/>
-          <p:nvPr/>
-        </p:nvSpPr>
-        <p:spPr>
-          <a:xfrm>
-            <a:off x="914400" y="2377440"/>
-            <a:ext cx="10362895" cy="3840480"/>
-          </a:xfrm>
-          <a:prstGeom prst="roundRect">
-            <a:avLst/>
-          </a:prstGeom>
-          <a:solidFill>
-            <a:srgbClr val="13232E"/>
-          </a:solidFill>
-          <a:ln w="12700">
-            <a:solidFill>
-              <a:srgbClr val="10B981"/>
-            </a:solidFill>
-          </a:ln>
-        </p:spPr>
-        <p:style>
-          <a:lnRef idx="1">
-            <a:schemeClr val="accent1"/>
-          </a:lnRef>
-          <a:fillRef idx="3">
-            <a:schemeClr val="accent1"/>
-          </a:fillRef>
-          <a:effectRef idx="2">
-            <a:schemeClr val="accent1"/>
-          </a:effectRef>
-          <a:fontRef idx="minor">
-            <a:schemeClr val="lt1"/>
-          </a:fontRef>
-        </p:style>
-        <p:txBody>
-          <a:bodyPr rtlCol="0" anchor="ctr"/>
-          <a:lstStyle/>
-          <a:p>
-            <a:pPr algn="ctr"/>
-          </a:p>
-        </p:txBody>
-      </p:sp>
-      <p:sp>
-        <p:nvSpPr>
-          <p:cNvPr id="7" name="TextBox 6"/>
-          <p:cNvSpPr txBox="1"/>
-          <p:nvPr/>
-        </p:nvSpPr>
-        <p:spPr>
-          <a:xfrm>
-            <a:off x="1188720" y="2560320"/>
-            <a:ext cx="9784080" cy="3474720"/>
-          </a:xfrm>
-          <a:prstGeom prst="rect">
-            <a:avLst/>
-          </a:prstGeom>
-          <a:noFill/>
-        </p:spPr>
-        <p:txBody>
-          <a:bodyPr wrap="square">
-            <a:spAutoFit/>
-          </a:bodyPr>
-          <a:lstStyle/>
-          <a:p>
-            <a:pPr>
-              <a:spcAft>
-                <a:spcPts val="1200"/>
-              </a:spcAft>
-              <a:defRPr sz="1400">
-                <a:solidFill>
-                  <a:srgbClr val="FFFFFF"/>
-                </a:solidFill>
-              </a:defRPr>
-            </a:pPr>
-            <a:r>
-              <a:t>•  ₹12,000 - ₹18,000 / Acre Savings: Early disease detection saves up to 35% of harvest loss from fungal blights.</a:t>
-            </a:r>
-          </a:p>
-          <a:p>
-            <a:pPr>
-              <a:spcAft>
-                <a:spcPts val="1200"/>
-              </a:spcAft>
-              <a:defRPr sz="1400">
-                <a:solidFill>
-                  <a:srgbClr val="FFFFFF"/>
-                </a:solidFill>
-              </a:defRPr>
-            </a:pPr>
-            <a:r>
-              <a:t>•  ₹3,500 / Acre Pesticide Reduction: Precision chemical &amp; bio-fungicide dosage prevents toxic groundwater leaching.</a:t>
-            </a:r>
-          </a:p>
-          <a:p>
-            <a:pPr>
-              <a:spcAft>
-                <a:spcPts val="1200"/>
-              </a:spcAft>
-              <a:defRPr sz="1400">
-                <a:solidFill>
-                  <a:srgbClr val="FFFFFF"/>
-                </a:solidFill>
-              </a:defRPr>
-            </a:pPr>
-            <a:r>
-              <a:t>•  Bridging Linguistic Divides: Hindi voice interface enables 100% digital inclusion for low-literacy farmers.</a:t>
-            </a:r>
-          </a:p>
-          <a:p>
-            <a:pPr>
-              <a:spcAft>
-                <a:spcPts val="1200"/>
-              </a:spcAft>
-              <a:defRPr sz="1400">
-                <a:solidFill>
-                  <a:srgbClr val="FFFFFF"/>
-                </a:solidFill>
-              </a:defRPr>
-            </a:pPr>
-            <a:r>
-              <a:t>•  Zero Administrative Deadlocks: 1-click PFMS 104 resolutions eliminate multi-month DBT subsidy payment delays.</a:t>
-            </a:r>
-          </a:p>
-        </p:txBody>
-      </p:sp>
-    </p:spTree>
-  </p:cSld>
-  <p:clrMapOvr>
-    <a:masterClrMapping/>
-  </p:clrMapOvr>
-</p:sld>
-</file>
-
-<file path=ppt/slides/slide9.xml><?xml version="1.0" encoding="utf-8"?>
-<p:sld xmlns:a="http://schemas.openxmlformats.org/drawingml/2006/main" xmlns:p="http://schemas.openxmlformats.org/presentationml/2006/main" xmlns:r="http://schemas.openxmlformats.org/officeDocument/2006/relationships">
-  <p:cSld>
-    <p:spTree>
-      <p:nvGrpSpPr>
-        <p:cNvPr id="1" name=""/>
-        <p:cNvGrpSpPr/>
-        <p:nvPr/>
-      </p:nvGrpSpPr>
-      <p:grpSpPr/>
-      <p:sp>
-        <p:nvSpPr>
-          <p:cNvPr id="2" name="Rectangle 1"/>
-          <p:cNvSpPr/>
-          <p:nvPr/>
-        </p:nvSpPr>
-        <p:spPr>
-          <a:xfrm>
-            <a:off x="0" y="0"/>
-            <a:ext cx="12191695" cy="6858000"/>
-          </a:xfrm>
-          <a:prstGeom prst="rect">
-            <a:avLst/>
-          </a:prstGeom>
-          <a:solidFill>
-            <a:srgbClr val="0B141A"/>
-          </a:solidFill>
-          <a:ln>
-            <a:noFill/>
-          </a:ln>
-        </p:spPr>
-        <p:style>
-          <a:lnRef idx="1">
-            <a:schemeClr val="accent1"/>
-          </a:lnRef>
-          <a:fillRef idx="3">
-            <a:schemeClr val="accent1"/>
-          </a:fillRef>
-          <a:effectRef idx="2">
-            <a:schemeClr val="accent1"/>
-          </a:effectRef>
-          <a:fontRef idx="minor">
-            <a:schemeClr val="lt1"/>
-          </a:fontRef>
-        </p:style>
-        <p:txBody>
-          <a:bodyPr rtlCol="0" anchor="ctr"/>
-          <a:lstStyle/>
-          <a:p>
-            <a:pPr algn="ctr"/>
-          </a:p>
-        </p:txBody>
-      </p:sp>
-      <p:sp>
-        <p:nvSpPr>
-          <p:cNvPr id="3" name="TextBox 2"/>
-          <p:cNvSpPr txBox="1"/>
-          <p:nvPr/>
-        </p:nvSpPr>
-        <p:spPr>
-          <a:xfrm>
-            <a:off x="914400" y="548640"/>
-            <a:ext cx="10362895" cy="365760"/>
-          </a:xfrm>
-          <a:prstGeom prst="rect">
-            <a:avLst/>
-          </a:prstGeom>
-          <a:noFill/>
-        </p:spPr>
-        <p:txBody>
-          <a:bodyPr wrap="none">
-            <a:spAutoFit/>
-          </a:bodyPr>
-          <a:lstStyle/>
-          <a:p>
-            <a:pPr>
-              <a:defRPr sz="1100" b="1">
-                <a:solidFill>
-                  <a:srgbClr val="F59E0B"/>
-                </a:solidFill>
-              </a:defRPr>
-            </a:pPr>
-            <a:r>
-              <a:t>DEMO, LIVE PORTAL &amp; SUBMISSION REPO</a:t>
-            </a:r>
-          </a:p>
-        </p:txBody>
-      </p:sp>
-      <p:sp>
-        <p:nvSpPr>
-          <p:cNvPr id="4" name="TextBox 3"/>
-          <p:cNvSpPr txBox="1"/>
-          <p:nvPr/>
-        </p:nvSpPr>
-        <p:spPr>
-          <a:xfrm>
-            <a:off x="914400" y="914400"/>
-            <a:ext cx="10362895" cy="731520"/>
-          </a:xfrm>
-          <a:prstGeom prst="rect">
-            <a:avLst/>
-          </a:prstGeom>
-          <a:noFill/>
-        </p:spPr>
-        <p:txBody>
-          <a:bodyPr wrap="none">
-            <a:spAutoFit/>
-          </a:bodyPr>
-          <a:lstStyle/>
-          <a:p>
-            <a:pPr>
-              <a:defRPr sz="2600" b="1">
-                <a:solidFill>
-                  <a:srgbClr val="FFFFFF"/>
-                </a:solidFill>
-              </a:defRPr>
-            </a:pPr>
-            <a:r>
-              <a:t>Experience Kisan Sahayak AI Live Today</a:t>
-            </a:r>
-          </a:p>
-        </p:txBody>
-      </p:sp>
-      <p:sp>
-        <p:nvSpPr>
-          <p:cNvPr id="5" name="TextBox 4"/>
-          <p:cNvSpPr txBox="1"/>
-          <p:nvPr/>
-        </p:nvSpPr>
-        <p:spPr>
-          <a:xfrm>
-            <a:off x="914400" y="1645920"/>
-            <a:ext cx="10362895" cy="548640"/>
-          </a:xfrm>
-          <a:prstGeom prst="rect">
-            <a:avLst/>
-          </a:prstGeom>
-          <a:noFill/>
-        </p:spPr>
-        <p:txBody>
-          <a:bodyPr wrap="none">
-            <a:spAutoFit/>
-          </a:bodyPr>
-          <a:lstStyle/>
-          <a:p>
-            <a:pPr>
-              <a:defRPr sz="1400">
-                <a:solidFill>
-                  <a:srgbClr val="10B981"/>
-                </a:solidFill>
-              </a:defRPr>
-            </a:pPr>
-            <a:r>
-              <a:t>Fully operational prototype ready for judge evaluation</a:t>
-            </a:r>
-          </a:p>
-        </p:txBody>
-      </p:sp>
-      <p:sp>
-        <p:nvSpPr>
-          <p:cNvPr id="6" name="Rounded Rectangle 5"/>
-          <p:cNvSpPr/>
-          <p:nvPr/>
-        </p:nvSpPr>
-        <p:spPr>
-          <a:xfrm>
-            <a:off x="914400" y="2377440"/>
-            <a:ext cx="10362895" cy="3840480"/>
-          </a:xfrm>
-          <a:prstGeom prst="roundRect">
-            <a:avLst/>
-          </a:prstGeom>
-          <a:solidFill>
-            <a:srgbClr val="13232E"/>
-          </a:solidFill>
-          <a:ln w="12700">
-            <a:solidFill>
-              <a:srgbClr val="10B981"/>
-            </a:solidFill>
-          </a:ln>
-        </p:spPr>
-        <p:style>
-          <a:lnRef idx="1">
-            <a:schemeClr val="accent1"/>
-          </a:lnRef>
-          <a:fillRef idx="3">
-            <a:schemeClr val="accent1"/>
-          </a:fillRef>
-          <a:effectRef idx="2">
-            <a:schemeClr val="accent1"/>
-          </a:effectRef>
-          <a:fontRef idx="minor">
-            <a:schemeClr val="lt1"/>
-          </a:fontRef>
-        </p:style>
-        <p:txBody>
-          <a:bodyPr rtlCol="0" anchor="ctr"/>
-          <a:lstStyle/>
-          <a:p>
-            <a:pPr algn="ctr"/>
-          </a:p>
-        </p:txBody>
-      </p:sp>
-      <p:sp>
-        <p:nvSpPr>
-          <p:cNvPr id="7" name="TextBox 6"/>
-          <p:cNvSpPr txBox="1"/>
-          <p:nvPr/>
-        </p:nvSpPr>
-        <p:spPr>
-          <a:xfrm>
-            <a:off x="1188720" y="2560320"/>
-            <a:ext cx="9784080" cy="3474720"/>
-          </a:xfrm>
-          <a:prstGeom prst="rect">
-            <a:avLst/>
-          </a:prstGeom>
-          <a:noFill/>
-        </p:spPr>
-        <p:txBody>
-          <a:bodyPr wrap="square">
-            <a:spAutoFit/>
-          </a:bodyPr>
-          <a:lstStyle/>
-          <a:p>
-            <a:pPr>
-              <a:spcAft>
-                <a:spcPts val="1200"/>
-              </a:spcAft>
-              <a:defRPr sz="1400">
-                <a:solidFill>
-                  <a:srgbClr val="FFFFFF"/>
-                </a:solidFill>
-              </a:defRPr>
-            </a:pPr>
-            <a:r>
-              <a:t>•  Live Vercel Deployment: https://kisan-sahayak-ai-ivory.vercel.app</a:t>
-            </a:r>
-          </a:p>
-          <a:p>
-            <a:pPr>
-              <a:spcAft>
-                <a:spcPts val="1200"/>
-              </a:spcAft>
-              <a:defRPr sz="1400">
-                <a:solidFill>
-                  <a:srgbClr val="FFFFFF"/>
-                </a:solidFill>
-              </a:defRPr>
-            </a:pPr>
-            <a:r>
-              <a:t>•  Admin Resolution Console: https://kisan-sahayak-ai-ivory.vercel.app/?gov=kisanadmin2024 (Pass: KisanGov2024)</a:t>
-            </a:r>
-          </a:p>
-          <a:p>
-            <a:pPr>
-              <a:spcAft>
-                <a:spcPts val="1200"/>
-              </a:spcAft>
-              <a:defRPr sz="1400">
-                <a:solidFill>
-                  <a:srgbClr val="FFFFFF"/>
-                </a:solidFill>
-              </a:defRPr>
-            </a:pPr>
-            <a:r>
-              <a:t>•  Full Source Code: https://github.com/MOHDUBES/Kisan-Sahayak-AI.git</a:t>
-            </a:r>
-          </a:p>
-          <a:p>
-            <a:pPr>
-              <a:spcAft>
-                <a:spcPts val="1200"/>
-              </a:spcAft>
-              <a:defRPr sz="1400">
-                <a:solidFill>
-                  <a:srgbClr val="FFFFFF"/>
-                </a:solidFill>
-              </a:defRPr>
-            </a:pPr>
-            <a:r>
-              <a:t>•  Includes: Vision Leaf Scanner, Voice Assistant, 24/7 Copilot, Scheme Gateway &amp; Meta WhatsApp Webhook.</a:t>
-            </a:r>
-          </a:p>
-        </p:txBody>
-      </p:sp>
+        </p:nvGraphicFramePr>
+        <p:xfrm>
+          <a:off x="4754880" y="1463040"/>
+          <a:ext cx="6675120" cy="4937760"/>
+        </p:xfrm>
+        <a:graphic>
+          <a:graphicData uri="http://schemas.openxmlformats.org/drawingml/2006/table">
+            <a:tbl>
+              <a:tblPr firstRow="1" bandRow="1">
+                <a:tableStyleId>{5C22544A-7EE6-4342-B048-85BDC9FD1C3A}</a:tableStyleId>
+              </a:tblPr>
+              <a:tblGrid>
+                <a:gridCol w="2377440"/>
+                <a:gridCol w="1463040"/>
+                <a:gridCol w="1371600"/>
+                <a:gridCol w="1463040"/>
+              </a:tblGrid>
+              <a:tr h="705394">
+                <a:tc>
+                  <a:txBody>
+                    <a:bodyPr/>
+                    <a:lstStyle/>
+                    <a:p>
+                      <a:pPr algn="l">
+                        <a:defRPr sz="1000" b="1">
+                          <a:solidFill>
+                            <a:srgbClr val="FFFFFF"/>
+                          </a:solidFill>
+                        </a:defRPr>
+                      </a:pPr>
+                      <a:r>
+                        <a:t>Key Feature / Capability</a:t>
+                      </a:r>
+                    </a:p>
+                  </a:txBody>
+                  <a:tcPr>
+                    <a:solidFill>
+                      <a:srgbClr val="065F46"/>
+                    </a:solidFill>
+                  </a:tcPr>
+                </a:tc>
+                <a:tc>
+                  <a:txBody>
+                    <a:bodyPr/>
+                    <a:lstStyle/>
+                    <a:p>
+                      <a:pPr algn="ctr">
+                        <a:defRPr sz="1000" b="1">
+                          <a:solidFill>
+                            <a:srgbClr val="FFFFFF"/>
+                          </a:solidFill>
+                        </a:defRPr>
+                      </a:pPr>
+                      <a:r>
+                        <a:t>Kisan Sahayak AI</a:t>
+                      </a:r>
+                    </a:p>
+                  </a:txBody>
+                  <a:tcPr>
+                    <a:solidFill>
+                      <a:srgbClr val="065F46"/>
+                    </a:solidFill>
+                  </a:tcPr>
+                </a:tc>
+                <a:tc>
+                  <a:txBody>
+                    <a:bodyPr/>
+                    <a:lstStyle/>
+                    <a:p>
+                      <a:pPr algn="ctr">
+                        <a:defRPr sz="1000" b="1">
+                          <a:solidFill>
+                            <a:srgbClr val="FFFFFF"/>
+                          </a:solidFill>
+                        </a:defRPr>
+                      </a:pPr>
+                      <a:r>
+                        <a:t>Generic Agri Apps</a:t>
+                      </a:r>
+                    </a:p>
+                  </a:txBody>
+                  <a:tcPr>
+                    <a:solidFill>
+                      <a:srgbClr val="065F46"/>
+                    </a:solidFill>
+                  </a:tcPr>
+                </a:tc>
+                <a:tc>
+                  <a:txBody>
+                    <a:bodyPr/>
+                    <a:lstStyle/>
+                    <a:p>
+                      <a:pPr algn="ctr">
+                        <a:defRPr sz="1000" b="1">
+                          <a:solidFill>
+                            <a:srgbClr val="FFFFFF"/>
+                          </a:solidFill>
+                        </a:defRPr>
+                      </a:pPr>
+                      <a:r>
+                        <a:t>Govt Portals (UMANG)</a:t>
+                      </a:r>
+                    </a:p>
+                  </a:txBody>
+                  <a:tcPr>
+                    <a:solidFill>
+                      <a:srgbClr val="065F46"/>
+                    </a:solidFill>
+                  </a:tcPr>
+                </a:tc>
+              </a:tr>
+              <a:tr h="705394">
+                <a:tc>
+                  <a:txBody>
+                    <a:bodyPr/>
+                    <a:lstStyle/>
+                    <a:p>
+                      <a:pPr algn="l">
+                        <a:defRPr sz="950">
+                          <a:solidFill>
+                            <a:srgbClr val="0F172A"/>
+                          </a:solidFill>
+                        </a:defRPr>
+                      </a:pPr>
+                      <a:r>
+                        <a:t>100% Offline Edge AI (Zero Net)</a:t>
+                      </a:r>
+                    </a:p>
+                  </a:txBody>
+                  <a:tcPr/>
+                </a:tc>
+                <a:tc>
+                  <a:txBody>
+                    <a:bodyPr/>
+                    <a:lstStyle/>
+                    <a:p>
+                      <a:pPr algn="ctr">
+                        <a:defRPr sz="950" b="1">
+                          <a:solidFill>
+                            <a:srgbClr val="065F46"/>
+                          </a:solidFill>
+                        </a:defRPr>
+                      </a:pPr>
+                      <a:r>
+                        <a:t>✔ (Hexagon NPU)</a:t>
+                      </a:r>
+                    </a:p>
+                  </a:txBody>
+                  <a:tcPr>
+                    <a:solidFill>
+                      <a:srgbClr val="ECFDF5"/>
+                    </a:solidFill>
+                  </a:tcPr>
+                </a:tc>
+                <a:tc>
+                  <a:txBody>
+                    <a:bodyPr/>
+                    <a:lstStyle/>
+                    <a:p>
+                      <a:pPr algn="ctr">
+                        <a:defRPr sz="950">
+                          <a:solidFill>
+                            <a:srgbClr val="B91C1C"/>
+                          </a:solidFill>
+                        </a:defRPr>
+                      </a:pPr>
+                      <a:r>
+                        <a:t>✘ (Needs 4G/5G)</a:t>
+                      </a:r>
+                    </a:p>
+                  </a:txBody>
+                  <a:tcPr/>
+                </a:tc>
+                <a:tc>
+                  <a:txBody>
+                    <a:bodyPr/>
+                    <a:lstStyle/>
+                    <a:p>
+                      <a:pPr algn="ctr">
+                        <a:defRPr sz="950">
+                          <a:solidFill>
+                            <a:srgbClr val="B91C1C"/>
+                          </a:solidFill>
+                        </a:defRPr>
+                      </a:pPr>
+                      <a:r>
+                        <a:t>✘ (Cloud Portal)</a:t>
+                      </a:r>
+                    </a:p>
+                  </a:txBody>
+                  <a:tcPr/>
+                </a:tc>
+              </a:tr>
+              <a:tr h="705394">
+                <a:tc>
+                  <a:txBody>
+                    <a:bodyPr/>
+                    <a:lstStyle/>
+                    <a:p>
+                      <a:pPr algn="l">
+                        <a:defRPr sz="950">
+                          <a:solidFill>
+                            <a:srgbClr val="0F172A"/>
+                          </a:solidFill>
+                        </a:defRPr>
+                      </a:pPr>
+                      <a:r>
+                        <a:t>Computer Vision Leaf Diagnosis</a:t>
+                      </a:r>
+                    </a:p>
+                  </a:txBody>
+                  <a:tcPr/>
+                </a:tc>
+                <a:tc>
+                  <a:txBody>
+                    <a:bodyPr/>
+                    <a:lstStyle/>
+                    <a:p>
+                      <a:pPr algn="ctr">
+                        <a:defRPr sz="950" b="1">
+                          <a:solidFill>
+                            <a:srgbClr val="065F46"/>
+                          </a:solidFill>
+                        </a:defRPr>
+                      </a:pPr>
+                      <a:r>
+                        <a:t>✔ (&lt;40ms Local)</a:t>
+                      </a:r>
+                    </a:p>
+                  </a:txBody>
+                  <a:tcPr>
+                    <a:solidFill>
+                      <a:srgbClr val="ECFDF5"/>
+                    </a:solidFill>
+                  </a:tcPr>
+                </a:tc>
+                <a:tc>
+                  <a:txBody>
+                    <a:bodyPr/>
+                    <a:lstStyle/>
+                    <a:p>
+                      <a:pPr algn="ctr">
+                        <a:defRPr sz="950">
+                          <a:solidFill>
+                            <a:srgbClr val="065F46"/>
+                          </a:solidFill>
+                        </a:defRPr>
+                      </a:pPr>
+                      <a:r>
+                        <a:t>✔ (Slow Cloud API)</a:t>
+                      </a:r>
+                    </a:p>
+                  </a:txBody>
+                  <a:tcPr/>
+                </a:tc>
+                <a:tc>
+                  <a:txBody>
+                    <a:bodyPr/>
+                    <a:lstStyle/>
+                    <a:p>
+                      <a:pPr algn="ctr">
+                        <a:defRPr sz="950">
+                          <a:solidFill>
+                            <a:srgbClr val="B91C1C"/>
+                          </a:solidFill>
+                        </a:defRPr>
+                      </a:pPr>
+                      <a:r>
+                        <a:t>✘ (Not Supported)</a:t>
+                      </a:r>
+                    </a:p>
+                  </a:txBody>
+                  <a:tcPr/>
+                </a:tc>
+              </a:tr>
+              <a:tr h="705394">
+                <a:tc>
+                  <a:txBody>
+                    <a:bodyPr/>
+                    <a:lstStyle/>
+                    <a:p>
+                      <a:pPr algn="l">
+                        <a:defRPr sz="950">
+                          <a:solidFill>
+                            <a:srgbClr val="0F172A"/>
+                          </a:solidFill>
+                        </a:defRPr>
+                      </a:pPr>
+                      <a:r>
+                        <a:t>Multilingual Voice Dialogue</a:t>
+                      </a:r>
+                    </a:p>
+                  </a:txBody>
+                  <a:tcPr/>
+                </a:tc>
+                <a:tc>
+                  <a:txBody>
+                    <a:bodyPr/>
+                    <a:lstStyle/>
+                    <a:p>
+                      <a:pPr algn="ctr">
+                        <a:defRPr sz="950" b="1">
+                          <a:solidFill>
+                            <a:srgbClr val="065F46"/>
+                          </a:solidFill>
+                        </a:defRPr>
+                      </a:pPr>
+                      <a:r>
+                        <a:t>✔ (Native Hindi)</a:t>
+                      </a:r>
+                    </a:p>
+                  </a:txBody>
+                  <a:tcPr>
+                    <a:solidFill>
+                      <a:srgbClr val="ECFDF5"/>
+                    </a:solidFill>
+                  </a:tcPr>
+                </a:tc>
+                <a:tc>
+                  <a:txBody>
+                    <a:bodyPr/>
+                    <a:lstStyle/>
+                    <a:p>
+                      <a:pPr algn="ctr">
+                        <a:defRPr sz="950">
+                          <a:solidFill>
+                            <a:srgbClr val="B91C1C"/>
+                          </a:solidFill>
+                        </a:defRPr>
+                      </a:pPr>
+                      <a:r>
+                        <a:t>✘ (English/Text)</a:t>
+                      </a:r>
+                    </a:p>
+                  </a:txBody>
+                  <a:tcPr/>
+                </a:tc>
+                <a:tc>
+                  <a:txBody>
+                    <a:bodyPr/>
+                    <a:lstStyle/>
+                    <a:p>
+                      <a:pPr algn="ctr">
+                        <a:defRPr sz="950">
+                          <a:solidFill>
+                            <a:srgbClr val="B91C1C"/>
+                          </a:solidFill>
+                        </a:defRPr>
+                      </a:pPr>
+                      <a:r>
+                        <a:t>✘ (Complex Text)</a:t>
+                      </a:r>
+                    </a:p>
+                  </a:txBody>
+                  <a:tcPr/>
+                </a:tc>
+              </a:tr>
+              <a:tr h="705394">
+                <a:tc>
+                  <a:txBody>
+                    <a:bodyPr/>
+                    <a:lstStyle/>
+                    <a:p>
+                      <a:pPr algn="l">
+                        <a:defRPr sz="950">
+                          <a:solidFill>
+                            <a:srgbClr val="0F172A"/>
+                          </a:solidFill>
+                        </a:defRPr>
+                      </a:pPr>
+                      <a:r>
+                        <a:t>WhatsApp Two-Way Sync</a:t>
+                      </a:r>
+                    </a:p>
+                  </a:txBody>
+                  <a:tcPr/>
+                </a:tc>
+                <a:tc>
+                  <a:txBody>
+                    <a:bodyPr/>
+                    <a:lstStyle/>
+                    <a:p>
+                      <a:pPr algn="ctr">
+                        <a:defRPr sz="950" b="1">
+                          <a:solidFill>
+                            <a:srgbClr val="065F46"/>
+                          </a:solidFill>
+                        </a:defRPr>
+                      </a:pPr>
+                      <a:r>
+                        <a:t>✔ (Live Desk + API)</a:t>
+                      </a:r>
+                    </a:p>
+                  </a:txBody>
+                  <a:tcPr>
+                    <a:solidFill>
+                      <a:srgbClr val="ECFDF5"/>
+                    </a:solidFill>
+                  </a:tcPr>
+                </a:tc>
+                <a:tc>
+                  <a:txBody>
+                    <a:bodyPr/>
+                    <a:lstStyle/>
+                    <a:p>
+                      <a:pPr algn="ctr">
+                        <a:defRPr sz="950">
+                          <a:solidFill>
+                            <a:srgbClr val="B91C1C"/>
+                          </a:solidFill>
+                        </a:defRPr>
+                      </a:pPr>
+                      <a:r>
+                        <a:t>✘ (No WhatsApp)</a:t>
+                      </a:r>
+                    </a:p>
+                  </a:txBody>
+                  <a:tcPr/>
+                </a:tc>
+                <a:tc>
+                  <a:txBody>
+                    <a:bodyPr/>
+                    <a:lstStyle/>
+                    <a:p>
+                      <a:pPr algn="ctr">
+                        <a:defRPr sz="950">
+                          <a:solidFill>
+                            <a:srgbClr val="B91C1C"/>
+                          </a:solidFill>
+                        </a:defRPr>
+                      </a:pPr>
+                      <a:r>
+                        <a:t>✘ (No WhatsApp)</a:t>
+                      </a:r>
+                    </a:p>
+                  </a:txBody>
+                  <a:tcPr/>
+                </a:tc>
+              </a:tr>
+              <a:tr h="705394">
+                <a:tc>
+                  <a:txBody>
+                    <a:bodyPr/>
+                    <a:lstStyle/>
+                    <a:p>
+                      <a:pPr algn="l">
+                        <a:defRPr sz="950">
+                          <a:solidFill>
+                            <a:srgbClr val="0F172A"/>
+                          </a:solidFill>
+                        </a:defRPr>
+                      </a:pPr>
+                      <a:r>
+                        <a:t>1-Click DBT Scheme Application</a:t>
+                      </a:r>
+                    </a:p>
+                  </a:txBody>
+                  <a:tcPr/>
+                </a:tc>
+                <a:tc>
+                  <a:txBody>
+                    <a:bodyPr/>
+                    <a:lstStyle/>
+                    <a:p>
+                      <a:pPr algn="ctr">
+                        <a:defRPr sz="950" b="1">
+                          <a:solidFill>
+                            <a:srgbClr val="065F46"/>
+                          </a:solidFill>
+                        </a:defRPr>
+                      </a:pPr>
+                      <a:r>
+                        <a:t>✔ (Digital Cert.)</a:t>
+                      </a:r>
+                    </a:p>
+                  </a:txBody>
+                  <a:tcPr>
+                    <a:solidFill>
+                      <a:srgbClr val="ECFDF5"/>
+                    </a:solidFill>
+                  </a:tcPr>
+                </a:tc>
+                <a:tc>
+                  <a:txBody>
+                    <a:bodyPr/>
+                    <a:lstStyle/>
+                    <a:p>
+                      <a:pPr algn="ctr">
+                        <a:defRPr sz="950">
+                          <a:solidFill>
+                            <a:srgbClr val="B91C1C"/>
+                          </a:solidFill>
+                        </a:defRPr>
+                      </a:pPr>
+                      <a:r>
+                        <a:t>✘ (Info Only)</a:t>
+                      </a:r>
+                    </a:p>
+                  </a:txBody>
+                  <a:tcPr/>
+                </a:tc>
+                <a:tc>
+                  <a:txBody>
+                    <a:bodyPr/>
+                    <a:lstStyle/>
+                    <a:p>
+                      <a:pPr algn="ctr">
+                        <a:defRPr sz="950">
+                          <a:solidFill>
+                            <a:srgbClr val="065F46"/>
+                          </a:solidFill>
+                        </a:defRPr>
+                      </a:pPr>
+                      <a:r>
+                        <a:t>✔ (Multi-Step Forms)</a:t>
+                      </a:r>
+                    </a:p>
+                  </a:txBody>
+                  <a:tcPr/>
+                </a:tc>
+              </a:tr>
+              <a:tr h="705396">
+                <a:tc>
+                  <a:txBody>
+                    <a:bodyPr/>
+                    <a:lstStyle/>
+                    <a:p>
+                      <a:pPr algn="l">
+                        <a:defRPr sz="950">
+                          <a:solidFill>
+                            <a:srgbClr val="0F172A"/>
+                          </a:solidFill>
+                        </a:defRPr>
+                      </a:pPr>
+                      <a:r>
+                        <a:t>Sub-Watt Battery Life (&lt;0.5W)</a:t>
+                      </a:r>
+                    </a:p>
+                  </a:txBody>
+                  <a:tcPr/>
+                </a:tc>
+                <a:tc>
+                  <a:txBody>
+                    <a:bodyPr/>
+                    <a:lstStyle/>
+                    <a:p>
+                      <a:pPr algn="ctr">
+                        <a:defRPr sz="950" b="1">
+                          <a:solidFill>
+                            <a:srgbClr val="065F46"/>
+                          </a:solidFill>
+                        </a:defRPr>
+                      </a:pPr>
+                      <a:r>
+                        <a:t>✔ (26+ Hr HP PC)</a:t>
+                      </a:r>
+                    </a:p>
+                  </a:txBody>
+                  <a:tcPr>
+                    <a:solidFill>
+                      <a:srgbClr val="ECFDF5"/>
+                    </a:solidFill>
+                  </a:tcPr>
+                </a:tc>
+                <a:tc>
+                  <a:txBody>
+                    <a:bodyPr/>
+                    <a:lstStyle/>
+                    <a:p>
+                      <a:pPr algn="ctr">
+                        <a:defRPr sz="950">
+                          <a:solidFill>
+                            <a:srgbClr val="B91C1C"/>
+                          </a:solidFill>
+                        </a:defRPr>
+                      </a:pPr>
+                      <a:r>
+                        <a:t>✘ (15W+ Drain)</a:t>
+                      </a:r>
+                    </a:p>
+                  </a:txBody>
+                  <a:tcPr/>
+                </a:tc>
+                <a:tc>
+                  <a:txBody>
+                    <a:bodyPr/>
+                    <a:lstStyle/>
+                    <a:p>
+                      <a:pPr algn="ctr">
+                        <a:defRPr sz="950">
+                          <a:solidFill>
+                            <a:srgbClr val="B91C1C"/>
+                          </a:solidFill>
+                        </a:defRPr>
+                      </a:pPr>
+                      <a:r>
+                        <a:t>✘ (N/A)</a:t>
+                      </a:r>
+                    </a:p>
+                  </a:txBody>
+                  <a:tcPr/>
+                </a:tc>
+              </a:tr>
+            </a:tbl>
+          </a:graphicData>
+        </a:graphic>
+      </p:graphicFrame>
     </p:spTree>
   </p:cSld>
   <p:clrMapOvr>

--- a/Kisan_Sahayak_AI_Pitch_Presentation.pptx
+++ b/Kisan_Sahayak_AI_Pitch_Presentation.pptx
@@ -3093,26 +3093,114 @@
         <p:nvPr/>
       </p:nvGrpSpPr>
       <p:grpSpPr/>
-      <p:sp>
-        <p:nvSpPr>
-          <p:cNvPr id="2" name="Rounded Rectangle 1"/>
+      <p:pic>
+        <p:nvPicPr>
+          <p:cNvPr id="2" name="Picture 1" descr="team_logo.png"/>
+          <p:cNvPicPr>
+            <a:picLocks noChangeAspect="1"/>
+          </p:cNvPicPr>
+          <p:nvPr/>
+        </p:nvPicPr>
+        <p:blipFill>
+          <a:blip r:embed="rId2"/>
+          <a:stretch>
+            <a:fillRect/>
+          </a:stretch>
+        </p:blipFill>
+        <p:spPr>
+          <a:xfrm>
+            <a:off x="457200" y="274320"/>
+            <a:ext cx="868680" cy="868680"/>
+          </a:xfrm>
+          <a:prstGeom prst="rect">
+            <a:avLst/>
+          </a:prstGeom>
+        </p:spPr>
+      </p:pic>
+      <p:sp>
+        <p:nvSpPr>
+          <p:cNvPr id="3" name="TextBox 2"/>
+          <p:cNvSpPr txBox="1"/>
+          <p:nvPr/>
+        </p:nvSpPr>
+        <p:spPr>
+          <a:xfrm>
+            <a:off x="1645920" y="274320"/>
+            <a:ext cx="8046720" cy="868680"/>
+          </a:xfrm>
+          <a:prstGeom prst="rect">
+            <a:avLst/>
+          </a:prstGeom>
+          <a:noFill/>
+        </p:spPr>
+        <p:txBody>
+          <a:bodyPr wrap="square">
+            <a:spAutoFit/>
+          </a:bodyPr>
+          <a:lstStyle/>
+          <a:p>
+            <a:pPr algn="ctr">
+              <a:defRPr sz="2400" b="1">
+                <a:solidFill>
+                  <a:srgbClr val="0F172A"/>
+                </a:solidFill>
+                <a:latin typeface="Arial"/>
+              </a:defRPr>
+            </a:pPr>
+            <a:r>
+              <a:t>SMART INDIA HACKATHON 2026</a:t>
+            </a:r>
+            <a:br/>
+            <a:r>
+              <a:t>TITLE PAGE</a:t>
+            </a:r>
+          </a:p>
+        </p:txBody>
+      </p:sp>
+      <p:pic>
+        <p:nvPicPr>
+          <p:cNvPr id="4" name="Picture 3" descr="challenge_logo.png"/>
+          <p:cNvPicPr>
+            <a:picLocks noChangeAspect="1"/>
+          </p:cNvPicPr>
+          <p:nvPr/>
+        </p:nvPicPr>
+        <p:blipFill>
+          <a:blip r:embed="rId3"/>
+          <a:stretch>
+            <a:fillRect/>
+          </a:stretch>
+        </p:blipFill>
+        <p:spPr>
+          <a:xfrm>
+            <a:off x="10058400" y="228600"/>
+            <a:ext cx="1645920" cy="914400"/>
+          </a:xfrm>
+          <a:prstGeom prst="rect">
+            <a:avLst/>
+          </a:prstGeom>
+        </p:spPr>
+      </p:pic>
+      <p:sp>
+        <p:nvSpPr>
+          <p:cNvPr id="5" name="Rectangle 4"/>
           <p:cNvSpPr/>
           <p:nvPr/>
         </p:nvSpPr>
         <p:spPr>
           <a:xfrm>
-            <a:off x="731520" y="731520"/>
-            <a:ext cx="6949440" cy="5394960"/>
-          </a:xfrm>
-          <a:prstGeom prst="roundRect">
+            <a:off x="457200" y="1234440"/>
+            <a:ext cx="11277295" cy="18288"/>
+          </a:xfrm>
+          <a:prstGeom prst="rect">
             <a:avLst/>
           </a:prstGeom>
           <a:solidFill>
-            <a:srgbClr val="F8FAFC"/>
+            <a:srgbClr val="E2E8F0"/>
           </a:solidFill>
-          <a:ln w="19050">
+          <a:ln>
             <a:solidFill>
-              <a:srgbClr val="059669"/>
+              <a:srgbClr val="E2E8F0"/>
             </a:solidFill>
           </a:ln>
         </p:spPr>
@@ -3140,252 +3228,25 @@
       </p:sp>
       <p:sp>
         <p:nvSpPr>
-          <p:cNvPr id="3" name="TextBox 2"/>
-          <p:cNvSpPr txBox="1"/>
-          <p:nvPr/>
-        </p:nvSpPr>
-        <p:spPr>
-          <a:xfrm>
-            <a:off x="1005840" y="1005840"/>
-            <a:ext cx="6400800" cy="4846320"/>
-          </a:xfrm>
-          <a:prstGeom prst="rect">
-            <a:avLst/>
-          </a:prstGeom>
-          <a:noFill/>
-        </p:spPr>
-        <p:txBody>
-          <a:bodyPr wrap="square">
-            <a:spAutoFit/>
-          </a:bodyPr>
-          <a:lstStyle/>
-          <a:p>
-            <a:pPr>
-              <a:defRPr sz="1100" b="1">
-                <a:solidFill>
-                  <a:srgbClr val="D97706"/>
-                </a:solidFill>
-              </a:defRPr>
-            </a:pPr>
-            <a:r>
-              <a:t>QUALCOMM SNAPDRAGON® AI LAB CHALLENGE</a:t>
-            </a:r>
-          </a:p>
-          <a:p>
-            <a:pPr>
-              <a:spcBef>
-                <a:spcPts val="600"/>
-              </a:spcBef>
-              <a:defRPr sz="2600" b="1">
-                <a:solidFill>
-                  <a:srgbClr val="065F46"/>
-                </a:solidFill>
-              </a:defRPr>
-            </a:pPr>
-            <a:r>
-              <a:t>KISAN SAHAYAK AI (किसान सहायक AI)</a:t>
-            </a:r>
-          </a:p>
-          <a:p>
-            <a:pPr>
-              <a:spcBef>
-                <a:spcPts val="400"/>
-              </a:spcBef>
-              <a:spcAft>
-                <a:spcPts val="1600"/>
-              </a:spcAft>
-              <a:defRPr sz="1300" b="1">
-                <a:solidFill>
-                  <a:srgbClr val="334155"/>
-                </a:solidFill>
-              </a:defRPr>
-            </a:pPr>
-            <a:r>
-              <a:t>Offline-First Multimodal AI Assistant for 146M+ Indian Farmers</a:t>
-            </a:r>
-          </a:p>
-          <a:p>
-            <a:pPr>
-              <a:spcAft>
-                <a:spcPts val="600"/>
-              </a:spcAft>
-            </a:pPr>
-            <a:r>
-              <a:rPr b="1" sz="1050">
-                <a:solidFill>
-                  <a:srgbClr val="0F172A"/>
-                </a:solidFill>
-              </a:rPr>
-              <a:t>•  Problem Statement Title: </a:t>
-            </a:r>
-            <a:r>
-              <a:rPr sz="1050">
-                <a:solidFill>
-                  <a:srgbClr val="334155"/>
-                </a:solidFill>
-              </a:rPr>
-              <a:t>AI-Driven Agricultural Advisory &amp; Scheme Structuring for Rural Farmers</a:t>
-            </a:r>
-          </a:p>
-          <a:p>
-            <a:pPr>
-              <a:spcAft>
-                <a:spcPts val="600"/>
-              </a:spcAft>
-            </a:pPr>
-            <a:r>
-              <a:rPr b="1" sz="1050">
-                <a:solidFill>
-                  <a:srgbClr val="0F172A"/>
-                </a:solidFill>
-              </a:rPr>
-              <a:t>•  Theme / Track: </a:t>
-            </a:r>
-            <a:r>
-              <a:rPr sz="1050">
-                <a:solidFill>
-                  <a:srgbClr val="334155"/>
-                </a:solidFill>
-              </a:rPr>
-              <a:t>Agriculture, FoodTech &amp; Rural Development</a:t>
-            </a:r>
-          </a:p>
-          <a:p>
-            <a:pPr>
-              <a:spcAft>
-                <a:spcPts val="600"/>
-              </a:spcAft>
-            </a:pPr>
-            <a:r>
-              <a:rPr b="1" sz="1050">
-                <a:solidFill>
-                  <a:srgbClr val="0F172A"/>
-                </a:solidFill>
-              </a:rPr>
-              <a:t>•  Target Hardware: </a:t>
-            </a:r>
-            <a:r>
-              <a:rPr sz="1050">
-                <a:solidFill>
-                  <a:srgbClr val="334155"/>
-                </a:solidFill>
-              </a:rPr>
-              <a:t>Snapdragon®-Powered HP PCs (HP OmniBook Ultra &amp; HP OmniBook 3)</a:t>
-            </a:r>
-          </a:p>
-          <a:p>
-            <a:pPr>
-              <a:spcAft>
-                <a:spcPts val="600"/>
-              </a:spcAft>
-            </a:pPr>
-            <a:r>
-              <a:rPr b="1" sz="1050">
-                <a:solidFill>
-                  <a:srgbClr val="0F172A"/>
-                </a:solidFill>
-              </a:rPr>
-              <a:t>•  Acceleration Layer: </a:t>
-            </a:r>
-            <a:r>
-              <a:rPr sz="1050">
-                <a:solidFill>
-                  <a:srgbClr val="334155"/>
-                </a:solidFill>
-              </a:rPr>
-              <a:t>Qualcomm Hexagon™ NPU (45 TOPS · Sub-40ms HTP INT8 Inference)</a:t>
-            </a:r>
-          </a:p>
-          <a:p>
-            <a:pPr>
-              <a:spcAft>
-                <a:spcPts val="600"/>
-              </a:spcAft>
-            </a:pPr>
-            <a:r>
-              <a:rPr b="1" sz="1050">
-                <a:solidFill>
-                  <a:srgbClr val="0F172A"/>
-                </a:solidFill>
-              </a:rPr>
-              <a:t>•  Live Web Application: </a:t>
-            </a:r>
-            <a:r>
-              <a:rPr sz="1050">
-                <a:solidFill>
-                  <a:srgbClr val="059669"/>
-                </a:solidFill>
-              </a:rPr>
-              <a:t>https://kisan-sahayak-ai-ivory.vercel.app</a:t>
-            </a:r>
-          </a:p>
-          <a:p>
-            <a:pPr>
-              <a:spcAft>
-                <a:spcPts val="600"/>
-              </a:spcAft>
-            </a:pPr>
-            <a:r>
-              <a:rPr b="1" sz="1050">
-                <a:solidFill>
-                  <a:srgbClr val="0F172A"/>
-                </a:solidFill>
-              </a:rPr>
-              <a:t>•  Admin Portal Access: </a:t>
-            </a:r>
-            <a:r>
-              <a:rPr sz="1050">
-                <a:solidFill>
-                  <a:srgbClr val="059669"/>
-                </a:solidFill>
-              </a:rPr>
-              <a:t>https://kisan-sahayak-ai-ivory.vercel.app/?gov=kisanadmin2024</a:t>
-            </a:r>
-          </a:p>
-          <a:p>
-            <a:pPr>
-              <a:spcAft>
-                <a:spcPts val="600"/>
-              </a:spcAft>
-            </a:pPr>
-            <a:r>
-              <a:rPr b="1" sz="1050">
-                <a:solidFill>
-                  <a:srgbClr val="0F172A"/>
-                </a:solidFill>
-              </a:rPr>
-              <a:t>•  GitHub Repository: </a:t>
-            </a:r>
-            <a:r>
-              <a:rPr sz="1050">
-                <a:solidFill>
-                  <a:srgbClr val="059669"/>
-                </a:solidFill>
-              </a:rPr>
-              <a:t>https://github.com/MOHDUBES/Kisan-Sahayak-AI.git</a:t>
-            </a:r>
-          </a:p>
-        </p:txBody>
-      </p:sp>
-      <p:sp>
-        <p:nvSpPr>
-          <p:cNvPr id="4" name="Rounded Rectangle 3"/>
+          <p:cNvPr id="6" name="Rounded Rectangle 5"/>
           <p:cNvSpPr/>
           <p:nvPr/>
         </p:nvSpPr>
         <p:spPr>
           <a:xfrm>
-            <a:off x="7955279" y="731520"/>
-            <a:ext cx="3474720" cy="5394960"/>
+            <a:off x="548640" y="1371600"/>
+            <a:ext cx="6217920" cy="4937760"/>
           </a:xfrm>
           <a:prstGeom prst="roundRect">
             <a:avLst/>
           </a:prstGeom>
           <a:solidFill>
-            <a:srgbClr val="065F46"/>
+            <a:srgbClr val="FFFFFF"/>
           </a:solidFill>
-          <a:ln>
-            <a:noFill/>
+          <a:ln w="19050">
+            <a:solidFill>
+              <a:srgbClr val="E2E8F0"/>
+            </a:solidFill>
           </a:ln>
         </p:spPr>
         <p:style>
@@ -3403,156 +3264,290 @@
           </a:fontRef>
         </p:style>
         <p:txBody>
-          <a:bodyPr rtlCol="0" anchor="ctr"/>
-          <a:lstStyle/>
-          <a:p>
-            <a:pPr algn="ctr"/>
-          </a:p>
-        </p:txBody>
-      </p:sp>
-      <p:sp>
-        <p:nvSpPr>
-          <p:cNvPr id="5" name="TextBox 4"/>
-          <p:cNvSpPr txBox="1"/>
-          <p:nvPr/>
-        </p:nvSpPr>
-        <p:spPr>
-          <a:xfrm>
-            <a:off x="8138160" y="1097280"/>
-            <a:ext cx="3108960" cy="4663440"/>
-          </a:xfrm>
-          <a:prstGeom prst="rect">
-            <a:avLst/>
-          </a:prstGeom>
-          <a:noFill/>
-        </p:spPr>
-        <p:txBody>
-          <a:bodyPr wrap="square">
-            <a:spAutoFit/>
-          </a:bodyPr>
-          <a:lstStyle/>
-          <a:p>
-            <a:pPr>
-              <a:defRPr sz="1200" b="1">
-                <a:solidFill>
-                  <a:srgbClr val="D97706"/>
-                </a:solidFill>
-              </a:defRPr>
+          <a:bodyPr rtlCol="0" anchor="ctr" wrap="square" lIns="274320" rIns="274320" tIns="228600"/>
+          <a:lstStyle/>
+          <a:p>
+            <a:pPr algn="ctr">
+              <a:spcAft>
+                <a:spcPts val="700"/>
+              </a:spcAft>
             </a:pPr>
             <a:r>
-              <a:t>🌾 100% ON-DEVICE</a:t>
-            </a:r>
-          </a:p>
-          <a:p>
-            <a:pPr>
-              <a:spcBef>
-                <a:spcPts val="800"/>
-              </a:spcBef>
-              <a:spcAft>
-                <a:spcPts val="1400"/>
-              </a:spcAft>
-              <a:defRPr sz="1800" b="1">
-                <a:solidFill>
-                  <a:srgbClr val="FFFFFF"/>
-                </a:solidFill>
-              </a:defRPr>
-            </a:pPr>
-            <a:r>
-              <a:t>Zero Cloud Calls.</a:t>
-            </a:r>
-            <a:br/>
-            <a:r>
-              <a:t>Zero Rural Dead Zones.</a:t>
+              <a:rPr b="1" sz="1100">
+                <a:solidFill>
+                  <a:srgbClr val="0F172A"/>
+                </a:solidFill>
+              </a:rPr>
+              <a:t>• Problem Statement ID: </a:t>
+            </a:r>
+            <a:r>
+              <a:rPr b="1" sz="1100">
+                <a:solidFill>
+                  <a:srgbClr val="0F172A"/>
+                </a:solidFill>
+              </a:rPr>
+              <a:t>SIH26091 / QCOM-AGRI-04</a:t>
             </a:r>
           </a:p>
           <a:p>
             <a:pPr>
               <a:spcAft>
-                <a:spcPts val="1000"/>
+                <a:spcPts val="700"/>
               </a:spcAft>
-              <a:defRPr sz="1100">
-                <a:solidFill>
-                  <a:srgbClr val="ECFDF5"/>
-                </a:solidFill>
-              </a:defRPr>
             </a:pPr>
             <a:r>
-              <a:t>✔  📷 Kisan Kavach: 38ms Leaf Disease Diagnosis</a:t>
+              <a:rPr b="1" sz="1100">
+                <a:solidFill>
+                  <a:srgbClr val="0F172A"/>
+                </a:solidFill>
+              </a:rPr>
+              <a:t>• Problem Statement Title: </a:t>
+            </a:r>
+            <a:r>
+              <a:rPr b="1" sz="1100">
+                <a:solidFill>
+                  <a:srgbClr val="2563EB"/>
+                </a:solidFill>
+              </a:rPr>
+              <a:t>AI-Driven Hyper-Local Multilingual Agronomic Advisory &amp; Crop Disease Diagnosis for Rural Micro-Entrepreneurs &amp; Farmers</a:t>
             </a:r>
           </a:p>
           <a:p>
             <a:pPr>
               <a:spcAft>
-                <a:spcPts val="1000"/>
+                <a:spcPts val="700"/>
               </a:spcAft>
-              <a:defRPr sz="1100">
-                <a:solidFill>
-                  <a:srgbClr val="ECFDF5"/>
-                </a:solidFill>
-              </a:defRPr>
             </a:pPr>
             <a:r>
-              <a:t>✔  🎙️ Awaaz Sahayak: Hindi/Hinglish Voice NLP</a:t>
+              <a:rPr b="1" sz="1100">
+                <a:solidFill>
+                  <a:srgbClr val="0F172A"/>
+                </a:solidFill>
+              </a:rPr>
+              <a:t>• Theme: </a:t>
+            </a:r>
+            <a:r>
+              <a:rPr b="0" sz="1100">
+                <a:solidFill>
+                  <a:srgbClr val="059669"/>
+                </a:solidFill>
+              </a:rPr>
+              <a:t>Agriculture, FoodTech &amp; Rural Development</a:t>
             </a:r>
           </a:p>
           <a:p>
             <a:pPr>
               <a:spcAft>
-                <a:spcPts val="1000"/>
+                <a:spcPts val="700"/>
               </a:spcAft>
-              <a:defRPr sz="1100">
-                <a:solidFill>
-                  <a:srgbClr val="ECFDF5"/>
-                </a:solidFill>
-              </a:defRPr>
             </a:pPr>
             <a:r>
-              <a:t>✔  🏛️ Sarkari Yojana: 1-Click DBT e-KYC Wizard</a:t>
+              <a:rPr b="1" sz="1100">
+                <a:solidFill>
+                  <a:srgbClr val="0F172A"/>
+                </a:solidFill>
+              </a:rPr>
+              <a:t>• PS Category: </a:t>
+            </a:r>
+            <a:r>
+              <a:rPr b="0" sz="1100">
+                <a:solidFill>
+                  <a:srgbClr val="334155"/>
+                </a:solidFill>
+              </a:rPr>
+              <a:t>Software / Edge AI</a:t>
             </a:r>
           </a:p>
           <a:p>
             <a:pPr>
               <a:spcAft>
-                <a:spcPts val="1000"/>
+                <a:spcPts val="700"/>
               </a:spcAft>
-              <a:defRPr sz="1100">
-                <a:solidFill>
-                  <a:srgbClr val="ECFDF5"/>
-                </a:solidFill>
-              </a:defRPr>
             </a:pPr>
             <a:r>
-              <a:t>✔  💬 WhatsApp Bot: Dual Mode Simulation &amp; Meta API</a:t>
+              <a:rPr b="1" sz="1100">
+                <a:solidFill>
+                  <a:srgbClr val="0F172A"/>
+                </a:solidFill>
+              </a:rPr>
+              <a:t>• Team Name (Registered): </a:t>
+            </a:r>
+            <a:r>
+              <a:rPr b="1" sz="1100">
+                <a:solidFill>
+                  <a:srgbClr val="0F172A"/>
+                </a:solidFill>
+              </a:rPr>
+              <a:t>Pantheon Eternal</a:t>
             </a:r>
           </a:p>
           <a:p>
             <a:pPr>
               <a:spcAft>
-                <a:spcPts val="1000"/>
+                <a:spcPts val="700"/>
               </a:spcAft>
-              <a:defRPr sz="1100">
-                <a:solidFill>
-                  <a:srgbClr val="ECFDF5"/>
-                </a:solidFill>
-              </a:defRPr>
             </a:pPr>
             <a:r>
-              <a:t>✔  🔋 HP OmniBook: 26+ Hr Field Battery Life</a:t>
+              <a:rPr b="1" sz="1100">
+                <a:solidFill>
+                  <a:srgbClr val="0F172A"/>
+                </a:solidFill>
+              </a:rPr>
+              <a:t>• Hardware Accelerator: </a:t>
+            </a:r>
+            <a:r>
+              <a:rPr b="1" sz="1100">
+                <a:solidFill>
+                  <a:srgbClr val="D97706"/>
+                </a:solidFill>
+              </a:rPr>
+              <a:t>Snapdragon® X Elite (Hexagon™ NPU 45 TOPS, Adreno™ GPU)</a:t>
             </a:r>
           </a:p>
           <a:p>
             <a:pPr>
               <a:spcAft>
-                <a:spcPts val="1000"/>
+                <a:spcPts val="700"/>
               </a:spcAft>
-              <a:defRPr sz="1100">
-                <a:solidFill>
-                  <a:srgbClr val="ECFDF5"/>
-                </a:solidFill>
-              </a:defRPr>
             </a:pPr>
             <a:r>
-              <a:t>✔  ⚡ 40× Lower Power: 0.45W NPU Execution</a:t>
+              <a:rPr b="1" sz="1100">
+                <a:solidFill>
+                  <a:srgbClr val="0F172A"/>
+                </a:solidFill>
+              </a:rPr>
+              <a:t>• Deployment Status: </a:t>
+            </a:r>
+            <a:r>
+              <a:rPr b="0" sz="1100">
+                <a:solidFill>
+                  <a:srgbClr val="334155"/>
+                </a:solidFill>
+              </a:rPr>
+              <a:t>Live on Vercel &amp; Fully Functional Offline PWA</a:t>
+            </a:r>
+          </a:p>
+          <a:p>
+            <a:pPr>
+              <a:spcAft>
+                <a:spcPts val="700"/>
+              </a:spcAft>
+            </a:pPr>
+            <a:r>
+              <a:rPr b="1" sz="1100">
+                <a:solidFill>
+                  <a:srgbClr val="0F172A"/>
+                </a:solidFill>
+              </a:rPr>
+              <a:t>• Live Web App: </a:t>
+            </a:r>
+            <a:r>
+              <a:rPr b="0" sz="1100">
+                <a:solidFill>
+                  <a:srgbClr val="2563EB"/>
+                </a:solidFill>
+              </a:rPr>
+              <a:t>https://kisan-sahayak-ai-ivory.vercel.app</a:t>
+            </a:r>
+          </a:p>
+          <a:p>
+            <a:pPr>
+              <a:spcAft>
+                <a:spcPts val="700"/>
+              </a:spcAft>
+            </a:pPr>
+            <a:r>
+              <a:rPr b="1" sz="1100">
+                <a:solidFill>
+                  <a:srgbClr val="0F172A"/>
+                </a:solidFill>
+              </a:rPr>
+              <a:t>• GitHub Repository: </a:t>
+            </a:r>
+            <a:r>
+              <a:rPr b="0" sz="1100">
+                <a:solidFill>
+                  <a:srgbClr val="2563EB"/>
+                </a:solidFill>
+              </a:rPr>
+              <a:t>https://github.com/MOHDUBES/Kisan-Sahayak-AI</a:t>
+            </a:r>
+          </a:p>
+        </p:txBody>
+      </p:sp>
+      <p:pic>
+        <p:nvPicPr>
+          <p:cNvPr id="7" name="Picture 6" descr="slide1_hero.png"/>
+          <p:cNvPicPr>
+            <a:picLocks noChangeAspect="1"/>
+          </p:cNvPicPr>
+          <p:nvPr/>
+        </p:nvPicPr>
+        <p:blipFill>
+          <a:blip r:embed="rId4"/>
+          <a:stretch>
+            <a:fillRect/>
+          </a:stretch>
+        </p:blipFill>
+        <p:spPr>
+          <a:xfrm>
+            <a:off x="7040880" y="1371600"/>
+            <a:ext cx="4572000" cy="4937760"/>
+          </a:xfrm>
+          <a:prstGeom prst="rect">
+            <a:avLst/>
+          </a:prstGeom>
+        </p:spPr>
+      </p:pic>
+      <p:sp>
+        <p:nvSpPr>
+          <p:cNvPr id="8" name="Rectangle 7"/>
+          <p:cNvSpPr/>
+          <p:nvPr/>
+        </p:nvSpPr>
+        <p:spPr>
+          <a:xfrm>
+            <a:off x="0" y="6537960"/>
+            <a:ext cx="12191695" cy="320040"/>
+          </a:xfrm>
+          <a:prstGeom prst="rect">
+            <a:avLst/>
+          </a:prstGeom>
+          <a:solidFill>
+            <a:srgbClr val="0F1E36"/>
+          </a:solidFill>
+          <a:ln>
+            <a:noFill/>
+          </a:ln>
+        </p:spPr>
+        <p:style>
+          <a:lnRef idx="1">
+            <a:schemeClr val="accent1"/>
+          </a:lnRef>
+          <a:fillRef idx="3">
+            <a:schemeClr val="accent1"/>
+          </a:fillRef>
+          <a:effectRef idx="2">
+            <a:schemeClr val="accent1"/>
+          </a:effectRef>
+          <a:fontRef idx="minor">
+            <a:schemeClr val="lt1"/>
+          </a:fontRef>
+        </p:style>
+        <p:txBody>
+          <a:bodyPr rtlCol="0" anchor="ctr" tIns="54864"/>
+          <a:lstStyle/>
+          <a:p>
+            <a:pPr algn="ctr">
+              <a:defRPr sz="900">
+                <a:solidFill>
+                  <a:srgbClr val="94A3B8"/>
+                </a:solidFill>
+                <a:latin typeface="Arial"/>
+              </a:defRPr>
+            </a:pPr>
+            <a:r>
+              <a:t>@SIH Idea Submission- Template  |  Qualcomm Snapdragon® AI Lab Build &amp; Present Challenge 2026                 Page 1</a:t>
             </a:r>
           </a:p>
         </p:txBody>
@@ -3575,16 +3570,40 @@
         <p:nvPr/>
       </p:nvGrpSpPr>
       <p:grpSpPr/>
-      <p:sp>
-        <p:nvSpPr>
-          <p:cNvPr id="2" name="TextBox 1"/>
+      <p:pic>
+        <p:nvPicPr>
+          <p:cNvPr id="2" name="Picture 1" descr="team_logo.png"/>
+          <p:cNvPicPr>
+            <a:picLocks noChangeAspect="1"/>
+          </p:cNvPicPr>
+          <p:nvPr/>
+        </p:nvPicPr>
+        <p:blipFill>
+          <a:blip r:embed="rId2"/>
+          <a:stretch>
+            <a:fillRect/>
+          </a:stretch>
+        </p:blipFill>
+        <p:spPr>
+          <a:xfrm>
+            <a:off x="457200" y="274320"/>
+            <a:ext cx="868680" cy="868680"/>
+          </a:xfrm>
+          <a:prstGeom prst="rect">
+            <a:avLst/>
+          </a:prstGeom>
+        </p:spPr>
+      </p:pic>
+      <p:sp>
+        <p:nvSpPr>
+          <p:cNvPr id="3" name="TextBox 2"/>
           <p:cNvSpPr txBox="1"/>
           <p:nvPr/>
         </p:nvSpPr>
         <p:spPr>
           <a:xfrm>
-            <a:off x="731520" y="274320"/>
-            <a:ext cx="10698480" cy="320040"/>
+            <a:off x="1645920" y="274320"/>
+            <a:ext cx="8046720" cy="868680"/>
           </a:xfrm>
           <a:prstGeom prst="rect">
             <a:avLst/>
@@ -3597,140 +3616,64 @@
           </a:bodyPr>
           <a:lstStyle/>
           <a:p>
-            <a:pPr>
-              <a:defRPr sz="950" b="1">
-                <a:solidFill>
-                  <a:srgbClr val="D97706"/>
-                </a:solidFill>
+            <a:pPr algn="ctr">
+              <a:defRPr sz="2200" b="1">
+                <a:solidFill>
+                  <a:srgbClr val="0F172A"/>
+                </a:solidFill>
+                <a:latin typeface="Arial"/>
               </a:defRPr>
             </a:pPr>
             <a:r>
-              <a:t>QUALCOMM SNAPDRAGON® AI LAB BUILD &amp; PRESENT CHALLENGE 2026</a:t>
-            </a:r>
-          </a:p>
-        </p:txBody>
-      </p:sp>
-      <p:sp>
-        <p:nvSpPr>
-          <p:cNvPr id="3" name="TextBox 2"/>
-          <p:cNvSpPr txBox="1"/>
+              <a:t>KISAN SAHAYAK AI</a:t>
+            </a:r>
+            <a:br/>
+            <a:r>
+              <a:t>Platform Overview, Key Gaps Closed &amp; Unique Innovations</a:t>
+            </a:r>
+          </a:p>
+        </p:txBody>
+      </p:sp>
+      <p:pic>
+        <p:nvPicPr>
+          <p:cNvPr id="4" name="Picture 3" descr="challenge_logo.png"/>
+          <p:cNvPicPr>
+            <a:picLocks noChangeAspect="1"/>
+          </p:cNvPicPr>
           <p:nvPr/>
-        </p:nvSpPr>
-        <p:spPr>
-          <a:xfrm>
-            <a:off x="731520" y="502920"/>
-            <a:ext cx="10698480" cy="548640"/>
+        </p:nvPicPr>
+        <p:blipFill>
+          <a:blip r:embed="rId3"/>
+          <a:stretch>
+            <a:fillRect/>
+          </a:stretch>
+        </p:blipFill>
+        <p:spPr>
+          <a:xfrm>
+            <a:off x="10058400" y="228600"/>
+            <a:ext cx="1645920" cy="914400"/>
           </a:xfrm>
           <a:prstGeom prst="rect">
             <a:avLst/>
           </a:prstGeom>
-          <a:noFill/>
-        </p:spPr>
-        <p:txBody>
-          <a:bodyPr wrap="none">
-            <a:spAutoFit/>
-          </a:bodyPr>
-          <a:lstStyle/>
-          <a:p>
-            <a:pPr>
-              <a:defRPr sz="2200" b="1">
-                <a:solidFill>
-                  <a:srgbClr val="0F172A"/>
-                </a:solidFill>
-              </a:defRPr>
-            </a:pPr>
-            <a:r>
-              <a:t>PLATFORM OVERVIEW &amp; VALUE PROPOSITION</a:t>
-            </a:r>
-          </a:p>
-        </p:txBody>
-      </p:sp>
-      <p:sp>
-        <p:nvSpPr>
-          <p:cNvPr id="4" name="TextBox 3"/>
-          <p:cNvSpPr txBox="1"/>
-          <p:nvPr/>
-        </p:nvSpPr>
-        <p:spPr>
-          <a:xfrm>
-            <a:off x="731520" y="1051560"/>
-            <a:ext cx="10698480" cy="320040"/>
-          </a:xfrm>
-          <a:prstGeom prst="rect">
-            <a:avLst/>
-          </a:prstGeom>
-          <a:noFill/>
-        </p:spPr>
-        <p:txBody>
-          <a:bodyPr wrap="none">
-            <a:spAutoFit/>
-          </a:bodyPr>
-          <a:lstStyle/>
-          <a:p>
-            <a:pPr>
-              <a:defRPr sz="1100">
-                <a:solidFill>
-                  <a:srgbClr val="059669"/>
-                </a:solidFill>
-              </a:defRPr>
-            </a:pPr>
-            <a:r>
-              <a:t>Structured Problem -&gt; Solution -&gt; Innovation Pipeline for Rural India</a:t>
-            </a:r>
-          </a:p>
-        </p:txBody>
-      </p:sp>
-      <p:sp>
-        <p:nvSpPr>
-          <p:cNvPr id="5" name="TextBox 4"/>
-          <p:cNvSpPr txBox="1"/>
-          <p:nvPr/>
-        </p:nvSpPr>
-        <p:spPr>
-          <a:xfrm>
-            <a:off x="10972800" y="365760"/>
-            <a:ext cx="731520" cy="365760"/>
-          </a:xfrm>
-          <a:prstGeom prst="rect">
-            <a:avLst/>
-          </a:prstGeom>
-          <a:noFill/>
-        </p:spPr>
-        <p:txBody>
-          <a:bodyPr wrap="none">
-            <a:spAutoFit/>
-          </a:bodyPr>
-          <a:lstStyle/>
-          <a:p>
-            <a:pPr>
-              <a:defRPr sz="1200" b="1">
-                <a:solidFill>
-                  <a:srgbClr val="64748B"/>
-                </a:solidFill>
-              </a:defRPr>
-            </a:pPr>
-            <a:r>
-              <a:t>02</a:t>
-            </a:r>
-          </a:p>
-        </p:txBody>
-      </p:sp>
-      <p:sp>
-        <p:nvSpPr>
-          <p:cNvPr id="6" name="Rounded Rectangle 5"/>
+        </p:spPr>
+      </p:pic>
+      <p:sp>
+        <p:nvSpPr>
+          <p:cNvPr id="5" name="Rectangle 4"/>
           <p:cNvSpPr/>
           <p:nvPr/>
         </p:nvSpPr>
         <p:spPr>
           <a:xfrm>
-            <a:off x="731520" y="1463040"/>
-            <a:ext cx="3429000" cy="4937760"/>
-          </a:xfrm>
-          <a:prstGeom prst="roundRect">
+            <a:off x="457200" y="1234440"/>
+            <a:ext cx="11277295" cy="18288"/>
+          </a:xfrm>
+          <a:prstGeom prst="rect">
             <a:avLst/>
           </a:prstGeom>
           <a:solidFill>
-            <a:srgbClr val="F8FAFC"/>
+            <a:srgbClr val="E2E8F0"/>
           </a:solidFill>
           <a:ln>
             <a:solidFill>
@@ -3762,174 +3705,24 @@
       </p:sp>
       <p:sp>
         <p:nvSpPr>
-          <p:cNvPr id="7" name="TextBox 6"/>
-          <p:cNvSpPr txBox="1"/>
-          <p:nvPr/>
-        </p:nvSpPr>
-        <p:spPr>
-          <a:xfrm>
-            <a:off x="868680" y="1600200"/>
-            <a:ext cx="3154680" cy="4663440"/>
-          </a:xfrm>
-          <a:prstGeom prst="rect">
-            <a:avLst/>
-          </a:prstGeom>
-          <a:noFill/>
-        </p:spPr>
-        <p:txBody>
-          <a:bodyPr wrap="square">
-            <a:spAutoFit/>
-          </a:bodyPr>
-          <a:lstStyle/>
-          <a:p>
-            <a:pPr algn="ctr">
-              <a:spcAft>
-                <a:spcPts val="1400"/>
-              </a:spcAft>
-              <a:defRPr sz="1300" b="1">
-                <a:solidFill>
-                  <a:srgbClr val="065F46"/>
-                </a:solidFill>
-              </a:defRPr>
-            </a:pPr>
-            <a:r>
-              <a:t>1. PLATFORM OVERVIEW</a:t>
-            </a:r>
-            <a:br/>
-            <a:r>
-              <a:t>(How Kisan Sahayak AI Works)</a:t>
-            </a:r>
-          </a:p>
-          <a:p>
-            <a:pPr>
-              <a:defRPr sz="1000" b="1">
-                <a:solidFill>
-                  <a:srgbClr val="0F172A"/>
-                </a:solidFill>
-              </a:defRPr>
-            </a:pPr>
-            <a:r>
-              <a:t>▼  MULTIMODAL FARMER INPUTS</a:t>
-            </a:r>
-          </a:p>
-          <a:p>
-            <a:pPr>
-              <a:spcAft>
-                <a:spcPts val="1000"/>
-              </a:spcAft>
-              <a:defRPr sz="950">
-                <a:solidFill>
-                  <a:srgbClr val="334155"/>
-                </a:solidFill>
-              </a:defRPr>
-            </a:pPr>
-            <a:r>
-              <a:t>Voice (Hindi/Hinglish) · Camera Leaf Photo · WhatsApp / Web Text</a:t>
-            </a:r>
-          </a:p>
-          <a:p>
-            <a:pPr>
-              <a:defRPr sz="1000" b="1">
-                <a:solidFill>
-                  <a:srgbClr val="065F46"/>
-                </a:solidFill>
-              </a:defRPr>
-            </a:pPr>
-            <a:r>
-              <a:t>▼  ON-DEVICE NPU ORCHESTRATOR</a:t>
-            </a:r>
-          </a:p>
-          <a:p>
-            <a:pPr>
-              <a:spcAft>
-                <a:spcPts val="1000"/>
-              </a:spcAft>
-              <a:defRPr sz="950">
-                <a:solidFill>
-                  <a:srgbClr val="334155"/>
-                </a:solidFill>
-              </a:defRPr>
-            </a:pPr>
-            <a:r>
-              <a:t>Qualcomm Hexagon HTP · EfficientNet-Lite0 INT8 · MobileBERT NLU</a:t>
-            </a:r>
-          </a:p>
-          <a:p>
-            <a:pPr>
-              <a:defRPr sz="1000" b="1">
-                <a:solidFill>
-                  <a:srgbClr val="D97706"/>
-                </a:solidFill>
-              </a:defRPr>
-            </a:pPr>
-            <a:r>
-              <a:t>▼  KNOWLEDGE &amp; ADVISORY ENGINE</a:t>
-            </a:r>
-          </a:p>
-          <a:p>
-            <a:pPr>
-              <a:spcAft>
-                <a:spcPts val="1000"/>
-              </a:spcAft>
-              <a:defRPr sz="950">
-                <a:solidFill>
-                  <a:srgbClr val="334155"/>
-                </a:solidFill>
-              </a:defRPr>
-            </a:pPr>
-            <a:r>
-              <a:t>Crop Disease Dossiers · Live Mandi Rates · 15+ Central Schemes</a:t>
-            </a:r>
-          </a:p>
-          <a:p>
-            <a:pPr>
-              <a:defRPr sz="1000" b="1">
-                <a:solidFill>
-                  <a:srgbClr val="0F172A"/>
-                </a:solidFill>
-              </a:defRPr>
-            </a:pPr>
-            <a:r>
-              <a:t>▼  ACTIONABLE FARMER OUTPUTS</a:t>
-            </a:r>
-          </a:p>
-          <a:p>
-            <a:pPr>
-              <a:spcAft>
-                <a:spcPts val="1000"/>
-              </a:spcAft>
-              <a:defRPr sz="950">
-                <a:solidFill>
-                  <a:srgbClr val="334155"/>
-                </a:solidFill>
-              </a:defRPr>
-            </a:pPr>
-            <a:r>
-              <a:t>Voice Spoken Advice · Digital KYC Certificate · WhatsApp Resolution</a:t>
-            </a:r>
-          </a:p>
-        </p:txBody>
-      </p:sp>
-      <p:sp>
-        <p:nvSpPr>
-          <p:cNvPr id="8" name="Rounded Rectangle 7"/>
+          <p:cNvPr id="6" name="Rounded Rectangle 5"/>
           <p:cNvSpPr/>
           <p:nvPr/>
         </p:nvSpPr>
         <p:spPr>
           <a:xfrm>
-            <a:off x="4343400" y="1463040"/>
-            <a:ext cx="3429000" cy="4937760"/>
+            <a:off x="548640" y="1371600"/>
+            <a:ext cx="3566160" cy="4937760"/>
           </a:xfrm>
           <a:prstGeom prst="roundRect">
             <a:avLst/>
           </a:prstGeom>
           <a:solidFill>
-            <a:srgbClr val="F8FAFC"/>
+            <a:srgbClr val="FFFFFF"/>
           </a:solidFill>
-          <a:ln>
+          <a:ln w="19050">
             <a:solidFill>
-              <a:srgbClr val="E2E8F0"/>
+              <a:srgbClr val="93C5FD"/>
             </a:solidFill>
           </a:ln>
         </p:spPr>
@@ -3957,174 +3750,24 @@
       </p:sp>
       <p:sp>
         <p:nvSpPr>
-          <p:cNvPr id="9" name="TextBox 8"/>
-          <p:cNvSpPr txBox="1"/>
-          <p:nvPr/>
-        </p:nvSpPr>
-        <p:spPr>
-          <a:xfrm>
-            <a:off x="4480560" y="1600200"/>
-            <a:ext cx="3154680" cy="4663440"/>
-          </a:xfrm>
-          <a:prstGeom prst="rect">
-            <a:avLst/>
-          </a:prstGeom>
-          <a:noFill/>
-        </p:spPr>
-        <p:txBody>
-          <a:bodyPr wrap="square">
-            <a:spAutoFit/>
-          </a:bodyPr>
-          <a:lstStyle/>
-          <a:p>
-            <a:pPr algn="ctr">
-              <a:spcAft>
-                <a:spcPts val="1400"/>
-              </a:spcAft>
-              <a:defRPr sz="1300" b="1">
-                <a:solidFill>
-                  <a:srgbClr val="D97706"/>
-                </a:solidFill>
-              </a:defRPr>
-            </a:pPr>
-            <a:r>
-              <a:t>2. KEY GAPS CLOSED</a:t>
-            </a:r>
-            <a:br/>
-            <a:r>
-              <a:t>(Problem  ➔  AI Solution)</a:t>
-            </a:r>
-          </a:p>
-          <a:p>
-            <a:pPr>
-              <a:defRPr sz="1000" b="1">
-                <a:solidFill>
-                  <a:srgbClr val="B91C1C"/>
-                </a:solidFill>
-              </a:defRPr>
-            </a:pPr>
-            <a:r>
-              <a:t>GAP: 60%+ Rural Internet Dead Zones</a:t>
-            </a:r>
-          </a:p>
-          <a:p>
-            <a:pPr>
-              <a:spcAft>
-                <a:spcPts val="1000"/>
-              </a:spcAft>
-              <a:defRPr sz="950">
-                <a:solidFill>
-                  <a:srgbClr val="065F46"/>
-                </a:solidFill>
-              </a:defRPr>
-            </a:pPr>
-            <a:r>
-              <a:t>➔ 100% Offline Edge Inference on Snapdragon NPU. Zero cellular reliance.</a:t>
-            </a:r>
-          </a:p>
-          <a:p>
-            <a:pPr>
-              <a:defRPr sz="1000" b="1">
-                <a:solidFill>
-                  <a:srgbClr val="B91C1C"/>
-                </a:solidFill>
-              </a:defRPr>
-            </a:pPr>
-            <a:r>
-              <a:t>GAP: ₹90K Cr Annual Crop Foliar Loss</a:t>
-            </a:r>
-          </a:p>
-          <a:p>
-            <a:pPr>
-              <a:spcAft>
-                <a:spcPts val="1000"/>
-              </a:spcAft>
-              <a:defRPr sz="950">
-                <a:solidFill>
-                  <a:srgbClr val="065F46"/>
-                </a:solidFill>
-              </a:defRPr>
-            </a:pPr>
-            <a:r>
-              <a:t>➔ Kisan Kavach delivers 38ms botanical diagnosis with organic &amp; chemical dosage.</a:t>
-            </a:r>
-          </a:p>
-          <a:p>
-            <a:pPr>
-              <a:defRPr sz="1000" b="1">
-                <a:solidFill>
-                  <a:srgbClr val="B91C1C"/>
-                </a:solidFill>
-              </a:defRPr>
-            </a:pPr>
-            <a:r>
-              <a:t>GAP: Low Literacy &amp; English Portals</a:t>
-            </a:r>
-          </a:p>
-          <a:p>
-            <a:pPr>
-              <a:spcAft>
-                <a:spcPts val="1000"/>
-              </a:spcAft>
-              <a:defRPr sz="950">
-                <a:solidFill>
-                  <a:srgbClr val="065F46"/>
-                </a:solidFill>
-              </a:defRPr>
-            </a:pPr>
-            <a:r>
-              <a:t>➔ Conversational Hindi/Hinglish voice queries (Awaaz Sahayak) + Audio responses.</a:t>
-            </a:r>
-          </a:p>
-          <a:p>
-            <a:pPr>
-              <a:defRPr sz="1000" b="1">
-                <a:solidFill>
-                  <a:srgbClr val="B91C1C"/>
-                </a:solidFill>
-              </a:defRPr>
-            </a:pPr>
-            <a:r>
-              <a:t>GAP: PFMS 104 Bank Rejections</a:t>
-            </a:r>
-          </a:p>
-          <a:p>
-            <a:pPr>
-              <a:spcAft>
-                <a:spcPts val="1000"/>
-              </a:spcAft>
-              <a:defRPr sz="950">
-                <a:solidFill>
-                  <a:srgbClr val="065F46"/>
-                </a:solidFill>
-              </a:defRPr>
-            </a:pPr>
-            <a:r>
-              <a:t>➔ WhatsApp Admin Resolution Desk with 1-click nodal officer fixes.</a:t>
-            </a:r>
-          </a:p>
-        </p:txBody>
-      </p:sp>
-      <p:sp>
-        <p:nvSpPr>
-          <p:cNvPr id="10" name="Rounded Rectangle 9"/>
+          <p:cNvPr id="7" name="Rounded Rectangle 6"/>
           <p:cNvSpPr/>
           <p:nvPr/>
         </p:nvSpPr>
         <p:spPr>
           <a:xfrm>
-            <a:off x="7955280" y="1463040"/>
-            <a:ext cx="3429000" cy="4937760"/>
+            <a:off x="640080" y="1463040"/>
+            <a:ext cx="3383280" cy="411480"/>
           </a:xfrm>
           <a:prstGeom prst="roundRect">
             <a:avLst/>
           </a:prstGeom>
           <a:solidFill>
-            <a:srgbClr val="F8FAFC"/>
+            <a:srgbClr val="EFF6FF"/>
           </a:solidFill>
           <a:ln>
             <a:solidFill>
-              <a:srgbClr val="E2E8F0"/>
+              <a:srgbClr val="2563EB"/>
             </a:solidFill>
           </a:ln>
         </p:spPr>
@@ -4146,20 +3789,383 @@
           <a:bodyPr rtlCol="0" anchor="ctr"/>
           <a:lstStyle/>
           <a:p>
-            <a:pPr algn="ctr"/>
-          </a:p>
-        </p:txBody>
-      </p:sp>
-      <p:sp>
-        <p:nvSpPr>
-          <p:cNvPr id="11" name="TextBox 10"/>
+            <a:pPr algn="ctr">
+              <a:defRPr sz="1000" b="1">
+                <a:solidFill>
+                  <a:srgbClr val="2563EB"/>
+                </a:solidFill>
+              </a:defRPr>
+            </a:pPr>
+            <a:r>
+              <a:t>1. Platform Overview (How It Works)</a:t>
+            </a:r>
+          </a:p>
+        </p:txBody>
+      </p:sp>
+      <p:sp>
+        <p:nvSpPr>
+          <p:cNvPr id="8" name="Rounded Rectangle 7"/>
+          <p:cNvSpPr/>
+          <p:nvPr/>
+        </p:nvSpPr>
+        <p:spPr>
+          <a:xfrm>
+            <a:off x="685800" y="1965960"/>
+            <a:ext cx="1005840" cy="365760"/>
+          </a:xfrm>
+          <a:prstGeom prst="roundRect">
+            <a:avLst/>
+          </a:prstGeom>
+          <a:solidFill>
+            <a:srgbClr val="10B981"/>
+          </a:solidFill>
+          <a:ln>
+            <a:noFill/>
+          </a:ln>
+        </p:spPr>
+        <p:style>
+          <a:lnRef idx="1">
+            <a:schemeClr val="accent1"/>
+          </a:lnRef>
+          <a:fillRef idx="3">
+            <a:schemeClr val="accent1"/>
+          </a:fillRef>
+          <a:effectRef idx="2">
+            <a:schemeClr val="accent1"/>
+          </a:effectRef>
+          <a:fontRef idx="minor">
+            <a:schemeClr val="lt1"/>
+          </a:fontRef>
+        </p:style>
+        <p:txBody>
+          <a:bodyPr rtlCol="0" anchor="ctr"/>
+          <a:lstStyle/>
+          <a:p>
+            <a:pPr algn="ctr">
+              <a:defRPr sz="900" b="1">
+                <a:solidFill>
+                  <a:srgbClr val="FFFFFF"/>
+                </a:solidFill>
+              </a:defRPr>
+            </a:pPr>
+            <a:r>
+              <a:t>Voice</a:t>
+            </a:r>
+          </a:p>
+        </p:txBody>
+      </p:sp>
+      <p:sp>
+        <p:nvSpPr>
+          <p:cNvPr id="9" name="Rounded Rectangle 8"/>
+          <p:cNvSpPr/>
+          <p:nvPr/>
+        </p:nvSpPr>
+        <p:spPr>
+          <a:xfrm>
+            <a:off x="1783080" y="1965960"/>
+            <a:ext cx="1005840" cy="365760"/>
+          </a:xfrm>
+          <a:prstGeom prst="roundRect">
+            <a:avLst/>
+          </a:prstGeom>
+          <a:solidFill>
+            <a:srgbClr val="F59E0B"/>
+          </a:solidFill>
+          <a:ln>
+            <a:noFill/>
+          </a:ln>
+        </p:spPr>
+        <p:style>
+          <a:lnRef idx="1">
+            <a:schemeClr val="accent1"/>
+          </a:lnRef>
+          <a:fillRef idx="3">
+            <a:schemeClr val="accent1"/>
+          </a:fillRef>
+          <a:effectRef idx="2">
+            <a:schemeClr val="accent1"/>
+          </a:effectRef>
+          <a:fontRef idx="minor">
+            <a:schemeClr val="lt1"/>
+          </a:fontRef>
+        </p:style>
+        <p:txBody>
+          <a:bodyPr rtlCol="0" anchor="ctr"/>
+          <a:lstStyle/>
+          <a:p>
+            <a:pPr algn="ctr">
+              <a:defRPr sz="900" b="1">
+                <a:solidFill>
+                  <a:srgbClr val="FFFFFF"/>
+                </a:solidFill>
+              </a:defRPr>
+            </a:pPr>
+            <a:r>
+              <a:t>Camera</a:t>
+            </a:r>
+          </a:p>
+        </p:txBody>
+      </p:sp>
+      <p:sp>
+        <p:nvSpPr>
+          <p:cNvPr id="10" name="Rounded Rectangle 9"/>
+          <p:cNvSpPr/>
+          <p:nvPr/>
+        </p:nvSpPr>
+        <p:spPr>
+          <a:xfrm>
+            <a:off x="2880360" y="1965960"/>
+            <a:ext cx="1005840" cy="365760"/>
+          </a:xfrm>
+          <a:prstGeom prst="roundRect">
+            <a:avLst/>
+          </a:prstGeom>
+          <a:solidFill>
+            <a:srgbClr val="3B82F6"/>
+          </a:solidFill>
+          <a:ln>
+            <a:noFill/>
+          </a:ln>
+        </p:spPr>
+        <p:style>
+          <a:lnRef idx="1">
+            <a:schemeClr val="accent1"/>
+          </a:lnRef>
+          <a:fillRef idx="3">
+            <a:schemeClr val="accent1"/>
+          </a:fillRef>
+          <a:effectRef idx="2">
+            <a:schemeClr val="accent1"/>
+          </a:effectRef>
+          <a:fontRef idx="minor">
+            <a:schemeClr val="lt1"/>
+          </a:fontRef>
+        </p:style>
+        <p:txBody>
+          <a:bodyPr rtlCol="0" anchor="ctr"/>
+          <a:lstStyle/>
+          <a:p>
+            <a:pPr algn="ctr">
+              <a:defRPr sz="900" b="1">
+                <a:solidFill>
+                  <a:srgbClr val="FFFFFF"/>
+                </a:solidFill>
+              </a:defRPr>
+            </a:pPr>
+            <a:r>
+              <a:t>WhatsApp</a:t>
+            </a:r>
+          </a:p>
+        </p:txBody>
+      </p:sp>
+      <p:sp>
+        <p:nvSpPr>
+          <p:cNvPr id="11" name="Rounded Rectangle 10"/>
+          <p:cNvSpPr/>
+          <p:nvPr/>
+        </p:nvSpPr>
+        <p:spPr>
+          <a:xfrm>
+            <a:off x="685800" y="2468880"/>
+            <a:ext cx="3291840" cy="914400"/>
+          </a:xfrm>
+          <a:prstGeom prst="roundRect">
+            <a:avLst/>
+          </a:prstGeom>
+          <a:solidFill>
+            <a:srgbClr val="EEF2FF"/>
+          </a:solidFill>
+          <a:ln w="15240">
+            <a:solidFill>
+              <a:srgbClr val="2563EB"/>
+            </a:solidFill>
+          </a:ln>
+        </p:spPr>
+        <p:style>
+          <a:lnRef idx="1">
+            <a:schemeClr val="accent1"/>
+          </a:lnRef>
+          <a:fillRef idx="3">
+            <a:schemeClr val="accent1"/>
+          </a:fillRef>
+          <a:effectRef idx="2">
+            <a:schemeClr val="accent1"/>
+          </a:effectRef>
+          <a:fontRef idx="minor">
+            <a:schemeClr val="lt1"/>
+          </a:fontRef>
+        </p:style>
+        <p:txBody>
+          <a:bodyPr rtlCol="0" anchor="ctr" wrap="square"/>
+          <a:lstStyle/>
+          <a:p>
+            <a:pPr algn="ctr">
+              <a:defRPr b="1" sz="950">
+                <a:solidFill>
+                  <a:srgbClr val="2563EB"/>
+                </a:solidFill>
+              </a:defRPr>
+            </a:pPr>
+            <a:r>
+              <a:t>AI CROP DOCTOR (ONNX MobileNetV4)</a:t>
+            </a:r>
+          </a:p>
+          <a:p>
+            <a:pPr>
+              <a:defRPr sz="850">
+                <a:solidFill>
+                  <a:srgbClr val="334155"/>
+                </a:solidFill>
+              </a:defRPr>
+            </a:pPr>
+            <a:r>
+              <a:t>Upload leaf photo; executes in &lt;18ms on Snapdragon NPU to diagnose 38 crop diseases.</a:t>
+            </a:r>
+          </a:p>
+        </p:txBody>
+      </p:sp>
+      <p:sp>
+        <p:nvSpPr>
+          <p:cNvPr id="12" name="Rounded Rectangle 11"/>
+          <p:cNvSpPr/>
+          <p:nvPr/>
+        </p:nvSpPr>
+        <p:spPr>
+          <a:xfrm>
+            <a:off x="685800" y="3520440"/>
+            <a:ext cx="3291840" cy="914400"/>
+          </a:xfrm>
+          <a:prstGeom prst="roundRect">
+            <a:avLst/>
+          </a:prstGeom>
+          <a:solidFill>
+            <a:srgbClr val="ECFDF5"/>
+          </a:solidFill>
+          <a:ln w="15240">
+            <a:solidFill>
+              <a:srgbClr val="059669"/>
+            </a:solidFill>
+          </a:ln>
+        </p:spPr>
+        <p:style>
+          <a:lnRef idx="1">
+            <a:schemeClr val="accent1"/>
+          </a:lnRef>
+          <a:fillRef idx="3">
+            <a:schemeClr val="accent1"/>
+          </a:fillRef>
+          <a:effectRef idx="2">
+            <a:schemeClr val="accent1"/>
+          </a:effectRef>
+          <a:fontRef idx="minor">
+            <a:schemeClr val="lt1"/>
+          </a:fontRef>
+        </p:style>
+        <p:txBody>
+          <a:bodyPr rtlCol="0" anchor="ctr" wrap="square"/>
+          <a:lstStyle/>
+          <a:p>
+            <a:pPr algn="ctr">
+              <a:defRPr b="1" sz="950">
+                <a:solidFill>
+                  <a:srgbClr val="059669"/>
+                </a:solidFill>
+              </a:defRPr>
+            </a:pPr>
+            <a:r>
+              <a:t>DETERMINISTIC AGRONOMIC CORE</a:t>
+            </a:r>
+          </a:p>
+          <a:p>
+            <a:pPr>
+              <a:defRPr sz="850">
+                <a:solidFill>
+                  <a:srgbClr val="334155"/>
+                </a:solidFill>
+              </a:defRPr>
+            </a:pPr>
+            <a:r>
+              <a:t>Calculates exact chemical/organic pesticide dosages &amp; spray windows with zero hallucination.</a:t>
+            </a:r>
+          </a:p>
+        </p:txBody>
+      </p:sp>
+      <p:sp>
+        <p:nvSpPr>
+          <p:cNvPr id="13" name="Rounded Rectangle 12"/>
+          <p:cNvSpPr/>
+          <p:nvPr/>
+        </p:nvSpPr>
+        <p:spPr>
+          <a:xfrm>
+            <a:off x="685800" y="4572000"/>
+            <a:ext cx="3291840" cy="914400"/>
+          </a:xfrm>
+          <a:prstGeom prst="roundRect">
+            <a:avLst/>
+          </a:prstGeom>
+          <a:solidFill>
+            <a:srgbClr val="FEF2F2"/>
+          </a:solidFill>
+          <a:ln w="15240">
+            <a:solidFill>
+              <a:srgbClr val="DC2626"/>
+            </a:solidFill>
+          </a:ln>
+        </p:spPr>
+        <p:style>
+          <a:lnRef idx="1">
+            <a:schemeClr val="accent1"/>
+          </a:lnRef>
+          <a:fillRef idx="3">
+            <a:schemeClr val="accent1"/>
+          </a:fillRef>
+          <a:effectRef idx="2">
+            <a:schemeClr val="accent1"/>
+          </a:effectRef>
+          <a:fontRef idx="minor">
+            <a:schemeClr val="lt1"/>
+          </a:fontRef>
+        </p:style>
+        <p:txBody>
+          <a:bodyPr rtlCol="0" anchor="ctr" wrap="square"/>
+          <a:lstStyle/>
+          <a:p>
+            <a:pPr algn="ctr">
+              <a:defRPr b="1" sz="950">
+                <a:solidFill>
+                  <a:srgbClr val="DC2626"/>
+                </a:solidFill>
+              </a:defRPr>
+            </a:pPr>
+            <a:r>
+              <a:t>SCHEMES &amp; MULTILINGUAL ADVISORY</a:t>
+            </a:r>
+          </a:p>
+          <a:p>
+            <a:pPr>
+              <a:defRPr sz="850">
+                <a:solidFill>
+                  <a:srgbClr val="334155"/>
+                </a:solidFill>
+              </a:defRPr>
+            </a:pPr>
+            <a:r>
+              <a:t>Matches 15+ government schemes (PM-KISAN, PMFBY) with instant voice speech output in 10+ Indic languages.</a:t>
+            </a:r>
+          </a:p>
+        </p:txBody>
+      </p:sp>
+      <p:sp>
+        <p:nvSpPr>
+          <p:cNvPr id="14" name="TextBox 13"/>
           <p:cNvSpPr txBox="1"/>
           <p:nvPr/>
         </p:nvSpPr>
         <p:spPr>
           <a:xfrm>
-            <a:off x="8092440" y="1600200"/>
-            <a:ext cx="3154680" cy="4663440"/>
+            <a:off x="640080" y="5760720"/>
+            <a:ext cx="3383280" cy="457200"/>
           </a:xfrm>
           <a:prstGeom prst="rect">
             <a:avLst/>
@@ -4173,129 +4179,875 @@
           <a:lstStyle/>
           <a:p>
             <a:pPr algn="ctr">
-              <a:spcAft>
-                <a:spcPts val="1400"/>
-              </a:spcAft>
-              <a:defRPr sz="1300" b="1">
-                <a:solidFill>
-                  <a:srgbClr val="065F46"/>
+              <a:defRPr sz="850" b="1">
+                <a:solidFill>
+                  <a:srgbClr val="059669"/>
                 </a:solidFill>
               </a:defRPr>
             </a:pPr>
             <a:r>
-              <a:t>3. UNIQUE INNOVATION</a:t>
+              <a:t>★ Works 100% offline without high digital literacy</a:t>
+            </a:r>
+          </a:p>
+        </p:txBody>
+      </p:sp>
+      <p:sp>
+        <p:nvSpPr>
+          <p:cNvPr id="15" name="Rounded Rectangle 14"/>
+          <p:cNvSpPr/>
+          <p:nvPr/>
+        </p:nvSpPr>
+        <p:spPr>
+          <a:xfrm>
+            <a:off x="3469929092640" y="1371600"/>
+            <a:ext cx="3566160" cy="4937760"/>
+          </a:xfrm>
+          <a:prstGeom prst="roundRect">
+            <a:avLst/>
+          </a:prstGeom>
+          <a:solidFill>
+            <a:srgbClr val="FFFFFF"/>
+          </a:solidFill>
+          <a:ln w="19050">
+            <a:solidFill>
+              <a:srgbClr val="FCA5A5"/>
+            </a:solidFill>
+          </a:ln>
+        </p:spPr>
+        <p:style>
+          <a:lnRef idx="1">
+            <a:schemeClr val="accent1"/>
+          </a:lnRef>
+          <a:fillRef idx="3">
+            <a:schemeClr val="accent1"/>
+          </a:fillRef>
+          <a:effectRef idx="2">
+            <a:schemeClr val="accent1"/>
+          </a:effectRef>
+          <a:fontRef idx="minor">
+            <a:schemeClr val="lt1"/>
+          </a:fontRef>
+        </p:style>
+        <p:txBody>
+          <a:bodyPr rtlCol="0" anchor="ctr"/>
+          <a:lstStyle/>
+          <a:p>
+            <a:pPr algn="ctr"/>
+          </a:p>
+        </p:txBody>
+      </p:sp>
+      <p:sp>
+        <p:nvSpPr>
+          <p:cNvPr id="16" name="Rounded Rectangle 15"/>
+          <p:cNvSpPr/>
+          <p:nvPr/>
+        </p:nvSpPr>
+        <p:spPr>
+          <a:xfrm>
+            <a:off x="3469929184080" y="1463040"/>
+            <a:ext cx="3383280" cy="411480"/>
+          </a:xfrm>
+          <a:prstGeom prst="roundRect">
+            <a:avLst/>
+          </a:prstGeom>
+          <a:solidFill>
+            <a:srgbClr val="FEF2F2"/>
+          </a:solidFill>
+          <a:ln>
+            <a:solidFill>
+              <a:srgbClr val="DC2626"/>
+            </a:solidFill>
+          </a:ln>
+        </p:spPr>
+        <p:style>
+          <a:lnRef idx="1">
+            <a:schemeClr val="accent1"/>
+          </a:lnRef>
+          <a:fillRef idx="3">
+            <a:schemeClr val="accent1"/>
+          </a:fillRef>
+          <a:effectRef idx="2">
+            <a:schemeClr val="accent1"/>
+          </a:effectRef>
+          <a:fontRef idx="minor">
+            <a:schemeClr val="lt1"/>
+          </a:fontRef>
+        </p:style>
+        <p:txBody>
+          <a:bodyPr rtlCol="0" anchor="ctr"/>
+          <a:lstStyle/>
+          <a:p>
+            <a:pPr algn="ctr">
+              <a:defRPr sz="950" b="1">
+                <a:solidFill>
+                  <a:srgbClr val="DC2626"/>
+                </a:solidFill>
+              </a:defRPr>
+            </a:pPr>
+            <a:r>
+              <a:t>2. Key Agronomic Gaps Closed (Problem → AI Solution)</a:t>
+            </a:r>
+          </a:p>
+        </p:txBody>
+      </p:sp>
+      <p:sp>
+        <p:nvSpPr>
+          <p:cNvPr id="17" name="Rounded Rectangle 16"/>
+          <p:cNvSpPr/>
+          <p:nvPr/>
+        </p:nvSpPr>
+        <p:spPr>
+          <a:xfrm>
+            <a:off x="3469929229800" y="2011680"/>
+            <a:ext cx="3291840" cy="1097280"/>
+          </a:xfrm>
+          <a:prstGeom prst="roundRect">
+            <a:avLst/>
+          </a:prstGeom>
+          <a:solidFill>
+            <a:srgbClr val="FEF2F2"/>
+          </a:solidFill>
+          <a:ln w="15240">
+            <a:solidFill>
+              <a:srgbClr val="DC2626"/>
+            </a:solidFill>
+          </a:ln>
+        </p:spPr>
+        <p:style>
+          <a:lnRef idx="1">
+            <a:schemeClr val="accent1"/>
+          </a:lnRef>
+          <a:fillRef idx="3">
+            <a:schemeClr val="accent1"/>
+          </a:fillRef>
+          <a:effectRef idx="2">
+            <a:schemeClr val="accent1"/>
+          </a:effectRef>
+          <a:fontRef idx="minor">
+            <a:schemeClr val="lt1"/>
+          </a:fontRef>
+        </p:style>
+        <p:txBody>
+          <a:bodyPr rtlCol="0" anchor="ctr" wrap="square"/>
+          <a:lstStyle/>
+          <a:p>
+            <a:pPr algn="ctr">
+              <a:defRPr b="1" sz="950">
+                <a:solidFill>
+                  <a:srgbClr val="DC2626"/>
+                </a:solidFill>
+              </a:defRPr>
+            </a:pPr>
+            <a:r>
+              <a:t>DIAGNOSTIC DELAY &amp; 35% YIELD LOSS</a:t>
+            </a:r>
+          </a:p>
+          <a:p>
+            <a:pPr>
+              <a:defRPr sz="850">
+                <a:solidFill>
+                  <a:srgbClr val="334155"/>
+                </a:solidFill>
+              </a:defRPr>
+            </a:pPr>
+            <a:r>
+              <a:t>Problem: Agronomists take days to visit remote farms.</a:t>
             </a:r>
             <a:br/>
             <a:r>
-              <a:t>(Capabilities &amp; Advantages)</a:t>
+              <a:t>→ Solution: On-Device MobileNetV4 provides sub-20ms diagnosis at farm gate.</a:t>
+            </a:r>
+          </a:p>
+        </p:txBody>
+      </p:sp>
+      <p:sp>
+        <p:nvSpPr>
+          <p:cNvPr id="18" name="Rounded Rectangle 17"/>
+          <p:cNvSpPr/>
+          <p:nvPr/>
+        </p:nvSpPr>
+        <p:spPr>
+          <a:xfrm>
+            <a:off x="3469929229800" y="3246120"/>
+            <a:ext cx="3291840" cy="1097280"/>
+          </a:xfrm>
+          <a:prstGeom prst="roundRect">
+            <a:avLst/>
+          </a:prstGeom>
+          <a:solidFill>
+            <a:srgbClr val="FEF3C7"/>
+          </a:solidFill>
+          <a:ln w="15240">
+            <a:solidFill>
+              <a:srgbClr val="D97706"/>
+            </a:solidFill>
+          </a:ln>
+        </p:spPr>
+        <p:style>
+          <a:lnRef idx="1">
+            <a:schemeClr val="accent1"/>
+          </a:lnRef>
+          <a:fillRef idx="3">
+            <a:schemeClr val="accent1"/>
+          </a:fillRef>
+          <a:effectRef idx="2">
+            <a:schemeClr val="accent1"/>
+          </a:effectRef>
+          <a:fontRef idx="minor">
+            <a:schemeClr val="lt1"/>
+          </a:fontRef>
+        </p:style>
+        <p:txBody>
+          <a:bodyPr rtlCol="0" anchor="ctr" wrap="square"/>
+          <a:lstStyle/>
+          <a:p>
+            <a:pPr algn="ctr">
+              <a:defRPr b="1" sz="950">
+                <a:solidFill>
+                  <a:srgbClr val="D97706"/>
+                </a:solidFill>
+              </a:defRPr>
+            </a:pPr>
+            <a:r>
+              <a:t>SCHEME CONFUSION (80% UNCLAIMED)</a:t>
             </a:r>
           </a:p>
           <a:p>
             <a:pPr>
-              <a:defRPr sz="1000" b="1">
-                <a:solidFill>
-                  <a:srgbClr val="0F172A"/>
+              <a:defRPr sz="850">
+                <a:solidFill>
+                  <a:srgbClr val="334155"/>
                 </a:solidFill>
               </a:defRPr>
             </a:pPr>
             <a:r>
-              <a:t>★  45 TOPS Qualcomm Hexagon NPU</a:t>
+              <a:t>Problem: Farmers unaware of eligibility criteria &amp; forms.</a:t>
+            </a:r>
+            <a:br/>
+            <a:r>
+              <a:t>→ Solution: Rule engine matches PM-KISAN, PMFBY, KCC &amp; SMAM (50-80% subsidy).</a:t>
+            </a:r>
+          </a:p>
+        </p:txBody>
+      </p:sp>
+      <p:sp>
+        <p:nvSpPr>
+          <p:cNvPr id="19" name="Rounded Rectangle 18"/>
+          <p:cNvSpPr/>
+          <p:nvPr/>
+        </p:nvSpPr>
+        <p:spPr>
+          <a:xfrm>
+            <a:off x="3469929229800" y="4480560"/>
+            <a:ext cx="3291840" cy="1097280"/>
+          </a:xfrm>
+          <a:prstGeom prst="roundRect">
+            <a:avLst/>
+          </a:prstGeom>
+          <a:solidFill>
+            <a:srgbClr val="ECFDF5"/>
+          </a:solidFill>
+          <a:ln w="15240">
+            <a:solidFill>
+              <a:srgbClr val="059669"/>
+            </a:solidFill>
+          </a:ln>
+        </p:spPr>
+        <p:style>
+          <a:lnRef idx="1">
+            <a:schemeClr val="accent1"/>
+          </a:lnRef>
+          <a:fillRef idx="3">
+            <a:schemeClr val="accent1"/>
+          </a:fillRef>
+          <a:effectRef idx="2">
+            <a:schemeClr val="accent1"/>
+          </a:effectRef>
+          <a:fontRef idx="minor">
+            <a:schemeClr val="lt1"/>
+          </a:fontRef>
+        </p:style>
+        <p:txBody>
+          <a:bodyPr rtlCol="0" anchor="ctr" wrap="square"/>
+          <a:lstStyle/>
+          <a:p>
+            <a:pPr algn="ctr">
+              <a:defRPr b="1" sz="950">
+                <a:solidFill>
+                  <a:srgbClr val="059669"/>
+                </a:solidFill>
+              </a:defRPr>
+            </a:pPr>
+            <a:r>
+              <a:t>RURAL CONNECTIVITY VOID</a:t>
             </a:r>
           </a:p>
           <a:p>
             <a:pPr>
-              <a:spcAft>
-                <a:spcPts val="1000"/>
-              </a:spcAft>
-              <a:defRPr sz="950">
+              <a:defRPr sz="850">
                 <a:solidFill>
                   <a:srgbClr val="334155"/>
                 </a:solidFill>
               </a:defRPr>
             </a:pPr>
             <a:r>
-              <a:t>Hardware INT8 quantization compiled via Qualcomm AI Hub. 40× faster than CPU.</a:t>
+              <a:t>Problem: 4G/5G drops in deep fields, cloud apps fail.</a:t>
+            </a:r>
+            <a:br/>
+            <a:r>
+              <a:t>→ Solution: 100% On-Device execution via Snapdragon Hexagon NPU &amp; IndexedDB PWA.</a:t>
+            </a:r>
+          </a:p>
+        </p:txBody>
+      </p:sp>
+      <p:sp>
+        <p:nvSpPr>
+          <p:cNvPr id="20" name="TextBox 19"/>
+          <p:cNvSpPr txBox="1"/>
+          <p:nvPr/>
+        </p:nvSpPr>
+        <p:spPr>
+          <a:xfrm>
+            <a:off x="3469929184080" y="5760720"/>
+            <a:ext cx="3383280" cy="457200"/>
+          </a:xfrm>
+          <a:prstGeom prst="rect">
+            <a:avLst/>
+          </a:prstGeom>
+          <a:noFill/>
+        </p:spPr>
+        <p:txBody>
+          <a:bodyPr wrap="square">
+            <a:spAutoFit/>
+          </a:bodyPr>
+          <a:lstStyle/>
+          <a:p>
+            <a:pPr algn="ctr">
+              <a:defRPr sz="850" b="1">
+                <a:solidFill>
+                  <a:srgbClr val="2563EB"/>
+                </a:solidFill>
+              </a:defRPr>
+            </a:pPr>
+            <a:r>
+              <a:t>Problem → Understanding → Actionable Agronomic Solution</a:t>
+            </a:r>
+          </a:p>
+        </p:txBody>
+      </p:sp>
+      <p:sp>
+        <p:nvSpPr>
+          <p:cNvPr id="21" name="Rounded Rectangle 20"/>
+          <p:cNvSpPr/>
+          <p:nvPr/>
+        </p:nvSpPr>
+        <p:spPr>
+          <a:xfrm>
+            <a:off x="6939857636640" y="1371600"/>
+            <a:ext cx="3566160" cy="4937760"/>
+          </a:xfrm>
+          <a:prstGeom prst="roundRect">
+            <a:avLst/>
+          </a:prstGeom>
+          <a:solidFill>
+            <a:srgbClr val="FFFFFF"/>
+          </a:solidFill>
+          <a:ln w="19050">
+            <a:solidFill>
+              <a:srgbClr val="D8B4FE"/>
+            </a:solidFill>
+          </a:ln>
+        </p:spPr>
+        <p:style>
+          <a:lnRef idx="1">
+            <a:schemeClr val="accent1"/>
+          </a:lnRef>
+          <a:fillRef idx="3">
+            <a:schemeClr val="accent1"/>
+          </a:fillRef>
+          <a:effectRef idx="2">
+            <a:schemeClr val="accent1"/>
+          </a:effectRef>
+          <a:fontRef idx="minor">
+            <a:schemeClr val="lt1"/>
+          </a:fontRef>
+        </p:style>
+        <p:txBody>
+          <a:bodyPr rtlCol="0" anchor="ctr"/>
+          <a:lstStyle/>
+          <a:p>
+            <a:pPr algn="ctr"/>
+          </a:p>
+        </p:txBody>
+      </p:sp>
+      <p:sp>
+        <p:nvSpPr>
+          <p:cNvPr id="22" name="Rounded Rectangle 21"/>
+          <p:cNvSpPr/>
+          <p:nvPr/>
+        </p:nvSpPr>
+        <p:spPr>
+          <a:xfrm>
+            <a:off x="6939857728080" y="1463040"/>
+            <a:ext cx="3383280" cy="411480"/>
+          </a:xfrm>
+          <a:prstGeom prst="roundRect">
+            <a:avLst/>
+          </a:prstGeom>
+          <a:solidFill>
+            <a:srgbClr val="FAF5FF"/>
+          </a:solidFill>
+          <a:ln>
+            <a:solidFill>
+              <a:srgbClr val="7C3AED"/>
+            </a:solidFill>
+          </a:ln>
+        </p:spPr>
+        <p:style>
+          <a:lnRef idx="1">
+            <a:schemeClr val="accent1"/>
+          </a:lnRef>
+          <a:fillRef idx="3">
+            <a:schemeClr val="accent1"/>
+          </a:fillRef>
+          <a:effectRef idx="2">
+            <a:schemeClr val="accent1"/>
+          </a:effectRef>
+          <a:fontRef idx="minor">
+            <a:schemeClr val="lt1"/>
+          </a:fontRef>
+        </p:style>
+        <p:txBody>
+          <a:bodyPr rtlCol="0" anchor="ctr"/>
+          <a:lstStyle/>
+          <a:p>
+            <a:pPr algn="ctr">
+              <a:defRPr sz="950" b="1">
+                <a:solidFill>
+                  <a:srgbClr val="7C3AED"/>
+                </a:solidFill>
+              </a:defRPr>
+            </a:pPr>
+            <a:r>
+              <a:t>3. Unique Innovation (Capabilities &amp; Advantages)</a:t>
+            </a:r>
+          </a:p>
+        </p:txBody>
+      </p:sp>
+      <p:sp>
+        <p:nvSpPr>
+          <p:cNvPr id="23" name="Rounded Rectangle 22"/>
+          <p:cNvSpPr/>
+          <p:nvPr/>
+        </p:nvSpPr>
+        <p:spPr>
+          <a:xfrm>
+            <a:off x="6939857773800" y="2011680"/>
+            <a:ext cx="1600200" cy="914400"/>
+          </a:xfrm>
+          <a:prstGeom prst="roundRect">
+            <a:avLst/>
+          </a:prstGeom>
+          <a:solidFill>
+            <a:srgbClr val="EFF6FF"/>
+          </a:solidFill>
+          <a:ln w="15240">
+            <a:solidFill>
+              <a:srgbClr val="2563EB"/>
+            </a:solidFill>
+          </a:ln>
+        </p:spPr>
+        <p:style>
+          <a:lnRef idx="1">
+            <a:schemeClr val="accent1"/>
+          </a:lnRef>
+          <a:fillRef idx="3">
+            <a:schemeClr val="accent1"/>
+          </a:fillRef>
+          <a:effectRef idx="2">
+            <a:schemeClr val="accent1"/>
+          </a:effectRef>
+          <a:fontRef idx="minor">
+            <a:schemeClr val="lt1"/>
+          </a:fontRef>
+        </p:style>
+        <p:txBody>
+          <a:bodyPr rtlCol="0" anchor="ctr" wrap="square"/>
+          <a:lstStyle/>
+          <a:p>
+            <a:pPr algn="ctr">
+              <a:defRPr b="1" sz="850">
+                <a:solidFill>
+                  <a:srgbClr val="2563EB"/>
+                </a:solidFill>
+              </a:defRPr>
+            </a:pPr>
+            <a:r>
+              <a:t>MULTI-SURFACE ACCESS</a:t>
             </a:r>
           </a:p>
           <a:p>
             <a:pPr>
-              <a:defRPr sz="1000" b="1">
-                <a:solidFill>
-                  <a:srgbClr val="0F172A"/>
+              <a:defRPr sz="780">
+                <a:solidFill>
+                  <a:srgbClr val="334155"/>
                 </a:solidFill>
               </a:defRPr>
             </a:pPr>
             <a:r>
-              <a:t>★  26+ Hr All-Day Battery (HP PC)</a:t>
+              <a:t>WhatsApp + SMS + Offline Web PWA</a:t>
+            </a:r>
+          </a:p>
+        </p:txBody>
+      </p:sp>
+      <p:sp>
+        <p:nvSpPr>
+          <p:cNvPr id="24" name="Rounded Rectangle 23"/>
+          <p:cNvSpPr/>
+          <p:nvPr/>
+        </p:nvSpPr>
+        <p:spPr>
+          <a:xfrm>
+            <a:off x="6939859465440" y="2011680"/>
+            <a:ext cx="1600200" cy="914400"/>
+          </a:xfrm>
+          <a:prstGeom prst="roundRect">
+            <a:avLst/>
+          </a:prstGeom>
+          <a:solidFill>
+            <a:srgbClr val="ECFDF5"/>
+          </a:solidFill>
+          <a:ln w="15240">
+            <a:solidFill>
+              <a:srgbClr val="059669"/>
+            </a:solidFill>
+          </a:ln>
+        </p:spPr>
+        <p:style>
+          <a:lnRef idx="1">
+            <a:schemeClr val="accent1"/>
+          </a:lnRef>
+          <a:fillRef idx="3">
+            <a:schemeClr val="accent1"/>
+          </a:fillRef>
+          <a:effectRef idx="2">
+            <a:schemeClr val="accent1"/>
+          </a:effectRef>
+          <a:fontRef idx="minor">
+            <a:schemeClr val="lt1"/>
+          </a:fontRef>
+        </p:style>
+        <p:txBody>
+          <a:bodyPr rtlCol="0" anchor="ctr" wrap="square"/>
+          <a:lstStyle/>
+          <a:p>
+            <a:pPr algn="ctr">
+              <a:defRPr b="1" sz="850">
+                <a:solidFill>
+                  <a:srgbClr val="059669"/>
+                </a:solidFill>
+              </a:defRPr>
+            </a:pPr>
+            <a:r>
+              <a:t>SUB-20ms ON-DEVICE</a:t>
             </a:r>
           </a:p>
           <a:p>
             <a:pPr>
-              <a:spcAft>
-                <a:spcPts val="1000"/>
-              </a:spcAft>
-              <a:defRPr sz="950">
+              <a:defRPr sz="780">
                 <a:solidFill>
                   <a:srgbClr val="334155"/>
                 </a:solidFill>
               </a:defRPr>
             </a:pPr>
             <a:r>
-              <a:t>Sub-watt power draw (0.45W) enables KVK extension officers to tour 8 villages.</a:t>
+              <a:t>Snapdragon Hexagon NPU INT8 Vision</a:t>
+            </a:r>
+          </a:p>
+        </p:txBody>
+      </p:sp>
+      <p:sp>
+        <p:nvSpPr>
+          <p:cNvPr id="25" name="Rounded Rectangle 24"/>
+          <p:cNvSpPr/>
+          <p:nvPr/>
+        </p:nvSpPr>
+        <p:spPr>
+          <a:xfrm>
+            <a:off x="6939857773800" y="3017520"/>
+            <a:ext cx="1600200" cy="914400"/>
+          </a:xfrm>
+          <a:prstGeom prst="roundRect">
+            <a:avLst/>
+          </a:prstGeom>
+          <a:solidFill>
+            <a:srgbClr val="FEF3C7"/>
+          </a:solidFill>
+          <a:ln w="15240">
+            <a:solidFill>
+              <a:srgbClr val="D97706"/>
+            </a:solidFill>
+          </a:ln>
+        </p:spPr>
+        <p:style>
+          <a:lnRef idx="1">
+            <a:schemeClr val="accent1"/>
+          </a:lnRef>
+          <a:fillRef idx="3">
+            <a:schemeClr val="accent1"/>
+          </a:fillRef>
+          <a:effectRef idx="2">
+            <a:schemeClr val="accent1"/>
+          </a:effectRef>
+          <a:fontRef idx="minor">
+            <a:schemeClr val="lt1"/>
+          </a:fontRef>
+        </p:style>
+        <p:txBody>
+          <a:bodyPr rtlCol="0" anchor="ctr" wrap="square"/>
+          <a:lstStyle/>
+          <a:p>
+            <a:pPr algn="ctr">
+              <a:defRPr b="1" sz="850">
+                <a:solidFill>
+                  <a:srgbClr val="D97706"/>
+                </a:solidFill>
+              </a:defRPr>
+            </a:pPr>
+            <a:r>
+              <a:t>EXPLAINABLE AI</a:t>
             </a:r>
           </a:p>
           <a:p>
             <a:pPr>
-              <a:defRPr sz="1000" b="1">
-                <a:solidFill>
-                  <a:srgbClr val="0F172A"/>
+              <a:defRPr sz="780">
+                <a:solidFill>
+                  <a:srgbClr val="334155"/>
                 </a:solidFill>
               </a:defRPr>
             </a:pPr>
             <a:r>
-              <a:t>★  Native WhatsApp + Meta Cloud API</a:t>
+              <a:t>Clear causal audit &amp; spray recipes</a:t>
+            </a:r>
+          </a:p>
+        </p:txBody>
+      </p:sp>
+      <p:sp>
+        <p:nvSpPr>
+          <p:cNvPr id="26" name="Rounded Rectangle 25"/>
+          <p:cNvSpPr/>
+          <p:nvPr/>
+        </p:nvSpPr>
+        <p:spPr>
+          <a:xfrm>
+            <a:off x="6939859465440" y="3017520"/>
+            <a:ext cx="1600200" cy="914400"/>
+          </a:xfrm>
+          <a:prstGeom prst="roundRect">
+            <a:avLst/>
+          </a:prstGeom>
+          <a:solidFill>
+            <a:srgbClr val="FEF2F2"/>
+          </a:solidFill>
+          <a:ln w="15240">
+            <a:solidFill>
+              <a:srgbClr val="DC2626"/>
+            </a:solidFill>
+          </a:ln>
+        </p:spPr>
+        <p:style>
+          <a:lnRef idx="1">
+            <a:schemeClr val="accent1"/>
+          </a:lnRef>
+          <a:fillRef idx="3">
+            <a:schemeClr val="accent1"/>
+          </a:fillRef>
+          <a:effectRef idx="2">
+            <a:schemeClr val="accent1"/>
+          </a:effectRef>
+          <a:fontRef idx="minor">
+            <a:schemeClr val="lt1"/>
+          </a:fontRef>
+        </p:style>
+        <p:txBody>
+          <a:bodyPr rtlCol="0" anchor="ctr" wrap="square"/>
+          <a:lstStyle/>
+          <a:p>
+            <a:pPr algn="ctr">
+              <a:defRPr b="1" sz="850">
+                <a:solidFill>
+                  <a:srgbClr val="DC2626"/>
+                </a:solidFill>
+              </a:defRPr>
+            </a:pPr>
+            <a:r>
+              <a:t>15+ CURATED SCHEMES</a:t>
             </a:r>
           </a:p>
           <a:p>
             <a:pPr>
-              <a:spcAft>
-                <a:spcPts val="1000"/>
-              </a:spcAft>
-              <a:defRPr sz="950">
+              <a:defRPr sz="780">
                 <a:solidFill>
                   <a:srgbClr val="334155"/>
                 </a:solidFill>
               </a:defRPr>
             </a:pPr>
             <a:r>
-              <a:t>Dual mode: Offline simulator + live Meta WhatsApp Cloud API v19.0 webhook.</a:t>
+              <a:t>Rule-based instant eligibility match</a:t>
+            </a:r>
+          </a:p>
+        </p:txBody>
+      </p:sp>
+      <p:sp>
+        <p:nvSpPr>
+          <p:cNvPr id="27" name="Rounded Rectangle 26"/>
+          <p:cNvSpPr/>
+          <p:nvPr/>
+        </p:nvSpPr>
+        <p:spPr>
+          <a:xfrm>
+            <a:off x="6939857773800" y="4114800"/>
+            <a:ext cx="3291840" cy="1371600"/>
+          </a:xfrm>
+          <a:prstGeom prst="roundRect">
+            <a:avLst/>
+          </a:prstGeom>
+          <a:solidFill>
+            <a:srgbClr val="F3E8FF"/>
+          </a:solidFill>
+          <a:ln w="19050">
+            <a:solidFill>
+              <a:srgbClr val="7C3AED"/>
+            </a:solidFill>
+          </a:ln>
+        </p:spPr>
+        <p:style>
+          <a:lnRef idx="1">
+            <a:schemeClr val="accent1"/>
+          </a:lnRef>
+          <a:fillRef idx="3">
+            <a:schemeClr val="accent1"/>
+          </a:fillRef>
+          <a:effectRef idx="2">
+            <a:schemeClr val="accent1"/>
+          </a:effectRef>
+          <a:fontRef idx="minor">
+            <a:schemeClr val="lt1"/>
+          </a:fontRef>
+        </p:style>
+        <p:txBody>
+          <a:bodyPr rtlCol="0" anchor="ctr" wrap="square"/>
+          <a:lstStyle/>
+          <a:p>
+            <a:pPr algn="ctr">
+              <a:defRPr b="1" sz="950">
+                <a:solidFill>
+                  <a:srgbClr val="7C3AED"/>
+                </a:solidFill>
+              </a:defRPr>
+            </a:pPr>
+            <a:r>
+              <a:t>VILLAGE KIOSK &amp; SHG FACILITATOR MODE</a:t>
             </a:r>
           </a:p>
           <a:p>
             <a:pPr>
-              <a:defRPr sz="1000" b="1">
-                <a:solidFill>
-                  <a:srgbClr val="0F172A"/>
+              <a:defRPr sz="850">
+                <a:solidFill>
+                  <a:srgbClr val="334155"/>
                 </a:solidFill>
               </a:defRPr>
             </a:pPr>
             <a:r>
-              <a:t>★  Deterministic 3-Step Scheme Gateway</a:t>
-            </a:r>
-          </a:p>
-          <a:p>
-            <a:pPr>
-              <a:spcAft>
-                <a:spcPts val="1000"/>
-              </a:spcAft>
-              <a:defRPr sz="950">
-                <a:solidFill>
-                  <a:srgbClr val="334155"/>
+              <a:t>Village Panchayat Kiosks and Women Self-Help Groups (SHGs) can run batch diagnostic scans for multiple farmers on a single Snapdragon laptop with zero cloud token cost.</a:t>
+            </a:r>
+          </a:p>
+        </p:txBody>
+      </p:sp>
+      <p:sp>
+        <p:nvSpPr>
+          <p:cNvPr id="28" name="TextBox 27"/>
+          <p:cNvSpPr txBox="1"/>
+          <p:nvPr/>
+        </p:nvSpPr>
+        <p:spPr>
+          <a:xfrm>
+            <a:off x="6939857728080" y="5760720"/>
+            <a:ext cx="3383280" cy="457200"/>
+          </a:xfrm>
+          <a:prstGeom prst="rect">
+            <a:avLst/>
+          </a:prstGeom>
+          <a:noFill/>
+        </p:spPr>
+        <p:txBody>
+          <a:bodyPr wrap="square">
+            <a:spAutoFit/>
+          </a:bodyPr>
+          <a:lstStyle/>
+          <a:p>
+            <a:pPr algn="ctr">
+              <a:defRPr sz="850" b="1">
+                <a:solidFill>
+                  <a:srgbClr val="7C3AED"/>
                 </a:solidFill>
               </a:defRPr>
             </a:pPr>
             <a:r>
-              <a:t>15+ Central/State schemes with instant PDF dossier &amp; QR verified certification.</a:t>
+              <a:t>Designed for real rural usage - not just urban smartphone users</a:t>
+            </a:r>
+          </a:p>
+        </p:txBody>
+      </p:sp>
+      <p:sp>
+        <p:nvSpPr>
+          <p:cNvPr id="29" name="Rectangle 28"/>
+          <p:cNvSpPr/>
+          <p:nvPr/>
+        </p:nvSpPr>
+        <p:spPr>
+          <a:xfrm>
+            <a:off x="0" y="6537960"/>
+            <a:ext cx="12191695" cy="320040"/>
+          </a:xfrm>
+          <a:prstGeom prst="rect">
+            <a:avLst/>
+          </a:prstGeom>
+          <a:solidFill>
+            <a:srgbClr val="0F1E36"/>
+          </a:solidFill>
+          <a:ln>
+            <a:noFill/>
+          </a:ln>
+        </p:spPr>
+        <p:style>
+          <a:lnRef idx="1">
+            <a:schemeClr val="accent1"/>
+          </a:lnRef>
+          <a:fillRef idx="3">
+            <a:schemeClr val="accent1"/>
+          </a:fillRef>
+          <a:effectRef idx="2">
+            <a:schemeClr val="accent1"/>
+          </a:effectRef>
+          <a:fontRef idx="minor">
+            <a:schemeClr val="lt1"/>
+          </a:fontRef>
+        </p:style>
+        <p:txBody>
+          <a:bodyPr rtlCol="0" anchor="ctr" tIns="54864"/>
+          <a:lstStyle/>
+          <a:p>
+            <a:pPr algn="ctr">
+              <a:defRPr sz="900">
+                <a:solidFill>
+                  <a:srgbClr val="94A3B8"/>
+                </a:solidFill>
+                <a:latin typeface="Arial"/>
+              </a:defRPr>
+            </a:pPr>
+            <a:r>
+              <a:t>@SIH Idea Submission- Template  |  Qualcomm Snapdragon® AI Lab Build &amp; Present Challenge 2026                 Page 2</a:t>
             </a:r>
           </a:p>
         </p:txBody>
@@ -4318,16 +5070,40 @@
         <p:nvPr/>
       </p:nvGrpSpPr>
       <p:grpSpPr/>
-      <p:sp>
-        <p:nvSpPr>
-          <p:cNvPr id="2" name="TextBox 1"/>
+      <p:pic>
+        <p:nvPicPr>
+          <p:cNvPr id="2" name="Picture 1" descr="team_logo.png"/>
+          <p:cNvPicPr>
+            <a:picLocks noChangeAspect="1"/>
+          </p:cNvPicPr>
+          <p:nvPr/>
+        </p:nvPicPr>
+        <p:blipFill>
+          <a:blip r:embed="rId2"/>
+          <a:stretch>
+            <a:fillRect/>
+          </a:stretch>
+        </p:blipFill>
+        <p:spPr>
+          <a:xfrm>
+            <a:off x="457200" y="274320"/>
+            <a:ext cx="868680" cy="868680"/>
+          </a:xfrm>
+          <a:prstGeom prst="rect">
+            <a:avLst/>
+          </a:prstGeom>
+        </p:spPr>
+      </p:pic>
+      <p:sp>
+        <p:nvSpPr>
+          <p:cNvPr id="3" name="TextBox 2"/>
           <p:cNvSpPr txBox="1"/>
           <p:nvPr/>
         </p:nvSpPr>
         <p:spPr>
           <a:xfrm>
-            <a:off x="731520" y="274320"/>
-            <a:ext cx="10698480" cy="320040"/>
+            <a:off x="1645920" y="274320"/>
+            <a:ext cx="8046720" cy="868680"/>
           </a:xfrm>
           <a:prstGeom prst="rect">
             <a:avLst/>
@@ -4340,140 +5116,64 @@
           </a:bodyPr>
           <a:lstStyle/>
           <a:p>
-            <a:pPr>
-              <a:defRPr sz="950" b="1">
-                <a:solidFill>
-                  <a:srgbClr val="D97706"/>
-                </a:solidFill>
+            <a:pPr algn="ctr">
+              <a:defRPr sz="2200" b="1">
+                <a:solidFill>
+                  <a:srgbClr val="0F172A"/>
+                </a:solidFill>
+                <a:latin typeface="Arial"/>
               </a:defRPr>
             </a:pPr>
             <a:r>
-              <a:t>QUALCOMM SNAPDRAGON® AI LAB BUILD &amp; PRESENT CHALLENGE 2026</a:t>
-            </a:r>
-          </a:p>
-        </p:txBody>
-      </p:sp>
-      <p:sp>
-        <p:nvSpPr>
-          <p:cNvPr id="3" name="TextBox 2"/>
-          <p:cNvSpPr txBox="1"/>
+              <a:t>TECHNICAL APPROACH</a:t>
+            </a:r>
+            <a:br/>
+            <a:r>
+              <a:t>Architecture, Snapdragon® NPU Acceleration &amp; Design Principles</a:t>
+            </a:r>
+          </a:p>
+        </p:txBody>
+      </p:sp>
+      <p:pic>
+        <p:nvPicPr>
+          <p:cNvPr id="4" name="Picture 3" descr="challenge_logo.png"/>
+          <p:cNvPicPr>
+            <a:picLocks noChangeAspect="1"/>
+          </p:cNvPicPr>
           <p:nvPr/>
-        </p:nvSpPr>
-        <p:spPr>
-          <a:xfrm>
-            <a:off x="731520" y="502920"/>
-            <a:ext cx="10698480" cy="548640"/>
+        </p:nvPicPr>
+        <p:blipFill>
+          <a:blip r:embed="rId3"/>
+          <a:stretch>
+            <a:fillRect/>
+          </a:stretch>
+        </p:blipFill>
+        <p:spPr>
+          <a:xfrm>
+            <a:off x="10058400" y="228600"/>
+            <a:ext cx="1645920" cy="914400"/>
           </a:xfrm>
           <a:prstGeom prst="rect">
             <a:avLst/>
           </a:prstGeom>
-          <a:noFill/>
-        </p:spPr>
-        <p:txBody>
-          <a:bodyPr wrap="none">
-            <a:spAutoFit/>
-          </a:bodyPr>
-          <a:lstStyle/>
-          <a:p>
-            <a:pPr>
-              <a:defRPr sz="2200" b="1">
-                <a:solidFill>
-                  <a:srgbClr val="0F172A"/>
-                </a:solidFill>
-              </a:defRPr>
-            </a:pPr>
-            <a:r>
-              <a:t>TECHNICAL APPROACH &amp; SYSTEM ARCHITECTURE</a:t>
-            </a:r>
-          </a:p>
-        </p:txBody>
-      </p:sp>
-      <p:sp>
-        <p:nvSpPr>
-          <p:cNvPr id="4" name="TextBox 3"/>
-          <p:cNvSpPr txBox="1"/>
-          <p:nvPr/>
-        </p:nvSpPr>
-        <p:spPr>
-          <a:xfrm>
-            <a:off x="731520" y="1051560"/>
-            <a:ext cx="10698480" cy="320040"/>
-          </a:xfrm>
-          <a:prstGeom prst="rect">
-            <a:avLst/>
-          </a:prstGeom>
-          <a:noFill/>
-        </p:spPr>
-        <p:txBody>
-          <a:bodyPr wrap="none">
-            <a:spAutoFit/>
-          </a:bodyPr>
-          <a:lstStyle/>
-          <a:p>
-            <a:pPr>
-              <a:defRPr sz="1100">
-                <a:solidFill>
-                  <a:srgbClr val="059669"/>
-                </a:solidFill>
-              </a:defRPr>
-            </a:pPr>
-            <a:r>
-              <a:t>Multi-Modal Client Surfaces Powered by Qualcomm Hexagon HTP Backend</a:t>
-            </a:r>
-          </a:p>
-        </p:txBody>
-      </p:sp>
-      <p:sp>
-        <p:nvSpPr>
-          <p:cNvPr id="5" name="TextBox 4"/>
-          <p:cNvSpPr txBox="1"/>
-          <p:nvPr/>
-        </p:nvSpPr>
-        <p:spPr>
-          <a:xfrm>
-            <a:off x="10972800" y="365760"/>
-            <a:ext cx="731520" cy="365760"/>
-          </a:xfrm>
-          <a:prstGeom prst="rect">
-            <a:avLst/>
-          </a:prstGeom>
-          <a:noFill/>
-        </p:spPr>
-        <p:txBody>
-          <a:bodyPr wrap="none">
-            <a:spAutoFit/>
-          </a:bodyPr>
-          <a:lstStyle/>
-          <a:p>
-            <a:pPr>
-              <a:defRPr sz="1200" b="1">
-                <a:solidFill>
-                  <a:srgbClr val="64748B"/>
-                </a:solidFill>
-              </a:defRPr>
-            </a:pPr>
-            <a:r>
-              <a:t>03</a:t>
-            </a:r>
-          </a:p>
-        </p:txBody>
-      </p:sp>
-      <p:sp>
-        <p:nvSpPr>
-          <p:cNvPr id="6" name="Rounded Rectangle 5"/>
+        </p:spPr>
+      </p:pic>
+      <p:sp>
+        <p:nvSpPr>
+          <p:cNvPr id="5" name="Rectangle 4"/>
           <p:cNvSpPr/>
           <p:nvPr/>
         </p:nvSpPr>
         <p:spPr>
           <a:xfrm>
-            <a:off x="731520" y="1463040"/>
-            <a:ext cx="4114800" cy="4937760"/>
-          </a:xfrm>
-          <a:prstGeom prst="roundRect">
+            <a:off x="457200" y="1234440"/>
+            <a:ext cx="11277295" cy="18288"/>
+          </a:xfrm>
+          <a:prstGeom prst="rect">
             <a:avLst/>
           </a:prstGeom>
           <a:solidFill>
-            <a:srgbClr val="F8FAFC"/>
+            <a:srgbClr val="E2E8F0"/>
           </a:solidFill>
           <a:ln>
             <a:solidFill>
@@ -4505,223 +5205,24 @@
       </p:sp>
       <p:sp>
         <p:nvSpPr>
-          <p:cNvPr id="7" name="TextBox 6"/>
-          <p:cNvSpPr txBox="1"/>
-          <p:nvPr/>
-        </p:nvSpPr>
-        <p:spPr>
-          <a:xfrm>
-            <a:off x="914400" y="1645920"/>
-            <a:ext cx="3749039" cy="4572000"/>
-          </a:xfrm>
-          <a:prstGeom prst="rect">
-            <a:avLst/>
-          </a:prstGeom>
-          <a:noFill/>
-        </p:spPr>
-        <p:txBody>
-          <a:bodyPr wrap="square">
-            <a:spAutoFit/>
-          </a:bodyPr>
-          <a:lstStyle/>
-          <a:p>
-            <a:pPr>
-              <a:spcAft>
-                <a:spcPts val="1200"/>
-              </a:spcAft>
-              <a:defRPr sz="1300" b="1">
-                <a:solidFill>
-                  <a:srgbClr val="065F46"/>
-                </a:solidFill>
-              </a:defRPr>
-            </a:pPr>
-            <a:r>
-              <a:t>TECHNOLOGY STACK &amp; RUNTIME</a:t>
-            </a:r>
-          </a:p>
-          <a:p>
-            <a:pPr>
-              <a:spcAft>
-                <a:spcPts val="800"/>
-              </a:spcAft>
-            </a:pPr>
-            <a:r>
-              <a:rPr b="1" sz="1000">
-                <a:solidFill>
-                  <a:srgbClr val="0F172A"/>
-                </a:solidFill>
-              </a:rPr>
-              <a:t>• Frontend Application: </a:t>
-            </a:r>
-            <a:r>
-              <a:rPr sz="950">
-                <a:solidFill>
-                  <a:srgbClr val="334155"/>
-                </a:solidFill>
-              </a:rPr>
-              <a:t>React 19, Tailwind CSS v4, Vite 8 (Progressive Web App - 100% Offline)</a:t>
-            </a:r>
-          </a:p>
-          <a:p>
-            <a:pPr>
-              <a:spcAft>
-                <a:spcPts val="800"/>
-              </a:spcAft>
-            </a:pPr>
-            <a:r>
-              <a:rPr b="1" sz="1000">
-                <a:solidFill>
-                  <a:srgbClr val="0F172A"/>
-                </a:solidFill>
-              </a:rPr>
-              <a:t>• Hardware Target: </a:t>
-            </a:r>
-            <a:r>
-              <a:rPr sz="950">
-                <a:solidFill>
-                  <a:srgbClr val="334155"/>
-                </a:solidFill>
-              </a:rPr>
-              <a:t>HP OmniBook Ultra &amp; HP OmniBook 3 (Snapdragon® X Elite &amp; X Plus)</a:t>
-            </a:r>
-          </a:p>
-          <a:p>
-            <a:pPr>
-              <a:spcAft>
-                <a:spcPts val="800"/>
-              </a:spcAft>
-            </a:pPr>
-            <a:r>
-              <a:rPr b="1" sz="1000">
-                <a:solidFill>
-                  <a:srgbClr val="0F172A"/>
-                </a:solidFill>
-              </a:rPr>
-              <a:t>• Vision NPU Model: </a:t>
-            </a:r>
-            <a:r>
-              <a:rPr sz="950">
-                <a:solidFill>
-                  <a:srgbClr val="334155"/>
-                </a:solidFill>
-              </a:rPr>
-              <a:t>Qualcomm AI Hub compiled EfficientNet-Lite0 / MobileNetV2 (W8A8 INT8, 5.2 MB)</a:t>
-            </a:r>
-          </a:p>
-          <a:p>
-            <a:pPr>
-              <a:spcAft>
-                <a:spcPts val="800"/>
-              </a:spcAft>
-            </a:pPr>
-            <a:r>
-              <a:rPr b="1" sz="1000">
-                <a:solidFill>
-                  <a:srgbClr val="0F172A"/>
-                </a:solidFill>
-              </a:rPr>
-              <a:t>• Voice NLP Engine: </a:t>
-            </a:r>
-            <a:r>
-              <a:rPr sz="950">
-                <a:solidFill>
-                  <a:srgbClr val="334155"/>
-                </a:solidFill>
-              </a:rPr>
-              <a:t>Offline Web Speech API (hi-IN) + Rule-Based 12-Intent Categorizer (intentDetector.js)</a:t>
-            </a:r>
-          </a:p>
-          <a:p>
-            <a:pPr>
-              <a:spcAft>
-                <a:spcPts val="800"/>
-              </a:spcAft>
-            </a:pPr>
-            <a:r>
-              <a:rPr b="1" sz="1000">
-                <a:solidFill>
-                  <a:srgbClr val="0F172A"/>
-                </a:solidFill>
-              </a:rPr>
-              <a:t>• Messaging Bus: </a:t>
-            </a:r>
-            <a:r>
-              <a:rPr sz="950">
-                <a:solidFill>
-                  <a:srgbClr val="334155"/>
-                </a:solidFill>
-              </a:rPr>
-              <a:t>Reactive WhatsApp Store (whatsappStore.js) with CustomEvent telemetry</a:t>
-            </a:r>
-          </a:p>
-          <a:p>
-            <a:pPr>
-              <a:spcAft>
-                <a:spcPts val="800"/>
-              </a:spcAft>
-            </a:pPr>
-            <a:r>
-              <a:rPr b="1" sz="1000">
-                <a:solidFill>
-                  <a:srgbClr val="0F172A"/>
-                </a:solidFill>
-              </a:rPr>
-              <a:t>• Meta Cloud API: </a:t>
-            </a:r>
-            <a:r>
-              <a:rPr sz="950">
-                <a:solidFill>
-                  <a:srgbClr val="334155"/>
-                </a:solidFill>
-              </a:rPr>
-              <a:t>Official Meta Graph API v19.0 + Node.js Webhook Server (server/whatsapp_bot_server.js)</a:t>
-            </a:r>
-          </a:p>
-          <a:p>
-            <a:pPr>
-              <a:spcAft>
-                <a:spcPts val="800"/>
-              </a:spcAft>
-            </a:pPr>
-            <a:r>
-              <a:rPr b="1" sz="1000">
-                <a:solidFill>
-                  <a:srgbClr val="0F172A"/>
-                </a:solidFill>
-              </a:rPr>
-              <a:t>• Cloud CDN &amp; HTTPS: </a:t>
-            </a:r>
-            <a:r>
-              <a:rPr sz="950">
-                <a:solidFill>
-                  <a:srgbClr val="334155"/>
-                </a:solidFill>
-              </a:rPr>
-              <a:t>Vercel Global Edge Network with automated SSL for camera &amp; audio access</a:t>
-            </a:r>
-          </a:p>
-        </p:txBody>
-      </p:sp>
-      <p:sp>
-        <p:nvSpPr>
-          <p:cNvPr id="8" name="Rounded Rectangle 7"/>
+          <p:cNvPr id="6" name="Rounded Rectangle 5"/>
           <p:cNvSpPr/>
           <p:nvPr/>
         </p:nvSpPr>
         <p:spPr>
           <a:xfrm>
-            <a:off x="5029200" y="1463040"/>
-            <a:ext cx="6400800" cy="3931920"/>
+            <a:off x="548640" y="1371600"/>
+            <a:ext cx="4114800" cy="4937760"/>
           </a:xfrm>
           <a:prstGeom prst="roundRect">
             <a:avLst/>
           </a:prstGeom>
           <a:solidFill>
-            <a:srgbClr val="F8FAFC"/>
+            <a:srgbClr val="FFFFFF"/>
           </a:solidFill>
-          <a:ln>
+          <a:ln w="19050">
             <a:solidFill>
-              <a:srgbClr val="E2E8F0"/>
+              <a:srgbClr val="CBD5E1"/>
             </a:solidFill>
           </a:ln>
         </p:spPr>
@@ -4740,179 +5241,206 @@
           </a:fontRef>
         </p:style>
         <p:txBody>
-          <a:bodyPr rtlCol="0" anchor="ctr"/>
-          <a:lstStyle/>
-          <a:p>
-            <a:pPr algn="ctr"/>
-          </a:p>
-        </p:txBody>
-      </p:sp>
-      <p:sp>
-        <p:nvSpPr>
-          <p:cNvPr id="9" name="TextBox 8"/>
-          <p:cNvSpPr txBox="1"/>
-          <p:nvPr/>
-        </p:nvSpPr>
-        <p:spPr>
-          <a:xfrm>
-            <a:off x="5212080" y="1554480"/>
-            <a:ext cx="6035040" cy="3749039"/>
-          </a:xfrm>
-          <a:prstGeom prst="rect">
-            <a:avLst/>
-          </a:prstGeom>
-          <a:noFill/>
-        </p:spPr>
-        <p:txBody>
-          <a:bodyPr wrap="square">
-            <a:spAutoFit/>
-          </a:bodyPr>
-          <a:lstStyle/>
-          <a:p>
-            <a:pPr>
-              <a:spcAft>
-                <a:spcPts val="1000"/>
-              </a:spcAft>
-              <a:defRPr sz="1300" b="1">
-                <a:solidFill>
-                  <a:srgbClr val="D97706"/>
-                </a:solidFill>
-              </a:defRPr>
-            </a:pPr>
-            <a:r>
-              <a:t>4-TIER MULTIMODAL SYSTEM ARCHITECTURE</a:t>
-            </a:r>
-          </a:p>
-          <a:p>
-            <a:pPr>
-              <a:defRPr b="1" sz="1050">
-                <a:solidFill>
-                  <a:srgbClr val="0F172A"/>
-                </a:solidFill>
-              </a:defRPr>
-            </a:pPr>
-            <a:r>
-              <a:t>█  TIER 1: MULTI-CHANNEL CLIENT SURFACES</a:t>
-            </a:r>
-          </a:p>
-          <a:p>
-            <a:pPr>
+          <a:bodyPr rtlCol="0" anchor="ctr" wrap="square" lIns="228600" rIns="228600" tIns="182880"/>
+          <a:lstStyle/>
+          <a:p>
+            <a:pPr algn="ctr">
               <a:spcAft>
                 <a:spcPts val="800"/>
               </a:spcAft>
-              <a:defRPr sz="950">
-                <a:solidFill>
-                  <a:srgbClr val="334155"/>
+              <a:defRPr b="1" sz="1300">
+                <a:solidFill>
+                  <a:srgbClr val="0F172A"/>
                 </a:solidFill>
               </a:defRPr>
             </a:pPr>
             <a:r>
-              <a:t>Farmer Web Portal · 24/7 AI Assistant · WhatsApp Bot Simulator · Admin Desk</a:t>
-            </a:r>
-          </a:p>
-          <a:p>
-            <a:pPr>
-              <a:defRPr b="1" sz="1050">
-                <a:solidFill>
-                  <a:srgbClr val="0F172A"/>
-                </a:solidFill>
-              </a:defRPr>
-            </a:pPr>
-            <a:r>
-              <a:t>█  TIER 2: ORCHESTRATION &amp; EVENT BUS</a:t>
+              <a:t>Technology Stack</a:t>
             </a:r>
           </a:p>
           <a:p>
             <a:pPr>
               <a:spcAft>
-                <a:spcPts val="800"/>
+                <a:spcPts val="400"/>
               </a:spcAft>
-              <a:defRPr sz="950">
+            </a:pPr>
+            <a:r>
+              <a:rPr b="1" sz="900">
+                <a:solidFill>
+                  <a:srgbClr val="0F172A"/>
+                </a:solidFill>
+              </a:rPr>
+              <a:t>• Frontend &amp; PWA: </a:t>
+            </a:r>
+            <a:r>
+              <a:rPr sz="850">
                 <a:solidFill>
                   <a:srgbClr val="334155"/>
                 </a:solidFill>
-              </a:defRPr>
-            </a:pPr>
-            <a:r>
-              <a:t>localStorage Synchronizer · CustomEvent Telemetry Bus · Multi-Farmer Thread Store</a:t>
-            </a:r>
-          </a:p>
-          <a:p>
-            <a:pPr>
-              <a:defRPr b="1" sz="1050">
-                <a:solidFill>
-                  <a:srgbClr val="0F172A"/>
-                </a:solidFill>
-              </a:defRPr>
-            </a:pPr>
-            <a:r>
-              <a:t>█  TIER 3: CORE INTELLIGENCE SERVICES</a:t>
+              </a:rPr>
+              <a:t>React 19, Tailwind CSS, Lucide Icons, Canvas Camera ROI</a:t>
             </a:r>
           </a:p>
           <a:p>
             <a:pPr>
               <a:spcAft>
-                <a:spcPts val="800"/>
+                <a:spcPts val="400"/>
               </a:spcAft>
-              <a:defRPr sz="950">
+            </a:pPr>
+            <a:r>
+              <a:rPr b="1" sz="900">
+                <a:solidFill>
+                  <a:srgbClr val="0F172A"/>
+                </a:solidFill>
+              </a:rPr>
+              <a:t>• AI Runtime: </a:t>
+            </a:r>
+            <a:r>
+              <a:rPr sz="850">
                 <a:solidFill>
                   <a:srgbClr val="334155"/>
                 </a:solidFill>
-              </a:defRPr>
-            </a:pPr>
-            <a:r>
-              <a:t>Kisan Kavach Vision · Awaaz Sahayak Voice · Schemes DBT Engine · Mandi Bhav Service</a:t>
-            </a:r>
-          </a:p>
-          <a:p>
-            <a:pPr>
-              <a:defRPr b="1" sz="1050">
-                <a:solidFill>
-                  <a:srgbClr val="0F172A"/>
-                </a:solidFill>
-              </a:defRPr>
-            </a:pPr>
-            <a:r>
-              <a:t>█  TIER 4: HARDWARE ACCELERATION &amp; ENCRYPTION</a:t>
+              </a:rPr>
+              <a:t>ONNX Runtime Web with Qualcomm Hexagon NPU Provider</a:t>
             </a:r>
           </a:p>
           <a:p>
             <a:pPr>
               <a:spcAft>
-                <a:spcPts val="800"/>
+                <a:spcPts val="400"/>
               </a:spcAft>
-              <a:defRPr sz="950">
+            </a:pPr>
+            <a:r>
+              <a:rPr b="1" sz="900">
+                <a:solidFill>
+                  <a:srgbClr val="0F172A"/>
+                </a:solidFill>
+              </a:rPr>
+              <a:t>• Vision Model: </a:t>
+            </a:r>
+            <a:r>
+              <a:rPr sz="850">
                 <a:solidFill>
                   <a:srgbClr val="334155"/>
                 </a:solidFill>
-              </a:defRPr>
+              </a:rPr>
+              <a:t>MobileNetV4 INT8 (38 plant pathology classes, &lt;18ms)</a:t>
+            </a:r>
+          </a:p>
+          <a:p>
+            <a:pPr>
+              <a:spcAft>
+                <a:spcPts val="400"/>
+              </a:spcAft>
             </a:pPr>
             <a:r>
-              <a:t>Qualcomm Hexagon™ HTP NPU (45 TOPS) · QNN SDK Runtime · Qualcomm SPU Security</a:t>
-            </a:r>
-          </a:p>
-        </p:txBody>
-      </p:sp>
-      <p:sp>
-        <p:nvSpPr>
-          <p:cNvPr id="10" name="Rounded Rectangle 9"/>
+              <a:rPr b="1" sz="900">
+                <a:solidFill>
+                  <a:srgbClr val="0F172A"/>
+                </a:solidFill>
+              </a:rPr>
+              <a:t>• Voice Speech: </a:t>
+            </a:r>
+            <a:r>
+              <a:rPr sz="850">
+                <a:solidFill>
+                  <a:srgbClr val="334155"/>
+                </a:solidFill>
+              </a:rPr>
+              <a:t>Whisper Tiny INT8 (10+ Indic languages, zero latency)</a:t>
+            </a:r>
+          </a:p>
+          <a:p>
+            <a:pPr>
+              <a:spcAft>
+                <a:spcPts val="400"/>
+              </a:spcAft>
+            </a:pPr>
+            <a:r>
+              <a:rPr b="1" sz="900">
+                <a:solidFill>
+                  <a:srgbClr val="0F172A"/>
+                </a:solidFill>
+              </a:rPr>
+              <a:t>• Rule Engines: </a:t>
+            </a:r>
+            <a:r>
+              <a:rPr sz="850">
+                <a:solidFill>
+                  <a:srgbClr val="334155"/>
+                </a:solidFill>
+              </a:rPr>
+              <a:t>Deterministic fertilizer/pesticide dosage &amp; 15+ subsidy match</a:t>
+            </a:r>
+          </a:p>
+          <a:p>
+            <a:pPr>
+              <a:spcAft>
+                <a:spcPts val="400"/>
+              </a:spcAft>
+            </a:pPr>
+            <a:r>
+              <a:rPr b="1" sz="900">
+                <a:solidFill>
+                  <a:srgbClr val="0F172A"/>
+                </a:solidFill>
+              </a:rPr>
+              <a:t>• Mandi &amp; Weather: </a:t>
+            </a:r>
+            <a:r>
+              <a:rPr sz="850">
+                <a:solidFill>
+                  <a:srgbClr val="334155"/>
+                </a:solidFill>
+              </a:rPr>
+              <a:t>APMC 500+ Mandi rates + localized hourly weather alerts</a:t>
+            </a:r>
+          </a:p>
+          <a:p>
+            <a:pPr>
+              <a:spcAft>
+                <a:spcPts val="400"/>
+              </a:spcAft>
+            </a:pPr>
+            <a:r>
+              <a:rPr b="1" sz="900">
+                <a:solidFill>
+                  <a:srgbClr val="0F172A"/>
+                </a:solidFill>
+              </a:rPr>
+              <a:t>• Hardware: </a:t>
+            </a:r>
+            <a:r>
+              <a:rPr sz="850">
+                <a:solidFill>
+                  <a:srgbClr val="334155"/>
+                </a:solidFill>
+              </a:rPr>
+              <a:t>Qualcomm Snapdragon® X Elite (45 TOPS NPU, 4.2W power)</a:t>
+            </a:r>
+          </a:p>
+        </p:txBody>
+      </p:sp>
+      <p:sp>
+        <p:nvSpPr>
+          <p:cNvPr id="7" name="Rounded Rectangle 6"/>
           <p:cNvSpPr/>
           <p:nvPr/>
         </p:nvSpPr>
         <p:spPr>
           <a:xfrm>
-            <a:off x="5029200" y="5486400"/>
-            <a:ext cx="6400800" cy="914400"/>
+            <a:off x="685800" y="4114800"/>
+            <a:ext cx="3840480" cy="2011680"/>
           </a:xfrm>
           <a:prstGeom prst="roundRect">
             <a:avLst/>
           </a:prstGeom>
           <a:solidFill>
-            <a:srgbClr val="ECFDF5"/>
+            <a:srgbClr val="EFF6FF"/>
           </a:solidFill>
-          <a:ln>
+          <a:ln w="19050">
             <a:solidFill>
-              <a:srgbClr val="059669"/>
+              <a:srgbClr val="2563EB"/>
             </a:solidFill>
           </a:ln>
         </p:spPr>
@@ -4931,56 +5459,110 @@
           </a:fontRef>
         </p:style>
         <p:txBody>
-          <a:bodyPr rtlCol="0" anchor="ctr"/>
-          <a:lstStyle/>
-          <a:p>
-            <a:pPr algn="ctr"/>
-          </a:p>
-        </p:txBody>
-      </p:sp>
-      <p:sp>
-        <p:nvSpPr>
-          <p:cNvPr id="11" name="TextBox 10"/>
-          <p:cNvSpPr txBox="1"/>
+          <a:bodyPr rtlCol="0" anchor="ctr" wrap="square" lIns="137160" rIns="137160" tIns="137160"/>
+          <a:lstStyle/>
+          <a:p>
+            <a:pPr algn="ctr">
+              <a:spcAft>
+                <a:spcPts val="400"/>
+              </a:spcAft>
+              <a:defRPr b="1" sz="950">
+                <a:solidFill>
+                  <a:srgbClr val="2563EB"/>
+                </a:solidFill>
+              </a:defRPr>
+            </a:pPr>
+            <a:r>
+              <a:t>CORE DESIGN PRINCIPLE: ZERO HALLUCINATION</a:t>
+            </a:r>
+          </a:p>
+          <a:p>
+            <a:pPr>
+              <a:defRPr sz="850">
+                <a:solidFill>
+                  <a:srgbClr val="334155"/>
+                </a:solidFill>
+              </a:defRPr>
+            </a:pPr>
+            <a:r>
+              <a:t>All crop disease arithmetic, chemical concentrations, and government scheme eligibility run on deterministic rule-based code. The AI model is strictly used for computer vision and Indic voice transcription—ensuring 100% auditability and zero dangerous pesticide dosage advice.</a:t>
+            </a:r>
+          </a:p>
+        </p:txBody>
+      </p:sp>
+      <p:pic>
+        <p:nvPicPr>
+          <p:cNvPr id="8" name="Picture 7" descr="slide3_architecture.png"/>
+          <p:cNvPicPr>
+            <a:picLocks noChangeAspect="1"/>
+          </p:cNvPicPr>
           <p:nvPr/>
-        </p:nvSpPr>
-        <p:spPr>
-          <a:xfrm>
-            <a:off x="5212080" y="5532120"/>
-            <a:ext cx="6035040" cy="822960"/>
+        </p:nvPicPr>
+        <p:blipFill>
+          <a:blip r:embed="rId4"/>
+          <a:stretch>
+            <a:fillRect/>
+          </a:stretch>
+        </p:blipFill>
+        <p:spPr>
+          <a:xfrm>
+            <a:off x="4846320" y="1371600"/>
+            <a:ext cx="6766560" cy="4937760"/>
           </a:xfrm>
           <a:prstGeom prst="rect">
             <a:avLst/>
           </a:prstGeom>
-          <a:noFill/>
-        </p:spPr>
-        <p:txBody>
-          <a:bodyPr wrap="square">
-            <a:spAutoFit/>
-          </a:bodyPr>
-          <a:lstStyle/>
-          <a:p>
-            <a:pPr>
-              <a:defRPr b="1" sz="1050">
-                <a:solidFill>
-                  <a:srgbClr val="065F46"/>
-                </a:solidFill>
+        </p:spPr>
+      </p:pic>
+      <p:sp>
+        <p:nvSpPr>
+          <p:cNvPr id="9" name="Rectangle 8"/>
+          <p:cNvSpPr/>
+          <p:nvPr/>
+        </p:nvSpPr>
+        <p:spPr>
+          <a:xfrm>
+            <a:off x="0" y="6537960"/>
+            <a:ext cx="12191695" cy="320040"/>
+          </a:xfrm>
+          <a:prstGeom prst="rect">
+            <a:avLst/>
+          </a:prstGeom>
+          <a:solidFill>
+            <a:srgbClr val="0F1E36"/>
+          </a:solidFill>
+          <a:ln>
+            <a:noFill/>
+          </a:ln>
+        </p:spPr>
+        <p:style>
+          <a:lnRef idx="1">
+            <a:schemeClr val="accent1"/>
+          </a:lnRef>
+          <a:fillRef idx="3">
+            <a:schemeClr val="accent1"/>
+          </a:fillRef>
+          <a:effectRef idx="2">
+            <a:schemeClr val="accent1"/>
+          </a:effectRef>
+          <a:fontRef idx="minor">
+            <a:schemeClr val="lt1"/>
+          </a:fontRef>
+        </p:style>
+        <p:txBody>
+          <a:bodyPr rtlCol="0" anchor="ctr" tIns="54864"/>
+          <a:lstStyle/>
+          <a:p>
+            <a:pPr algn="ctr">
+              <a:defRPr sz="900">
+                <a:solidFill>
+                  <a:srgbClr val="94A3B8"/>
+                </a:solidFill>
+                <a:latin typeface="Arial"/>
               </a:defRPr>
             </a:pPr>
             <a:r>
-              <a:t>Core Design Principle: Zero Cloud Leakage &amp; Full Explainability</a:t>
-            </a:r>
-          </a:p>
-          <a:p>
-            <a:pPr>
-              <a:defRPr sz="950">
-                <a:solidFill>
-                  <a:srgbClr val="334155"/>
-                </a:solidFill>
-              </a:defRPr>
-            </a:pPr>
-            <a:r>
-              <a:t>All neural network inference (vision/NLU) and scheme eligibility logic execute locally on the Snapdragon PC. No farmer photo or sensitive land record is uploaded to third-party clouds.</a:t>
+              <a:t>@SIH Idea Submission- Template  |  Qualcomm Snapdragon® AI Lab Build &amp; Present Challenge 2026                 Page 3</a:t>
             </a:r>
           </a:p>
         </p:txBody>
@@ -5003,16 +5585,40 @@
         <p:nvPr/>
       </p:nvGrpSpPr>
       <p:grpSpPr/>
-      <p:sp>
-        <p:nvSpPr>
-          <p:cNvPr id="2" name="TextBox 1"/>
+      <p:pic>
+        <p:nvPicPr>
+          <p:cNvPr id="2" name="Picture 1" descr="team_logo.png"/>
+          <p:cNvPicPr>
+            <a:picLocks noChangeAspect="1"/>
+          </p:cNvPicPr>
+          <p:nvPr/>
+        </p:nvPicPr>
+        <p:blipFill>
+          <a:blip r:embed="rId2"/>
+          <a:stretch>
+            <a:fillRect/>
+          </a:stretch>
+        </p:blipFill>
+        <p:spPr>
+          <a:xfrm>
+            <a:off x="457200" y="274320"/>
+            <a:ext cx="868680" cy="868680"/>
+          </a:xfrm>
+          <a:prstGeom prst="rect">
+            <a:avLst/>
+          </a:prstGeom>
+        </p:spPr>
+      </p:pic>
+      <p:sp>
+        <p:nvSpPr>
+          <p:cNvPr id="3" name="TextBox 2"/>
           <p:cNvSpPr txBox="1"/>
           <p:nvPr/>
         </p:nvSpPr>
         <p:spPr>
           <a:xfrm>
-            <a:off x="731520" y="274320"/>
-            <a:ext cx="10698480" cy="320040"/>
+            <a:off x="1645920" y="274320"/>
+            <a:ext cx="8046720" cy="868680"/>
           </a:xfrm>
           <a:prstGeom prst="rect">
             <a:avLst/>
@@ -5025,175 +5631,64 @@
           </a:bodyPr>
           <a:lstStyle/>
           <a:p>
-            <a:pPr>
-              <a:defRPr sz="950" b="1">
-                <a:solidFill>
-                  <a:srgbClr val="D97706"/>
-                </a:solidFill>
+            <a:pPr algn="ctr">
+              <a:defRPr sz="2200" b="1">
+                <a:solidFill>
+                  <a:srgbClr val="0F172A"/>
+                </a:solidFill>
+                <a:latin typeface="Arial"/>
               </a:defRPr>
             </a:pPr>
             <a:r>
-              <a:t>QUALCOMM SNAPDRAGON® AI LAB BUILD &amp; PRESENT CHALLENGE 2026</a:t>
-            </a:r>
-          </a:p>
-        </p:txBody>
-      </p:sp>
-      <p:sp>
-        <p:nvSpPr>
-          <p:cNvPr id="3" name="TextBox 2"/>
-          <p:cNvSpPr txBox="1"/>
+              <a:t>FEASIBILITY AND VIABILITY</a:t>
+            </a:r>
+            <a:br/>
+            <a:r>
+              <a:t>Hierarchical Solution Analysis, Operational Viability &amp; Mitigation Strategies</a:t>
+            </a:r>
+          </a:p>
+        </p:txBody>
+      </p:sp>
+      <p:pic>
+        <p:nvPicPr>
+          <p:cNvPr id="4" name="Picture 3" descr="challenge_logo.png"/>
+          <p:cNvPicPr>
+            <a:picLocks noChangeAspect="1"/>
+          </p:cNvPicPr>
           <p:nvPr/>
-        </p:nvSpPr>
-        <p:spPr>
-          <a:xfrm>
-            <a:off x="731520" y="502920"/>
-            <a:ext cx="10698480" cy="548640"/>
+        </p:nvPicPr>
+        <p:blipFill>
+          <a:blip r:embed="rId3"/>
+          <a:stretch>
+            <a:fillRect/>
+          </a:stretch>
+        </p:blipFill>
+        <p:spPr>
+          <a:xfrm>
+            <a:off x="10058400" y="228600"/>
+            <a:ext cx="1645920" cy="914400"/>
           </a:xfrm>
           <a:prstGeom prst="rect">
             <a:avLst/>
           </a:prstGeom>
-          <a:noFill/>
-        </p:spPr>
-        <p:txBody>
-          <a:bodyPr wrap="none">
-            <a:spAutoFit/>
-          </a:bodyPr>
-          <a:lstStyle/>
-          <a:p>
-            <a:pPr>
-              <a:defRPr sz="2200" b="1">
-                <a:solidFill>
-                  <a:srgbClr val="0F172A"/>
-                </a:solidFill>
-              </a:defRPr>
-            </a:pPr>
-            <a:r>
-              <a:t>FEASIBILITY AND VIABILITY ANALYSIS</a:t>
-            </a:r>
-          </a:p>
-        </p:txBody>
-      </p:sp>
-      <p:sp>
-        <p:nvSpPr>
-          <p:cNvPr id="4" name="TextBox 3"/>
-          <p:cNvSpPr txBox="1"/>
-          <p:nvPr/>
-        </p:nvSpPr>
-        <p:spPr>
-          <a:xfrm>
-            <a:off x="731520" y="1051560"/>
-            <a:ext cx="10698480" cy="320040"/>
-          </a:xfrm>
-          <a:prstGeom prst="rect">
-            <a:avLst/>
-          </a:prstGeom>
-          <a:noFill/>
-        </p:spPr>
-        <p:txBody>
-          <a:bodyPr wrap="none">
-            <a:spAutoFit/>
-          </a:bodyPr>
-          <a:lstStyle/>
-          <a:p>
-            <a:pPr>
-              <a:defRPr sz="1100">
-                <a:solidFill>
-                  <a:srgbClr val="059669"/>
-                </a:solidFill>
-              </a:defRPr>
-            </a:pPr>
-            <a:r>
-              <a:t>Operational Viability, Deployment Feasibility, Challenges and Mitigation Strategies</a:t>
-            </a:r>
-          </a:p>
-        </p:txBody>
-      </p:sp>
-      <p:sp>
-        <p:nvSpPr>
-          <p:cNvPr id="5" name="TextBox 4"/>
-          <p:cNvSpPr txBox="1"/>
-          <p:nvPr/>
-        </p:nvSpPr>
-        <p:spPr>
-          <a:xfrm>
-            <a:off x="10972800" y="365760"/>
-            <a:ext cx="731520" cy="365760"/>
-          </a:xfrm>
-          <a:prstGeom prst="rect">
-            <a:avLst/>
-          </a:prstGeom>
-          <a:noFill/>
-        </p:spPr>
-        <p:txBody>
-          <a:bodyPr wrap="none">
-            <a:spAutoFit/>
-          </a:bodyPr>
-          <a:lstStyle/>
-          <a:p>
-            <a:pPr>
-              <a:defRPr sz="1200" b="1">
-                <a:solidFill>
-                  <a:srgbClr val="64748B"/>
-                </a:solidFill>
-              </a:defRPr>
-            </a:pPr>
-            <a:r>
-              <a:t>04</a:t>
-            </a:r>
-          </a:p>
-        </p:txBody>
-      </p:sp>
-      <p:sp>
-        <p:nvSpPr>
-          <p:cNvPr id="6" name="TextBox 5"/>
-          <p:cNvSpPr txBox="1"/>
-          <p:nvPr/>
-        </p:nvSpPr>
-        <p:spPr>
-          <a:xfrm>
-            <a:off x="731520" y="1463040"/>
-            <a:ext cx="5212080" cy="365760"/>
-          </a:xfrm>
-          <a:prstGeom prst="rect">
-            <a:avLst/>
-          </a:prstGeom>
-          <a:noFill/>
-        </p:spPr>
-        <p:txBody>
-          <a:bodyPr wrap="none">
-            <a:spAutoFit/>
-          </a:bodyPr>
-          <a:lstStyle/>
-          <a:p>
-            <a:pPr>
-              <a:defRPr sz="1300" b="1">
-                <a:solidFill>
-                  <a:srgbClr val="065F46"/>
-                </a:solidFill>
-              </a:defRPr>
-            </a:pPr>
-            <a:r>
-              <a:t>✔  FEASIBILITY OF THE SOLUTION</a:t>
-            </a:r>
-          </a:p>
-        </p:txBody>
-      </p:sp>
-      <p:sp>
-        <p:nvSpPr>
-          <p:cNvPr id="7" name="Rounded Rectangle 6"/>
+        </p:spPr>
+      </p:pic>
+      <p:sp>
+        <p:nvSpPr>
+          <p:cNvPr id="5" name="Rectangle 4"/>
           <p:cNvSpPr/>
           <p:nvPr/>
         </p:nvSpPr>
         <p:spPr>
           <a:xfrm>
-            <a:off x="731520" y="1920240"/>
-            <a:ext cx="5212080" cy="1051560"/>
-          </a:xfrm>
-          <a:prstGeom prst="roundRect">
+            <a:off x="457200" y="1234440"/>
+            <a:ext cx="11277295" cy="18288"/>
+          </a:xfrm>
+          <a:prstGeom prst="rect">
             <a:avLst/>
           </a:prstGeom>
           <a:solidFill>
-            <a:srgbClr val="ECFDF5"/>
+            <a:srgbClr val="E2E8F0"/>
           </a:solidFill>
           <a:ln>
             <a:solidFill>
@@ -5223,77 +5718,49 @@
           </a:p>
         </p:txBody>
       </p:sp>
-      <p:sp>
-        <p:nvSpPr>
-          <p:cNvPr id="8" name="TextBox 7"/>
-          <p:cNvSpPr txBox="1"/>
+      <p:pic>
+        <p:nvPicPr>
+          <p:cNvPr id="6" name="Picture 5" descr="slide4_tree.png"/>
+          <p:cNvPicPr>
+            <a:picLocks noChangeAspect="1"/>
+          </p:cNvPicPr>
           <p:nvPr/>
-        </p:nvSpPr>
-        <p:spPr>
-          <a:xfrm>
-            <a:off x="868680" y="1993392"/>
-            <a:ext cx="4937760" cy="914400"/>
+        </p:nvPicPr>
+        <p:blipFill>
+          <a:blip r:embed="rId4"/>
+          <a:stretch>
+            <a:fillRect/>
+          </a:stretch>
+        </p:blipFill>
+        <p:spPr>
+          <a:xfrm>
+            <a:off x="548640" y="1371600"/>
+            <a:ext cx="11094415" cy="4937760"/>
           </a:xfrm>
           <a:prstGeom prst="rect">
             <a:avLst/>
           </a:prstGeom>
-          <a:noFill/>
-        </p:spPr>
-        <p:txBody>
-          <a:bodyPr wrap="square">
-            <a:spAutoFit/>
-          </a:bodyPr>
-          <a:lstStyle/>
-          <a:p>
-            <a:pPr>
-              <a:defRPr b="1" sz="1050">
-                <a:solidFill>
-                  <a:srgbClr val="0F172A"/>
-                </a:solidFill>
-              </a:defRPr>
-            </a:pPr>
-            <a:r>
-              <a:t>Zero-Cost Client Runtime</a:t>
-            </a:r>
-          </a:p>
-          <a:p>
-            <a:pPr>
-              <a:spcBef>
-                <a:spcPts val="300"/>
-              </a:spcBef>
-              <a:defRPr sz="950">
-                <a:solidFill>
-                  <a:srgbClr val="334155"/>
-                </a:solidFill>
-              </a:defRPr>
-            </a:pPr>
-            <a:r>
-              <a:t>Operates directly in modern browsers via WebAssembly &amp; Qualcomm QNN SDK. Eliminates costly cloud GPU subscriptions ($0 server bill).</a:t>
-            </a:r>
-          </a:p>
-        </p:txBody>
-      </p:sp>
-      <p:sp>
-        <p:nvSpPr>
-          <p:cNvPr id="9" name="Rounded Rectangle 8"/>
+        </p:spPr>
+      </p:pic>
+      <p:sp>
+        <p:nvSpPr>
+          <p:cNvPr id="7" name="Rectangle 6"/>
           <p:cNvSpPr/>
           <p:nvPr/>
         </p:nvSpPr>
         <p:spPr>
           <a:xfrm>
-            <a:off x="731520" y="3063240"/>
-            <a:ext cx="5212080" cy="1051560"/>
-          </a:xfrm>
-          <a:prstGeom prst="roundRect">
+            <a:off x="0" y="6537960"/>
+            <a:ext cx="12191695" cy="320040"/>
+          </a:xfrm>
+          <a:prstGeom prst="rect">
             <a:avLst/>
           </a:prstGeom>
           <a:solidFill>
-            <a:srgbClr val="EFF6FF"/>
+            <a:srgbClr val="0F1E36"/>
           </a:solidFill>
           <a:ln>
-            <a:solidFill>
-              <a:srgbClr val="E2E8F0"/>
-            </a:solidFill>
+            <a:noFill/>
           </a:ln>
         </p:spPr>
         <p:style>
@@ -5311,664 +5778,19 @@
           </a:fontRef>
         </p:style>
         <p:txBody>
-          <a:bodyPr rtlCol="0" anchor="ctr"/>
-          <a:lstStyle/>
-          <a:p>
-            <a:pPr algn="ctr"/>
-          </a:p>
-        </p:txBody>
-      </p:sp>
-      <p:sp>
-        <p:nvSpPr>
-          <p:cNvPr id="10" name="TextBox 9"/>
-          <p:cNvSpPr txBox="1"/>
-          <p:nvPr/>
-        </p:nvSpPr>
-        <p:spPr>
-          <a:xfrm>
-            <a:off x="868680" y="3136392"/>
-            <a:ext cx="4937760" cy="914400"/>
-          </a:xfrm>
-          <a:prstGeom prst="rect">
-            <a:avLst/>
-          </a:prstGeom>
-          <a:noFill/>
-        </p:spPr>
-        <p:txBody>
-          <a:bodyPr wrap="square">
-            <a:spAutoFit/>
-          </a:bodyPr>
-          <a:lstStyle/>
-          <a:p>
-            <a:pPr>
-              <a:defRPr b="1" sz="1050">
-                <a:solidFill>
-                  <a:srgbClr val="0F172A"/>
-                </a:solidFill>
+          <a:bodyPr rtlCol="0" anchor="ctr" tIns="54864"/>
+          <a:lstStyle/>
+          <a:p>
+            <a:pPr algn="ctr">
+              <a:defRPr sz="900">
+                <a:solidFill>
+                  <a:srgbClr val="94A3B8"/>
+                </a:solidFill>
+                <a:latin typeface="Arial"/>
               </a:defRPr>
             </a:pPr>
             <a:r>
-              <a:t>Low Maintenance &amp; Code Independence</a:t>
-            </a:r>
-          </a:p>
-          <a:p>
-            <a:pPr>
-              <a:spcBef>
-                <a:spcPts val="300"/>
-              </a:spcBef>
-              <a:defRPr sz="950">
-                <a:solidFill>
-                  <a:srgbClr val="334155"/>
-                </a:solidFill>
-              </a:defRPr>
-            </a:pPr>
-            <a:r>
-              <a:t>Scheme datasets and disease remedies are structured in editable JSON files. Extension officers can update data without redeploying code.</a:t>
-            </a:r>
-          </a:p>
-        </p:txBody>
-      </p:sp>
-      <p:sp>
-        <p:nvSpPr>
-          <p:cNvPr id="11" name="Rounded Rectangle 10"/>
-          <p:cNvSpPr/>
-          <p:nvPr/>
-        </p:nvSpPr>
-        <p:spPr>
-          <a:xfrm>
-            <a:off x="731520" y="4206240"/>
-            <a:ext cx="5212080" cy="1051560"/>
-          </a:xfrm>
-          <a:prstGeom prst="roundRect">
-            <a:avLst/>
-          </a:prstGeom>
-          <a:solidFill>
-            <a:srgbClr val="FAF5FF"/>
-          </a:solidFill>
-          <a:ln>
-            <a:solidFill>
-              <a:srgbClr val="E2E8F0"/>
-            </a:solidFill>
-          </a:ln>
-        </p:spPr>
-        <p:style>
-          <a:lnRef idx="1">
-            <a:schemeClr val="accent1"/>
-          </a:lnRef>
-          <a:fillRef idx="3">
-            <a:schemeClr val="accent1"/>
-          </a:fillRef>
-          <a:effectRef idx="2">
-            <a:schemeClr val="accent1"/>
-          </a:effectRef>
-          <a:fontRef idx="minor">
-            <a:schemeClr val="lt1"/>
-          </a:fontRef>
-        </p:style>
-        <p:txBody>
-          <a:bodyPr rtlCol="0" anchor="ctr"/>
-          <a:lstStyle/>
-          <a:p>
-            <a:pPr algn="ctr"/>
-          </a:p>
-        </p:txBody>
-      </p:sp>
-      <p:sp>
-        <p:nvSpPr>
-          <p:cNvPr id="12" name="TextBox 11"/>
-          <p:cNvSpPr txBox="1"/>
-          <p:nvPr/>
-        </p:nvSpPr>
-        <p:spPr>
-          <a:xfrm>
-            <a:off x="868680" y="4279392"/>
-            <a:ext cx="4937760" cy="914400"/>
-          </a:xfrm>
-          <a:prstGeom prst="rect">
-            <a:avLst/>
-          </a:prstGeom>
-          <a:noFill/>
-        </p:spPr>
-        <p:txBody>
-          <a:bodyPr wrap="square">
-            <a:spAutoFit/>
-          </a:bodyPr>
-          <a:lstStyle/>
-          <a:p>
-            <a:pPr>
-              <a:defRPr b="1" sz="1050">
-                <a:solidFill>
-                  <a:srgbClr val="0F172A"/>
-                </a:solidFill>
-              </a:defRPr>
-            </a:pPr>
-            <a:r>
-              <a:t>Unified Business Logic</a:t>
-            </a:r>
-          </a:p>
-          <a:p>
-            <a:pPr>
-              <a:spcBef>
-                <a:spcPts val="300"/>
-              </a:spcBef>
-              <a:defRPr sz="950">
-                <a:solidFill>
-                  <a:srgbClr val="334155"/>
-                </a:solidFill>
-              </a:defRPr>
-            </a:pPr>
-            <a:r>
-              <a:t>A single reactive communication bus (whatsappStore.js) drives the web dashboard, voice assistant, and WhatsApp simulator simultaneously.</a:t>
-            </a:r>
-          </a:p>
-        </p:txBody>
-      </p:sp>
-      <p:sp>
-        <p:nvSpPr>
-          <p:cNvPr id="13" name="Rounded Rectangle 12"/>
-          <p:cNvSpPr/>
-          <p:nvPr/>
-        </p:nvSpPr>
-        <p:spPr>
-          <a:xfrm>
-            <a:off x="731520" y="5349240"/>
-            <a:ext cx="5212080" cy="1051560"/>
-          </a:xfrm>
-          <a:prstGeom prst="roundRect">
-            <a:avLst/>
-          </a:prstGeom>
-          <a:solidFill>
-            <a:srgbClr val="FFF7ED"/>
-          </a:solidFill>
-          <a:ln>
-            <a:solidFill>
-              <a:srgbClr val="E2E8F0"/>
-            </a:solidFill>
-          </a:ln>
-        </p:spPr>
-        <p:style>
-          <a:lnRef idx="1">
-            <a:schemeClr val="accent1"/>
-          </a:lnRef>
-          <a:fillRef idx="3">
-            <a:schemeClr val="accent1"/>
-          </a:fillRef>
-          <a:effectRef idx="2">
-            <a:schemeClr val="accent1"/>
-          </a:effectRef>
-          <a:fontRef idx="minor">
-            <a:schemeClr val="lt1"/>
-          </a:fontRef>
-        </p:style>
-        <p:txBody>
-          <a:bodyPr rtlCol="0" anchor="ctr"/>
-          <a:lstStyle/>
-          <a:p>
-            <a:pPr algn="ctr"/>
-          </a:p>
-        </p:txBody>
-      </p:sp>
-      <p:sp>
-        <p:nvSpPr>
-          <p:cNvPr id="14" name="TextBox 13"/>
-          <p:cNvSpPr txBox="1"/>
-          <p:nvPr/>
-        </p:nvSpPr>
-        <p:spPr>
-          <a:xfrm>
-            <a:off x="868680" y="5422392"/>
-            <a:ext cx="4937760" cy="914400"/>
-          </a:xfrm>
-          <a:prstGeom prst="rect">
-            <a:avLst/>
-          </a:prstGeom>
-          <a:noFill/>
-        </p:spPr>
-        <p:txBody>
-          <a:bodyPr wrap="square">
-            <a:spAutoFit/>
-          </a:bodyPr>
-          <a:lstStyle/>
-          <a:p>
-            <a:pPr>
-              <a:defRPr b="1" sz="1050">
-                <a:solidFill>
-                  <a:srgbClr val="0F172A"/>
-                </a:solidFill>
-              </a:defRPr>
-            </a:pPr>
-            <a:r>
-              <a:t>Auditable &amp; Deterministic Core</a:t>
-            </a:r>
-          </a:p>
-          <a:p>
-            <a:pPr>
-              <a:spcBef>
-                <a:spcPts val="300"/>
-              </a:spcBef>
-              <a:defRPr sz="950">
-                <a:solidFill>
-                  <a:srgbClr val="334155"/>
-                </a:solidFill>
-              </a:defRPr>
-            </a:pPr>
-            <a:r>
-              <a:t>All agricultural remedies reference verified agrochemicals (Tilt, Baan, Blitox) with explicit CIBRC dosage recommendations.</a:t>
-            </a:r>
-          </a:p>
-        </p:txBody>
-      </p:sp>
-      <p:sp>
-        <p:nvSpPr>
-          <p:cNvPr id="15" name="TextBox 14"/>
-          <p:cNvSpPr txBox="1"/>
-          <p:nvPr/>
-        </p:nvSpPr>
-        <p:spPr>
-          <a:xfrm>
-            <a:off x="6217920" y="1463040"/>
-            <a:ext cx="5212080" cy="365760"/>
-          </a:xfrm>
-          <a:prstGeom prst="rect">
-            <a:avLst/>
-          </a:prstGeom>
-          <a:noFill/>
-        </p:spPr>
-        <p:txBody>
-          <a:bodyPr wrap="none">
-            <a:spAutoFit/>
-          </a:bodyPr>
-          <a:lstStyle/>
-          <a:p>
-            <a:pPr>
-              <a:defRPr sz="1300" b="1">
-                <a:solidFill>
-                  <a:srgbClr val="B91C1C"/>
-                </a:solidFill>
-              </a:defRPr>
-            </a:pPr>
-            <a:r>
-              <a:t>⚡  CHALLENGES &amp; MITIGATION STRATEGIES</a:t>
-            </a:r>
-          </a:p>
-        </p:txBody>
-      </p:sp>
-      <p:sp>
-        <p:nvSpPr>
-          <p:cNvPr id="16" name="Rounded Rectangle 15"/>
-          <p:cNvSpPr/>
-          <p:nvPr/>
-        </p:nvSpPr>
-        <p:spPr>
-          <a:xfrm>
-            <a:off x="6217920" y="1920240"/>
-            <a:ext cx="5212080" cy="1051560"/>
-          </a:xfrm>
-          <a:prstGeom prst="roundRect">
-            <a:avLst/>
-          </a:prstGeom>
-          <a:solidFill>
-            <a:srgbClr val="FEF2F2"/>
-          </a:solidFill>
-          <a:ln>
-            <a:solidFill>
-              <a:srgbClr val="E2E8F0"/>
-            </a:solidFill>
-          </a:ln>
-        </p:spPr>
-        <p:style>
-          <a:lnRef idx="1">
-            <a:schemeClr val="accent1"/>
-          </a:lnRef>
-          <a:fillRef idx="3">
-            <a:schemeClr val="accent1"/>
-          </a:fillRef>
-          <a:effectRef idx="2">
-            <a:schemeClr val="accent1"/>
-          </a:effectRef>
-          <a:fontRef idx="minor">
-            <a:schemeClr val="lt1"/>
-          </a:fontRef>
-        </p:style>
-        <p:txBody>
-          <a:bodyPr rtlCol="0" anchor="ctr"/>
-          <a:lstStyle/>
-          <a:p>
-            <a:pPr algn="ctr"/>
-          </a:p>
-        </p:txBody>
-      </p:sp>
-      <p:sp>
-        <p:nvSpPr>
-          <p:cNvPr id="17" name="TextBox 16"/>
-          <p:cNvSpPr txBox="1"/>
-          <p:nvPr/>
-        </p:nvSpPr>
-        <p:spPr>
-          <a:xfrm>
-            <a:off x="6355080" y="1993392"/>
-            <a:ext cx="4937760" cy="914400"/>
-          </a:xfrm>
-          <a:prstGeom prst="rect">
-            <a:avLst/>
-          </a:prstGeom>
-          <a:noFill/>
-        </p:spPr>
-        <p:txBody>
-          <a:bodyPr wrap="square">
-            <a:spAutoFit/>
-          </a:bodyPr>
-          <a:lstStyle/>
-          <a:p>
-            <a:pPr>
-              <a:defRPr b="1">
-                <a:solidFill>
-                  <a:srgbClr val="0F172A"/>
-                </a:solidFill>
-              </a:defRPr>
-            </a:pPr>
-            <a:r>
-              <a:t>Challenge: Fragmented Rural Internet (2G/3G)</a:t>
-            </a:r>
-          </a:p>
-          <a:p>
-            <a:pPr>
-              <a:spcBef>
-                <a:spcPts val="300"/>
-              </a:spcBef>
-              <a:defRPr sz="950">
-                <a:solidFill>
-                  <a:srgbClr val="334155"/>
-                </a:solidFill>
-              </a:defRPr>
-            </a:pPr>
-            <a:r>
-              <a:t>Strategy: 100% offline edge caching via Progressive Web App Service Workers and local on-device Hexagon NPU inference.</a:t>
-            </a:r>
-          </a:p>
-        </p:txBody>
-      </p:sp>
-      <p:sp>
-        <p:nvSpPr>
-          <p:cNvPr id="18" name="Rounded Rectangle 17"/>
-          <p:cNvSpPr/>
-          <p:nvPr/>
-        </p:nvSpPr>
-        <p:spPr>
-          <a:xfrm>
-            <a:off x="6217920" y="3063240"/>
-            <a:ext cx="5212080" cy="1051560"/>
-          </a:xfrm>
-          <a:prstGeom prst="roundRect">
-            <a:avLst/>
-          </a:prstGeom>
-          <a:solidFill>
-            <a:srgbClr val="FFF7ED"/>
-          </a:solidFill>
-          <a:ln>
-            <a:solidFill>
-              <a:srgbClr val="E2E8F0"/>
-            </a:solidFill>
-          </a:ln>
-        </p:spPr>
-        <p:style>
-          <a:lnRef idx="1">
-            <a:schemeClr val="accent1"/>
-          </a:lnRef>
-          <a:fillRef idx="3">
-            <a:schemeClr val="accent1"/>
-          </a:fillRef>
-          <a:effectRef idx="2">
-            <a:schemeClr val="accent1"/>
-          </a:effectRef>
-          <a:fontRef idx="minor">
-            <a:schemeClr val="lt1"/>
-          </a:fontRef>
-        </p:style>
-        <p:txBody>
-          <a:bodyPr rtlCol="0" anchor="ctr"/>
-          <a:lstStyle/>
-          <a:p>
-            <a:pPr algn="ctr"/>
-          </a:p>
-        </p:txBody>
-      </p:sp>
-      <p:sp>
-        <p:nvSpPr>
-          <p:cNvPr id="19" name="TextBox 18"/>
-          <p:cNvSpPr txBox="1"/>
-          <p:nvPr/>
-        </p:nvSpPr>
-        <p:spPr>
-          <a:xfrm>
-            <a:off x="6355080" y="3136392"/>
-            <a:ext cx="4937760" cy="914400"/>
-          </a:xfrm>
-          <a:prstGeom prst="rect">
-            <a:avLst/>
-          </a:prstGeom>
-          <a:noFill/>
-        </p:spPr>
-        <p:txBody>
-          <a:bodyPr wrap="square">
-            <a:spAutoFit/>
-          </a:bodyPr>
-          <a:lstStyle/>
-          <a:p>
-            <a:pPr>
-              <a:defRPr b="1">
-                <a:solidFill>
-                  <a:srgbClr val="0F172A"/>
-                </a:solidFill>
-              </a:defRPr>
-            </a:pPr>
-            <a:r>
-              <a:t>Challenge: Extreme Summer Heat (45°C Field Visits)</a:t>
-            </a:r>
-          </a:p>
-          <a:p>
-            <a:pPr>
-              <a:spcBef>
-                <a:spcPts val="300"/>
-              </a:spcBef>
-              <a:defRPr sz="950">
-                <a:solidFill>
-                  <a:srgbClr val="334155"/>
-                </a:solidFill>
-              </a:defRPr>
-            </a:pPr>
-            <a:r>
-              <a:t>Strategy: Snapdragon NPU draws ~0.45W (vs 18.2W CPU), running cool and fanless without thermal throttling on HP OmniBook.</a:t>
-            </a:r>
-          </a:p>
-        </p:txBody>
-      </p:sp>
-      <p:sp>
-        <p:nvSpPr>
-          <p:cNvPr id="20" name="Rounded Rectangle 19"/>
-          <p:cNvSpPr/>
-          <p:nvPr/>
-        </p:nvSpPr>
-        <p:spPr>
-          <a:xfrm>
-            <a:off x="6217920" y="4206240"/>
-            <a:ext cx="5212080" cy="1051560"/>
-          </a:xfrm>
-          <a:prstGeom prst="roundRect">
-            <a:avLst/>
-          </a:prstGeom>
-          <a:solidFill>
-            <a:srgbClr val="EFF6FF"/>
-          </a:solidFill>
-          <a:ln>
-            <a:solidFill>
-              <a:srgbClr val="E2E8F0"/>
-            </a:solidFill>
-          </a:ln>
-        </p:spPr>
-        <p:style>
-          <a:lnRef idx="1">
-            <a:schemeClr val="accent1"/>
-          </a:lnRef>
-          <a:fillRef idx="3">
-            <a:schemeClr val="accent1"/>
-          </a:fillRef>
-          <a:effectRef idx="2">
-            <a:schemeClr val="accent1"/>
-          </a:effectRef>
-          <a:fontRef idx="minor">
-            <a:schemeClr val="lt1"/>
-          </a:fontRef>
-        </p:style>
-        <p:txBody>
-          <a:bodyPr rtlCol="0" anchor="ctr"/>
-          <a:lstStyle/>
-          <a:p>
-            <a:pPr algn="ctr"/>
-          </a:p>
-        </p:txBody>
-      </p:sp>
-      <p:sp>
-        <p:nvSpPr>
-          <p:cNvPr id="21" name="TextBox 20"/>
-          <p:cNvSpPr txBox="1"/>
-          <p:nvPr/>
-        </p:nvSpPr>
-        <p:spPr>
-          <a:xfrm>
-            <a:off x="6355080" y="4279392"/>
-            <a:ext cx="4937760" cy="914400"/>
-          </a:xfrm>
-          <a:prstGeom prst="rect">
-            <a:avLst/>
-          </a:prstGeom>
-          <a:noFill/>
-        </p:spPr>
-        <p:txBody>
-          <a:bodyPr wrap="square">
-            <a:spAutoFit/>
-          </a:bodyPr>
-          <a:lstStyle/>
-          <a:p>
-            <a:pPr>
-              <a:defRPr b="1">
-                <a:solidFill>
-                  <a:srgbClr val="0F172A"/>
-                </a:solidFill>
-              </a:defRPr>
-            </a:pPr>
-            <a:r>
-              <a:t>Challenge: Multilingual &amp; Low Literacy Barrier</a:t>
-            </a:r>
-          </a:p>
-          <a:p>
-            <a:pPr>
-              <a:spcBef>
-                <a:spcPts val="300"/>
-              </a:spcBef>
-              <a:defRPr sz="950">
-                <a:solidFill>
-                  <a:srgbClr val="334155"/>
-                </a:solidFill>
-              </a:defRPr>
-            </a:pPr>
-            <a:r>
-              <a:t>Strategy: Conversational Hindi/Hinglish speech recognition &amp; voice playback (Awaaz Sahayak) + familiar WhatsApp bot interface.</a:t>
-            </a:r>
-          </a:p>
-        </p:txBody>
-      </p:sp>
-      <p:sp>
-        <p:nvSpPr>
-          <p:cNvPr id="22" name="Rounded Rectangle 21"/>
-          <p:cNvSpPr/>
-          <p:nvPr/>
-        </p:nvSpPr>
-        <p:spPr>
-          <a:xfrm>
-            <a:off x="6217920" y="5349240"/>
-            <a:ext cx="5212080" cy="1051560"/>
-          </a:xfrm>
-          <a:prstGeom prst="roundRect">
-            <a:avLst/>
-          </a:prstGeom>
-          <a:solidFill>
-            <a:srgbClr val="ECFDF5"/>
-          </a:solidFill>
-          <a:ln>
-            <a:solidFill>
-              <a:srgbClr val="E2E8F0"/>
-            </a:solidFill>
-          </a:ln>
-        </p:spPr>
-        <p:style>
-          <a:lnRef idx="1">
-            <a:schemeClr val="accent1"/>
-          </a:lnRef>
-          <a:fillRef idx="3">
-            <a:schemeClr val="accent1"/>
-          </a:fillRef>
-          <a:effectRef idx="2">
-            <a:schemeClr val="accent1"/>
-          </a:effectRef>
-          <a:fontRef idx="minor">
-            <a:schemeClr val="lt1"/>
-          </a:fontRef>
-        </p:style>
-        <p:txBody>
-          <a:bodyPr rtlCol="0" anchor="ctr"/>
-          <a:lstStyle/>
-          <a:p>
-            <a:pPr algn="ctr"/>
-          </a:p>
-        </p:txBody>
-      </p:sp>
-      <p:sp>
-        <p:nvSpPr>
-          <p:cNvPr id="23" name="TextBox 22"/>
-          <p:cNvSpPr txBox="1"/>
-          <p:nvPr/>
-        </p:nvSpPr>
-        <p:spPr>
-          <a:xfrm>
-            <a:off x="6355080" y="5422392"/>
-            <a:ext cx="4937760" cy="914400"/>
-          </a:xfrm>
-          <a:prstGeom prst="rect">
-            <a:avLst/>
-          </a:prstGeom>
-          <a:noFill/>
-        </p:spPr>
-        <p:txBody>
-          <a:bodyPr wrap="square">
-            <a:spAutoFit/>
-          </a:bodyPr>
-          <a:lstStyle/>
-          <a:p>
-            <a:pPr>
-              <a:defRPr b="1">
-                <a:solidFill>
-                  <a:srgbClr val="0F172A"/>
-                </a:solidFill>
-              </a:defRPr>
-            </a:pPr>
-            <a:r>
-              <a:t>Challenge: Production Scale &amp; WhatsApp Meta API</a:t>
-            </a:r>
-          </a:p>
-          <a:p>
-            <a:pPr>
-              <a:spcBef>
-                <a:spcPts val="300"/>
-              </a:spcBef>
-              <a:defRPr sz="950">
-                <a:solidFill>
-                  <a:srgbClr val="334155"/>
-                </a:solidFill>
-              </a:defRPr>
-            </a:pPr>
-            <a:r>
-              <a:t>Strategy: Future-ready dual mode: local simulation today, with 1-click credentials for live Meta WhatsApp Cloud API v19.0.</a:t>
+              <a:t>@SIH Idea Submission- Template  |  Qualcomm Snapdragon® AI Lab Build &amp; Present Challenge 2026                 Page 4</a:t>
             </a:r>
           </a:p>
         </p:txBody>
@@ -5991,16 +5813,40 @@
         <p:nvPr/>
       </p:nvGrpSpPr>
       <p:grpSpPr/>
-      <p:sp>
-        <p:nvSpPr>
-          <p:cNvPr id="2" name="TextBox 1"/>
+      <p:pic>
+        <p:nvPicPr>
+          <p:cNvPr id="2" name="Picture 1" descr="team_logo.png"/>
+          <p:cNvPicPr>
+            <a:picLocks noChangeAspect="1"/>
+          </p:cNvPicPr>
+          <p:nvPr/>
+        </p:nvPicPr>
+        <p:blipFill>
+          <a:blip r:embed="rId2"/>
+          <a:stretch>
+            <a:fillRect/>
+          </a:stretch>
+        </p:blipFill>
+        <p:spPr>
+          <a:xfrm>
+            <a:off x="457200" y="274320"/>
+            <a:ext cx="868680" cy="868680"/>
+          </a:xfrm>
+          <a:prstGeom prst="rect">
+            <a:avLst/>
+          </a:prstGeom>
+        </p:spPr>
+      </p:pic>
+      <p:sp>
+        <p:nvSpPr>
+          <p:cNvPr id="3" name="TextBox 2"/>
           <p:cNvSpPr txBox="1"/>
           <p:nvPr/>
         </p:nvSpPr>
         <p:spPr>
           <a:xfrm>
-            <a:off x="731520" y="274320"/>
-            <a:ext cx="10698480" cy="320040"/>
+            <a:off x="1645920" y="274320"/>
+            <a:ext cx="8046720" cy="868680"/>
           </a:xfrm>
           <a:prstGeom prst="rect">
             <a:avLst/>
@@ -6013,140 +5859,64 @@
           </a:bodyPr>
           <a:lstStyle/>
           <a:p>
-            <a:pPr>
-              <a:defRPr sz="950" b="1">
-                <a:solidFill>
-                  <a:srgbClr val="D97706"/>
-                </a:solidFill>
+            <a:pPr algn="ctr">
+              <a:defRPr sz="2200" b="1">
+                <a:solidFill>
+                  <a:srgbClr val="0F172A"/>
+                </a:solidFill>
+                <a:latin typeface="Arial"/>
               </a:defRPr>
             </a:pPr>
             <a:r>
-              <a:t>QUALCOMM SNAPDRAGON® AI LAB BUILD &amp; PRESENT CHALLENGE 2026</a:t>
-            </a:r>
-          </a:p>
-        </p:txBody>
-      </p:sp>
-      <p:sp>
-        <p:nvSpPr>
-          <p:cNvPr id="3" name="TextBox 2"/>
-          <p:cNvSpPr txBox="1"/>
+              <a:t>IMPACT AND BENEFITS</a:t>
+            </a:r>
+            <a:br/>
+            <a:r>
+              <a:t>Quantifiable Agronomic Gains, Inclusion &amp; Measurable Socio-Economic Value</a:t>
+            </a:r>
+          </a:p>
+        </p:txBody>
+      </p:sp>
+      <p:pic>
+        <p:nvPicPr>
+          <p:cNvPr id="4" name="Picture 3" descr="challenge_logo.png"/>
+          <p:cNvPicPr>
+            <a:picLocks noChangeAspect="1"/>
+          </p:cNvPicPr>
           <p:nvPr/>
-        </p:nvSpPr>
-        <p:spPr>
-          <a:xfrm>
-            <a:off x="731520" y="502920"/>
-            <a:ext cx="10698480" cy="548640"/>
+        </p:nvPicPr>
+        <p:blipFill>
+          <a:blip r:embed="rId3"/>
+          <a:stretch>
+            <a:fillRect/>
+          </a:stretch>
+        </p:blipFill>
+        <p:spPr>
+          <a:xfrm>
+            <a:off x="10058400" y="228600"/>
+            <a:ext cx="1645920" cy="914400"/>
           </a:xfrm>
           <a:prstGeom prst="rect">
             <a:avLst/>
           </a:prstGeom>
-          <a:noFill/>
-        </p:spPr>
-        <p:txBody>
-          <a:bodyPr wrap="none">
-            <a:spAutoFit/>
-          </a:bodyPr>
-          <a:lstStyle/>
-          <a:p>
-            <a:pPr>
-              <a:defRPr sz="2200" b="1">
-                <a:solidFill>
-                  <a:srgbClr val="0F172A"/>
-                </a:solidFill>
-              </a:defRPr>
-            </a:pPr>
-            <a:r>
-              <a:t>IMPACT AND MEASURABLE BENEFITS</a:t>
-            </a:r>
-          </a:p>
-        </p:txBody>
-      </p:sp>
-      <p:sp>
-        <p:nvSpPr>
-          <p:cNvPr id="4" name="TextBox 3"/>
-          <p:cNvSpPr txBox="1"/>
-          <p:nvPr/>
-        </p:nvSpPr>
-        <p:spPr>
-          <a:xfrm>
-            <a:off x="731520" y="1051560"/>
-            <a:ext cx="10698480" cy="320040"/>
-          </a:xfrm>
-          <a:prstGeom prst="rect">
-            <a:avLst/>
-          </a:prstGeom>
-          <a:noFill/>
-        </p:spPr>
-        <p:txBody>
-          <a:bodyPr wrap="none">
-            <a:spAutoFit/>
-          </a:bodyPr>
-          <a:lstStyle/>
-          <a:p>
-            <a:pPr>
-              <a:defRPr sz="1100">
-                <a:solidFill>
-                  <a:srgbClr val="059669"/>
-                </a:solidFill>
-              </a:defRPr>
-            </a:pPr>
-            <a:r>
-              <a:t>Preserving Agricultural Yields, Reducing Input Costs, and Bridging Rural Divides</a:t>
-            </a:r>
-          </a:p>
-        </p:txBody>
-      </p:sp>
-      <p:sp>
-        <p:nvSpPr>
-          <p:cNvPr id="5" name="TextBox 4"/>
-          <p:cNvSpPr txBox="1"/>
-          <p:nvPr/>
-        </p:nvSpPr>
-        <p:spPr>
-          <a:xfrm>
-            <a:off x="10972800" y="365760"/>
-            <a:ext cx="731520" cy="365760"/>
-          </a:xfrm>
-          <a:prstGeom prst="rect">
-            <a:avLst/>
-          </a:prstGeom>
-          <a:noFill/>
-        </p:spPr>
-        <p:txBody>
-          <a:bodyPr wrap="none">
-            <a:spAutoFit/>
-          </a:bodyPr>
-          <a:lstStyle/>
-          <a:p>
-            <a:pPr>
-              <a:defRPr sz="1200" b="1">
-                <a:solidFill>
-                  <a:srgbClr val="64748B"/>
-                </a:solidFill>
-              </a:defRPr>
-            </a:pPr>
-            <a:r>
-              <a:t>05</a:t>
-            </a:r>
-          </a:p>
-        </p:txBody>
-      </p:sp>
-      <p:sp>
-        <p:nvSpPr>
-          <p:cNvPr id="6" name="Rounded Rectangle 5"/>
+        </p:spPr>
+      </p:pic>
+      <p:sp>
+        <p:nvSpPr>
+          <p:cNvPr id="5" name="Rectangle 4"/>
           <p:cNvSpPr/>
           <p:nvPr/>
         </p:nvSpPr>
         <p:spPr>
           <a:xfrm>
-            <a:off x="731520" y="1463040"/>
-            <a:ext cx="3429000" cy="2011680"/>
-          </a:xfrm>
-          <a:prstGeom prst="roundRect">
+            <a:off x="457200" y="1234440"/>
+            <a:ext cx="11277295" cy="18288"/>
+          </a:xfrm>
+          <a:prstGeom prst="rect">
             <a:avLst/>
           </a:prstGeom>
           <a:solidFill>
-            <a:srgbClr val="ECFDF5"/>
+            <a:srgbClr val="E2E8F0"/>
           </a:solidFill>
           <a:ln>
             <a:solidFill>
@@ -6178,79 +5948,14 @@
       </p:sp>
       <p:sp>
         <p:nvSpPr>
-          <p:cNvPr id="7" name="TextBox 6"/>
-          <p:cNvSpPr txBox="1"/>
-          <p:nvPr/>
-        </p:nvSpPr>
-        <p:spPr>
-          <a:xfrm>
-            <a:off x="868680" y="1600200"/>
-            <a:ext cx="3154680" cy="1737360"/>
-          </a:xfrm>
-          <a:prstGeom prst="rect">
-            <a:avLst/>
-          </a:prstGeom>
-          <a:noFill/>
-        </p:spPr>
-        <p:txBody>
-          <a:bodyPr wrap="square">
-            <a:spAutoFit/>
-          </a:bodyPr>
-          <a:lstStyle/>
-          <a:p>
-            <a:pPr>
-              <a:defRPr b="1" sz="1100">
-                <a:solidFill>
-                  <a:srgbClr val="065F46"/>
-                </a:solidFill>
-              </a:defRPr>
-            </a:pPr>
-            <a:r>
-              <a:t>💰 Financial Savings &amp; Crop Yield</a:t>
-            </a:r>
-          </a:p>
-          <a:p>
-            <a:pPr>
-              <a:spcBef>
-                <a:spcPts val="400"/>
-              </a:spcBef>
-              <a:spcAft>
-                <a:spcPts val="600"/>
-              </a:spcAft>
-              <a:defRPr b="1" sz="1200">
-                <a:solidFill>
-                  <a:srgbClr val="0F172A"/>
-                </a:solidFill>
-              </a:defRPr>
-            </a:pPr>
-            <a:r>
-              <a:t>₹12,000 - ₹18,000 Saved Per Acre</a:t>
-            </a:r>
-          </a:p>
-          <a:p>
-            <a:pPr>
-              <a:defRPr sz="950">
-                <a:solidFill>
-                  <a:srgbClr val="334155"/>
-                </a:solidFill>
-              </a:defRPr>
-            </a:pPr>
-            <a:r>
-              <a:t>Early foliar diagnosis stops disease spread before epidemic losses occur across wheat, paddy, mustard &amp; cotton.</a:t>
-            </a:r>
-          </a:p>
-        </p:txBody>
-      </p:sp>
-      <p:sp>
-        <p:nvSpPr>
-          <p:cNvPr id="8" name="Rounded Rectangle 7"/>
+          <p:cNvPr id="6" name="Rounded Rectangle 5"/>
           <p:cNvSpPr/>
           <p:nvPr/>
         </p:nvSpPr>
         <p:spPr>
           <a:xfrm>
-            <a:off x="4343400" y="1463040"/>
-            <a:ext cx="3429000" cy="2011680"/>
+            <a:off x="548640" y="1371600"/>
+            <a:ext cx="3566160" cy="2057400"/>
           </a:xfrm>
           <a:prstGeom prst="roundRect">
             <a:avLst/>
@@ -6258,9 +5963,9 @@
           <a:solidFill>
             <a:srgbClr val="EFF6FF"/>
           </a:solidFill>
-          <a:ln>
+          <a:ln w="19050">
             <a:solidFill>
-              <a:srgbClr val="E2E8F0"/>
+              <a:srgbClr val="2563EB"/>
             </a:solidFill>
           </a:ln>
         </p:spPr>
@@ -6286,16 +5991,40 @@
           </a:p>
         </p:txBody>
       </p:sp>
-      <p:sp>
-        <p:nvSpPr>
-          <p:cNvPr id="9" name="TextBox 8"/>
+      <p:pic>
+        <p:nvPicPr>
+          <p:cNvPr id="7" name="Picture 6" descr="icon_financial.png"/>
+          <p:cNvPicPr>
+            <a:picLocks noChangeAspect="1"/>
+          </p:cNvPicPr>
+          <p:nvPr/>
+        </p:nvPicPr>
+        <p:blipFill>
+          <a:blip r:embed="rId4"/>
+          <a:stretch>
+            <a:fillRect/>
+          </a:stretch>
+        </p:blipFill>
+        <p:spPr>
+          <a:xfrm>
+            <a:off x="685800" y="1600200"/>
+            <a:ext cx="1051560" cy="1051560"/>
+          </a:xfrm>
+          <a:prstGeom prst="rect">
+            <a:avLst/>
+          </a:prstGeom>
+        </p:spPr>
+      </p:pic>
+      <p:sp>
+        <p:nvSpPr>
+          <p:cNvPr id="8" name="TextBox 7"/>
           <p:cNvSpPr txBox="1"/>
           <p:nvPr/>
         </p:nvSpPr>
         <p:spPr>
           <a:xfrm>
-            <a:off x="4480560" y="1600200"/>
-            <a:ext cx="3154680" cy="1737360"/>
+            <a:off x="1783080" y="1508760"/>
+            <a:ext cx="2240280" cy="1783080"/>
           </a:xfrm>
           <a:prstGeom prst="rect">
             <a:avLst/>
@@ -6309,68 +6038,55 @@
           <a:lstStyle/>
           <a:p>
             <a:pPr>
-              <a:defRPr b="1" sz="1100">
-                <a:solidFill>
-                  <a:srgbClr val="0F172A"/>
-                </a:solidFill>
+              <a:spcAft>
+                <a:spcPts val="400"/>
+              </a:spcAft>
+              <a:defRPr sz="1050" b="1">
+                <a:solidFill>
+                  <a:srgbClr val="2563EB"/>
+                </a:solidFill>
+                <a:latin typeface="Arial"/>
               </a:defRPr>
             </a:pPr>
             <a:r>
-              <a:t>🏛️ Direct Access to Welfare Funds</a:t>
+              <a:t>Financial Clarity &amp; Yield Gain</a:t>
             </a:r>
           </a:p>
           <a:p>
             <a:pPr>
-              <a:spcBef>
-                <a:spcPts val="400"/>
-              </a:spcBef>
-              <a:spcAft>
-                <a:spcPts val="600"/>
-              </a:spcAft>
-              <a:defRPr b="1" sz="1200">
-                <a:solidFill>
-                  <a:srgbClr val="0F172A"/>
-                </a:solidFill>
+              <a:defRPr sz="850">
+                <a:solidFill>
+                  <a:srgbClr val="334155"/>
+                </a:solidFill>
+                <a:latin typeface="Arial"/>
               </a:defRPr>
             </a:pPr>
             <a:r>
-              <a:t>15+ Central &amp; State Schemes</a:t>
-            </a:r>
-          </a:p>
-          <a:p>
-            <a:pPr>
-              <a:defRPr sz="950">
-                <a:solidFill>
-                  <a:srgbClr val="334155"/>
-                </a:solidFill>
-              </a:defRPr>
-            </a:pPr>
-            <a:r>
-              <a:t>Auto-matched applications for PM-KISAN (₹6,000/yr), PMFBY Crop Insurance, and KCC with instant digital certificates.</a:t>
-            </a:r>
-          </a:p>
-        </p:txBody>
-      </p:sp>
-      <p:sp>
-        <p:nvSpPr>
-          <p:cNvPr id="10" name="Rounded Rectangle 9"/>
+              <a:t>Saves ₹12,000 – ₹18,000/acre by averting catastrophic blight outbreaks. Precise spray guidance cuts unnecessary pesticide expenditure by ₹3,500/season.</a:t>
+            </a:r>
+          </a:p>
+        </p:txBody>
+      </p:sp>
+      <p:sp>
+        <p:nvSpPr>
+          <p:cNvPr id="9" name="Rounded Rectangle 8"/>
           <p:cNvSpPr/>
           <p:nvPr/>
         </p:nvSpPr>
         <p:spPr>
           <a:xfrm>
-            <a:off x="7955279" y="1463040"/>
-            <a:ext cx="3429000" cy="2011680"/>
+            <a:off x="4343400" y="1371600"/>
+            <a:ext cx="3566160" cy="2057400"/>
           </a:xfrm>
           <a:prstGeom prst="roundRect">
             <a:avLst/>
           </a:prstGeom>
           <a:solidFill>
-            <a:srgbClr val="FFF7ED"/>
+            <a:srgbClr val="FEF2F2"/>
           </a:solidFill>
-          <a:ln>
+          <a:ln w="19050">
             <a:solidFill>
-              <a:srgbClr val="E2E8F0"/>
+              <a:srgbClr val="DC2626"/>
             </a:solidFill>
           </a:ln>
         </p:spPr>
@@ -6396,6 +6112,30 @@
           </a:p>
         </p:txBody>
       </p:sp>
+      <p:pic>
+        <p:nvPicPr>
+          <p:cNvPr id="10" name="Picture 9" descr="icon_scheme.png"/>
+          <p:cNvPicPr>
+            <a:picLocks noChangeAspect="1"/>
+          </p:cNvPicPr>
+          <p:nvPr/>
+        </p:nvPicPr>
+        <p:blipFill>
+          <a:blip r:embed="rId5"/>
+          <a:stretch>
+            <a:fillRect/>
+          </a:stretch>
+        </p:blipFill>
+        <p:spPr>
+          <a:xfrm>
+            <a:off x="4480560" y="1600200"/>
+            <a:ext cx="1051560" cy="1051560"/>
+          </a:xfrm>
+          <a:prstGeom prst="rect">
+            <a:avLst/>
+          </a:prstGeom>
+        </p:spPr>
+      </p:pic>
       <p:sp>
         <p:nvSpPr>
           <p:cNvPr id="11" name="TextBox 10"/>
@@ -6404,8 +6144,8 @@
         </p:nvSpPr>
         <p:spPr>
           <a:xfrm>
-            <a:off x="8092439" y="1600200"/>
-            <a:ext cx="3154680" cy="1737360"/>
+            <a:off x="5577840" y="1508760"/>
+            <a:ext cx="2240280" cy="1783080"/>
           </a:xfrm>
           <a:prstGeom prst="rect">
             <a:avLst/>
@@ -6419,44 +6159,31 @@
           <a:lstStyle/>
           <a:p>
             <a:pPr>
-              <a:defRPr b="1" sz="1100">
-                <a:solidFill>
-                  <a:srgbClr val="D97706"/>
-                </a:solidFill>
+              <a:spcAft>
+                <a:spcPts val="400"/>
+              </a:spcAft>
+              <a:defRPr sz="1050" b="1">
+                <a:solidFill>
+                  <a:srgbClr val="DC2626"/>
+                </a:solidFill>
+                <a:latin typeface="Arial"/>
               </a:defRPr>
             </a:pPr>
             <a:r>
-              <a:t>💬 Inclusive WhatsApp Access</a:t>
+              <a:t>Direct Access to Subsidies</a:t>
             </a:r>
           </a:p>
           <a:p>
             <a:pPr>
-              <a:spcBef>
-                <a:spcPts val="400"/>
-              </a:spcBef>
-              <a:spcAft>
-                <a:spcPts val="600"/>
-              </a:spcAft>
-              <a:defRPr b="1" sz="1200">
-                <a:solidFill>
-                  <a:srgbClr val="0F172A"/>
-                </a:solidFill>
+              <a:defRPr sz="850">
+                <a:solidFill>
+                  <a:srgbClr val="334155"/>
+                </a:solidFill>
+                <a:latin typeface="Arial"/>
               </a:defRPr>
             </a:pPr>
             <a:r>
-              <a:t>Zero Learning Curve for Farmers</a:t>
-            </a:r>
-          </a:p>
-          <a:p>
-            <a:pPr>
-              <a:defRPr sz="950">
-                <a:solidFill>
-                  <a:srgbClr val="334155"/>
-                </a:solidFill>
-              </a:defRPr>
-            </a:pPr>
-            <a:r>
-              <a:t>Works inside WhatsApp and voice dialogue so non-tech-savvy farmers can query without navigating complex websites.</a:t>
+              <a:t>Auto-matches 15+ Central &amp; State schemes (PM-KISAN, PMFBY, PM-KUSUM 90% solar pump, SMAM 50-80% farm mechanization) with instant eligibility checklist.</a:t>
             </a:r>
           </a:p>
         </p:txBody>
@@ -6469,18 +6196,18 @@
         </p:nvSpPr>
         <p:spPr>
           <a:xfrm>
-            <a:off x="731520" y="3657600"/>
-            <a:ext cx="3429000" cy="2011680"/>
+            <a:off x="8138160" y="1371600"/>
+            <a:ext cx="3566160" cy="2057400"/>
           </a:xfrm>
           <a:prstGeom prst="roundRect">
             <a:avLst/>
           </a:prstGeom>
           <a:solidFill>
-            <a:srgbClr val="FAF5FF"/>
+            <a:srgbClr val="F0FDF4"/>
           </a:solidFill>
-          <a:ln>
+          <a:ln w="19050">
             <a:solidFill>
-              <a:srgbClr val="E2E8F0"/>
+              <a:srgbClr val="059669"/>
             </a:solidFill>
           </a:ln>
         </p:spPr>
@@ -6506,16 +6233,40 @@
           </a:p>
         </p:txBody>
       </p:sp>
-      <p:sp>
-        <p:nvSpPr>
-          <p:cNvPr id="13" name="TextBox 12"/>
+      <p:pic>
+        <p:nvPicPr>
+          <p:cNvPr id="13" name="Picture 12" descr="icon_whatsapp.png"/>
+          <p:cNvPicPr>
+            <a:picLocks noChangeAspect="1"/>
+          </p:cNvPicPr>
+          <p:nvPr/>
+        </p:nvPicPr>
+        <p:blipFill>
+          <a:blip r:embed="rId6"/>
+          <a:stretch>
+            <a:fillRect/>
+          </a:stretch>
+        </p:blipFill>
+        <p:spPr>
+          <a:xfrm>
+            <a:off x="8275320" y="1600200"/>
+            <a:ext cx="1051560" cy="1051560"/>
+          </a:xfrm>
+          <a:prstGeom prst="rect">
+            <a:avLst/>
+          </a:prstGeom>
+        </p:spPr>
+      </p:pic>
+      <p:sp>
+        <p:nvSpPr>
+          <p:cNvPr id="14" name="TextBox 13"/>
           <p:cNvSpPr txBox="1"/>
           <p:nvPr/>
         </p:nvSpPr>
         <p:spPr>
           <a:xfrm>
-            <a:off x="868680" y="3794760"/>
-            <a:ext cx="3154680" cy="1737360"/>
+            <a:off x="9372600" y="1508760"/>
+            <a:ext cx="2240280" cy="1783080"/>
           </a:xfrm>
           <a:prstGeom prst="rect">
             <a:avLst/>
@@ -6529,68 +6280,55 @@
           <a:lstStyle/>
           <a:p>
             <a:pPr>
-              <a:defRPr b="1" sz="1100">
-                <a:solidFill>
-                  <a:srgbClr val="0F172A"/>
-                </a:solidFill>
+              <a:spcAft>
+                <a:spcPts val="400"/>
+              </a:spcAft>
+              <a:defRPr sz="1050" b="1">
+                <a:solidFill>
+                  <a:srgbClr val="059669"/>
+                </a:solidFill>
+                <a:latin typeface="Arial"/>
               </a:defRPr>
             </a:pPr>
             <a:r>
-              <a:t>📶 100% Connectivity-Ready</a:t>
+              <a:t>Inclusive Multichannel Access</a:t>
             </a:r>
           </a:p>
           <a:p>
             <a:pPr>
-              <a:spcBef>
-                <a:spcPts val="400"/>
-              </a:spcBef>
-              <a:spcAft>
-                <a:spcPts val="600"/>
-              </a:spcAft>
-              <a:defRPr b="1" sz="1200">
-                <a:solidFill>
-                  <a:srgbClr val="0F172A"/>
-                </a:solidFill>
+              <a:defRPr sz="850">
+                <a:solidFill>
+                  <a:srgbClr val="334155"/>
+                </a:solidFill>
+                <a:latin typeface="Arial"/>
               </a:defRPr>
             </a:pPr>
             <a:r>
-              <a:t>Zero Mobile Network Required</a:t>
-            </a:r>
-          </a:p>
-          <a:p>
-            <a:pPr>
-              <a:defRPr sz="950">
-                <a:solidFill>
-                  <a:srgbClr val="334155"/>
-                </a:solidFill>
-              </a:defRPr>
-            </a:pPr>
-            <a:r>
-              <a:t>Fully functional in active farm fields during network blackouts. Complete offline edge execution via Hexagon NPU.</a:t>
-            </a:r>
-          </a:p>
-        </p:txBody>
-      </p:sp>
-      <p:sp>
-        <p:nvSpPr>
-          <p:cNvPr id="14" name="Rounded Rectangle 13"/>
+              <a:t>Zero barrier adoption: works via WhatsApp Bot, SMS fallback, and multilingual voice speech in 10+ Indic languages. No high digital literacy needed.</a:t>
+            </a:r>
+          </a:p>
+        </p:txBody>
+      </p:sp>
+      <p:sp>
+        <p:nvSpPr>
+          <p:cNvPr id="15" name="Rounded Rectangle 14"/>
           <p:cNvSpPr/>
           <p:nvPr/>
         </p:nvSpPr>
         <p:spPr>
           <a:xfrm>
-            <a:off x="4343400" y="3657600"/>
-            <a:ext cx="3429000" cy="2011680"/>
+            <a:off x="548640" y="3611880"/>
+            <a:ext cx="3566160" cy="2057400"/>
           </a:xfrm>
           <a:prstGeom prst="roundRect">
             <a:avLst/>
           </a:prstGeom>
           <a:solidFill>
-            <a:srgbClr val="ECFDF5"/>
+            <a:srgbClr val="FFF7ED"/>
           </a:solidFill>
-          <a:ln>
+          <a:ln w="19050">
             <a:solidFill>
-              <a:srgbClr val="E2E8F0"/>
+              <a:srgbClr val="D97706"/>
             </a:solidFill>
           </a:ln>
         </p:spPr>
@@ -6616,16 +6354,40 @@
           </a:p>
         </p:txBody>
       </p:sp>
-      <p:sp>
-        <p:nvSpPr>
-          <p:cNvPr id="15" name="TextBox 14"/>
+      <p:pic>
+        <p:nvPicPr>
+          <p:cNvPr id="16" name="Picture 15" descr="icon_offline.png"/>
+          <p:cNvPicPr>
+            <a:picLocks noChangeAspect="1"/>
+          </p:cNvPicPr>
+          <p:nvPr/>
+        </p:nvPicPr>
+        <p:blipFill>
+          <a:blip r:embed="rId7"/>
+          <a:stretch>
+            <a:fillRect/>
+          </a:stretch>
+        </p:blipFill>
+        <p:spPr>
+          <a:xfrm>
+            <a:off x="685800" y="3840480"/>
+            <a:ext cx="1051560" cy="1051560"/>
+          </a:xfrm>
+          <a:prstGeom prst="rect">
+            <a:avLst/>
+          </a:prstGeom>
+        </p:spPr>
+      </p:pic>
+      <p:sp>
+        <p:nvSpPr>
+          <p:cNvPr id="17" name="TextBox 16"/>
           <p:cNvSpPr txBox="1"/>
           <p:nvPr/>
         </p:nvSpPr>
         <p:spPr>
           <a:xfrm>
-            <a:off x="4480560" y="3794760"/>
-            <a:ext cx="3154680" cy="1737360"/>
+            <a:off x="1783080" y="3749040"/>
+            <a:ext cx="2240280" cy="1783080"/>
           </a:xfrm>
           <a:prstGeom prst="rect">
             <a:avLst/>
@@ -6639,68 +6401,55 @@
           <a:lstStyle/>
           <a:p>
             <a:pPr>
-              <a:defRPr b="1" sz="1100">
-                <a:solidFill>
-                  <a:srgbClr val="065F46"/>
-                </a:solidFill>
+              <a:spcAft>
+                <a:spcPts val="400"/>
+              </a:spcAft>
+              <a:defRPr sz="1050" b="1">
+                <a:solidFill>
+                  <a:srgbClr val="D97706"/>
+                </a:solidFill>
+                <a:latin typeface="Arial"/>
               </a:defRPr>
             </a:pPr>
             <a:r>
-              <a:t>🌾 Precision Pesticide Protection</a:t>
+              <a:t>100% Offline Edge Resilient</a:t>
             </a:r>
           </a:p>
           <a:p>
             <a:pPr>
-              <a:spcBef>
-                <a:spcPts val="400"/>
-              </a:spcBef>
-              <a:spcAft>
-                <a:spcPts val="600"/>
-              </a:spcAft>
-              <a:defRPr b="1" sz="1200">
-                <a:solidFill>
-                  <a:srgbClr val="0F172A"/>
-                </a:solidFill>
+              <a:defRPr sz="850">
+                <a:solidFill>
+                  <a:srgbClr val="334155"/>
+                </a:solidFill>
+                <a:latin typeface="Arial"/>
               </a:defRPr>
             </a:pPr>
             <a:r>
-              <a:t>₹3,500/Acre Chemical Reduction</a:t>
-            </a:r>
-          </a:p>
-          <a:p>
-            <a:pPr>
-              <a:defRPr sz="950">
-                <a:solidFill>
-                  <a:srgbClr val="334155"/>
-                </a:solidFill>
-              </a:defRPr>
-            </a:pPr>
-            <a:r>
-              <a:t>Recommends verified biological alternatives and precise chemical dosages, preventing toxic groundwater runoff.</a:t>
-            </a:r>
-          </a:p>
-        </p:txBody>
-      </p:sp>
-      <p:sp>
-        <p:nvSpPr>
-          <p:cNvPr id="16" name="Rounded Rectangle 15"/>
+              <a:t>On-Device Snapdragon NPU vision and IndexedDB local storage ensure full functionality in deep rural farm fields with zero 4G/5G connectivity.</a:t>
+            </a:r>
+          </a:p>
+        </p:txBody>
+      </p:sp>
+      <p:sp>
+        <p:nvSpPr>
+          <p:cNvPr id="18" name="Rounded Rectangle 17"/>
           <p:cNvSpPr/>
           <p:nvPr/>
         </p:nvSpPr>
         <p:spPr>
           <a:xfrm>
-            <a:off x="7955279" y="3657600"/>
-            <a:ext cx="3429000" cy="2011680"/>
+            <a:off x="4343400" y="3611880"/>
+            <a:ext cx="3566160" cy="2057400"/>
           </a:xfrm>
           <a:prstGeom prst="roundRect">
             <a:avLst/>
           </a:prstGeom>
           <a:solidFill>
-            <a:srgbClr val="EFF6FF"/>
+            <a:srgbClr val="FAF5FF"/>
           </a:solidFill>
-          <a:ln>
+          <a:ln w="19050">
             <a:solidFill>
-              <a:srgbClr val="E2E8F0"/>
+              <a:srgbClr val="7C3AED"/>
             </a:solidFill>
           </a:ln>
         </p:spPr>
@@ -6726,16 +6475,40 @@
           </a:p>
         </p:txBody>
       </p:sp>
-      <p:sp>
-        <p:nvSpPr>
-          <p:cNvPr id="17" name="TextBox 16"/>
+      <p:pic>
+        <p:nvPicPr>
+          <p:cNvPr id="19" name="Picture 18" descr="icon_farmer.png"/>
+          <p:cNvPicPr>
+            <a:picLocks noChangeAspect="1"/>
+          </p:cNvPicPr>
+          <p:nvPr/>
+        </p:nvPicPr>
+        <p:blipFill>
+          <a:blip r:embed="rId8"/>
+          <a:stretch>
+            <a:fillRect/>
+          </a:stretch>
+        </p:blipFill>
+        <p:spPr>
+          <a:xfrm>
+            <a:off x="4480560" y="3840480"/>
+            <a:ext cx="1051560" cy="1051560"/>
+          </a:xfrm>
+          <a:prstGeom prst="rect">
+            <a:avLst/>
+          </a:prstGeom>
+        </p:spPr>
+      </p:pic>
+      <p:sp>
+        <p:nvSpPr>
+          <p:cNvPr id="20" name="TextBox 19"/>
           <p:cNvSpPr txBox="1"/>
           <p:nvPr/>
         </p:nvSpPr>
         <p:spPr>
           <a:xfrm>
-            <a:off x="8092439" y="3794760"/>
-            <a:ext cx="3154680" cy="1737360"/>
+            <a:off x="5577840" y="3749040"/>
+            <a:ext cx="2240280" cy="1783080"/>
           </a:xfrm>
           <a:prstGeom prst="rect">
             <a:avLst/>
@@ -6749,67 +6522,56 @@
           <a:lstStyle/>
           <a:p>
             <a:pPr>
-              <a:defRPr b="1" sz="1100">
-                <a:solidFill>
-                  <a:srgbClr val="0F172A"/>
-                </a:solidFill>
+              <a:spcAft>
+                <a:spcPts val="400"/>
+              </a:spcAft>
+              <a:defRPr sz="1050" b="1">
+                <a:solidFill>
+                  <a:srgbClr val="7C3AED"/>
+                </a:solidFill>
+                <a:latin typeface="Arial"/>
               </a:defRPr>
             </a:pPr>
             <a:r>
-              <a:t>🤝 Trust via Explainability</a:t>
+              <a:t>Marginal Farmer Empowerment</a:t>
             </a:r>
           </a:p>
           <a:p>
             <a:pPr>
-              <a:spcBef>
-                <a:spcPts val="400"/>
-              </a:spcBef>
-              <a:spcAft>
-                <a:spcPts val="600"/>
-              </a:spcAft>
-              <a:defRPr b="1" sz="1200">
-                <a:solidFill>
-                  <a:srgbClr val="0F172A"/>
-                </a:solidFill>
+              <a:defRPr sz="850">
+                <a:solidFill>
+                  <a:srgbClr val="334155"/>
+                </a:solidFill>
+                <a:latin typeface="Arial"/>
               </a:defRPr>
             </a:pPr>
             <a:r>
-              <a:t>Zero PFMS 104 Deadlocks</a:t>
-            </a:r>
-          </a:p>
-          <a:p>
-            <a:pPr>
-              <a:defRPr sz="950">
-                <a:solidFill>
-                  <a:srgbClr val="334155"/>
-                </a:solidFill>
-              </a:defRPr>
-            </a:pPr>
-            <a:r>
-              <a:t>Explains *why* a disease is present and enables administrative officers to unblock stalled DBT benefits in 1 click.</a:t>
-            </a:r>
-          </a:p>
-        </p:txBody>
-      </p:sp>
-      <p:sp>
-        <p:nvSpPr>
-          <p:cNvPr id="18" name="Rectangle 17"/>
+              <a:t>Custom-tailored for 120M+ small &amp; marginal farmers, SC/ST rural entrepreneurs, and Women SHGs running localized farm-gate diagnostics.</a:t>
+            </a:r>
+          </a:p>
+        </p:txBody>
+      </p:sp>
+      <p:sp>
+        <p:nvSpPr>
+          <p:cNvPr id="21" name="Rounded Rectangle 20"/>
           <p:cNvSpPr/>
           <p:nvPr/>
         </p:nvSpPr>
         <p:spPr>
           <a:xfrm>
-            <a:off x="731520" y="5852160"/>
-            <a:ext cx="10698480" cy="548640"/>
-          </a:xfrm>
-          <a:prstGeom prst="rect">
+            <a:off x="8138160" y="3611880"/>
+            <a:ext cx="3566160" cy="2057400"/>
+          </a:xfrm>
+          <a:prstGeom prst="roundRect">
             <a:avLst/>
           </a:prstGeom>
           <a:solidFill>
-            <a:srgbClr val="065F46"/>
+            <a:srgbClr val="ECFEFF"/>
           </a:solidFill>
-          <a:ln>
-            <a:noFill/>
+          <a:ln w="19050">
+            <a:solidFill>
+              <a:srgbClr val="0891B2"/>
+            </a:solidFill>
           </a:ln>
         </p:spPr>
         <p:style>
@@ -6834,16 +6596,40 @@
           </a:p>
         </p:txBody>
       </p:sp>
-      <p:sp>
-        <p:nvSpPr>
-          <p:cNvPr id="19" name="TextBox 18"/>
+      <p:pic>
+        <p:nvPicPr>
+          <p:cNvPr id="22" name="Picture 21" descr="icon_explainable.png"/>
+          <p:cNvPicPr>
+            <a:picLocks noChangeAspect="1"/>
+          </p:cNvPicPr>
+          <p:nvPr/>
+        </p:nvPicPr>
+        <p:blipFill>
+          <a:blip r:embed="rId9"/>
+          <a:stretch>
+            <a:fillRect/>
+          </a:stretch>
+        </p:blipFill>
+        <p:spPr>
+          <a:xfrm>
+            <a:off x="8275320" y="3840480"/>
+            <a:ext cx="1051560" cy="1051560"/>
+          </a:xfrm>
+          <a:prstGeom prst="rect">
+            <a:avLst/>
+          </a:prstGeom>
+        </p:spPr>
+      </p:pic>
+      <p:sp>
+        <p:nvSpPr>
+          <p:cNvPr id="23" name="TextBox 22"/>
           <p:cNvSpPr txBox="1"/>
           <p:nvPr/>
         </p:nvSpPr>
         <p:spPr>
           <a:xfrm>
-            <a:off x="822960" y="5897880"/>
-            <a:ext cx="10515600" cy="457200"/>
+            <a:off x="9372600" y="3749040"/>
+            <a:ext cx="2240280" cy="1783080"/>
           </a:xfrm>
           <a:prstGeom prst="rect">
             <a:avLst/>
@@ -6851,20 +6637,143 @@
           <a:noFill/>
         </p:spPr>
         <p:txBody>
-          <a:bodyPr wrap="none">
+          <a:bodyPr wrap="square">
             <a:spAutoFit/>
           </a:bodyPr>
           <a:lstStyle/>
           <a:p>
+            <a:pPr>
+              <a:spcAft>
+                <a:spcPts val="400"/>
+              </a:spcAft>
+              <a:defRPr sz="1050" b="1">
+                <a:solidFill>
+                  <a:srgbClr val="0891B2"/>
+                </a:solidFill>
+                <a:latin typeface="Arial"/>
+              </a:defRPr>
+            </a:pPr>
+            <a:r>
+              <a:t>Trust via Explainable AI</a:t>
+            </a:r>
+          </a:p>
+          <a:p>
+            <a:pPr>
+              <a:defRPr sz="850">
+                <a:solidFill>
+                  <a:srgbClr val="334155"/>
+                </a:solidFill>
+                <a:latin typeface="Arial"/>
+              </a:defRPr>
+            </a:pPr>
+            <a:r>
+              <a:t>Every recommendation provides transparent 'WHY' causal reasoning, organic biological controls (Neem/Trichoderma), and government-approved chemical dosages.</a:t>
+            </a:r>
+          </a:p>
+        </p:txBody>
+      </p:sp>
+      <p:sp>
+        <p:nvSpPr>
+          <p:cNvPr id="24" name="Rounded Rectangle 23"/>
+          <p:cNvSpPr/>
+          <p:nvPr/>
+        </p:nvSpPr>
+        <p:spPr>
+          <a:xfrm>
+            <a:off x="548640" y="5806440"/>
+            <a:ext cx="11094415" cy="594360"/>
+          </a:xfrm>
+          <a:prstGeom prst="roundRect">
+            <a:avLst/>
+          </a:prstGeom>
+          <a:solidFill>
+            <a:srgbClr val="0F2A4A"/>
+          </a:solidFill>
+          <a:ln>
+            <a:noFill/>
+          </a:ln>
+        </p:spPr>
+        <p:style>
+          <a:lnRef idx="1">
+            <a:schemeClr val="accent1"/>
+          </a:lnRef>
+          <a:fillRef idx="3">
+            <a:schemeClr val="accent1"/>
+          </a:fillRef>
+          <a:effectRef idx="2">
+            <a:schemeClr val="accent1"/>
+          </a:effectRef>
+          <a:fontRef idx="minor">
+            <a:schemeClr val="lt1"/>
+          </a:fontRef>
+        </p:style>
+        <p:txBody>
+          <a:bodyPr rtlCol="0" anchor="ctr" tIns="109728"/>
+          <a:lstStyle/>
+          <a:p>
             <a:pPr algn="ctr">
-              <a:defRPr sz="1050" b="1">
+              <a:defRPr sz="1000" b="1">
                 <a:solidFill>
                   <a:srgbClr val="FFFFFF"/>
                 </a:solidFill>
+                <a:latin typeface="Arial"/>
               </a:defRPr>
             </a:pPr>
             <a:r>
-              <a:t>🌱 Empowering Indian Farmers   |   ⚡ 45 TOPS Hexagon™ NPU   |   🔋 26+ Hr Battery   |   🌾 Target: 146M+ Farming Households</a:t>
+              <a:t>🎯 Empowering Farmers. Enabling Growth.        🛡️ Transparent • Inclusive • Reliable.        🏆 Real Agronomic Impact. Stronger Rural Communities.            [ 05 ]</a:t>
+            </a:r>
+          </a:p>
+        </p:txBody>
+      </p:sp>
+      <p:sp>
+        <p:nvSpPr>
+          <p:cNvPr id="25" name="Rectangle 24"/>
+          <p:cNvSpPr/>
+          <p:nvPr/>
+        </p:nvSpPr>
+        <p:spPr>
+          <a:xfrm>
+            <a:off x="0" y="6537960"/>
+            <a:ext cx="12191695" cy="320040"/>
+          </a:xfrm>
+          <a:prstGeom prst="rect">
+            <a:avLst/>
+          </a:prstGeom>
+          <a:solidFill>
+            <a:srgbClr val="0F1E36"/>
+          </a:solidFill>
+          <a:ln>
+            <a:noFill/>
+          </a:ln>
+        </p:spPr>
+        <p:style>
+          <a:lnRef idx="1">
+            <a:schemeClr val="accent1"/>
+          </a:lnRef>
+          <a:fillRef idx="3">
+            <a:schemeClr val="accent1"/>
+          </a:fillRef>
+          <a:effectRef idx="2">
+            <a:schemeClr val="accent1"/>
+          </a:effectRef>
+          <a:fontRef idx="minor">
+            <a:schemeClr val="lt1"/>
+          </a:fontRef>
+        </p:style>
+        <p:txBody>
+          <a:bodyPr rtlCol="0" anchor="ctr" tIns="54864"/>
+          <a:lstStyle/>
+          <a:p>
+            <a:pPr algn="ctr">
+              <a:defRPr sz="900">
+                <a:solidFill>
+                  <a:srgbClr val="94A3B8"/>
+                </a:solidFill>
+                <a:latin typeface="Arial"/>
+              </a:defRPr>
+            </a:pPr>
+            <a:r>
+              <a:t>@SIH Idea Submission- Template  |  Qualcomm Snapdragon® AI Lab Build &amp; Present Challenge 2026                 Page 5</a:t>
             </a:r>
           </a:p>
         </p:txBody>
@@ -6887,16 +6796,40 @@
         <p:nvPr/>
       </p:nvGrpSpPr>
       <p:grpSpPr/>
-      <p:sp>
-        <p:nvSpPr>
-          <p:cNvPr id="2" name="TextBox 1"/>
+      <p:pic>
+        <p:nvPicPr>
+          <p:cNvPr id="2" name="Picture 1" descr="team_logo.png"/>
+          <p:cNvPicPr>
+            <a:picLocks noChangeAspect="1"/>
+          </p:cNvPicPr>
+          <p:nvPr/>
+        </p:nvPicPr>
+        <p:blipFill>
+          <a:blip r:embed="rId2"/>
+          <a:stretch>
+            <a:fillRect/>
+          </a:stretch>
+        </p:blipFill>
+        <p:spPr>
+          <a:xfrm>
+            <a:off x="457200" y="274320"/>
+            <a:ext cx="868680" cy="868680"/>
+          </a:xfrm>
+          <a:prstGeom prst="rect">
+            <a:avLst/>
+          </a:prstGeom>
+        </p:spPr>
+      </p:pic>
+      <p:sp>
+        <p:nvSpPr>
+          <p:cNvPr id="3" name="TextBox 2"/>
           <p:cNvSpPr txBox="1"/>
           <p:nvPr/>
         </p:nvSpPr>
         <p:spPr>
           <a:xfrm>
-            <a:off x="731520" y="274320"/>
-            <a:ext cx="10698480" cy="320040"/>
+            <a:off x="1645920" y="274320"/>
+            <a:ext cx="8046720" cy="868680"/>
           </a:xfrm>
           <a:prstGeom prst="rect">
             <a:avLst/>
@@ -6909,140 +6842,64 @@
           </a:bodyPr>
           <a:lstStyle/>
           <a:p>
-            <a:pPr>
-              <a:defRPr sz="950" b="1">
-                <a:solidFill>
-                  <a:srgbClr val="D97706"/>
-                </a:solidFill>
+            <a:pPr algn="ctr">
+              <a:defRPr sz="2200" b="1">
+                <a:solidFill>
+                  <a:srgbClr val="0F172A"/>
+                </a:solidFill>
+                <a:latin typeface="Arial"/>
               </a:defRPr>
             </a:pPr>
             <a:r>
-              <a:t>QUALCOMM SNAPDRAGON® AI LAB BUILD &amp; PRESENT CHALLENGE 2026</a:t>
-            </a:r>
-          </a:p>
-        </p:txBody>
-      </p:sp>
-      <p:sp>
-        <p:nvSpPr>
-          <p:cNvPr id="3" name="TextBox 2"/>
-          <p:cNvSpPr txBox="1"/>
+              <a:t>RESEARCH AND REFERENCES</a:t>
+            </a:r>
+            <a:br/>
+            <a:r>
+              <a:t>Evaluating Key Differentiators &amp; Competitive Comparison Matrix</a:t>
+            </a:r>
+          </a:p>
+        </p:txBody>
+      </p:sp>
+      <p:pic>
+        <p:nvPicPr>
+          <p:cNvPr id="4" name="Picture 3" descr="challenge_logo.png"/>
+          <p:cNvPicPr>
+            <a:picLocks noChangeAspect="1"/>
+          </p:cNvPicPr>
           <p:nvPr/>
-        </p:nvSpPr>
-        <p:spPr>
-          <a:xfrm>
-            <a:off x="731520" y="502920"/>
-            <a:ext cx="10698480" cy="548640"/>
+        </p:nvPicPr>
+        <p:blipFill>
+          <a:blip r:embed="rId3"/>
+          <a:stretch>
+            <a:fillRect/>
+          </a:stretch>
+        </p:blipFill>
+        <p:spPr>
+          <a:xfrm>
+            <a:off x="10058400" y="228600"/>
+            <a:ext cx="1645920" cy="914400"/>
           </a:xfrm>
           <a:prstGeom prst="rect">
             <a:avLst/>
           </a:prstGeom>
-          <a:noFill/>
-        </p:spPr>
-        <p:txBody>
-          <a:bodyPr wrap="none">
-            <a:spAutoFit/>
-          </a:bodyPr>
-          <a:lstStyle/>
-          <a:p>
-            <a:pPr>
-              <a:defRPr sz="2200" b="1">
-                <a:solidFill>
-                  <a:srgbClr val="0F172A"/>
-                </a:solidFill>
-              </a:defRPr>
-            </a:pPr>
-            <a:r>
-              <a:t>RESEARCH, REFERENCES &amp; COMPETITIVE MATRIX</a:t>
-            </a:r>
-          </a:p>
-        </p:txBody>
-      </p:sp>
-      <p:sp>
-        <p:nvSpPr>
-          <p:cNvPr id="4" name="TextBox 3"/>
-          <p:cNvSpPr txBox="1"/>
-          <p:nvPr/>
-        </p:nvSpPr>
-        <p:spPr>
-          <a:xfrm>
-            <a:off x="731520" y="1051560"/>
-            <a:ext cx="10698480" cy="320040"/>
-          </a:xfrm>
-          <a:prstGeom prst="rect">
-            <a:avLst/>
-          </a:prstGeom>
-          <a:noFill/>
-        </p:spPr>
-        <p:txBody>
-          <a:bodyPr wrap="none">
-            <a:spAutoFit/>
-          </a:bodyPr>
-          <a:lstStyle/>
-          <a:p>
-            <a:pPr>
-              <a:defRPr sz="1100">
-                <a:solidFill>
-                  <a:srgbClr val="059669"/>
-                </a:solidFill>
-              </a:defRPr>
-            </a:pPr>
-            <a:r>
-              <a:t>Comparative Benchmark Against Existing Agricultural Portals &amp; Apps</a:t>
-            </a:r>
-          </a:p>
-        </p:txBody>
-      </p:sp>
-      <p:sp>
-        <p:nvSpPr>
-          <p:cNvPr id="5" name="TextBox 4"/>
-          <p:cNvSpPr txBox="1"/>
-          <p:nvPr/>
-        </p:nvSpPr>
-        <p:spPr>
-          <a:xfrm>
-            <a:off x="10972800" y="365760"/>
-            <a:ext cx="731520" cy="365760"/>
-          </a:xfrm>
-          <a:prstGeom prst="rect">
-            <a:avLst/>
-          </a:prstGeom>
-          <a:noFill/>
-        </p:spPr>
-        <p:txBody>
-          <a:bodyPr wrap="none">
-            <a:spAutoFit/>
-          </a:bodyPr>
-          <a:lstStyle/>
-          <a:p>
-            <a:pPr>
-              <a:defRPr sz="1200" b="1">
-                <a:solidFill>
-                  <a:srgbClr val="64748B"/>
-                </a:solidFill>
-              </a:defRPr>
-            </a:pPr>
-            <a:r>
-              <a:t>06</a:t>
-            </a:r>
-          </a:p>
-        </p:txBody>
-      </p:sp>
-      <p:sp>
-        <p:nvSpPr>
-          <p:cNvPr id="6" name="Rounded Rectangle 5"/>
+        </p:spPr>
+      </p:pic>
+      <p:sp>
+        <p:nvSpPr>
+          <p:cNvPr id="5" name="Rectangle 4"/>
           <p:cNvSpPr/>
           <p:nvPr/>
         </p:nvSpPr>
         <p:spPr>
           <a:xfrm>
-            <a:off x="731520" y="1463040"/>
-            <a:ext cx="3840480" cy="4937760"/>
-          </a:xfrm>
-          <a:prstGeom prst="roundRect">
+            <a:off x="457200" y="1234440"/>
+            <a:ext cx="11277295" cy="18288"/>
+          </a:xfrm>
+          <a:prstGeom prst="rect">
             <a:avLst/>
           </a:prstGeom>
           <a:solidFill>
-            <a:srgbClr val="F8FAFC"/>
+            <a:srgbClr val="E2E8F0"/>
           </a:solidFill>
           <a:ln>
             <a:solidFill>
@@ -7074,173 +6931,162 @@
       </p:sp>
       <p:sp>
         <p:nvSpPr>
-          <p:cNvPr id="7" name="TextBox 6"/>
-          <p:cNvSpPr txBox="1"/>
+          <p:cNvPr id="6" name="Rounded Rectangle 5"/>
+          <p:cNvSpPr/>
           <p:nvPr/>
         </p:nvSpPr>
         <p:spPr>
           <a:xfrm>
-            <a:off x="914400" y="1645920"/>
-            <a:ext cx="3474720" cy="4572000"/>
-          </a:xfrm>
-          <a:prstGeom prst="rect">
-            <a:avLst/>
-          </a:prstGeom>
-          <a:noFill/>
-        </p:spPr>
-        <p:txBody>
-          <a:bodyPr wrap="square">
-            <a:spAutoFit/>
-          </a:bodyPr>
-          <a:lstStyle/>
+            <a:off x="548640" y="1371600"/>
+            <a:ext cx="3291840" cy="4937760"/>
+          </a:xfrm>
+          <a:prstGeom prst="roundRect">
+            <a:avLst/>
+          </a:prstGeom>
+          <a:solidFill>
+            <a:srgbClr val="F8FAFC"/>
+          </a:solidFill>
+          <a:ln w="19050">
+            <a:solidFill>
+              <a:srgbClr val="CBD5E1"/>
+            </a:solidFill>
+          </a:ln>
+        </p:spPr>
+        <p:style>
+          <a:lnRef idx="1">
+            <a:schemeClr val="accent1"/>
+          </a:lnRef>
+          <a:fillRef idx="3">
+            <a:schemeClr val="accent1"/>
+          </a:fillRef>
+          <a:effectRef idx="2">
+            <a:schemeClr val="accent1"/>
+          </a:effectRef>
+          <a:fontRef idx="minor">
+            <a:schemeClr val="lt1"/>
+          </a:fontRef>
+        </p:style>
+        <p:txBody>
+          <a:bodyPr rtlCol="0" anchor="ctr" wrap="square" lIns="182880" rIns="182880" tIns="182880"/>
+          <a:lstStyle/>
+          <a:p>
+            <a:pPr algn="ctr">
+              <a:spcAft>
+                <a:spcPts val="800"/>
+              </a:spcAft>
+              <a:defRPr b="1" sz="1200">
+                <a:solidFill>
+                  <a:srgbClr val="0F172A"/>
+                </a:solidFill>
+              </a:defRPr>
+            </a:pPr>
+            <a:r>
+              <a:t>References &amp; Benchmarks</a:t>
+            </a:r>
+          </a:p>
           <a:p>
             <a:pPr>
               <a:spcAft>
-                <a:spcPts val="1200"/>
+                <a:spcPts val="600"/>
               </a:spcAft>
-              <a:defRPr sz="1300" b="1">
-                <a:solidFill>
-                  <a:srgbClr val="065F46"/>
+              <a:defRPr sz="850">
+                <a:solidFill>
+                  <a:srgbClr val="334155"/>
                 </a:solidFill>
               </a:defRPr>
             </a:pPr>
             <a:r>
-              <a:t>RESEARCH &amp; OFFICIAL REFERENCES</a:t>
+              <a:t>• Qualcomm AI Hub: ONNX Runtime INT8 MobileNetV4 &amp; Whisper optimization for Hexagon NPU.</a:t>
             </a:r>
           </a:p>
           <a:p>
             <a:pPr>
               <a:spcAft>
-                <a:spcPts val="1000"/>
+                <a:spcPts val="600"/>
               </a:spcAft>
+              <a:defRPr sz="850">
+                <a:solidFill>
+                  <a:srgbClr val="334155"/>
+                </a:solidFill>
+              </a:defRPr>
             </a:pPr>
             <a:r>
-              <a:rPr b="1" sz="1000">
-                <a:solidFill>
-                  <a:srgbClr val="0F172A"/>
-                </a:solidFill>
-              </a:rPr>
-              <a:t>• Qualcomm AI Hub Model Registry
-</a:t>
-            </a:r>
-            <a:r>
-              <a:rPr sz="950">
-                <a:solidFill>
-                  <a:srgbClr val="334155"/>
-                </a:solidFill>
-              </a:rPr>
-              <a:t>Pre-compiled INT8 models for Hexagon HTP: efficientnet-lite0-w8a8, mobilebert-int8</a:t>
+              <a:t>• PlantVillage Dataset: 54,303 expert-annotated leaf images across 38 crop disease classes.</a:t>
             </a:r>
           </a:p>
           <a:p>
             <a:pPr>
               <a:spcAft>
-                <a:spcPts val="1000"/>
+                <a:spcPts val="600"/>
               </a:spcAft>
+              <a:defRPr sz="850">
+                <a:solidFill>
+                  <a:srgbClr val="334155"/>
+                </a:solidFill>
+              </a:defRPr>
             </a:pPr>
             <a:r>
-              <a:rPr b="1" sz="1000">
-                <a:solidFill>
-                  <a:srgbClr val="0F172A"/>
-                </a:solidFill>
-              </a:rPr>
-              <a:t>• Penn State PlantVillage Dataset
-</a:t>
-            </a:r>
-            <a:r>
-              <a:rPr sz="950">
-                <a:solidFill>
-                  <a:srgbClr val="334155"/>
-                </a:solidFill>
-              </a:rPr>
-              <a:t>54,306 expert-annotated leaf disease images covering 38 crop disease classes</a:t>
+              <a:t>• ICAR (Indian Council of Agricultural Research): Integrated Pest Management (IPM) chemical &amp; bio-fungicide spray standards.</a:t>
             </a:r>
           </a:p>
           <a:p>
             <a:pPr>
               <a:spcAft>
-                <a:spcPts val="1000"/>
+                <a:spcPts val="600"/>
               </a:spcAft>
+              <a:defRPr sz="850">
+                <a:solidFill>
+                  <a:srgbClr val="334155"/>
+                </a:solidFill>
+              </a:defRPr>
             </a:pPr>
             <a:r>
-              <a:rPr b="1" sz="1000">
-                <a:solidFill>
-                  <a:srgbClr val="0F172A"/>
-                </a:solidFill>
-              </a:rPr>
-              <a:t>• PM-KISAN National Portal
-</a:t>
-            </a:r>
-            <a:r>
-              <a:rPr sz="950">
-                <a:solidFill>
-                  <a:srgbClr val="334155"/>
-                </a:solidFill>
-              </a:rPr>
-              <a:t>Direct Benefit Transfer (DBT) guidelines, PFMS 104 Aadhaar bank mapping rules</a:t>
+              <a:t>• Jan Samarth Portal &amp; UMANG App: Unified government credit linkage and agricultural subsidy schemes.</a:t>
             </a:r>
           </a:p>
           <a:p>
             <a:pPr>
               <a:spcAft>
-                <a:spcPts val="1000"/>
+                <a:spcPts val="600"/>
               </a:spcAft>
+              <a:defRPr sz="850">
+                <a:solidFill>
+                  <a:srgbClr val="334155"/>
+                </a:solidFill>
+              </a:defRPr>
             </a:pPr>
             <a:r>
-              <a:rPr b="1" sz="1000">
-                <a:solidFill>
-                  <a:srgbClr val="0F172A"/>
-                </a:solidFill>
-              </a:rPr>
-              <a:t>• ICAR &amp; KVK Agronomy Guidelines
-</a:t>
-            </a:r>
-            <a:r>
-              <a:rPr sz="950">
-                <a:solidFill>
-                  <a:srgbClr val="334155"/>
-                </a:solidFill>
-              </a:rPr>
-              <a:t>Standard package of practices for Wheat, Rice, Mustard, Potato and Tomato</a:t>
+              <a:t>• Ministry of Agriculture &amp; Farmers Welfare: PM-KISAN, PMFBY, SMAM guidelines (2024-2026).</a:t>
             </a:r>
           </a:p>
           <a:p>
             <a:pPr>
               <a:spcAft>
-                <a:spcPts val="1000"/>
+                <a:spcPts val="600"/>
               </a:spcAft>
+              <a:defRPr sz="850">
+                <a:solidFill>
+                  <a:srgbClr val="334155"/>
+                </a:solidFill>
+              </a:defRPr>
             </a:pPr>
             <a:r>
-              <a:rPr b="1" sz="1000">
-                <a:solidFill>
-                  <a:srgbClr val="0F172A"/>
-                </a:solidFill>
-              </a:rPr>
-              <a:t>• Digital Personal Data Protection Act 2023
-</a:t>
-            </a:r>
-            <a:r>
-              <a:rPr sz="950">
-                <a:solidFill>
-                  <a:srgbClr val="334155"/>
-                </a:solidFill>
-              </a:rPr>
-              <a:t>Full edge compliance; zero farmer PII transmitted off-device</a:t>
+              <a:t>• Digital Personal Data Protection (DPDP) Act 2023: 100% on-device data privacy compliance.</a:t>
             </a:r>
           </a:p>
         </p:txBody>
       </p:sp>
       <p:graphicFrame>
         <p:nvGraphicFramePr>
-          <p:cNvPr id="8" name="Table 7"/>
+          <p:cNvPr id="7" name="Table 6"/>
           <p:cNvGraphicFramePr>
             <a:graphicFrameLocks noGrp="1"/>
           </p:cNvGraphicFramePr>
           <p:nvPr/>
         </p:nvGraphicFramePr>
         <p:xfrm>
-          <a:off x="4754880" y="1463040"/>
-          <a:ext cx="6675120" cy="4937760"/>
+          <a:off x="4023360" y="1371600"/>
+          <a:ext cx="7589520" cy="4937760"/>
         </p:xfrm>
         <a:graphic>
           <a:graphicData uri="http://schemas.openxmlformats.org/drawingml/2006/table">
@@ -7249,32 +7095,32 @@
                 <a:tableStyleId>{5C22544A-7EE6-4342-B048-85BDC9FD1C3A}</a:tableStyleId>
               </a:tblPr>
               <a:tblGrid>
-                <a:gridCol w="2377440"/>
-                <a:gridCol w="1463040"/>
-                <a:gridCol w="1371600"/>
-                <a:gridCol w="1463040"/>
+                <a:gridCol w="3108960"/>
+                <a:gridCol w="1920240"/>
+                <a:gridCol w="1280160"/>
+                <a:gridCol w="1280160"/>
               </a:tblGrid>
-              <a:tr h="705394">
+              <a:tr h="617220">
                 <a:tc>
                   <a:txBody>
                     <a:bodyPr/>
                     <a:lstStyle/>
                     <a:p>
                       <a:pPr algn="l">
-                        <a:defRPr sz="1000" b="1">
+                        <a:defRPr b="1" sz="1000">
                           <a:solidFill>
                             <a:srgbClr val="FFFFFF"/>
                           </a:solidFill>
                         </a:defRPr>
                       </a:pPr>
                       <a:r>
-                        <a:t>Key Feature / Capability</a:t>
+                        <a:t>Feature / Aspect</a:t>
                       </a:r>
                     </a:p>
                   </a:txBody>
                   <a:tcPr>
                     <a:solidFill>
-                      <a:srgbClr val="065F46"/>
+                      <a:srgbClr val="0F1E36"/>
                     </a:solidFill>
                   </a:tcPr>
                 </a:tc>
@@ -7284,20 +7130,20 @@
                     <a:lstStyle/>
                     <a:p>
                       <a:pPr algn="ctr">
-                        <a:defRPr sz="1000" b="1">
+                        <a:defRPr b="1" sz="1000">
                           <a:solidFill>
                             <a:srgbClr val="FFFFFF"/>
                           </a:solidFill>
                         </a:defRPr>
                       </a:pPr>
                       <a:r>
-                        <a:t>Kisan Sahayak AI</a:t>
+                        <a:t>Kisan Sahayak AI (Our App)</a:t>
                       </a:r>
                     </a:p>
                   </a:txBody>
                   <a:tcPr>
                     <a:solidFill>
-                      <a:srgbClr val="065F46"/>
+                      <a:srgbClr val="0F1E36"/>
                     </a:solidFill>
                   </a:tcPr>
                 </a:tc>
@@ -7307,20 +7153,20 @@
                     <a:lstStyle/>
                     <a:p>
                       <a:pPr algn="ctr">
-                        <a:defRPr sz="1000" b="1">
+                        <a:defRPr b="1" sz="1000">
                           <a:solidFill>
                             <a:srgbClr val="FFFFFF"/>
                           </a:solidFill>
                         </a:defRPr>
                       </a:pPr>
                       <a:r>
-                        <a:t>Generic Agri Apps</a:t>
+                        <a:t>Jan Samarth</a:t>
                       </a:r>
                     </a:p>
                   </a:txBody>
                   <a:tcPr>
                     <a:solidFill>
-                      <a:srgbClr val="065F46"/>
+                      <a:srgbClr val="0F1E36"/>
                     </a:solidFill>
                   </a:tcPr>
                 </a:tc>
@@ -7330,64 +7176,45 @@
                     <a:lstStyle/>
                     <a:p>
                       <a:pPr algn="ctr">
-                        <a:defRPr sz="1000" b="1">
+                        <a:defRPr b="1" sz="1000">
                           <a:solidFill>
                             <a:srgbClr val="FFFFFF"/>
                           </a:solidFill>
                         </a:defRPr>
                       </a:pPr>
                       <a:r>
-                        <a:t>Govt Portals (UMANG)</a:t>
+                        <a:t>UMANG</a:t>
                       </a:r>
                     </a:p>
                   </a:txBody>
                   <a:tcPr>
                     <a:solidFill>
-                      <a:srgbClr val="065F46"/>
+                      <a:srgbClr val="0F1E36"/>
                     </a:solidFill>
                   </a:tcPr>
                 </a:tc>
               </a:tr>
-              <a:tr h="705394">
+              <a:tr h="617220">
                 <a:tc>
                   <a:txBody>
                     <a:bodyPr/>
                     <a:lstStyle/>
                     <a:p>
                       <a:pPr algn="l">
-                        <a:defRPr sz="950">
+                        <a:defRPr sz="900" b="1">
                           <a:solidFill>
                             <a:srgbClr val="0F172A"/>
                           </a:solidFill>
                         </a:defRPr>
                       </a:pPr>
                       <a:r>
-                        <a:t>100% Offline Edge AI (Zero Net)</a:t>
-                      </a:r>
-                    </a:p>
-                  </a:txBody>
-                  <a:tcPr/>
-                </a:tc>
-                <a:tc>
-                  <a:txBody>
-                    <a:bodyPr/>
-                    <a:lstStyle/>
-                    <a:p>
-                      <a:pPr algn="ctr">
-                        <a:defRPr sz="950" b="1">
-                          <a:solidFill>
-                            <a:srgbClr val="065F46"/>
-                          </a:solidFill>
-                        </a:defRPr>
-                      </a:pPr>
-                      <a:r>
-                        <a:t>✔ (Hexagon NPU)</a:t>
+                        <a:t>Works 100% Offline (Zero Internet)</a:t>
                       </a:r>
                     </a:p>
                   </a:txBody>
                   <a:tcPr>
                     <a:solidFill>
-                      <a:srgbClr val="ECFDF5"/>
+                      <a:srgbClr val="FFFFFF"/>
                     </a:solidFill>
                   </a:tcPr>
                 </a:tc>
@@ -7397,79 +7224,20 @@
                     <a:lstStyle/>
                     <a:p>
                       <a:pPr algn="ctr">
-                        <a:defRPr sz="950">
+                        <a:defRPr sz="900" b="1">
                           <a:solidFill>
-                            <a:srgbClr val="B91C1C"/>
+                            <a:srgbClr val="059669"/>
                           </a:solidFill>
                         </a:defRPr>
                       </a:pPr>
                       <a:r>
-                        <a:t>✘ (Needs 4G/5G)</a:t>
-                      </a:r>
-                    </a:p>
-                  </a:txBody>
-                  <a:tcPr/>
-                </a:tc>
-                <a:tc>
-                  <a:txBody>
-                    <a:bodyPr/>
-                    <a:lstStyle/>
-                    <a:p>
-                      <a:pPr algn="ctr">
-                        <a:defRPr sz="950">
-                          <a:solidFill>
-                            <a:srgbClr val="B91C1C"/>
-                          </a:solidFill>
-                        </a:defRPr>
-                      </a:pPr>
-                      <a:r>
-                        <a:t>✘ (Cloud Portal)</a:t>
-                      </a:r>
-                    </a:p>
-                  </a:txBody>
-                  <a:tcPr/>
-                </a:tc>
-              </a:tr>
-              <a:tr h="705394">
-                <a:tc>
-                  <a:txBody>
-                    <a:bodyPr/>
-                    <a:lstStyle/>
-                    <a:p>
-                      <a:pPr algn="l">
-                        <a:defRPr sz="950">
-                          <a:solidFill>
-                            <a:srgbClr val="0F172A"/>
-                          </a:solidFill>
-                        </a:defRPr>
-                      </a:pPr>
-                      <a:r>
-                        <a:t>Computer Vision Leaf Diagnosis</a:t>
-                      </a:r>
-                    </a:p>
-                  </a:txBody>
-                  <a:tcPr/>
-                </a:tc>
-                <a:tc>
-                  <a:txBody>
-                    <a:bodyPr/>
-                    <a:lstStyle/>
-                    <a:p>
-                      <a:pPr algn="ctr">
-                        <a:defRPr sz="950" b="1">
-                          <a:solidFill>
-                            <a:srgbClr val="065F46"/>
-                          </a:solidFill>
-                        </a:defRPr>
-                      </a:pPr>
-                      <a:r>
-                        <a:t>✔ (&lt;40ms Local)</a:t>
+                        <a:t>✔ Yes (On-Device NPU)</a:t>
                       </a:r>
                     </a:p>
                   </a:txBody>
                   <a:tcPr>
                     <a:solidFill>
-                      <a:srgbClr val="ECFDF5"/>
+                      <a:srgbClr val="FFFFFF"/>
                     </a:solidFill>
                   </a:tcPr>
                 </a:tc>
@@ -7479,79 +7247,20 @@
                     <a:lstStyle/>
                     <a:p>
                       <a:pPr algn="ctr">
-                        <a:defRPr sz="950">
+                        <a:defRPr sz="900">
                           <a:solidFill>
-                            <a:srgbClr val="065F46"/>
+                            <a:srgbClr val="DC2626"/>
                           </a:solidFill>
                         </a:defRPr>
                       </a:pPr>
                       <a:r>
-                        <a:t>✔ (Slow Cloud API)</a:t>
-                      </a:r>
-                    </a:p>
-                  </a:txBody>
-                  <a:tcPr/>
-                </a:tc>
-                <a:tc>
-                  <a:txBody>
-                    <a:bodyPr/>
-                    <a:lstStyle/>
-                    <a:p>
-                      <a:pPr algn="ctr">
-                        <a:defRPr sz="950">
-                          <a:solidFill>
-                            <a:srgbClr val="B91C1C"/>
-                          </a:solidFill>
-                        </a:defRPr>
-                      </a:pPr>
-                      <a:r>
-                        <a:t>✘ (Not Supported)</a:t>
-                      </a:r>
-                    </a:p>
-                  </a:txBody>
-                  <a:tcPr/>
-                </a:tc>
-              </a:tr>
-              <a:tr h="705394">
-                <a:tc>
-                  <a:txBody>
-                    <a:bodyPr/>
-                    <a:lstStyle/>
-                    <a:p>
-                      <a:pPr algn="l">
-                        <a:defRPr sz="950">
-                          <a:solidFill>
-                            <a:srgbClr val="0F172A"/>
-                          </a:solidFill>
-                        </a:defRPr>
-                      </a:pPr>
-                      <a:r>
-                        <a:t>Multilingual Voice Dialogue</a:t>
-                      </a:r>
-                    </a:p>
-                  </a:txBody>
-                  <a:tcPr/>
-                </a:tc>
-                <a:tc>
-                  <a:txBody>
-                    <a:bodyPr/>
-                    <a:lstStyle/>
-                    <a:p>
-                      <a:pPr algn="ctr">
-                        <a:defRPr sz="950" b="1">
-                          <a:solidFill>
-                            <a:srgbClr val="065F46"/>
-                          </a:solidFill>
-                        </a:defRPr>
-                      </a:pPr>
-                      <a:r>
-                        <a:t>✔ (Native Hindi)</a:t>
+                        <a:t>✖ No</a:t>
                       </a:r>
                     </a:p>
                   </a:txBody>
                   <a:tcPr>
                     <a:solidFill>
-                      <a:srgbClr val="ECFDF5"/>
+                      <a:srgbClr val="FFFFFF"/>
                     </a:solidFill>
                   </a:tcPr>
                 </a:tc>
@@ -7561,79 +7270,45 @@
                     <a:lstStyle/>
                     <a:p>
                       <a:pPr algn="ctr">
-                        <a:defRPr sz="950">
+                        <a:defRPr sz="900">
                           <a:solidFill>
-                            <a:srgbClr val="B91C1C"/>
+                            <a:srgbClr val="DC2626"/>
                           </a:solidFill>
                         </a:defRPr>
                       </a:pPr>
                       <a:r>
-                        <a:t>✘ (English/Text)</a:t>
+                        <a:t>✖ No</a:t>
                       </a:r>
                     </a:p>
                   </a:txBody>
-                  <a:tcPr/>
-                </a:tc>
-                <a:tc>
-                  <a:txBody>
-                    <a:bodyPr/>
-                    <a:lstStyle/>
-                    <a:p>
-                      <a:pPr algn="ctr">
-                        <a:defRPr sz="950">
-                          <a:solidFill>
-                            <a:srgbClr val="B91C1C"/>
-                          </a:solidFill>
-                        </a:defRPr>
-                      </a:pPr>
-                      <a:r>
-                        <a:t>✘ (Complex Text)</a:t>
-                      </a:r>
-                    </a:p>
-                  </a:txBody>
-                  <a:tcPr/>
+                  <a:tcPr>
+                    <a:solidFill>
+                      <a:srgbClr val="FFFFFF"/>
+                    </a:solidFill>
+                  </a:tcPr>
                 </a:tc>
               </a:tr>
-              <a:tr h="705394">
+              <a:tr h="617220">
                 <a:tc>
                   <a:txBody>
                     <a:bodyPr/>
                     <a:lstStyle/>
                     <a:p>
                       <a:pPr algn="l">
-                        <a:defRPr sz="950">
+                        <a:defRPr sz="900" b="1">
                           <a:solidFill>
                             <a:srgbClr val="0F172A"/>
                           </a:solidFill>
                         </a:defRPr>
                       </a:pPr>
                       <a:r>
-                        <a:t>WhatsApp Two-Way Sync</a:t>
-                      </a:r>
-                    </a:p>
-                  </a:txBody>
-                  <a:tcPr/>
-                </a:tc>
-                <a:tc>
-                  <a:txBody>
-                    <a:bodyPr/>
-                    <a:lstStyle/>
-                    <a:p>
-                      <a:pPr algn="ctr">
-                        <a:defRPr sz="950" b="1">
-                          <a:solidFill>
-                            <a:srgbClr val="065F46"/>
-                          </a:solidFill>
-                        </a:defRPr>
-                      </a:pPr>
-                      <a:r>
-                        <a:t>✔ (Live Desk + API)</a:t>
+                        <a:t>Sub-20ms Crop Disease Vision</a:t>
                       </a:r>
                     </a:p>
                   </a:txBody>
                   <a:tcPr>
                     <a:solidFill>
-                      <a:srgbClr val="ECFDF5"/>
+                      <a:srgbClr val="F1F5F9"/>
                     </a:solidFill>
                   </a:tcPr>
                 </a:tc>
@@ -7643,79 +7318,20 @@
                     <a:lstStyle/>
                     <a:p>
                       <a:pPr algn="ctr">
-                        <a:defRPr sz="950">
+                        <a:defRPr sz="900" b="1">
                           <a:solidFill>
-                            <a:srgbClr val="B91C1C"/>
+                            <a:srgbClr val="059669"/>
                           </a:solidFill>
                         </a:defRPr>
                       </a:pPr>
                       <a:r>
-                        <a:t>✘ (No WhatsApp)</a:t>
-                      </a:r>
-                    </a:p>
-                  </a:txBody>
-                  <a:tcPr/>
-                </a:tc>
-                <a:tc>
-                  <a:txBody>
-                    <a:bodyPr/>
-                    <a:lstStyle/>
-                    <a:p>
-                      <a:pPr algn="ctr">
-                        <a:defRPr sz="950">
-                          <a:solidFill>
-                            <a:srgbClr val="B91C1C"/>
-                          </a:solidFill>
-                        </a:defRPr>
-                      </a:pPr>
-                      <a:r>
-                        <a:t>✘ (No WhatsApp)</a:t>
-                      </a:r>
-                    </a:p>
-                  </a:txBody>
-                  <a:tcPr/>
-                </a:tc>
-              </a:tr>
-              <a:tr h="705394">
-                <a:tc>
-                  <a:txBody>
-                    <a:bodyPr/>
-                    <a:lstStyle/>
-                    <a:p>
-                      <a:pPr algn="l">
-                        <a:defRPr sz="950">
-                          <a:solidFill>
-                            <a:srgbClr val="0F172A"/>
-                          </a:solidFill>
-                        </a:defRPr>
-                      </a:pPr>
-                      <a:r>
-                        <a:t>1-Click DBT Scheme Application</a:t>
-                      </a:r>
-                    </a:p>
-                  </a:txBody>
-                  <a:tcPr/>
-                </a:tc>
-                <a:tc>
-                  <a:txBody>
-                    <a:bodyPr/>
-                    <a:lstStyle/>
-                    <a:p>
-                      <a:pPr algn="ctr">
-                        <a:defRPr sz="950" b="1">
-                          <a:solidFill>
-                            <a:srgbClr val="065F46"/>
-                          </a:solidFill>
-                        </a:defRPr>
-                      </a:pPr>
-                      <a:r>
-                        <a:t>✔ (Digital Cert.)</a:t>
+                        <a:t>✔ Yes (MobileNetV4 INT8)</a:t>
                       </a:r>
                     </a:p>
                   </a:txBody>
                   <a:tcPr>
                     <a:solidFill>
-                      <a:srgbClr val="ECFDF5"/>
+                      <a:srgbClr val="F1F5F9"/>
                     </a:solidFill>
                   </a:tcPr>
                 </a:tc>
@@ -7725,79 +7341,20 @@
                     <a:lstStyle/>
                     <a:p>
                       <a:pPr algn="ctr">
-                        <a:defRPr sz="950">
+                        <a:defRPr sz="900">
                           <a:solidFill>
-                            <a:srgbClr val="B91C1C"/>
+                            <a:srgbClr val="DC2626"/>
                           </a:solidFill>
                         </a:defRPr>
                       </a:pPr>
                       <a:r>
-                        <a:t>✘ (Info Only)</a:t>
-                      </a:r>
-                    </a:p>
-                  </a:txBody>
-                  <a:tcPr/>
-                </a:tc>
-                <a:tc>
-                  <a:txBody>
-                    <a:bodyPr/>
-                    <a:lstStyle/>
-                    <a:p>
-                      <a:pPr algn="ctr">
-                        <a:defRPr sz="950">
-                          <a:solidFill>
-                            <a:srgbClr val="065F46"/>
-                          </a:solidFill>
-                        </a:defRPr>
-                      </a:pPr>
-                      <a:r>
-                        <a:t>✔ (Multi-Step Forms)</a:t>
-                      </a:r>
-                    </a:p>
-                  </a:txBody>
-                  <a:tcPr/>
-                </a:tc>
-              </a:tr>
-              <a:tr h="705396">
-                <a:tc>
-                  <a:txBody>
-                    <a:bodyPr/>
-                    <a:lstStyle/>
-                    <a:p>
-                      <a:pPr algn="l">
-                        <a:defRPr sz="950">
-                          <a:solidFill>
-                            <a:srgbClr val="0F172A"/>
-                          </a:solidFill>
-                        </a:defRPr>
-                      </a:pPr>
-                      <a:r>
-                        <a:t>Sub-Watt Battery Life (&lt;0.5W)</a:t>
-                      </a:r>
-                    </a:p>
-                  </a:txBody>
-                  <a:tcPr/>
-                </a:tc>
-                <a:tc>
-                  <a:txBody>
-                    <a:bodyPr/>
-                    <a:lstStyle/>
-                    <a:p>
-                      <a:pPr algn="ctr">
-                        <a:defRPr sz="950" b="1">
-                          <a:solidFill>
-                            <a:srgbClr val="065F46"/>
-                          </a:solidFill>
-                        </a:defRPr>
-                      </a:pPr>
-                      <a:r>
-                        <a:t>✔ (26+ Hr HP PC)</a:t>
+                        <a:t>✖ No</a:t>
                       </a:r>
                     </a:p>
                   </a:txBody>
                   <a:tcPr>
                     <a:solidFill>
-                      <a:srgbClr val="ECFDF5"/>
+                      <a:srgbClr val="F1F5F9"/>
                     </a:solidFill>
                   </a:tcPr>
                 </a:tc>
@@ -7807,18 +7364,47 @@
                     <a:lstStyle/>
                     <a:p>
                       <a:pPr algn="ctr">
-                        <a:defRPr sz="950">
+                        <a:defRPr sz="900">
                           <a:solidFill>
-                            <a:srgbClr val="B91C1C"/>
+                            <a:srgbClr val="DC2626"/>
                           </a:solidFill>
                         </a:defRPr>
                       </a:pPr>
                       <a:r>
-                        <a:t>✘ (15W+ Drain)</a:t>
+                        <a:t>✖ No</a:t>
                       </a:r>
                     </a:p>
                   </a:txBody>
-                  <a:tcPr/>
+                  <a:tcPr>
+                    <a:solidFill>
+                      <a:srgbClr val="F1F5F9"/>
+                    </a:solidFill>
+                  </a:tcPr>
+                </a:tc>
+              </a:tr>
+              <a:tr h="617220">
+                <a:tc>
+                  <a:txBody>
+                    <a:bodyPr/>
+                    <a:lstStyle/>
+                    <a:p>
+                      <a:pPr algn="l">
+                        <a:defRPr sz="900" b="1">
+                          <a:solidFill>
+                            <a:srgbClr val="0F172A"/>
+                          </a:solidFill>
+                        </a:defRPr>
+                      </a:pPr>
+                      <a:r>
+                        <a:t>Multilingual Voice &amp; WhatsApp</a:t>
+                      </a:r>
+                    </a:p>
+                  </a:txBody>
+                  <a:tcPr>
+                    <a:solidFill>
+                      <a:srgbClr val="FFFFFF"/>
+                    </a:solidFill>
+                  </a:tcPr>
                 </a:tc>
                 <a:tc>
                   <a:txBody>
@@ -7826,24 +7412,503 @@
                     <a:lstStyle/>
                     <a:p>
                       <a:pPr algn="ctr">
-                        <a:defRPr sz="950">
+                        <a:defRPr sz="900" b="1">
                           <a:solidFill>
-                            <a:srgbClr val="B91C1C"/>
+                            <a:srgbClr val="059669"/>
                           </a:solidFill>
                         </a:defRPr>
                       </a:pPr>
                       <a:r>
-                        <a:t>✘ (N/A)</a:t>
+                        <a:t>✔ Yes (Whisper + Bot)</a:t>
                       </a:r>
                     </a:p>
                   </a:txBody>
-                  <a:tcPr/>
+                  <a:tcPr>
+                    <a:solidFill>
+                      <a:srgbClr val="FFFFFF"/>
+                    </a:solidFill>
+                  </a:tcPr>
+                </a:tc>
+                <a:tc>
+                  <a:txBody>
+                    <a:bodyPr/>
+                    <a:lstStyle/>
+                    <a:p>
+                      <a:pPr algn="ctr">
+                        <a:defRPr sz="900">
+                          <a:solidFill>
+                            <a:srgbClr val="DC2626"/>
+                          </a:solidFill>
+                        </a:defRPr>
+                      </a:pPr>
+                      <a:r>
+                        <a:t>✖ No (Web Form)</a:t>
+                      </a:r>
+                    </a:p>
+                  </a:txBody>
+                  <a:tcPr>
+                    <a:solidFill>
+                      <a:srgbClr val="FFFFFF"/>
+                    </a:solidFill>
+                  </a:tcPr>
+                </a:tc>
+                <a:tc>
+                  <a:txBody>
+                    <a:bodyPr/>
+                    <a:lstStyle/>
+                    <a:p>
+                      <a:pPr algn="ctr">
+                        <a:defRPr sz="900">
+                          <a:solidFill>
+                            <a:srgbClr val="DC2626"/>
+                          </a:solidFill>
+                        </a:defRPr>
+                      </a:pPr>
+                      <a:r>
+                        <a:t>✖ No (Menus)</a:t>
+                      </a:r>
+                    </a:p>
+                  </a:txBody>
+                  <a:tcPr>
+                    <a:solidFill>
+                      <a:srgbClr val="FFFFFF"/>
+                    </a:solidFill>
+                  </a:tcPr>
+                </a:tc>
+              </a:tr>
+              <a:tr h="617220">
+                <a:tc>
+                  <a:txBody>
+                    <a:bodyPr/>
+                    <a:lstStyle/>
+                    <a:p>
+                      <a:pPr algn="l">
+                        <a:defRPr sz="900" b="1">
+                          <a:solidFill>
+                            <a:srgbClr val="0F172A"/>
+                          </a:solidFill>
+                        </a:defRPr>
+                      </a:pPr>
+                      <a:r>
+                        <a:t>Zero Cloud Token / Server OPEX</a:t>
+                      </a:r>
+                    </a:p>
+                  </a:txBody>
+                  <a:tcPr>
+                    <a:solidFill>
+                      <a:srgbClr val="F1F5F9"/>
+                    </a:solidFill>
+                  </a:tcPr>
+                </a:tc>
+                <a:tc>
+                  <a:txBody>
+                    <a:bodyPr/>
+                    <a:lstStyle/>
+                    <a:p>
+                      <a:pPr algn="ctr">
+                        <a:defRPr sz="900" b="1">
+                          <a:solidFill>
+                            <a:srgbClr val="059669"/>
+                          </a:solidFill>
+                        </a:defRPr>
+                      </a:pPr>
+                      <a:r>
+                        <a:t>✔ Yes (Client Compute)</a:t>
+                      </a:r>
+                    </a:p>
+                  </a:txBody>
+                  <a:tcPr>
+                    <a:solidFill>
+                      <a:srgbClr val="F1F5F9"/>
+                    </a:solidFill>
+                  </a:tcPr>
+                </a:tc>
+                <a:tc>
+                  <a:txBody>
+                    <a:bodyPr/>
+                    <a:lstStyle/>
+                    <a:p>
+                      <a:pPr algn="ctr">
+                        <a:defRPr sz="900">
+                          <a:solidFill>
+                            <a:srgbClr val="DC2626"/>
+                          </a:solidFill>
+                        </a:defRPr>
+                      </a:pPr>
+                      <a:r>
+                        <a:t>✖ No (High OPEX)</a:t>
+                      </a:r>
+                    </a:p>
+                  </a:txBody>
+                  <a:tcPr>
+                    <a:solidFill>
+                      <a:srgbClr val="F1F5F9"/>
+                    </a:solidFill>
+                  </a:tcPr>
+                </a:tc>
+                <a:tc>
+                  <a:txBody>
+                    <a:bodyPr/>
+                    <a:lstStyle/>
+                    <a:p>
+                      <a:pPr algn="ctr">
+                        <a:defRPr sz="900">
+                          <a:solidFill>
+                            <a:srgbClr val="DC2626"/>
+                          </a:solidFill>
+                        </a:defRPr>
+                      </a:pPr>
+                      <a:r>
+                        <a:t>✖ No (High OPEX)</a:t>
+                      </a:r>
+                    </a:p>
+                  </a:txBody>
+                  <a:tcPr>
+                    <a:solidFill>
+                      <a:srgbClr val="F1F5F9"/>
+                    </a:solidFill>
+                  </a:tcPr>
+                </a:tc>
+              </a:tr>
+              <a:tr h="617220">
+                <a:tc>
+                  <a:txBody>
+                    <a:bodyPr/>
+                    <a:lstStyle/>
+                    <a:p>
+                      <a:pPr algn="l">
+                        <a:defRPr sz="900" b="1">
+                          <a:solidFill>
+                            <a:srgbClr val="0F172A"/>
+                          </a:solidFill>
+                        </a:defRPr>
+                      </a:pPr>
+                      <a:r>
+                        <a:t>15+ Auto-Matched Agri Subsidies</a:t>
+                      </a:r>
+                    </a:p>
+                  </a:txBody>
+                  <a:tcPr>
+                    <a:solidFill>
+                      <a:srgbClr val="FFFFFF"/>
+                    </a:solidFill>
+                  </a:tcPr>
+                </a:tc>
+                <a:tc>
+                  <a:txBody>
+                    <a:bodyPr/>
+                    <a:lstStyle/>
+                    <a:p>
+                      <a:pPr algn="ctr">
+                        <a:defRPr sz="900" b="1">
+                          <a:solidFill>
+                            <a:srgbClr val="059669"/>
+                          </a:solidFill>
+                        </a:defRPr>
+                      </a:pPr>
+                      <a:r>
+                        <a:t>✔ Yes (Rule Matcher)</a:t>
+                      </a:r>
+                    </a:p>
+                  </a:txBody>
+                  <a:tcPr>
+                    <a:solidFill>
+                      <a:srgbClr val="FFFFFF"/>
+                    </a:solidFill>
+                  </a:tcPr>
+                </a:tc>
+                <a:tc>
+                  <a:txBody>
+                    <a:bodyPr/>
+                    <a:lstStyle/>
+                    <a:p>
+                      <a:pPr algn="ctr">
+                        <a:defRPr sz="900">
+                          <a:solidFill>
+                            <a:srgbClr val="334155"/>
+                          </a:solidFill>
+                        </a:defRPr>
+                      </a:pPr>
+                      <a:r>
+                        <a:t>✔ Yes (Loans Only)</a:t>
+                      </a:r>
+                    </a:p>
+                  </a:txBody>
+                  <a:tcPr>
+                    <a:solidFill>
+                      <a:srgbClr val="FFFFFF"/>
+                    </a:solidFill>
+                  </a:tcPr>
+                </a:tc>
+                <a:tc>
+                  <a:txBody>
+                    <a:bodyPr/>
+                    <a:lstStyle/>
+                    <a:p>
+                      <a:pPr algn="ctr">
+                        <a:defRPr sz="900">
+                          <a:solidFill>
+                            <a:srgbClr val="DC2626"/>
+                          </a:solidFill>
+                        </a:defRPr>
+                      </a:pPr>
+                      <a:r>
+                        <a:t>✖ No (Scattered)</a:t>
+                      </a:r>
+                    </a:p>
+                  </a:txBody>
+                  <a:tcPr>
+                    <a:solidFill>
+                      <a:srgbClr val="FFFFFF"/>
+                    </a:solidFill>
+                  </a:tcPr>
+                </a:tc>
+              </a:tr>
+              <a:tr h="617220">
+                <a:tc>
+                  <a:txBody>
+                    <a:bodyPr/>
+                    <a:lstStyle/>
+                    <a:p>
+                      <a:pPr algn="l">
+                        <a:defRPr sz="900" b="1">
+                          <a:solidFill>
+                            <a:srgbClr val="0F172A"/>
+                          </a:solidFill>
+                        </a:defRPr>
+                      </a:pPr>
+                      <a:r>
+                        <a:t>Real-Time Mandi Bhav &amp; Weather</a:t>
+                      </a:r>
+                    </a:p>
+                  </a:txBody>
+                  <a:tcPr>
+                    <a:solidFill>
+                      <a:srgbClr val="F1F5F9"/>
+                    </a:solidFill>
+                  </a:tcPr>
+                </a:tc>
+                <a:tc>
+                  <a:txBody>
+                    <a:bodyPr/>
+                    <a:lstStyle/>
+                    <a:p>
+                      <a:pPr algn="ctr">
+                        <a:defRPr sz="900" b="1">
+                          <a:solidFill>
+                            <a:srgbClr val="059669"/>
+                          </a:solidFill>
+                        </a:defRPr>
+                      </a:pPr>
+                      <a:r>
+                        <a:t>✔ Yes (Integrated APMC)</a:t>
+                      </a:r>
+                    </a:p>
+                  </a:txBody>
+                  <a:tcPr>
+                    <a:solidFill>
+                      <a:srgbClr val="F1F5F9"/>
+                    </a:solidFill>
+                  </a:tcPr>
+                </a:tc>
+                <a:tc>
+                  <a:txBody>
+                    <a:bodyPr/>
+                    <a:lstStyle/>
+                    <a:p>
+                      <a:pPr algn="ctr">
+                        <a:defRPr sz="900">
+                          <a:solidFill>
+                            <a:srgbClr val="DC2626"/>
+                          </a:solidFill>
+                        </a:defRPr>
+                      </a:pPr>
+                      <a:r>
+                        <a:t>✖ No</a:t>
+                      </a:r>
+                    </a:p>
+                  </a:txBody>
+                  <a:tcPr>
+                    <a:solidFill>
+                      <a:srgbClr val="F1F5F9"/>
+                    </a:solidFill>
+                  </a:tcPr>
+                </a:tc>
+                <a:tc>
+                  <a:txBody>
+                    <a:bodyPr/>
+                    <a:lstStyle/>
+                    <a:p>
+                      <a:pPr algn="ctr">
+                        <a:defRPr sz="900">
+                          <a:solidFill>
+                            <a:srgbClr val="334155"/>
+                          </a:solidFill>
+                        </a:defRPr>
+                      </a:pPr>
+                      <a:r>
+                        <a:t>✔ Basic Links</a:t>
+                      </a:r>
+                    </a:p>
+                  </a:txBody>
+                  <a:tcPr>
+                    <a:solidFill>
+                      <a:srgbClr val="F1F5F9"/>
+                    </a:solidFill>
+                  </a:tcPr>
+                </a:tc>
+              </a:tr>
+              <a:tr h="617220">
+                <a:tc>
+                  <a:txBody>
+                    <a:bodyPr/>
+                    <a:lstStyle/>
+                    <a:p>
+                      <a:pPr algn="l">
+                        <a:defRPr sz="900" b="1">
+                          <a:solidFill>
+                            <a:srgbClr val="0F172A"/>
+                          </a:solidFill>
+                        </a:defRPr>
+                      </a:pPr>
+                      <a:r>
+                        <a:t>DPDPA 2023 Privacy Compliant</a:t>
+                      </a:r>
+                    </a:p>
+                  </a:txBody>
+                  <a:tcPr>
+                    <a:solidFill>
+                      <a:srgbClr val="FFFFFF"/>
+                    </a:solidFill>
+                  </a:tcPr>
+                </a:tc>
+                <a:tc>
+                  <a:txBody>
+                    <a:bodyPr/>
+                    <a:lstStyle/>
+                    <a:p>
+                      <a:pPr algn="ctr">
+                        <a:defRPr sz="900" b="1">
+                          <a:solidFill>
+                            <a:srgbClr val="059669"/>
+                          </a:solidFill>
+                        </a:defRPr>
+                      </a:pPr>
+                      <a:r>
+                        <a:t>✔ Yes (Zero Cloud Leak)</a:t>
+                      </a:r>
+                    </a:p>
+                  </a:txBody>
+                  <a:tcPr>
+                    <a:solidFill>
+                      <a:srgbClr val="FFFFFF"/>
+                    </a:solidFill>
+                  </a:tcPr>
+                </a:tc>
+                <a:tc>
+                  <a:txBody>
+                    <a:bodyPr/>
+                    <a:lstStyle/>
+                    <a:p>
+                      <a:pPr algn="ctr">
+                        <a:defRPr sz="900">
+                          <a:solidFill>
+                            <a:srgbClr val="DC2626"/>
+                          </a:solidFill>
+                        </a:defRPr>
+                      </a:pPr>
+                      <a:r>
+                        <a:t>✖ Cloud Stored</a:t>
+                      </a:r>
+                    </a:p>
+                  </a:txBody>
+                  <a:tcPr>
+                    <a:solidFill>
+                      <a:srgbClr val="FFFFFF"/>
+                    </a:solidFill>
+                  </a:tcPr>
+                </a:tc>
+                <a:tc>
+                  <a:txBody>
+                    <a:bodyPr/>
+                    <a:lstStyle/>
+                    <a:p>
+                      <a:pPr algn="ctr">
+                        <a:defRPr sz="900">
+                          <a:solidFill>
+                            <a:srgbClr val="DC2626"/>
+                          </a:solidFill>
+                        </a:defRPr>
+                      </a:pPr>
+                      <a:r>
+                        <a:t>✖ Cloud Stored</a:t>
+                      </a:r>
+                    </a:p>
+                  </a:txBody>
+                  <a:tcPr>
+                    <a:solidFill>
+                      <a:srgbClr val="FFFFFF"/>
+                    </a:solidFill>
+                  </a:tcPr>
                 </a:tc>
               </a:tr>
             </a:tbl>
           </a:graphicData>
         </a:graphic>
       </p:graphicFrame>
+      <p:sp>
+        <p:nvSpPr>
+          <p:cNvPr id="8" name="Rectangle 7"/>
+          <p:cNvSpPr/>
+          <p:nvPr/>
+        </p:nvSpPr>
+        <p:spPr>
+          <a:xfrm>
+            <a:off x="0" y="6537960"/>
+            <a:ext cx="12191695" cy="320040"/>
+          </a:xfrm>
+          <a:prstGeom prst="rect">
+            <a:avLst/>
+          </a:prstGeom>
+          <a:solidFill>
+            <a:srgbClr val="0F1E36"/>
+          </a:solidFill>
+          <a:ln>
+            <a:noFill/>
+          </a:ln>
+        </p:spPr>
+        <p:style>
+          <a:lnRef idx="1">
+            <a:schemeClr val="accent1"/>
+          </a:lnRef>
+          <a:fillRef idx="3">
+            <a:schemeClr val="accent1"/>
+          </a:fillRef>
+          <a:effectRef idx="2">
+            <a:schemeClr val="accent1"/>
+          </a:effectRef>
+          <a:fontRef idx="minor">
+            <a:schemeClr val="lt1"/>
+          </a:fontRef>
+        </p:style>
+        <p:txBody>
+          <a:bodyPr rtlCol="0" anchor="ctr" tIns="54864"/>
+          <a:lstStyle/>
+          <a:p>
+            <a:pPr algn="ctr">
+              <a:defRPr sz="900">
+                <a:solidFill>
+                  <a:srgbClr val="94A3B8"/>
+                </a:solidFill>
+                <a:latin typeface="Arial"/>
+              </a:defRPr>
+            </a:pPr>
+            <a:r>
+              <a:t>@SIH Idea Submission- Template  |  Qualcomm Snapdragon® AI Lab Build &amp; Present Challenge 2026                 Page 6</a:t>
+            </a:r>
+          </a:p>
+        </p:txBody>
+      </p:sp>
     </p:spTree>
   </p:cSld>
   <p:clrMapOvr>

--- a/Kisan_Sahayak_AI_Pitch_Presentation.pptx
+++ b/Kisan_Sahayak_AI_Pitch_Presentation.pptx
@@ -3140,7 +3140,7 @@
           <a:lstStyle/>
           <a:p>
             <a:pPr algn="ctr">
-              <a:defRPr sz="2400" b="1">
+              <a:defRPr sz="2300" b="1">
                 <a:solidFill>
                   <a:srgbClr val="0F172A"/>
                 </a:solidFill>
@@ -3148,7 +3148,7 @@
               </a:defRPr>
             </a:pPr>
             <a:r>
-              <a:t>SMART INDIA HACKATHON 2026</a:t>
+              <a:t>QUALCOMM SNAPDRAGON® AI LAB CHALLENGE 2026</a:t>
             </a:r>
             <a:br/>
             <a:r>
@@ -3278,7 +3278,7 @@
                   <a:srgbClr val="0F172A"/>
                 </a:solidFill>
               </a:rPr>
-              <a:t>• Problem Statement ID: </a:t>
+              <a:t>• Project Title: </a:t>
             </a:r>
             <a:r>
               <a:rPr b="1" sz="1100">
@@ -3286,7 +3286,7 @@
                   <a:srgbClr val="0F172A"/>
                 </a:solidFill>
               </a:rPr>
-              <a:t>SIH26091 / QCOM-AGRI-04</a:t>
+              <a:t>Kisan Sahayak AI (किसान सहायक AI)</a:t>
             </a:r>
           </a:p>
           <a:p>
@@ -3301,7 +3301,7 @@
                   <a:srgbClr val="0F172A"/>
                 </a:solidFill>
               </a:rPr>
-              <a:t>• Problem Statement Title: </a:t>
+              <a:t>• Developer / Innovator: </a:t>
             </a:r>
             <a:r>
               <a:rPr b="1" sz="1100">
@@ -3309,7 +3309,7 @@
                   <a:srgbClr val="2563EB"/>
                 </a:solidFill>
               </a:rPr>
-              <a:t>AI-Driven Hyper-Local Multilingual Agronomic Advisory &amp; Crop Disease Diagnosis for Rural Micro-Entrepreneurs &amp; Farmers</a:t>
+              <a:t>MOHD UBES</a:t>
             </a:r>
           </a:p>
           <a:p>
@@ -3324,15 +3324,15 @@
                   <a:srgbClr val="0F172A"/>
                 </a:solidFill>
               </a:rPr>
-              <a:t>• Theme: </a:t>
-            </a:r>
-            <a:r>
-              <a:rPr b="0" sz="1100">
+              <a:t>• Challenge Track: </a:t>
+            </a:r>
+            <a:r>
+              <a:rPr b="1" sz="1100">
                 <a:solidFill>
                   <a:srgbClr val="059669"/>
                 </a:solidFill>
               </a:rPr>
-              <a:t>Agriculture, FoodTech &amp; Rural Development</a:t>
+              <a:t>Agriculture, FoodTech &amp; Rural AI</a:t>
             </a:r>
           </a:p>
           <a:p>
@@ -3347,7 +3347,7 @@
                   <a:srgbClr val="0F172A"/>
                 </a:solidFill>
               </a:rPr>
-              <a:t>• PS Category: </a:t>
+              <a:t>• Category: </a:t>
             </a:r>
             <a:r>
               <a:rPr b="0" sz="1100">
@@ -3355,7 +3355,7 @@
                   <a:srgbClr val="334155"/>
                 </a:solidFill>
               </a:rPr>
-              <a:t>Software / Edge AI</a:t>
+              <a:t>Software / On-Device Edge AI</a:t>
             </a:r>
           </a:p>
           <a:p>
@@ -3370,15 +3370,15 @@
                   <a:srgbClr val="0F172A"/>
                 </a:solidFill>
               </a:rPr>
-              <a:t>• Team Name (Registered): </a:t>
+              <a:t>• Target Hardware: </a:t>
             </a:r>
             <a:r>
               <a:rPr b="1" sz="1100">
                 <a:solidFill>
-                  <a:srgbClr val="0F172A"/>
+                  <a:srgbClr val="D97706"/>
                 </a:solidFill>
               </a:rPr>
-              <a:t>Pantheon Eternal</a:t>
+              <a:t>Qualcomm Snapdragon® X Elite (Hexagon™ NPU 45 TOPS, Adreno™ GPU)</a:t>
             </a:r>
           </a:p>
           <a:p>
@@ -3393,15 +3393,15 @@
                   <a:srgbClr val="0F172A"/>
                 </a:solidFill>
               </a:rPr>
-              <a:t>• Hardware Accelerator: </a:t>
-            </a:r>
-            <a:r>
-              <a:rPr b="1" sz="1100">
-                <a:solidFill>
-                  <a:srgbClr val="D97706"/>
+              <a:t>• Deployment Status: </a:t>
+            </a:r>
+            <a:r>
+              <a:rPr b="0" sz="1100">
+                <a:solidFill>
+                  <a:srgbClr val="334155"/>
                 </a:solidFill>
               </a:rPr>
-              <a:t>Snapdragon® X Elite (Hexagon™ NPU 45 TOPS, Adreno™ GPU)</a:t>
+              <a:t>Live on Vercel &amp; 100% Offline Progressive Web App (PWA)</a:t>
             </a:r>
           </a:p>
           <a:p>
@@ -3416,15 +3416,15 @@
                   <a:srgbClr val="0F172A"/>
                 </a:solidFill>
               </a:rPr>
-              <a:t>• Deployment Status: </a:t>
+              <a:t>• Live Web Application: </a:t>
             </a:r>
             <a:r>
               <a:rPr b="0" sz="1100">
                 <a:solidFill>
-                  <a:srgbClr val="334155"/>
+                  <a:srgbClr val="2563EB"/>
                 </a:solidFill>
               </a:rPr>
-              <a:t>Live on Vercel &amp; Fully Functional Offline PWA</a:t>
+              <a:t>https://kisan-sahayak-ai-ivory.vercel.app</a:t>
             </a:r>
           </a:p>
           <a:p>
@@ -3439,7 +3439,7 @@
                   <a:srgbClr val="0F172A"/>
                 </a:solidFill>
               </a:rPr>
-              <a:t>• Live Web App: </a:t>
+              <a:t>• GitHub Repository: </a:t>
             </a:r>
             <a:r>
               <a:rPr b="0" sz="1100">
@@ -3447,7 +3447,7 @@
                   <a:srgbClr val="2563EB"/>
                 </a:solidFill>
               </a:rPr>
-              <a:t>https://kisan-sahayak-ai-ivory.vercel.app</a:t>
+              <a:t>https://github.com/MOHDUBES/Kisan-Sahayak-AI</a:t>
             </a:r>
           </a:p>
           <a:p>
@@ -3462,15 +3462,15 @@
                   <a:srgbClr val="0F172A"/>
                 </a:solidFill>
               </a:rPr>
-              <a:t>• GitHub Repository: </a:t>
+              <a:t>• Core Capabilities: </a:t>
             </a:r>
             <a:r>
               <a:rPr b="0" sz="1100">
                 <a:solidFill>
-                  <a:srgbClr val="2563EB"/>
+                  <a:srgbClr val="0F172A"/>
                 </a:solidFill>
               </a:rPr>
-              <a:t>https://github.com/MOHDUBES/Kisan-Sahayak-AI</a:t>
+              <a:t>Sub-20ms Crop Disease Vision, 10+ Indic Languages Speech, 15+ Central/State Subsidies</a:t>
             </a:r>
           </a:p>
         </p:txBody>
@@ -3547,7 +3547,7 @@
               </a:defRPr>
             </a:pPr>
             <a:r>
-              <a:t>@SIH Idea Submission- Template  |  Qualcomm Snapdragon® AI Lab Build &amp; Present Challenge 2026                 Page 1</a:t>
+              <a:t>@Qualcomm Snapdragon® AI Lab Build &amp; Present Challenge 2026  |  Project: Kisan Sahayak AI  |  Developer: MOHD UBES                 Page 1</a:t>
             </a:r>
           </a:p>
         </p:txBody>
@@ -3617,7 +3617,7 @@
           <a:lstStyle/>
           <a:p>
             <a:pPr algn="ctr">
-              <a:defRPr sz="2200" b="1">
+              <a:defRPr sz="2100" b="1">
                 <a:solidFill>
                   <a:srgbClr val="0F172A"/>
                 </a:solidFill>
@@ -4351,7 +4351,7 @@
               </a:defRPr>
             </a:pPr>
             <a:r>
-              <a:t>Problem: Agronomists take days to visit remote farms.</a:t>
+              <a:t>Problem: Agronomists take days to reach rural villages.</a:t>
             </a:r>
             <a:br/>
             <a:r>
@@ -5047,7 +5047,7 @@
               </a:defRPr>
             </a:pPr>
             <a:r>
-              <a:t>@SIH Idea Submission- Template  |  Qualcomm Snapdragon® AI Lab Build &amp; Present Challenge 2026                 Page 2</a:t>
+              <a:t>@Qualcomm Snapdragon® AI Lab Build &amp; Present Challenge 2026  |  Project: Kisan Sahayak AI  |  Developer: MOHD UBES                 Page 2</a:t>
             </a:r>
           </a:p>
         </p:txBody>
@@ -5117,7 +5117,7 @@
           <a:lstStyle/>
           <a:p>
             <a:pPr algn="ctr">
-              <a:defRPr sz="2200" b="1">
+              <a:defRPr sz="2100" b="1">
                 <a:solidFill>
                   <a:srgbClr val="0F172A"/>
                 </a:solidFill>
@@ -5562,7 +5562,7 @@
               </a:defRPr>
             </a:pPr>
             <a:r>
-              <a:t>@SIH Idea Submission- Template  |  Qualcomm Snapdragon® AI Lab Build &amp; Present Challenge 2026                 Page 3</a:t>
+              <a:t>@Qualcomm Snapdragon® AI Lab Build &amp; Present Challenge 2026  |  Project: Kisan Sahayak AI  |  Developer: MOHD UBES                 Page 3</a:t>
             </a:r>
           </a:p>
         </p:txBody>
@@ -5632,7 +5632,7 @@
           <a:lstStyle/>
           <a:p>
             <a:pPr algn="ctr">
-              <a:defRPr sz="2200" b="1">
+              <a:defRPr sz="2100" b="1">
                 <a:solidFill>
                   <a:srgbClr val="0F172A"/>
                 </a:solidFill>
@@ -5790,7 +5790,7 @@
               </a:defRPr>
             </a:pPr>
             <a:r>
-              <a:t>@SIH Idea Submission- Template  |  Qualcomm Snapdragon® AI Lab Build &amp; Present Challenge 2026                 Page 4</a:t>
+              <a:t>@Qualcomm Snapdragon® AI Lab Build &amp; Present Challenge 2026  |  Project: Kisan Sahayak AI  |  Developer: MOHD UBES                 Page 4</a:t>
             </a:r>
           </a:p>
         </p:txBody>
@@ -5860,7 +5860,7 @@
           <a:lstStyle/>
           <a:p>
             <a:pPr algn="ctr">
-              <a:defRPr sz="2200" b="1">
+              <a:defRPr sz="2100" b="1">
                 <a:solidFill>
                   <a:srgbClr val="0F172A"/>
                 </a:solidFill>
@@ -6773,7 +6773,7 @@
               </a:defRPr>
             </a:pPr>
             <a:r>
-              <a:t>@SIH Idea Submission- Template  |  Qualcomm Snapdragon® AI Lab Build &amp; Present Challenge 2026                 Page 5</a:t>
+              <a:t>@Qualcomm Snapdragon® AI Lab Build &amp; Present Challenge 2026  |  Project: Kisan Sahayak AI  |  Developer: MOHD UBES                 Page 5</a:t>
             </a:r>
           </a:p>
         </p:txBody>
@@ -6843,7 +6843,7 @@
           <a:lstStyle/>
           <a:p>
             <a:pPr algn="ctr">
-              <a:defRPr sz="2200" b="1">
+              <a:defRPr sz="2100" b="1">
                 <a:solidFill>
                   <a:srgbClr val="0F172A"/>
                 </a:solidFill>
@@ -7904,7 +7904,7 @@
               </a:defRPr>
             </a:pPr>
             <a:r>
-              <a:t>@SIH Idea Submission- Template  |  Qualcomm Snapdragon® AI Lab Build &amp; Present Challenge 2026                 Page 6</a:t>
+              <a:t>@Qualcomm Snapdragon® AI Lab Build &amp; Present Challenge 2026  |  Project: Kisan Sahayak AI  |  Developer: MOHD UBES                 Page 6</a:t>
             </a:r>
           </a:p>
         </p:txBody>

--- a/Kisan_Sahayak_AI_Pitch_Presentation.pptx
+++ b/Kisan_Sahayak_AI_Pitch_Presentation.pptx
@@ -3125,8 +3125,8 @@
         </p:nvSpPr>
         <p:spPr>
           <a:xfrm>
-            <a:off x="1645920" y="274320"/>
-            <a:ext cx="8046720" cy="868680"/>
+            <a:off x="1463040" y="274320"/>
+            <a:ext cx="10241280" cy="868680"/>
           </a:xfrm>
           <a:prstGeom prst="rect">
             <a:avLst/>
@@ -3140,7 +3140,7 @@
           <a:lstStyle/>
           <a:p>
             <a:pPr algn="ctr">
-              <a:defRPr sz="2300" b="1">
+              <a:defRPr sz="2400" b="1">
                 <a:solidFill>
                   <a:srgbClr val="0F172A"/>
                 </a:solidFill>
@@ -3148,18 +3148,312 @@
               </a:defRPr>
             </a:pPr>
             <a:r>
-              <a:t>QUALCOMM SNAPDRAGON® AI LAB CHALLENGE 2026</a:t>
+              <a:t>KISAN SAHAYAK AI (किसान सहायक AI)</a:t>
             </a:r>
             <a:br/>
             <a:r>
-              <a:t>TITLE PAGE</a:t>
+              <a:t>On-Device Multilingual Agronomic Advisory &amp; Pest Diagnosis System</a:t>
+            </a:r>
+          </a:p>
+        </p:txBody>
+      </p:sp>
+      <p:sp>
+        <p:nvSpPr>
+          <p:cNvPr id="4" name="Rectangle 3"/>
+          <p:cNvSpPr/>
+          <p:nvPr/>
+        </p:nvSpPr>
+        <p:spPr>
+          <a:xfrm>
+            <a:off x="457200" y="1234440"/>
+            <a:ext cx="11277295" cy="18288"/>
+          </a:xfrm>
+          <a:prstGeom prst="rect">
+            <a:avLst/>
+          </a:prstGeom>
+          <a:solidFill>
+            <a:srgbClr val="E2E8F0"/>
+          </a:solidFill>
+          <a:ln>
+            <a:solidFill>
+              <a:srgbClr val="E2E8F0"/>
+            </a:solidFill>
+          </a:ln>
+        </p:spPr>
+        <p:style>
+          <a:lnRef idx="1">
+            <a:schemeClr val="accent1"/>
+          </a:lnRef>
+          <a:fillRef idx="3">
+            <a:schemeClr val="accent1"/>
+          </a:fillRef>
+          <a:effectRef idx="2">
+            <a:schemeClr val="accent1"/>
+          </a:effectRef>
+          <a:fontRef idx="minor">
+            <a:schemeClr val="lt1"/>
+          </a:fontRef>
+        </p:style>
+        <p:txBody>
+          <a:bodyPr rtlCol="0" anchor="ctr"/>
+          <a:lstStyle/>
+          <a:p>
+            <a:pPr algn="ctr"/>
+          </a:p>
+        </p:txBody>
+      </p:sp>
+      <p:sp>
+        <p:nvSpPr>
+          <p:cNvPr id="5" name="Rounded Rectangle 4"/>
+          <p:cNvSpPr/>
+          <p:nvPr/>
+        </p:nvSpPr>
+        <p:spPr>
+          <a:xfrm>
+            <a:off x="548640" y="1371600"/>
+            <a:ext cx="6217920" cy="4937760"/>
+          </a:xfrm>
+          <a:prstGeom prst="roundRect">
+            <a:avLst/>
+          </a:prstGeom>
+          <a:solidFill>
+            <a:srgbClr val="FFFFFF"/>
+          </a:solidFill>
+          <a:ln w="19050">
+            <a:solidFill>
+              <a:srgbClr val="E2E8F0"/>
+            </a:solidFill>
+          </a:ln>
+        </p:spPr>
+        <p:style>
+          <a:lnRef idx="1">
+            <a:schemeClr val="accent1"/>
+          </a:lnRef>
+          <a:fillRef idx="3">
+            <a:schemeClr val="accent1"/>
+          </a:fillRef>
+          <a:effectRef idx="2">
+            <a:schemeClr val="accent1"/>
+          </a:effectRef>
+          <a:fontRef idx="minor">
+            <a:schemeClr val="lt1"/>
+          </a:fontRef>
+        </p:style>
+        <p:txBody>
+          <a:bodyPr rtlCol="0" anchor="ctr" wrap="square" lIns="274320" rIns="274320" tIns="228600"/>
+          <a:lstStyle/>
+          <a:p>
+            <a:pPr algn="ctr">
+              <a:spcAft>
+                <a:spcPts val="700"/>
+              </a:spcAft>
+            </a:pPr>
+            <a:r>
+              <a:rPr b="1" sz="1100">
+                <a:solidFill>
+                  <a:srgbClr val="0F172A"/>
+                </a:solidFill>
+              </a:rPr>
+              <a:t>• Project Name: </a:t>
+            </a:r>
+            <a:r>
+              <a:rPr b="1" sz="1100">
+                <a:solidFill>
+                  <a:srgbClr val="0F172A"/>
+                </a:solidFill>
+              </a:rPr>
+              <a:t>Kisan Sahayak AI (किसान सहायक AI)</a:t>
+            </a:r>
+          </a:p>
+          <a:p>
+            <a:pPr>
+              <a:spcAft>
+                <a:spcPts val="700"/>
+              </a:spcAft>
+            </a:pPr>
+            <a:r>
+              <a:rPr b="1" sz="1100">
+                <a:solidFill>
+                  <a:srgbClr val="0F172A"/>
+                </a:solidFill>
+              </a:rPr>
+              <a:t>• Developer / Author: </a:t>
+            </a:r>
+            <a:r>
+              <a:rPr b="1" sz="1100">
+                <a:solidFill>
+                  <a:srgbClr val="2563EB"/>
+                </a:solidFill>
+              </a:rPr>
+              <a:t>MOHD UBES</a:t>
+            </a:r>
+          </a:p>
+          <a:p>
+            <a:pPr>
+              <a:spcAft>
+                <a:spcPts val="700"/>
+              </a:spcAft>
+            </a:pPr>
+            <a:r>
+              <a:rPr b="1" sz="1100">
+                <a:solidFill>
+                  <a:srgbClr val="0F172A"/>
+                </a:solidFill>
+              </a:rPr>
+              <a:t>• Domain &amp; Category: </a:t>
+            </a:r>
+            <a:r>
+              <a:rPr b="1" sz="1100">
+                <a:solidFill>
+                  <a:srgbClr val="059669"/>
+                </a:solidFill>
+              </a:rPr>
+              <a:t>Agriculture, FoodTech &amp; Rural AI</a:t>
+            </a:r>
+          </a:p>
+          <a:p>
+            <a:pPr>
+              <a:spcAft>
+                <a:spcPts val="700"/>
+              </a:spcAft>
+            </a:pPr>
+            <a:r>
+              <a:rPr b="1" sz="1100">
+                <a:solidFill>
+                  <a:srgbClr val="0F172A"/>
+                </a:solidFill>
+              </a:rPr>
+              <a:t>• Execution Mode: </a:t>
+            </a:r>
+            <a:r>
+              <a:rPr b="0" sz="1100">
+                <a:solidFill>
+                  <a:srgbClr val="334155"/>
+                </a:solidFill>
+              </a:rPr>
+              <a:t>100% On-Device Edge AI / Zero Cloud Latency</a:t>
+            </a:r>
+          </a:p>
+          <a:p>
+            <a:pPr>
+              <a:spcAft>
+                <a:spcPts val="700"/>
+              </a:spcAft>
+            </a:pPr>
+            <a:r>
+              <a:rPr b="1" sz="1100">
+                <a:solidFill>
+                  <a:srgbClr val="0F172A"/>
+                </a:solidFill>
+              </a:rPr>
+              <a:t>• Hardware Accelerator: </a:t>
+            </a:r>
+            <a:r>
+              <a:rPr b="1" sz="1100">
+                <a:solidFill>
+                  <a:srgbClr val="D97706"/>
+                </a:solidFill>
+              </a:rPr>
+              <a:t>Qualcomm Snapdragon® X Elite (Hexagon™ NPU 45 TOPS)</a:t>
+            </a:r>
+          </a:p>
+          <a:p>
+            <a:pPr>
+              <a:spcAft>
+                <a:spcPts val="700"/>
+              </a:spcAft>
+            </a:pPr>
+            <a:r>
+              <a:rPr b="1" sz="1100">
+                <a:solidFill>
+                  <a:srgbClr val="0F172A"/>
+                </a:solidFill>
+              </a:rPr>
+              <a:t>• Deployment Status: </a:t>
+            </a:r>
+            <a:r>
+              <a:rPr b="0" sz="1100">
+                <a:solidFill>
+                  <a:srgbClr val="334155"/>
+                </a:solidFill>
+              </a:rPr>
+              <a:t>Live on Vercel &amp; Fully Functional Offline PWA</a:t>
+            </a:r>
+          </a:p>
+          <a:p>
+            <a:pPr>
+              <a:spcAft>
+                <a:spcPts val="700"/>
+              </a:spcAft>
+            </a:pPr>
+            <a:r>
+              <a:rPr b="1" sz="1100">
+                <a:solidFill>
+                  <a:srgbClr val="0F172A"/>
+                </a:solidFill>
+              </a:rPr>
+              <a:t>• Live Web Application: </a:t>
+            </a:r>
+            <a:r>
+              <a:rPr b="0" sz="1100">
+                <a:solidFill>
+                  <a:srgbClr val="2563EB"/>
+                </a:solidFill>
+              </a:rPr>
+              <a:t>https://kisan-sahayak-ai-ivory.vercel.app</a:t>
+            </a:r>
+          </a:p>
+          <a:p>
+            <a:pPr>
+              <a:spcAft>
+                <a:spcPts val="700"/>
+              </a:spcAft>
+            </a:pPr>
+            <a:r>
+              <a:rPr b="1" sz="1100">
+                <a:solidFill>
+                  <a:srgbClr val="0F172A"/>
+                </a:solidFill>
+              </a:rPr>
+              <a:t>• GitHub Repository: </a:t>
+            </a:r>
+            <a:r>
+              <a:rPr b="0" sz="1100">
+                <a:solidFill>
+                  <a:srgbClr val="2563EB"/>
+                </a:solidFill>
+              </a:rPr>
+              <a:t>https://github.com/MOHDUBES/Kisan-Sahayak-AI</a:t>
+            </a:r>
+          </a:p>
+          <a:p>
+            <a:pPr>
+              <a:spcAft>
+                <a:spcPts val="700"/>
+              </a:spcAft>
+            </a:pPr>
+            <a:r>
+              <a:rPr b="1" sz="1100">
+                <a:solidFill>
+                  <a:srgbClr val="0F172A"/>
+                </a:solidFill>
+              </a:rPr>
+              <a:t>• Core Capabilities: </a:t>
+            </a:r>
+            <a:r>
+              <a:rPr b="0" sz="1100">
+                <a:solidFill>
+                  <a:srgbClr val="0F172A"/>
+                </a:solidFill>
+              </a:rPr>
+              <a:t>Sub-20ms Crop Disease Vision, 10+ Indic Languages Speech, 15+ Central/State Subsidies</a:t>
             </a:r>
           </a:p>
         </p:txBody>
       </p:sp>
       <p:pic>
         <p:nvPicPr>
-          <p:cNvPr id="4" name="Picture 3" descr="challenge_logo.png"/>
+          <p:cNvPr id="6" name="Picture 5" descr="slide1_hero.png"/>
           <p:cNvPicPr>
             <a:picLocks noChangeAspect="1"/>
           </p:cNvPicPr>
@@ -3173,8 +3467,8 @@
         </p:blipFill>
         <p:spPr>
           <a:xfrm>
-            <a:off x="10058400" y="228600"/>
-            <a:ext cx="1645920" cy="914400"/>
+            <a:off x="7040880" y="1371600"/>
+            <a:ext cx="4572000" cy="4937760"/>
           </a:xfrm>
           <a:prstGeom prst="rect">
             <a:avLst/>
@@ -3183,325 +3477,7 @@
       </p:pic>
       <p:sp>
         <p:nvSpPr>
-          <p:cNvPr id="5" name="Rectangle 4"/>
-          <p:cNvSpPr/>
-          <p:nvPr/>
-        </p:nvSpPr>
-        <p:spPr>
-          <a:xfrm>
-            <a:off x="457200" y="1234440"/>
-            <a:ext cx="11277295" cy="18288"/>
-          </a:xfrm>
-          <a:prstGeom prst="rect">
-            <a:avLst/>
-          </a:prstGeom>
-          <a:solidFill>
-            <a:srgbClr val="E2E8F0"/>
-          </a:solidFill>
-          <a:ln>
-            <a:solidFill>
-              <a:srgbClr val="E2E8F0"/>
-            </a:solidFill>
-          </a:ln>
-        </p:spPr>
-        <p:style>
-          <a:lnRef idx="1">
-            <a:schemeClr val="accent1"/>
-          </a:lnRef>
-          <a:fillRef idx="3">
-            <a:schemeClr val="accent1"/>
-          </a:fillRef>
-          <a:effectRef idx="2">
-            <a:schemeClr val="accent1"/>
-          </a:effectRef>
-          <a:fontRef idx="minor">
-            <a:schemeClr val="lt1"/>
-          </a:fontRef>
-        </p:style>
-        <p:txBody>
-          <a:bodyPr rtlCol="0" anchor="ctr"/>
-          <a:lstStyle/>
-          <a:p>
-            <a:pPr algn="ctr"/>
-          </a:p>
-        </p:txBody>
-      </p:sp>
-      <p:sp>
-        <p:nvSpPr>
-          <p:cNvPr id="6" name="Rounded Rectangle 5"/>
-          <p:cNvSpPr/>
-          <p:nvPr/>
-        </p:nvSpPr>
-        <p:spPr>
-          <a:xfrm>
-            <a:off x="548640" y="1371600"/>
-            <a:ext cx="6217920" cy="4937760"/>
-          </a:xfrm>
-          <a:prstGeom prst="roundRect">
-            <a:avLst/>
-          </a:prstGeom>
-          <a:solidFill>
-            <a:srgbClr val="FFFFFF"/>
-          </a:solidFill>
-          <a:ln w="19050">
-            <a:solidFill>
-              <a:srgbClr val="E2E8F0"/>
-            </a:solidFill>
-          </a:ln>
-        </p:spPr>
-        <p:style>
-          <a:lnRef idx="1">
-            <a:schemeClr val="accent1"/>
-          </a:lnRef>
-          <a:fillRef idx="3">
-            <a:schemeClr val="accent1"/>
-          </a:fillRef>
-          <a:effectRef idx="2">
-            <a:schemeClr val="accent1"/>
-          </a:effectRef>
-          <a:fontRef idx="minor">
-            <a:schemeClr val="lt1"/>
-          </a:fontRef>
-        </p:style>
-        <p:txBody>
-          <a:bodyPr rtlCol="0" anchor="ctr" wrap="square" lIns="274320" rIns="274320" tIns="228600"/>
-          <a:lstStyle/>
-          <a:p>
-            <a:pPr algn="ctr">
-              <a:spcAft>
-                <a:spcPts val="700"/>
-              </a:spcAft>
-            </a:pPr>
-            <a:r>
-              <a:rPr b="1" sz="1100">
-                <a:solidFill>
-                  <a:srgbClr val="0F172A"/>
-                </a:solidFill>
-              </a:rPr>
-              <a:t>• Project Title: </a:t>
-            </a:r>
-            <a:r>
-              <a:rPr b="1" sz="1100">
-                <a:solidFill>
-                  <a:srgbClr val="0F172A"/>
-                </a:solidFill>
-              </a:rPr>
-              <a:t>Kisan Sahayak AI (किसान सहायक AI)</a:t>
-            </a:r>
-          </a:p>
-          <a:p>
-            <a:pPr>
-              <a:spcAft>
-                <a:spcPts val="700"/>
-              </a:spcAft>
-            </a:pPr>
-            <a:r>
-              <a:rPr b="1" sz="1100">
-                <a:solidFill>
-                  <a:srgbClr val="0F172A"/>
-                </a:solidFill>
-              </a:rPr>
-              <a:t>• Developer / Innovator: </a:t>
-            </a:r>
-            <a:r>
-              <a:rPr b="1" sz="1100">
-                <a:solidFill>
-                  <a:srgbClr val="2563EB"/>
-                </a:solidFill>
-              </a:rPr>
-              <a:t>MOHD UBES</a:t>
-            </a:r>
-          </a:p>
-          <a:p>
-            <a:pPr>
-              <a:spcAft>
-                <a:spcPts val="700"/>
-              </a:spcAft>
-            </a:pPr>
-            <a:r>
-              <a:rPr b="1" sz="1100">
-                <a:solidFill>
-                  <a:srgbClr val="0F172A"/>
-                </a:solidFill>
-              </a:rPr>
-              <a:t>• Challenge Track: </a:t>
-            </a:r>
-            <a:r>
-              <a:rPr b="1" sz="1100">
-                <a:solidFill>
-                  <a:srgbClr val="059669"/>
-                </a:solidFill>
-              </a:rPr>
-              <a:t>Agriculture, FoodTech &amp; Rural AI</a:t>
-            </a:r>
-          </a:p>
-          <a:p>
-            <a:pPr>
-              <a:spcAft>
-                <a:spcPts val="700"/>
-              </a:spcAft>
-            </a:pPr>
-            <a:r>
-              <a:rPr b="1" sz="1100">
-                <a:solidFill>
-                  <a:srgbClr val="0F172A"/>
-                </a:solidFill>
-              </a:rPr>
-              <a:t>• Category: </a:t>
-            </a:r>
-            <a:r>
-              <a:rPr b="0" sz="1100">
-                <a:solidFill>
-                  <a:srgbClr val="334155"/>
-                </a:solidFill>
-              </a:rPr>
-              <a:t>Software / On-Device Edge AI</a:t>
-            </a:r>
-          </a:p>
-          <a:p>
-            <a:pPr>
-              <a:spcAft>
-                <a:spcPts val="700"/>
-              </a:spcAft>
-            </a:pPr>
-            <a:r>
-              <a:rPr b="1" sz="1100">
-                <a:solidFill>
-                  <a:srgbClr val="0F172A"/>
-                </a:solidFill>
-              </a:rPr>
-              <a:t>• Target Hardware: </a:t>
-            </a:r>
-            <a:r>
-              <a:rPr b="1" sz="1100">
-                <a:solidFill>
-                  <a:srgbClr val="D97706"/>
-                </a:solidFill>
-              </a:rPr>
-              <a:t>Qualcomm Snapdragon® X Elite (Hexagon™ NPU 45 TOPS, Adreno™ GPU)</a:t>
-            </a:r>
-          </a:p>
-          <a:p>
-            <a:pPr>
-              <a:spcAft>
-                <a:spcPts val="700"/>
-              </a:spcAft>
-            </a:pPr>
-            <a:r>
-              <a:rPr b="1" sz="1100">
-                <a:solidFill>
-                  <a:srgbClr val="0F172A"/>
-                </a:solidFill>
-              </a:rPr>
-              <a:t>• Deployment Status: </a:t>
-            </a:r>
-            <a:r>
-              <a:rPr b="0" sz="1100">
-                <a:solidFill>
-                  <a:srgbClr val="334155"/>
-                </a:solidFill>
-              </a:rPr>
-              <a:t>Live on Vercel &amp; 100% Offline Progressive Web App (PWA)</a:t>
-            </a:r>
-          </a:p>
-          <a:p>
-            <a:pPr>
-              <a:spcAft>
-                <a:spcPts val="700"/>
-              </a:spcAft>
-            </a:pPr>
-            <a:r>
-              <a:rPr b="1" sz="1100">
-                <a:solidFill>
-                  <a:srgbClr val="0F172A"/>
-                </a:solidFill>
-              </a:rPr>
-              <a:t>• Live Web Application: </a:t>
-            </a:r>
-            <a:r>
-              <a:rPr b="0" sz="1100">
-                <a:solidFill>
-                  <a:srgbClr val="2563EB"/>
-                </a:solidFill>
-              </a:rPr>
-              <a:t>https://kisan-sahayak-ai-ivory.vercel.app</a:t>
-            </a:r>
-          </a:p>
-          <a:p>
-            <a:pPr>
-              <a:spcAft>
-                <a:spcPts val="700"/>
-              </a:spcAft>
-            </a:pPr>
-            <a:r>
-              <a:rPr b="1" sz="1100">
-                <a:solidFill>
-                  <a:srgbClr val="0F172A"/>
-                </a:solidFill>
-              </a:rPr>
-              <a:t>• GitHub Repository: </a:t>
-            </a:r>
-            <a:r>
-              <a:rPr b="0" sz="1100">
-                <a:solidFill>
-                  <a:srgbClr val="2563EB"/>
-                </a:solidFill>
-              </a:rPr>
-              <a:t>https://github.com/MOHDUBES/Kisan-Sahayak-AI</a:t>
-            </a:r>
-          </a:p>
-          <a:p>
-            <a:pPr>
-              <a:spcAft>
-                <a:spcPts val="700"/>
-              </a:spcAft>
-            </a:pPr>
-            <a:r>
-              <a:rPr b="1" sz="1100">
-                <a:solidFill>
-                  <a:srgbClr val="0F172A"/>
-                </a:solidFill>
-              </a:rPr>
-              <a:t>• Core Capabilities: </a:t>
-            </a:r>
-            <a:r>
-              <a:rPr b="0" sz="1100">
-                <a:solidFill>
-                  <a:srgbClr val="0F172A"/>
-                </a:solidFill>
-              </a:rPr>
-              <a:t>Sub-20ms Crop Disease Vision, 10+ Indic Languages Speech, 15+ Central/State Subsidies</a:t>
-            </a:r>
-          </a:p>
-        </p:txBody>
-      </p:sp>
-      <p:pic>
-        <p:nvPicPr>
-          <p:cNvPr id="7" name="Picture 6" descr="slide1_hero.png"/>
-          <p:cNvPicPr>
-            <a:picLocks noChangeAspect="1"/>
-          </p:cNvPicPr>
-          <p:nvPr/>
-        </p:nvPicPr>
-        <p:blipFill>
-          <a:blip r:embed="rId4"/>
-          <a:stretch>
-            <a:fillRect/>
-          </a:stretch>
-        </p:blipFill>
-        <p:spPr>
-          <a:xfrm>
-            <a:off x="7040880" y="1371600"/>
-            <a:ext cx="4572000" cy="4937760"/>
-          </a:xfrm>
-          <a:prstGeom prst="rect">
-            <a:avLst/>
-          </a:prstGeom>
-        </p:spPr>
-      </p:pic>
-      <p:sp>
-        <p:nvSpPr>
-          <p:cNvPr id="8" name="Rectangle 7"/>
+          <p:cNvPr id="7" name="Rectangle 6"/>
           <p:cNvSpPr/>
           <p:nvPr/>
         </p:nvSpPr>
@@ -3547,7 +3523,7 @@
               </a:defRPr>
             </a:pPr>
             <a:r>
-              <a:t>@Qualcomm Snapdragon® AI Lab Build &amp; Present Challenge 2026  |  Project: Kisan Sahayak AI  |  Developer: MOHD UBES                 Page 1</a:t>
+              <a:t>Project: Kisan Sahayak AI   |   Developer: MOHD UBES   |   Snapdragon® AI Lab Build &amp; Present Challenge 2026                 Page 1</a:t>
             </a:r>
           </a:p>
         </p:txBody>
@@ -3602,8 +3578,8 @@
         </p:nvSpPr>
         <p:spPr>
           <a:xfrm>
-            <a:off x="1645920" y="274320"/>
-            <a:ext cx="8046720" cy="868680"/>
+            <a:off x="1463040" y="274320"/>
+            <a:ext cx="10241280" cy="868680"/>
           </a:xfrm>
           <a:prstGeom prst="rect">
             <a:avLst/>
@@ -3617,7 +3593,7 @@
           <a:lstStyle/>
           <a:p>
             <a:pPr algn="ctr">
-              <a:defRPr sz="2100" b="1">
+              <a:defRPr sz="2200" b="1">
                 <a:solidFill>
                   <a:srgbClr val="0F172A"/>
                 </a:solidFill>
@@ -3625,42 +3601,18 @@
               </a:defRPr>
             </a:pPr>
             <a:r>
-              <a:t>KISAN SAHAYAK AI</a:t>
+              <a:t>PLATFORM OVERVIEW &amp; VALUE PROPOSITION</a:t>
             </a:r>
             <a:br/>
             <a:r>
-              <a:t>Platform Overview, Key Gaps Closed &amp; Unique Innovations</a:t>
-            </a:r>
-          </a:p>
-        </p:txBody>
-      </p:sp>
-      <p:pic>
-        <p:nvPicPr>
-          <p:cNvPr id="4" name="Picture 3" descr="challenge_logo.png"/>
-          <p:cNvPicPr>
-            <a:picLocks noChangeAspect="1"/>
-          </p:cNvPicPr>
-          <p:nvPr/>
-        </p:nvPicPr>
-        <p:blipFill>
-          <a:blip r:embed="rId3"/>
-          <a:stretch>
-            <a:fillRect/>
-          </a:stretch>
-        </p:blipFill>
-        <p:spPr>
-          <a:xfrm>
-            <a:off x="10058400" y="228600"/>
-            <a:ext cx="1645920" cy="914400"/>
-          </a:xfrm>
-          <a:prstGeom prst="rect">
-            <a:avLst/>
-          </a:prstGeom>
-        </p:spPr>
-      </p:pic>
-      <p:sp>
-        <p:nvSpPr>
-          <p:cNvPr id="5" name="Rectangle 4"/>
+              <a:t>End-to-End Workflow, Key Agronomic Gaps Closed &amp; Ground-Level Innovations</a:t>
+            </a:r>
+          </a:p>
+        </p:txBody>
+      </p:sp>
+      <p:sp>
+        <p:nvSpPr>
+          <p:cNvPr id="4" name="Rectangle 3"/>
           <p:cNvSpPr/>
           <p:nvPr/>
         </p:nvSpPr>
@@ -3705,7 +3657,7 @@
       </p:sp>
       <p:sp>
         <p:nvSpPr>
-          <p:cNvPr id="6" name="Rounded Rectangle 5"/>
+          <p:cNvPr id="5" name="Rounded Rectangle 4"/>
           <p:cNvSpPr/>
           <p:nvPr/>
         </p:nvSpPr>
@@ -3750,7 +3702,7 @@
       </p:sp>
       <p:sp>
         <p:nvSpPr>
-          <p:cNvPr id="7" name="Rounded Rectangle 6"/>
+          <p:cNvPr id="6" name="Rounded Rectangle 5"/>
           <p:cNvSpPr/>
           <p:nvPr/>
         </p:nvSpPr>
@@ -3804,7 +3756,7 @@
       </p:sp>
       <p:sp>
         <p:nvSpPr>
-          <p:cNvPr id="8" name="Rounded Rectangle 7"/>
+          <p:cNvPr id="7" name="Rounded Rectangle 6"/>
           <p:cNvSpPr/>
           <p:nvPr/>
         </p:nvSpPr>
@@ -3856,7 +3808,7 @@
       </p:sp>
       <p:sp>
         <p:nvSpPr>
-          <p:cNvPr id="9" name="Rounded Rectangle 8"/>
+          <p:cNvPr id="8" name="Rounded Rectangle 7"/>
           <p:cNvSpPr/>
           <p:nvPr/>
         </p:nvSpPr>
@@ -3908,7 +3860,7 @@
       </p:sp>
       <p:sp>
         <p:nvSpPr>
-          <p:cNvPr id="10" name="Rounded Rectangle 9"/>
+          <p:cNvPr id="9" name="Rounded Rectangle 8"/>
           <p:cNvSpPr/>
           <p:nvPr/>
         </p:nvSpPr>
@@ -3960,7 +3912,7 @@
       </p:sp>
       <p:sp>
         <p:nvSpPr>
-          <p:cNvPr id="11" name="Rounded Rectangle 10"/>
+          <p:cNvPr id="10" name="Rounded Rectangle 9"/>
           <p:cNvSpPr/>
           <p:nvPr/>
         </p:nvSpPr>
@@ -4026,7 +3978,7 @@
       </p:sp>
       <p:sp>
         <p:nvSpPr>
-          <p:cNvPr id="12" name="Rounded Rectangle 11"/>
+          <p:cNvPr id="11" name="Rounded Rectangle 10"/>
           <p:cNvSpPr/>
           <p:nvPr/>
         </p:nvSpPr>
@@ -4092,7 +4044,7 @@
       </p:sp>
       <p:sp>
         <p:nvSpPr>
-          <p:cNvPr id="13" name="Rounded Rectangle 12"/>
+          <p:cNvPr id="12" name="Rounded Rectangle 11"/>
           <p:cNvSpPr/>
           <p:nvPr/>
         </p:nvSpPr>
@@ -4158,7 +4110,7 @@
       </p:sp>
       <p:sp>
         <p:nvSpPr>
-          <p:cNvPr id="14" name="TextBox 13"/>
+          <p:cNvPr id="13" name="TextBox 12"/>
           <p:cNvSpPr txBox="1"/>
           <p:nvPr/>
         </p:nvSpPr>
@@ -4193,7 +4145,7 @@
       </p:sp>
       <p:sp>
         <p:nvSpPr>
-          <p:cNvPr id="15" name="Rounded Rectangle 14"/>
+          <p:cNvPr id="14" name="Rounded Rectangle 13"/>
           <p:cNvSpPr/>
           <p:nvPr/>
         </p:nvSpPr>
@@ -4238,7 +4190,7 @@
       </p:sp>
       <p:sp>
         <p:nvSpPr>
-          <p:cNvPr id="16" name="Rounded Rectangle 15"/>
+          <p:cNvPr id="15" name="Rounded Rectangle 14"/>
           <p:cNvSpPr/>
           <p:nvPr/>
         </p:nvSpPr>
@@ -4292,7 +4244,7 @@
       </p:sp>
       <p:sp>
         <p:nvSpPr>
-          <p:cNvPr id="17" name="Rounded Rectangle 16"/>
+          <p:cNvPr id="16" name="Rounded Rectangle 15"/>
           <p:cNvSpPr/>
           <p:nvPr/>
         </p:nvSpPr>
@@ -4362,7 +4314,7 @@
       </p:sp>
       <p:sp>
         <p:nvSpPr>
-          <p:cNvPr id="18" name="Rounded Rectangle 17"/>
+          <p:cNvPr id="17" name="Rounded Rectangle 16"/>
           <p:cNvSpPr/>
           <p:nvPr/>
         </p:nvSpPr>
@@ -4432,7 +4384,7 @@
       </p:sp>
       <p:sp>
         <p:nvSpPr>
-          <p:cNvPr id="19" name="Rounded Rectangle 18"/>
+          <p:cNvPr id="18" name="Rounded Rectangle 17"/>
           <p:cNvSpPr/>
           <p:nvPr/>
         </p:nvSpPr>
@@ -4502,7 +4454,7 @@
       </p:sp>
       <p:sp>
         <p:nvSpPr>
-          <p:cNvPr id="20" name="TextBox 19"/>
+          <p:cNvPr id="19" name="TextBox 18"/>
           <p:cNvSpPr txBox="1"/>
           <p:nvPr/>
         </p:nvSpPr>
@@ -4537,7 +4489,7 @@
       </p:sp>
       <p:sp>
         <p:nvSpPr>
-          <p:cNvPr id="21" name="Rounded Rectangle 20"/>
+          <p:cNvPr id="20" name="Rounded Rectangle 19"/>
           <p:cNvSpPr/>
           <p:nvPr/>
         </p:nvSpPr>
@@ -4582,7 +4534,7 @@
       </p:sp>
       <p:sp>
         <p:nvSpPr>
-          <p:cNvPr id="22" name="Rounded Rectangle 21"/>
+          <p:cNvPr id="21" name="Rounded Rectangle 20"/>
           <p:cNvSpPr/>
           <p:nvPr/>
         </p:nvSpPr>
@@ -4636,7 +4588,7 @@
       </p:sp>
       <p:sp>
         <p:nvSpPr>
-          <p:cNvPr id="23" name="Rounded Rectangle 22"/>
+          <p:cNvPr id="22" name="Rounded Rectangle 21"/>
           <p:cNvSpPr/>
           <p:nvPr/>
         </p:nvSpPr>
@@ -4702,7 +4654,7 @@
       </p:sp>
       <p:sp>
         <p:nvSpPr>
-          <p:cNvPr id="24" name="Rounded Rectangle 23"/>
+          <p:cNvPr id="23" name="Rounded Rectangle 22"/>
           <p:cNvSpPr/>
           <p:nvPr/>
         </p:nvSpPr>
@@ -4768,7 +4720,7 @@
       </p:sp>
       <p:sp>
         <p:nvSpPr>
-          <p:cNvPr id="25" name="Rounded Rectangle 24"/>
+          <p:cNvPr id="24" name="Rounded Rectangle 23"/>
           <p:cNvSpPr/>
           <p:nvPr/>
         </p:nvSpPr>
@@ -4834,7 +4786,7 @@
       </p:sp>
       <p:sp>
         <p:nvSpPr>
-          <p:cNvPr id="26" name="Rounded Rectangle 25"/>
+          <p:cNvPr id="25" name="Rounded Rectangle 24"/>
           <p:cNvSpPr/>
           <p:nvPr/>
         </p:nvSpPr>
@@ -4900,7 +4852,7 @@
       </p:sp>
       <p:sp>
         <p:nvSpPr>
-          <p:cNvPr id="27" name="Rounded Rectangle 26"/>
+          <p:cNvPr id="26" name="Rounded Rectangle 25"/>
           <p:cNvSpPr/>
           <p:nvPr/>
         </p:nvSpPr>
@@ -4966,7 +4918,7 @@
       </p:sp>
       <p:sp>
         <p:nvSpPr>
-          <p:cNvPr id="28" name="TextBox 27"/>
+          <p:cNvPr id="27" name="TextBox 26"/>
           <p:cNvSpPr txBox="1"/>
           <p:nvPr/>
         </p:nvSpPr>
@@ -5001,7 +4953,7 @@
       </p:sp>
       <p:sp>
         <p:nvSpPr>
-          <p:cNvPr id="29" name="Rectangle 28"/>
+          <p:cNvPr id="28" name="Rectangle 27"/>
           <p:cNvSpPr/>
           <p:nvPr/>
         </p:nvSpPr>
@@ -5047,7 +4999,7 @@
               </a:defRPr>
             </a:pPr>
             <a:r>
-              <a:t>@Qualcomm Snapdragon® AI Lab Build &amp; Present Challenge 2026  |  Project: Kisan Sahayak AI  |  Developer: MOHD UBES                 Page 2</a:t>
+              <a:t>Project: Kisan Sahayak AI   |   Developer: MOHD UBES   |   Snapdragon® AI Lab Build &amp; Present Challenge 2026                 Page 2</a:t>
             </a:r>
           </a:p>
         </p:txBody>
@@ -5102,8 +5054,8 @@
         </p:nvSpPr>
         <p:spPr>
           <a:xfrm>
-            <a:off x="1645920" y="274320"/>
-            <a:ext cx="8046720" cy="868680"/>
+            <a:off x="1463040" y="274320"/>
+            <a:ext cx="10241280" cy="868680"/>
           </a:xfrm>
           <a:prstGeom prst="rect">
             <a:avLst/>
@@ -5117,7 +5069,7 @@
           <a:lstStyle/>
           <a:p>
             <a:pPr algn="ctr">
-              <a:defRPr sz="2100" b="1">
+              <a:defRPr sz="2200" b="1">
                 <a:solidFill>
                   <a:srgbClr val="0F172A"/>
                 </a:solidFill>
@@ -5130,13 +5082,345 @@
             <a:br/>
             <a:r>
               <a:t>Architecture, Snapdragon® NPU Acceleration &amp; Design Principles</a:t>
+            </a:r>
+          </a:p>
+        </p:txBody>
+      </p:sp>
+      <p:sp>
+        <p:nvSpPr>
+          <p:cNvPr id="4" name="Rectangle 3"/>
+          <p:cNvSpPr/>
+          <p:nvPr/>
+        </p:nvSpPr>
+        <p:spPr>
+          <a:xfrm>
+            <a:off x="457200" y="1234440"/>
+            <a:ext cx="11277295" cy="18288"/>
+          </a:xfrm>
+          <a:prstGeom prst="rect">
+            <a:avLst/>
+          </a:prstGeom>
+          <a:solidFill>
+            <a:srgbClr val="E2E8F0"/>
+          </a:solidFill>
+          <a:ln>
+            <a:solidFill>
+              <a:srgbClr val="E2E8F0"/>
+            </a:solidFill>
+          </a:ln>
+        </p:spPr>
+        <p:style>
+          <a:lnRef idx="1">
+            <a:schemeClr val="accent1"/>
+          </a:lnRef>
+          <a:fillRef idx="3">
+            <a:schemeClr val="accent1"/>
+          </a:fillRef>
+          <a:effectRef idx="2">
+            <a:schemeClr val="accent1"/>
+          </a:effectRef>
+          <a:fontRef idx="minor">
+            <a:schemeClr val="lt1"/>
+          </a:fontRef>
+        </p:style>
+        <p:txBody>
+          <a:bodyPr rtlCol="0" anchor="ctr"/>
+          <a:lstStyle/>
+          <a:p>
+            <a:pPr algn="ctr"/>
+          </a:p>
+        </p:txBody>
+      </p:sp>
+      <p:sp>
+        <p:nvSpPr>
+          <p:cNvPr id="5" name="Rounded Rectangle 4"/>
+          <p:cNvSpPr/>
+          <p:nvPr/>
+        </p:nvSpPr>
+        <p:spPr>
+          <a:xfrm>
+            <a:off x="548640" y="1371600"/>
+            <a:ext cx="4114800" cy="4937760"/>
+          </a:xfrm>
+          <a:prstGeom prst="roundRect">
+            <a:avLst/>
+          </a:prstGeom>
+          <a:solidFill>
+            <a:srgbClr val="FFFFFF"/>
+          </a:solidFill>
+          <a:ln w="19050">
+            <a:solidFill>
+              <a:srgbClr val="CBD5E1"/>
+            </a:solidFill>
+          </a:ln>
+        </p:spPr>
+        <p:style>
+          <a:lnRef idx="1">
+            <a:schemeClr val="accent1"/>
+          </a:lnRef>
+          <a:fillRef idx="3">
+            <a:schemeClr val="accent1"/>
+          </a:fillRef>
+          <a:effectRef idx="2">
+            <a:schemeClr val="accent1"/>
+          </a:effectRef>
+          <a:fontRef idx="minor">
+            <a:schemeClr val="lt1"/>
+          </a:fontRef>
+        </p:style>
+        <p:txBody>
+          <a:bodyPr rtlCol="0" anchor="ctr" wrap="square" lIns="228600" rIns="228600" tIns="182880"/>
+          <a:lstStyle/>
+          <a:p>
+            <a:pPr algn="ctr">
+              <a:spcAft>
+                <a:spcPts val="800"/>
+              </a:spcAft>
+              <a:defRPr b="1" sz="1300">
+                <a:solidFill>
+                  <a:srgbClr val="0F172A"/>
+                </a:solidFill>
+              </a:defRPr>
+            </a:pPr>
+            <a:r>
+              <a:t>Technology Stack</a:t>
+            </a:r>
+          </a:p>
+          <a:p>
+            <a:pPr>
+              <a:spcAft>
+                <a:spcPts val="400"/>
+              </a:spcAft>
+            </a:pPr>
+            <a:r>
+              <a:rPr b="1" sz="900">
+                <a:solidFill>
+                  <a:srgbClr val="0F172A"/>
+                </a:solidFill>
+              </a:rPr>
+              <a:t>• Frontend &amp; PWA: </a:t>
+            </a:r>
+            <a:r>
+              <a:rPr sz="850">
+                <a:solidFill>
+                  <a:srgbClr val="334155"/>
+                </a:solidFill>
+              </a:rPr>
+              <a:t>React 19, Tailwind CSS, Lucide Icons, Canvas Camera ROI</a:t>
+            </a:r>
+          </a:p>
+          <a:p>
+            <a:pPr>
+              <a:spcAft>
+                <a:spcPts val="400"/>
+              </a:spcAft>
+            </a:pPr>
+            <a:r>
+              <a:rPr b="1" sz="900">
+                <a:solidFill>
+                  <a:srgbClr val="0F172A"/>
+                </a:solidFill>
+              </a:rPr>
+              <a:t>• AI Runtime: </a:t>
+            </a:r>
+            <a:r>
+              <a:rPr sz="850">
+                <a:solidFill>
+                  <a:srgbClr val="334155"/>
+                </a:solidFill>
+              </a:rPr>
+              <a:t>ONNX Runtime Web with Qualcomm Hexagon NPU Provider</a:t>
+            </a:r>
+          </a:p>
+          <a:p>
+            <a:pPr>
+              <a:spcAft>
+                <a:spcPts val="400"/>
+              </a:spcAft>
+            </a:pPr>
+            <a:r>
+              <a:rPr b="1" sz="900">
+                <a:solidFill>
+                  <a:srgbClr val="0F172A"/>
+                </a:solidFill>
+              </a:rPr>
+              <a:t>• Vision Model: </a:t>
+            </a:r>
+            <a:r>
+              <a:rPr sz="850">
+                <a:solidFill>
+                  <a:srgbClr val="334155"/>
+                </a:solidFill>
+              </a:rPr>
+              <a:t>MobileNetV4 INT8 (38 plant pathology classes, &lt;18ms)</a:t>
+            </a:r>
+          </a:p>
+          <a:p>
+            <a:pPr>
+              <a:spcAft>
+                <a:spcPts val="400"/>
+              </a:spcAft>
+            </a:pPr>
+            <a:r>
+              <a:rPr b="1" sz="900">
+                <a:solidFill>
+                  <a:srgbClr val="0F172A"/>
+                </a:solidFill>
+              </a:rPr>
+              <a:t>• Voice Speech: </a:t>
+            </a:r>
+            <a:r>
+              <a:rPr sz="850">
+                <a:solidFill>
+                  <a:srgbClr val="334155"/>
+                </a:solidFill>
+              </a:rPr>
+              <a:t>Whisper Tiny INT8 (10+ Indic languages, zero latency)</a:t>
+            </a:r>
+          </a:p>
+          <a:p>
+            <a:pPr>
+              <a:spcAft>
+                <a:spcPts val="400"/>
+              </a:spcAft>
+            </a:pPr>
+            <a:r>
+              <a:rPr b="1" sz="900">
+                <a:solidFill>
+                  <a:srgbClr val="0F172A"/>
+                </a:solidFill>
+              </a:rPr>
+              <a:t>• Rule Engines: </a:t>
+            </a:r>
+            <a:r>
+              <a:rPr sz="850">
+                <a:solidFill>
+                  <a:srgbClr val="334155"/>
+                </a:solidFill>
+              </a:rPr>
+              <a:t>Deterministic fertilizer/pesticide dosage &amp; 15+ subsidy match</a:t>
+            </a:r>
+          </a:p>
+          <a:p>
+            <a:pPr>
+              <a:spcAft>
+                <a:spcPts val="400"/>
+              </a:spcAft>
+            </a:pPr>
+            <a:r>
+              <a:rPr b="1" sz="900">
+                <a:solidFill>
+                  <a:srgbClr val="0F172A"/>
+                </a:solidFill>
+              </a:rPr>
+              <a:t>• Mandi &amp; Weather: </a:t>
+            </a:r>
+            <a:r>
+              <a:rPr sz="850">
+                <a:solidFill>
+                  <a:srgbClr val="334155"/>
+                </a:solidFill>
+              </a:rPr>
+              <a:t>APMC 500+ Mandi rates + localized hourly weather alerts</a:t>
+            </a:r>
+          </a:p>
+          <a:p>
+            <a:pPr>
+              <a:spcAft>
+                <a:spcPts val="400"/>
+              </a:spcAft>
+            </a:pPr>
+            <a:r>
+              <a:rPr b="1" sz="900">
+                <a:solidFill>
+                  <a:srgbClr val="0F172A"/>
+                </a:solidFill>
+              </a:rPr>
+              <a:t>• Hardware: </a:t>
+            </a:r>
+            <a:r>
+              <a:rPr sz="850">
+                <a:solidFill>
+                  <a:srgbClr val="334155"/>
+                </a:solidFill>
+              </a:rPr>
+              <a:t>Qualcomm Snapdragon® X Elite (45 TOPS NPU, 4.2W power)</a:t>
+            </a:r>
+          </a:p>
+        </p:txBody>
+      </p:sp>
+      <p:sp>
+        <p:nvSpPr>
+          <p:cNvPr id="6" name="Rounded Rectangle 5"/>
+          <p:cNvSpPr/>
+          <p:nvPr/>
+        </p:nvSpPr>
+        <p:spPr>
+          <a:xfrm>
+            <a:off x="685800" y="4114800"/>
+            <a:ext cx="3840480" cy="2011680"/>
+          </a:xfrm>
+          <a:prstGeom prst="roundRect">
+            <a:avLst/>
+          </a:prstGeom>
+          <a:solidFill>
+            <a:srgbClr val="EFF6FF"/>
+          </a:solidFill>
+          <a:ln w="19050">
+            <a:solidFill>
+              <a:srgbClr val="2563EB"/>
+            </a:solidFill>
+          </a:ln>
+        </p:spPr>
+        <p:style>
+          <a:lnRef idx="1">
+            <a:schemeClr val="accent1"/>
+          </a:lnRef>
+          <a:fillRef idx="3">
+            <a:schemeClr val="accent1"/>
+          </a:fillRef>
+          <a:effectRef idx="2">
+            <a:schemeClr val="accent1"/>
+          </a:effectRef>
+          <a:fontRef idx="minor">
+            <a:schemeClr val="lt1"/>
+          </a:fontRef>
+        </p:style>
+        <p:txBody>
+          <a:bodyPr rtlCol="0" anchor="ctr" wrap="square" lIns="137160" rIns="137160" tIns="137160"/>
+          <a:lstStyle/>
+          <a:p>
+            <a:pPr algn="ctr">
+              <a:spcAft>
+                <a:spcPts val="400"/>
+              </a:spcAft>
+              <a:defRPr b="1" sz="950">
+                <a:solidFill>
+                  <a:srgbClr val="2563EB"/>
+                </a:solidFill>
+              </a:defRPr>
+            </a:pPr>
+            <a:r>
+              <a:t>CORE DESIGN PRINCIPLE: ZERO HALLUCINATION</a:t>
+            </a:r>
+          </a:p>
+          <a:p>
+            <a:pPr>
+              <a:defRPr sz="850">
+                <a:solidFill>
+                  <a:srgbClr val="334155"/>
+                </a:solidFill>
+              </a:defRPr>
+            </a:pPr>
+            <a:r>
+              <a:t>All crop disease arithmetic, chemical concentrations, and government scheme eligibility run on deterministic rule-based code. The AI model is strictly used for computer vision and Indic voice transcription—ensuring 100% auditability and zero dangerous pesticide dosage advice.</a:t>
             </a:r>
           </a:p>
         </p:txBody>
       </p:sp>
       <p:pic>
         <p:nvPicPr>
-          <p:cNvPr id="4" name="Picture 3" descr="challenge_logo.png"/>
+          <p:cNvPr id="7" name="Picture 6" descr="slide3_architecture.png"/>
           <p:cNvPicPr>
             <a:picLocks noChangeAspect="1"/>
           </p:cNvPicPr>
@@ -5150,8 +5434,8 @@
         </p:blipFill>
         <p:spPr>
           <a:xfrm>
-            <a:off x="10058400" y="228600"/>
-            <a:ext cx="1645920" cy="914400"/>
+            <a:off x="4846320" y="1371600"/>
+            <a:ext cx="6766560" cy="4937760"/>
           </a:xfrm>
           <a:prstGeom prst="rect">
             <a:avLst/>
@@ -5160,363 +5444,7 @@
       </p:pic>
       <p:sp>
         <p:nvSpPr>
-          <p:cNvPr id="5" name="Rectangle 4"/>
-          <p:cNvSpPr/>
-          <p:nvPr/>
-        </p:nvSpPr>
-        <p:spPr>
-          <a:xfrm>
-            <a:off x="457200" y="1234440"/>
-            <a:ext cx="11277295" cy="18288"/>
-          </a:xfrm>
-          <a:prstGeom prst="rect">
-            <a:avLst/>
-          </a:prstGeom>
-          <a:solidFill>
-            <a:srgbClr val="E2E8F0"/>
-          </a:solidFill>
-          <a:ln>
-            <a:solidFill>
-              <a:srgbClr val="E2E8F0"/>
-            </a:solidFill>
-          </a:ln>
-        </p:spPr>
-        <p:style>
-          <a:lnRef idx="1">
-            <a:schemeClr val="accent1"/>
-          </a:lnRef>
-          <a:fillRef idx="3">
-            <a:schemeClr val="accent1"/>
-          </a:fillRef>
-          <a:effectRef idx="2">
-            <a:schemeClr val="accent1"/>
-          </a:effectRef>
-          <a:fontRef idx="minor">
-            <a:schemeClr val="lt1"/>
-          </a:fontRef>
-        </p:style>
-        <p:txBody>
-          <a:bodyPr rtlCol="0" anchor="ctr"/>
-          <a:lstStyle/>
-          <a:p>
-            <a:pPr algn="ctr"/>
-          </a:p>
-        </p:txBody>
-      </p:sp>
-      <p:sp>
-        <p:nvSpPr>
-          <p:cNvPr id="6" name="Rounded Rectangle 5"/>
-          <p:cNvSpPr/>
-          <p:nvPr/>
-        </p:nvSpPr>
-        <p:spPr>
-          <a:xfrm>
-            <a:off x="548640" y="1371600"/>
-            <a:ext cx="4114800" cy="4937760"/>
-          </a:xfrm>
-          <a:prstGeom prst="roundRect">
-            <a:avLst/>
-          </a:prstGeom>
-          <a:solidFill>
-            <a:srgbClr val="FFFFFF"/>
-          </a:solidFill>
-          <a:ln w="19050">
-            <a:solidFill>
-              <a:srgbClr val="CBD5E1"/>
-            </a:solidFill>
-          </a:ln>
-        </p:spPr>
-        <p:style>
-          <a:lnRef idx="1">
-            <a:schemeClr val="accent1"/>
-          </a:lnRef>
-          <a:fillRef idx="3">
-            <a:schemeClr val="accent1"/>
-          </a:fillRef>
-          <a:effectRef idx="2">
-            <a:schemeClr val="accent1"/>
-          </a:effectRef>
-          <a:fontRef idx="minor">
-            <a:schemeClr val="lt1"/>
-          </a:fontRef>
-        </p:style>
-        <p:txBody>
-          <a:bodyPr rtlCol="0" anchor="ctr" wrap="square" lIns="228600" rIns="228600" tIns="182880"/>
-          <a:lstStyle/>
-          <a:p>
-            <a:pPr algn="ctr">
-              <a:spcAft>
-                <a:spcPts val="800"/>
-              </a:spcAft>
-              <a:defRPr b="1" sz="1300">
-                <a:solidFill>
-                  <a:srgbClr val="0F172A"/>
-                </a:solidFill>
-              </a:defRPr>
-            </a:pPr>
-            <a:r>
-              <a:t>Technology Stack</a:t>
-            </a:r>
-          </a:p>
-          <a:p>
-            <a:pPr>
-              <a:spcAft>
-                <a:spcPts val="400"/>
-              </a:spcAft>
-            </a:pPr>
-            <a:r>
-              <a:rPr b="1" sz="900">
-                <a:solidFill>
-                  <a:srgbClr val="0F172A"/>
-                </a:solidFill>
-              </a:rPr>
-              <a:t>• Frontend &amp; PWA: </a:t>
-            </a:r>
-            <a:r>
-              <a:rPr sz="850">
-                <a:solidFill>
-                  <a:srgbClr val="334155"/>
-                </a:solidFill>
-              </a:rPr>
-              <a:t>React 19, Tailwind CSS, Lucide Icons, Canvas Camera ROI</a:t>
-            </a:r>
-          </a:p>
-          <a:p>
-            <a:pPr>
-              <a:spcAft>
-                <a:spcPts val="400"/>
-              </a:spcAft>
-            </a:pPr>
-            <a:r>
-              <a:rPr b="1" sz="900">
-                <a:solidFill>
-                  <a:srgbClr val="0F172A"/>
-                </a:solidFill>
-              </a:rPr>
-              <a:t>• AI Runtime: </a:t>
-            </a:r>
-            <a:r>
-              <a:rPr sz="850">
-                <a:solidFill>
-                  <a:srgbClr val="334155"/>
-                </a:solidFill>
-              </a:rPr>
-              <a:t>ONNX Runtime Web with Qualcomm Hexagon NPU Provider</a:t>
-            </a:r>
-          </a:p>
-          <a:p>
-            <a:pPr>
-              <a:spcAft>
-                <a:spcPts val="400"/>
-              </a:spcAft>
-            </a:pPr>
-            <a:r>
-              <a:rPr b="1" sz="900">
-                <a:solidFill>
-                  <a:srgbClr val="0F172A"/>
-                </a:solidFill>
-              </a:rPr>
-              <a:t>• Vision Model: </a:t>
-            </a:r>
-            <a:r>
-              <a:rPr sz="850">
-                <a:solidFill>
-                  <a:srgbClr val="334155"/>
-                </a:solidFill>
-              </a:rPr>
-              <a:t>MobileNetV4 INT8 (38 plant pathology classes, &lt;18ms)</a:t>
-            </a:r>
-          </a:p>
-          <a:p>
-            <a:pPr>
-              <a:spcAft>
-                <a:spcPts val="400"/>
-              </a:spcAft>
-            </a:pPr>
-            <a:r>
-              <a:rPr b="1" sz="900">
-                <a:solidFill>
-                  <a:srgbClr val="0F172A"/>
-                </a:solidFill>
-              </a:rPr>
-              <a:t>• Voice Speech: </a:t>
-            </a:r>
-            <a:r>
-              <a:rPr sz="850">
-                <a:solidFill>
-                  <a:srgbClr val="334155"/>
-                </a:solidFill>
-              </a:rPr>
-              <a:t>Whisper Tiny INT8 (10+ Indic languages, zero latency)</a:t>
-            </a:r>
-          </a:p>
-          <a:p>
-            <a:pPr>
-              <a:spcAft>
-                <a:spcPts val="400"/>
-              </a:spcAft>
-            </a:pPr>
-            <a:r>
-              <a:rPr b="1" sz="900">
-                <a:solidFill>
-                  <a:srgbClr val="0F172A"/>
-                </a:solidFill>
-              </a:rPr>
-              <a:t>• Rule Engines: </a:t>
-            </a:r>
-            <a:r>
-              <a:rPr sz="850">
-                <a:solidFill>
-                  <a:srgbClr val="334155"/>
-                </a:solidFill>
-              </a:rPr>
-              <a:t>Deterministic fertilizer/pesticide dosage &amp; 15+ subsidy match</a:t>
-            </a:r>
-          </a:p>
-          <a:p>
-            <a:pPr>
-              <a:spcAft>
-                <a:spcPts val="400"/>
-              </a:spcAft>
-            </a:pPr>
-            <a:r>
-              <a:rPr b="1" sz="900">
-                <a:solidFill>
-                  <a:srgbClr val="0F172A"/>
-                </a:solidFill>
-              </a:rPr>
-              <a:t>• Mandi &amp; Weather: </a:t>
-            </a:r>
-            <a:r>
-              <a:rPr sz="850">
-                <a:solidFill>
-                  <a:srgbClr val="334155"/>
-                </a:solidFill>
-              </a:rPr>
-              <a:t>APMC 500+ Mandi rates + localized hourly weather alerts</a:t>
-            </a:r>
-          </a:p>
-          <a:p>
-            <a:pPr>
-              <a:spcAft>
-                <a:spcPts val="400"/>
-              </a:spcAft>
-            </a:pPr>
-            <a:r>
-              <a:rPr b="1" sz="900">
-                <a:solidFill>
-                  <a:srgbClr val="0F172A"/>
-                </a:solidFill>
-              </a:rPr>
-              <a:t>• Hardware: </a:t>
-            </a:r>
-            <a:r>
-              <a:rPr sz="850">
-                <a:solidFill>
-                  <a:srgbClr val="334155"/>
-                </a:solidFill>
-              </a:rPr>
-              <a:t>Qualcomm Snapdragon® X Elite (45 TOPS NPU, 4.2W power)</a:t>
-            </a:r>
-          </a:p>
-        </p:txBody>
-      </p:sp>
-      <p:sp>
-        <p:nvSpPr>
-          <p:cNvPr id="7" name="Rounded Rectangle 6"/>
-          <p:cNvSpPr/>
-          <p:nvPr/>
-        </p:nvSpPr>
-        <p:spPr>
-          <a:xfrm>
-            <a:off x="685800" y="4114800"/>
-            <a:ext cx="3840480" cy="2011680"/>
-          </a:xfrm>
-          <a:prstGeom prst="roundRect">
-            <a:avLst/>
-          </a:prstGeom>
-          <a:solidFill>
-            <a:srgbClr val="EFF6FF"/>
-          </a:solidFill>
-          <a:ln w="19050">
-            <a:solidFill>
-              <a:srgbClr val="2563EB"/>
-            </a:solidFill>
-          </a:ln>
-        </p:spPr>
-        <p:style>
-          <a:lnRef idx="1">
-            <a:schemeClr val="accent1"/>
-          </a:lnRef>
-          <a:fillRef idx="3">
-            <a:schemeClr val="accent1"/>
-          </a:fillRef>
-          <a:effectRef idx="2">
-            <a:schemeClr val="accent1"/>
-          </a:effectRef>
-          <a:fontRef idx="minor">
-            <a:schemeClr val="lt1"/>
-          </a:fontRef>
-        </p:style>
-        <p:txBody>
-          <a:bodyPr rtlCol="0" anchor="ctr" wrap="square" lIns="137160" rIns="137160" tIns="137160"/>
-          <a:lstStyle/>
-          <a:p>
-            <a:pPr algn="ctr">
-              <a:spcAft>
-                <a:spcPts val="400"/>
-              </a:spcAft>
-              <a:defRPr b="1" sz="950">
-                <a:solidFill>
-                  <a:srgbClr val="2563EB"/>
-                </a:solidFill>
-              </a:defRPr>
-            </a:pPr>
-            <a:r>
-              <a:t>CORE DESIGN PRINCIPLE: ZERO HALLUCINATION</a:t>
-            </a:r>
-          </a:p>
-          <a:p>
-            <a:pPr>
-              <a:defRPr sz="850">
-                <a:solidFill>
-                  <a:srgbClr val="334155"/>
-                </a:solidFill>
-              </a:defRPr>
-            </a:pPr>
-            <a:r>
-              <a:t>All crop disease arithmetic, chemical concentrations, and government scheme eligibility run on deterministic rule-based code. The AI model is strictly used for computer vision and Indic voice transcription—ensuring 100% auditability and zero dangerous pesticide dosage advice.</a:t>
-            </a:r>
-          </a:p>
-        </p:txBody>
-      </p:sp>
-      <p:pic>
-        <p:nvPicPr>
-          <p:cNvPr id="8" name="Picture 7" descr="slide3_architecture.png"/>
-          <p:cNvPicPr>
-            <a:picLocks noChangeAspect="1"/>
-          </p:cNvPicPr>
-          <p:nvPr/>
-        </p:nvPicPr>
-        <p:blipFill>
-          <a:blip r:embed="rId4"/>
-          <a:stretch>
-            <a:fillRect/>
-          </a:stretch>
-        </p:blipFill>
-        <p:spPr>
-          <a:xfrm>
-            <a:off x="4846320" y="1371600"/>
-            <a:ext cx="6766560" cy="4937760"/>
-          </a:xfrm>
-          <a:prstGeom prst="rect">
-            <a:avLst/>
-          </a:prstGeom>
-        </p:spPr>
-      </p:pic>
-      <p:sp>
-        <p:nvSpPr>
-          <p:cNvPr id="9" name="Rectangle 8"/>
+          <p:cNvPr id="8" name="Rectangle 7"/>
           <p:cNvSpPr/>
           <p:nvPr/>
         </p:nvSpPr>
@@ -5562,7 +5490,7 @@
               </a:defRPr>
             </a:pPr>
             <a:r>
-              <a:t>@Qualcomm Snapdragon® AI Lab Build &amp; Present Challenge 2026  |  Project: Kisan Sahayak AI  |  Developer: MOHD UBES                 Page 3</a:t>
+              <a:t>Project: Kisan Sahayak AI   |   Developer: MOHD UBES   |   Snapdragon® AI Lab Build &amp; Present Challenge 2026                 Page 3</a:t>
             </a:r>
           </a:p>
         </p:txBody>
@@ -5617,8 +5545,8 @@
         </p:nvSpPr>
         <p:spPr>
           <a:xfrm>
-            <a:off x="1645920" y="274320"/>
-            <a:ext cx="8046720" cy="868680"/>
+            <a:off x="1463040" y="274320"/>
+            <a:ext cx="10241280" cy="868680"/>
           </a:xfrm>
           <a:prstGeom prst="rect">
             <a:avLst/>
@@ -5632,7 +5560,7 @@
           <a:lstStyle/>
           <a:p>
             <a:pPr algn="ctr">
-              <a:defRPr sz="2100" b="1">
+              <a:defRPr sz="2200" b="1">
                 <a:solidFill>
                   <a:srgbClr val="0F172A"/>
                 </a:solidFill>
@@ -5646,12 +5574,57 @@
             <a:r>
               <a:t>Hierarchical Solution Analysis, Operational Viability &amp; Mitigation Strategies</a:t>
             </a:r>
+          </a:p>
+        </p:txBody>
+      </p:sp>
+      <p:sp>
+        <p:nvSpPr>
+          <p:cNvPr id="4" name="Rectangle 3"/>
+          <p:cNvSpPr/>
+          <p:nvPr/>
+        </p:nvSpPr>
+        <p:spPr>
+          <a:xfrm>
+            <a:off x="457200" y="1234440"/>
+            <a:ext cx="11277295" cy="18288"/>
+          </a:xfrm>
+          <a:prstGeom prst="rect">
+            <a:avLst/>
+          </a:prstGeom>
+          <a:solidFill>
+            <a:srgbClr val="E2E8F0"/>
+          </a:solidFill>
+          <a:ln>
+            <a:solidFill>
+              <a:srgbClr val="E2E8F0"/>
+            </a:solidFill>
+          </a:ln>
+        </p:spPr>
+        <p:style>
+          <a:lnRef idx="1">
+            <a:schemeClr val="accent1"/>
+          </a:lnRef>
+          <a:fillRef idx="3">
+            <a:schemeClr val="accent1"/>
+          </a:fillRef>
+          <a:effectRef idx="2">
+            <a:schemeClr val="accent1"/>
+          </a:effectRef>
+          <a:fontRef idx="minor">
+            <a:schemeClr val="lt1"/>
+          </a:fontRef>
+        </p:style>
+        <p:txBody>
+          <a:bodyPr rtlCol="0" anchor="ctr"/>
+          <a:lstStyle/>
+          <a:p>
+            <a:pPr algn="ctr"/>
           </a:p>
         </p:txBody>
       </p:sp>
       <p:pic>
         <p:nvPicPr>
-          <p:cNvPr id="4" name="Picture 3" descr="challenge_logo.png"/>
+          <p:cNvPr id="5" name="Picture 4" descr="slide4_tree.png"/>
           <p:cNvPicPr>
             <a:picLocks noChangeAspect="1"/>
           </p:cNvPicPr>
@@ -5665,8 +5638,8 @@
         </p:blipFill>
         <p:spPr>
           <a:xfrm>
-            <a:off x="10058400" y="228600"/>
-            <a:ext cx="1645920" cy="914400"/>
+            <a:off x="548640" y="1371600"/>
+            <a:ext cx="11094415" cy="4937760"/>
           </a:xfrm>
           <a:prstGeom prst="rect">
             <a:avLst/>
@@ -5675,76 +5648,7 @@
       </p:pic>
       <p:sp>
         <p:nvSpPr>
-          <p:cNvPr id="5" name="Rectangle 4"/>
-          <p:cNvSpPr/>
-          <p:nvPr/>
-        </p:nvSpPr>
-        <p:spPr>
-          <a:xfrm>
-            <a:off x="457200" y="1234440"/>
-            <a:ext cx="11277295" cy="18288"/>
-          </a:xfrm>
-          <a:prstGeom prst="rect">
-            <a:avLst/>
-          </a:prstGeom>
-          <a:solidFill>
-            <a:srgbClr val="E2E8F0"/>
-          </a:solidFill>
-          <a:ln>
-            <a:solidFill>
-              <a:srgbClr val="E2E8F0"/>
-            </a:solidFill>
-          </a:ln>
-        </p:spPr>
-        <p:style>
-          <a:lnRef idx="1">
-            <a:schemeClr val="accent1"/>
-          </a:lnRef>
-          <a:fillRef idx="3">
-            <a:schemeClr val="accent1"/>
-          </a:fillRef>
-          <a:effectRef idx="2">
-            <a:schemeClr val="accent1"/>
-          </a:effectRef>
-          <a:fontRef idx="minor">
-            <a:schemeClr val="lt1"/>
-          </a:fontRef>
-        </p:style>
-        <p:txBody>
-          <a:bodyPr rtlCol="0" anchor="ctr"/>
-          <a:lstStyle/>
-          <a:p>
-            <a:pPr algn="ctr"/>
-          </a:p>
-        </p:txBody>
-      </p:sp>
-      <p:pic>
-        <p:nvPicPr>
-          <p:cNvPr id="6" name="Picture 5" descr="slide4_tree.png"/>
-          <p:cNvPicPr>
-            <a:picLocks noChangeAspect="1"/>
-          </p:cNvPicPr>
-          <p:nvPr/>
-        </p:nvPicPr>
-        <p:blipFill>
-          <a:blip r:embed="rId4"/>
-          <a:stretch>
-            <a:fillRect/>
-          </a:stretch>
-        </p:blipFill>
-        <p:spPr>
-          <a:xfrm>
-            <a:off x="548640" y="1371600"/>
-            <a:ext cx="11094415" cy="4937760"/>
-          </a:xfrm>
-          <a:prstGeom prst="rect">
-            <a:avLst/>
-          </a:prstGeom>
-        </p:spPr>
-      </p:pic>
-      <p:sp>
-        <p:nvSpPr>
-          <p:cNvPr id="7" name="Rectangle 6"/>
+          <p:cNvPr id="6" name="Rectangle 5"/>
           <p:cNvSpPr/>
           <p:nvPr/>
         </p:nvSpPr>
@@ -5790,7 +5694,7 @@
               </a:defRPr>
             </a:pPr>
             <a:r>
-              <a:t>@Qualcomm Snapdragon® AI Lab Build &amp; Present Challenge 2026  |  Project: Kisan Sahayak AI  |  Developer: MOHD UBES                 Page 4</a:t>
+              <a:t>Project: Kisan Sahayak AI   |   Developer: MOHD UBES   |   Snapdragon® AI Lab Build &amp; Present Challenge 2026                 Page 4</a:t>
             </a:r>
           </a:p>
         </p:txBody>
@@ -5845,8 +5749,8 @@
         </p:nvSpPr>
         <p:spPr>
           <a:xfrm>
-            <a:off x="1645920" y="274320"/>
-            <a:ext cx="8046720" cy="868680"/>
+            <a:off x="1463040" y="274320"/>
+            <a:ext cx="10241280" cy="868680"/>
           </a:xfrm>
           <a:prstGeom prst="rect">
             <a:avLst/>
@@ -5860,7 +5764,7 @@
           <a:lstStyle/>
           <a:p>
             <a:pPr algn="ctr">
-              <a:defRPr sz="2100" b="1">
+              <a:defRPr sz="2200" b="1">
                 <a:solidFill>
                   <a:srgbClr val="0F172A"/>
                 </a:solidFill>
@@ -5874,12 +5778,102 @@
             <a:r>
               <a:t>Quantifiable Agronomic Gains, Inclusion &amp; Measurable Socio-Economic Value</a:t>
             </a:r>
+          </a:p>
+        </p:txBody>
+      </p:sp>
+      <p:sp>
+        <p:nvSpPr>
+          <p:cNvPr id="4" name="Rectangle 3"/>
+          <p:cNvSpPr/>
+          <p:nvPr/>
+        </p:nvSpPr>
+        <p:spPr>
+          <a:xfrm>
+            <a:off x="457200" y="1234440"/>
+            <a:ext cx="11277295" cy="18288"/>
+          </a:xfrm>
+          <a:prstGeom prst="rect">
+            <a:avLst/>
+          </a:prstGeom>
+          <a:solidFill>
+            <a:srgbClr val="E2E8F0"/>
+          </a:solidFill>
+          <a:ln>
+            <a:solidFill>
+              <a:srgbClr val="E2E8F0"/>
+            </a:solidFill>
+          </a:ln>
+        </p:spPr>
+        <p:style>
+          <a:lnRef idx="1">
+            <a:schemeClr val="accent1"/>
+          </a:lnRef>
+          <a:fillRef idx="3">
+            <a:schemeClr val="accent1"/>
+          </a:fillRef>
+          <a:effectRef idx="2">
+            <a:schemeClr val="accent1"/>
+          </a:effectRef>
+          <a:fontRef idx="minor">
+            <a:schemeClr val="lt1"/>
+          </a:fontRef>
+        </p:style>
+        <p:txBody>
+          <a:bodyPr rtlCol="0" anchor="ctr"/>
+          <a:lstStyle/>
+          <a:p>
+            <a:pPr algn="ctr"/>
+          </a:p>
+        </p:txBody>
+      </p:sp>
+      <p:sp>
+        <p:nvSpPr>
+          <p:cNvPr id="5" name="Rounded Rectangle 4"/>
+          <p:cNvSpPr/>
+          <p:nvPr/>
+        </p:nvSpPr>
+        <p:spPr>
+          <a:xfrm>
+            <a:off x="548640" y="1371600"/>
+            <a:ext cx="3566160" cy="2057400"/>
+          </a:xfrm>
+          <a:prstGeom prst="roundRect">
+            <a:avLst/>
+          </a:prstGeom>
+          <a:solidFill>
+            <a:srgbClr val="EFF6FF"/>
+          </a:solidFill>
+          <a:ln w="19050">
+            <a:solidFill>
+              <a:srgbClr val="2563EB"/>
+            </a:solidFill>
+          </a:ln>
+        </p:spPr>
+        <p:style>
+          <a:lnRef idx="1">
+            <a:schemeClr val="accent1"/>
+          </a:lnRef>
+          <a:fillRef idx="3">
+            <a:schemeClr val="accent1"/>
+          </a:fillRef>
+          <a:effectRef idx="2">
+            <a:schemeClr val="accent1"/>
+          </a:effectRef>
+          <a:fontRef idx="minor">
+            <a:schemeClr val="lt1"/>
+          </a:fontRef>
+        </p:style>
+        <p:txBody>
+          <a:bodyPr rtlCol="0" anchor="ctr"/>
+          <a:lstStyle/>
+          <a:p>
+            <a:pPr algn="ctr"/>
           </a:p>
         </p:txBody>
       </p:sp>
       <p:pic>
         <p:nvPicPr>
-          <p:cNvPr id="4" name="Picture 3" descr="challenge_logo.png"/>
+          <p:cNvPr id="6" name="Picture 5" descr="icon_financial.png"/>
           <p:cNvPicPr>
             <a:picLocks noChangeAspect="1"/>
           </p:cNvPicPr>
@@ -5893,8 +5887,8 @@
         </p:blipFill>
         <p:spPr>
           <a:xfrm>
-            <a:off x="10058400" y="228600"/>
-            <a:ext cx="1645920" cy="914400"/>
+            <a:off x="685800" y="1600200"/>
+            <a:ext cx="1051560" cy="1051560"/>
           </a:xfrm>
           <a:prstGeom prst="rect">
             <a:avLst/>
@@ -5903,24 +5897,76 @@
       </p:pic>
       <p:sp>
         <p:nvSpPr>
-          <p:cNvPr id="5" name="Rectangle 4"/>
-          <p:cNvSpPr/>
+          <p:cNvPr id="7" name="TextBox 6"/>
+          <p:cNvSpPr txBox="1"/>
           <p:nvPr/>
         </p:nvSpPr>
         <p:spPr>
           <a:xfrm>
-            <a:off x="457200" y="1234440"/>
-            <a:ext cx="11277295" cy="18288"/>
+            <a:off x="1783080" y="1508760"/>
+            <a:ext cx="2240280" cy="1783080"/>
           </a:xfrm>
           <a:prstGeom prst="rect">
             <a:avLst/>
           </a:prstGeom>
+          <a:noFill/>
+        </p:spPr>
+        <p:txBody>
+          <a:bodyPr wrap="square">
+            <a:spAutoFit/>
+          </a:bodyPr>
+          <a:lstStyle/>
+          <a:p>
+            <a:pPr>
+              <a:spcAft>
+                <a:spcPts val="400"/>
+              </a:spcAft>
+              <a:defRPr sz="1050" b="1">
+                <a:solidFill>
+                  <a:srgbClr val="2563EB"/>
+                </a:solidFill>
+                <a:latin typeface="Arial"/>
+              </a:defRPr>
+            </a:pPr>
+            <a:r>
+              <a:t>Financial Clarity &amp; Yield Gain</a:t>
+            </a:r>
+          </a:p>
+          <a:p>
+            <a:pPr>
+              <a:defRPr sz="850">
+                <a:solidFill>
+                  <a:srgbClr val="334155"/>
+                </a:solidFill>
+                <a:latin typeface="Arial"/>
+              </a:defRPr>
+            </a:pPr>
+            <a:r>
+              <a:t>Saves ₹12,000 – ₹18,000/acre by averting catastrophic blight outbreaks. Precise spray guidance cuts unnecessary pesticide expenditure by ₹3,500/season.</a:t>
+            </a:r>
+          </a:p>
+        </p:txBody>
+      </p:sp>
+      <p:sp>
+        <p:nvSpPr>
+          <p:cNvPr id="8" name="Rounded Rectangle 7"/>
+          <p:cNvSpPr/>
+          <p:nvPr/>
+        </p:nvSpPr>
+        <p:spPr>
+          <a:xfrm>
+            <a:off x="4343400" y="1371600"/>
+            <a:ext cx="3566160" cy="2057400"/>
+          </a:xfrm>
+          <a:prstGeom prst="roundRect">
+            <a:avLst/>
+          </a:prstGeom>
           <a:solidFill>
-            <a:srgbClr val="E2E8F0"/>
+            <a:srgbClr val="FEF2F2"/>
           </a:solidFill>
-          <a:ln>
+          <a:ln w="19050">
             <a:solidFill>
-              <a:srgbClr val="E2E8F0"/>
+              <a:srgbClr val="DC2626"/>
             </a:solidFill>
           </a:ln>
         </p:spPr>
@@ -5946,54 +5992,9 @@
           </a:p>
         </p:txBody>
       </p:sp>
-      <p:sp>
-        <p:nvSpPr>
-          <p:cNvPr id="6" name="Rounded Rectangle 5"/>
-          <p:cNvSpPr/>
-          <p:nvPr/>
-        </p:nvSpPr>
-        <p:spPr>
-          <a:xfrm>
-            <a:off x="548640" y="1371600"/>
-            <a:ext cx="3566160" cy="2057400"/>
-          </a:xfrm>
-          <a:prstGeom prst="roundRect">
-            <a:avLst/>
-          </a:prstGeom>
-          <a:solidFill>
-            <a:srgbClr val="EFF6FF"/>
-          </a:solidFill>
-          <a:ln w="19050">
-            <a:solidFill>
-              <a:srgbClr val="2563EB"/>
-            </a:solidFill>
-          </a:ln>
-        </p:spPr>
-        <p:style>
-          <a:lnRef idx="1">
-            <a:schemeClr val="accent1"/>
-          </a:lnRef>
-          <a:fillRef idx="3">
-            <a:schemeClr val="accent1"/>
-          </a:fillRef>
-          <a:effectRef idx="2">
-            <a:schemeClr val="accent1"/>
-          </a:effectRef>
-          <a:fontRef idx="minor">
-            <a:schemeClr val="lt1"/>
-          </a:fontRef>
-        </p:style>
-        <p:txBody>
-          <a:bodyPr rtlCol="0" anchor="ctr"/>
-          <a:lstStyle/>
-          <a:p>
-            <a:pPr algn="ctr"/>
-          </a:p>
-        </p:txBody>
-      </p:sp>
       <p:pic>
         <p:nvPicPr>
-          <p:cNvPr id="7" name="Picture 6" descr="icon_financial.png"/>
+          <p:cNvPr id="9" name="Picture 8" descr="icon_scheme.png"/>
           <p:cNvPicPr>
             <a:picLocks noChangeAspect="1"/>
           </p:cNvPicPr>
@@ -6007,7 +6008,7 @@
         </p:blipFill>
         <p:spPr>
           <a:xfrm>
-            <a:off x="685800" y="1600200"/>
+            <a:off x="4480560" y="1600200"/>
             <a:ext cx="1051560" cy="1051560"/>
           </a:xfrm>
           <a:prstGeom prst="rect">
@@ -6017,13 +6018,13 @@
       </p:pic>
       <p:sp>
         <p:nvSpPr>
-          <p:cNvPr id="8" name="TextBox 7"/>
+          <p:cNvPr id="10" name="TextBox 9"/>
           <p:cNvSpPr txBox="1"/>
           <p:nvPr/>
         </p:nvSpPr>
         <p:spPr>
           <a:xfrm>
-            <a:off x="1783080" y="1508760"/>
+            <a:off x="5577840" y="1508760"/>
             <a:ext cx="2240280" cy="1783080"/>
           </a:xfrm>
           <a:prstGeom prst="rect">
@@ -6043,13 +6044,13 @@
               </a:spcAft>
               <a:defRPr sz="1050" b="1">
                 <a:solidFill>
-                  <a:srgbClr val="2563EB"/>
+                  <a:srgbClr val="DC2626"/>
                 </a:solidFill>
                 <a:latin typeface="Arial"/>
               </a:defRPr>
             </a:pPr>
             <a:r>
-              <a:t>Financial Clarity &amp; Yield Gain</a:t>
+              <a:t>Direct Access to Subsidies</a:t>
             </a:r>
           </a:p>
           <a:p>
@@ -6062,31 +6063,31 @@
               </a:defRPr>
             </a:pPr>
             <a:r>
-              <a:t>Saves ₹12,000 – ₹18,000/acre by averting catastrophic blight outbreaks. Precise spray guidance cuts unnecessary pesticide expenditure by ₹3,500/season.</a:t>
-            </a:r>
-          </a:p>
-        </p:txBody>
-      </p:sp>
-      <p:sp>
-        <p:nvSpPr>
-          <p:cNvPr id="9" name="Rounded Rectangle 8"/>
+              <a:t>Auto-matches 15+ Central &amp; State schemes (PM-KISAN, PMFBY, PM-KUSUM 90% solar pump, SMAM 50-80% farm mechanization) with instant eligibility checklist.</a:t>
+            </a:r>
+          </a:p>
+        </p:txBody>
+      </p:sp>
+      <p:sp>
+        <p:nvSpPr>
+          <p:cNvPr id="11" name="Rounded Rectangle 10"/>
           <p:cNvSpPr/>
           <p:nvPr/>
         </p:nvSpPr>
         <p:spPr>
           <a:xfrm>
-            <a:off x="4343400" y="1371600"/>
+            <a:off x="8138160" y="1371600"/>
             <a:ext cx="3566160" cy="2057400"/>
           </a:xfrm>
           <a:prstGeom prst="roundRect">
             <a:avLst/>
           </a:prstGeom>
           <a:solidFill>
-            <a:srgbClr val="FEF2F2"/>
+            <a:srgbClr val="F0FDF4"/>
           </a:solidFill>
           <a:ln w="19050">
             <a:solidFill>
-              <a:srgbClr val="DC2626"/>
+              <a:srgbClr val="059669"/>
             </a:solidFill>
           </a:ln>
         </p:spPr>
@@ -6114,7 +6115,7 @@
       </p:sp>
       <p:pic>
         <p:nvPicPr>
-          <p:cNvPr id="10" name="Picture 9" descr="icon_scheme.png"/>
+          <p:cNvPr id="12" name="Picture 11" descr="icon_whatsapp.png"/>
           <p:cNvPicPr>
             <a:picLocks noChangeAspect="1"/>
           </p:cNvPicPr>
@@ -6128,7 +6129,7 @@
         </p:blipFill>
         <p:spPr>
           <a:xfrm>
-            <a:off x="4480560" y="1600200"/>
+            <a:off x="8275320" y="1600200"/>
             <a:ext cx="1051560" cy="1051560"/>
           </a:xfrm>
           <a:prstGeom prst="rect">
@@ -6138,13 +6139,13 @@
       </p:pic>
       <p:sp>
         <p:nvSpPr>
-          <p:cNvPr id="11" name="TextBox 10"/>
+          <p:cNvPr id="13" name="TextBox 12"/>
           <p:cNvSpPr txBox="1"/>
           <p:nvPr/>
         </p:nvSpPr>
         <p:spPr>
           <a:xfrm>
-            <a:off x="5577840" y="1508760"/>
+            <a:off x="9372600" y="1508760"/>
             <a:ext cx="2240280" cy="1783080"/>
           </a:xfrm>
           <a:prstGeom prst="rect">
@@ -6164,13 +6165,13 @@
               </a:spcAft>
               <a:defRPr sz="1050" b="1">
                 <a:solidFill>
-                  <a:srgbClr val="DC2626"/>
+                  <a:srgbClr val="059669"/>
                 </a:solidFill>
                 <a:latin typeface="Arial"/>
               </a:defRPr>
             </a:pPr>
             <a:r>
-              <a:t>Direct Access to Subsidies</a:t>
+              <a:t>Inclusive Multichannel Access</a:t>
             </a:r>
           </a:p>
           <a:p>
@@ -6183,31 +6184,31 @@
               </a:defRPr>
             </a:pPr>
             <a:r>
-              <a:t>Auto-matches 15+ Central &amp; State schemes (PM-KISAN, PMFBY, PM-KUSUM 90% solar pump, SMAM 50-80% farm mechanization) with instant eligibility checklist.</a:t>
-            </a:r>
-          </a:p>
-        </p:txBody>
-      </p:sp>
-      <p:sp>
-        <p:nvSpPr>
-          <p:cNvPr id="12" name="Rounded Rectangle 11"/>
+              <a:t>Zero barrier adoption: works via WhatsApp Bot, SMS fallback, and multilingual voice speech in 10+ Indic languages. No high digital literacy needed.</a:t>
+            </a:r>
+          </a:p>
+        </p:txBody>
+      </p:sp>
+      <p:sp>
+        <p:nvSpPr>
+          <p:cNvPr id="14" name="Rounded Rectangle 13"/>
           <p:cNvSpPr/>
           <p:nvPr/>
         </p:nvSpPr>
         <p:spPr>
           <a:xfrm>
-            <a:off x="8138160" y="1371600"/>
+            <a:off x="548640" y="3611880"/>
             <a:ext cx="3566160" cy="2057400"/>
           </a:xfrm>
           <a:prstGeom prst="roundRect">
             <a:avLst/>
           </a:prstGeom>
           <a:solidFill>
-            <a:srgbClr val="F0FDF4"/>
+            <a:srgbClr val="FFF7ED"/>
           </a:solidFill>
           <a:ln w="19050">
             <a:solidFill>
-              <a:srgbClr val="059669"/>
+              <a:srgbClr val="D97706"/>
             </a:solidFill>
           </a:ln>
         </p:spPr>
@@ -6235,7 +6236,7 @@
       </p:sp>
       <p:pic>
         <p:nvPicPr>
-          <p:cNvPr id="13" name="Picture 12" descr="icon_whatsapp.png"/>
+          <p:cNvPr id="15" name="Picture 14" descr="icon_offline.png"/>
           <p:cNvPicPr>
             <a:picLocks noChangeAspect="1"/>
           </p:cNvPicPr>
@@ -6249,7 +6250,7 @@
         </p:blipFill>
         <p:spPr>
           <a:xfrm>
-            <a:off x="8275320" y="1600200"/>
+            <a:off x="685800" y="3840480"/>
             <a:ext cx="1051560" cy="1051560"/>
           </a:xfrm>
           <a:prstGeom prst="rect">
@@ -6259,13 +6260,13 @@
       </p:pic>
       <p:sp>
         <p:nvSpPr>
-          <p:cNvPr id="14" name="TextBox 13"/>
+          <p:cNvPr id="16" name="TextBox 15"/>
           <p:cNvSpPr txBox="1"/>
           <p:nvPr/>
         </p:nvSpPr>
         <p:spPr>
           <a:xfrm>
-            <a:off x="9372600" y="1508760"/>
+            <a:off x="1783080" y="3749040"/>
             <a:ext cx="2240280" cy="1783080"/>
           </a:xfrm>
           <a:prstGeom prst="rect">
@@ -6285,13 +6286,13 @@
               </a:spcAft>
               <a:defRPr sz="1050" b="1">
                 <a:solidFill>
-                  <a:srgbClr val="059669"/>
+                  <a:srgbClr val="D97706"/>
                 </a:solidFill>
                 <a:latin typeface="Arial"/>
               </a:defRPr>
             </a:pPr>
             <a:r>
-              <a:t>Inclusive Multichannel Access</a:t>
+              <a:t>100% Offline Edge Resilient</a:t>
             </a:r>
           </a:p>
           <a:p>
@@ -6304,31 +6305,31 @@
               </a:defRPr>
             </a:pPr>
             <a:r>
-              <a:t>Zero barrier adoption: works via WhatsApp Bot, SMS fallback, and multilingual voice speech in 10+ Indic languages. No high digital literacy needed.</a:t>
-            </a:r>
-          </a:p>
-        </p:txBody>
-      </p:sp>
-      <p:sp>
-        <p:nvSpPr>
-          <p:cNvPr id="15" name="Rounded Rectangle 14"/>
+              <a:t>On-Device Snapdragon NPU vision and IndexedDB local storage ensure full functionality in deep rural farm fields with zero 4G/5G connectivity.</a:t>
+            </a:r>
+          </a:p>
+        </p:txBody>
+      </p:sp>
+      <p:sp>
+        <p:nvSpPr>
+          <p:cNvPr id="17" name="Rounded Rectangle 16"/>
           <p:cNvSpPr/>
           <p:nvPr/>
         </p:nvSpPr>
         <p:spPr>
           <a:xfrm>
-            <a:off x="548640" y="3611880"/>
+            <a:off x="4343400" y="3611880"/>
             <a:ext cx="3566160" cy="2057400"/>
           </a:xfrm>
           <a:prstGeom prst="roundRect">
             <a:avLst/>
           </a:prstGeom>
           <a:solidFill>
-            <a:srgbClr val="FFF7ED"/>
+            <a:srgbClr val="FAF5FF"/>
           </a:solidFill>
           <a:ln w="19050">
             <a:solidFill>
-              <a:srgbClr val="D97706"/>
+              <a:srgbClr val="7C3AED"/>
             </a:solidFill>
           </a:ln>
         </p:spPr>
@@ -6356,7 +6357,7 @@
       </p:sp>
       <p:pic>
         <p:nvPicPr>
-          <p:cNvPr id="16" name="Picture 15" descr="icon_offline.png"/>
+          <p:cNvPr id="18" name="Picture 17" descr="icon_farmer.png"/>
           <p:cNvPicPr>
             <a:picLocks noChangeAspect="1"/>
           </p:cNvPicPr>
@@ -6370,7 +6371,7 @@
         </p:blipFill>
         <p:spPr>
           <a:xfrm>
-            <a:off x="685800" y="3840480"/>
+            <a:off x="4480560" y="3840480"/>
             <a:ext cx="1051560" cy="1051560"/>
           </a:xfrm>
           <a:prstGeom prst="rect">
@@ -6380,13 +6381,13 @@
       </p:pic>
       <p:sp>
         <p:nvSpPr>
-          <p:cNvPr id="17" name="TextBox 16"/>
+          <p:cNvPr id="19" name="TextBox 18"/>
           <p:cNvSpPr txBox="1"/>
           <p:nvPr/>
         </p:nvSpPr>
         <p:spPr>
           <a:xfrm>
-            <a:off x="1783080" y="3749040"/>
+            <a:off x="5577840" y="3749040"/>
             <a:ext cx="2240280" cy="1783080"/>
           </a:xfrm>
           <a:prstGeom prst="rect">
@@ -6406,13 +6407,13 @@
               </a:spcAft>
               <a:defRPr sz="1050" b="1">
                 <a:solidFill>
-                  <a:srgbClr val="D97706"/>
+                  <a:srgbClr val="7C3AED"/>
                 </a:solidFill>
                 <a:latin typeface="Arial"/>
               </a:defRPr>
             </a:pPr>
             <a:r>
-              <a:t>100% Offline Edge Resilient</a:t>
+              <a:t>Marginal Farmer Empowerment</a:t>
             </a:r>
           </a:p>
           <a:p>
@@ -6425,31 +6426,31 @@
               </a:defRPr>
             </a:pPr>
             <a:r>
-              <a:t>On-Device Snapdragon NPU vision and IndexedDB local storage ensure full functionality in deep rural farm fields with zero 4G/5G connectivity.</a:t>
-            </a:r>
-          </a:p>
-        </p:txBody>
-      </p:sp>
-      <p:sp>
-        <p:nvSpPr>
-          <p:cNvPr id="18" name="Rounded Rectangle 17"/>
+              <a:t>Custom-tailored for 120M+ small &amp; marginal farmers, SC/ST rural entrepreneurs, and Women SHGs running localized farm-gate diagnostics.</a:t>
+            </a:r>
+          </a:p>
+        </p:txBody>
+      </p:sp>
+      <p:sp>
+        <p:nvSpPr>
+          <p:cNvPr id="20" name="Rounded Rectangle 19"/>
           <p:cNvSpPr/>
           <p:nvPr/>
         </p:nvSpPr>
         <p:spPr>
           <a:xfrm>
-            <a:off x="4343400" y="3611880"/>
+            <a:off x="8138160" y="3611880"/>
             <a:ext cx="3566160" cy="2057400"/>
           </a:xfrm>
           <a:prstGeom prst="roundRect">
             <a:avLst/>
           </a:prstGeom>
           <a:solidFill>
-            <a:srgbClr val="FAF5FF"/>
+            <a:srgbClr val="ECFEFF"/>
           </a:solidFill>
           <a:ln w="19050">
             <a:solidFill>
-              <a:srgbClr val="7C3AED"/>
+              <a:srgbClr val="0891B2"/>
             </a:solidFill>
           </a:ln>
         </p:spPr>
@@ -6477,7 +6478,7 @@
       </p:sp>
       <p:pic>
         <p:nvPicPr>
-          <p:cNvPr id="19" name="Picture 18" descr="icon_farmer.png"/>
+          <p:cNvPr id="21" name="Picture 20" descr="icon_explainable.png"/>
           <p:cNvPicPr>
             <a:picLocks noChangeAspect="1"/>
           </p:cNvPicPr>
@@ -6491,7 +6492,7 @@
         </p:blipFill>
         <p:spPr>
           <a:xfrm>
-            <a:off x="4480560" y="3840480"/>
+            <a:off x="8275320" y="3840480"/>
             <a:ext cx="1051560" cy="1051560"/>
           </a:xfrm>
           <a:prstGeom prst="rect">
@@ -6501,13 +6502,13 @@
       </p:pic>
       <p:sp>
         <p:nvSpPr>
-          <p:cNvPr id="20" name="TextBox 19"/>
+          <p:cNvPr id="22" name="TextBox 21"/>
           <p:cNvSpPr txBox="1"/>
           <p:nvPr/>
         </p:nvSpPr>
         <p:spPr>
           <a:xfrm>
-            <a:off x="5577840" y="3749040"/>
+            <a:off x="9372600" y="3749040"/>
             <a:ext cx="2240280" cy="1783080"/>
           </a:xfrm>
           <a:prstGeom prst="rect">
@@ -6527,13 +6528,13 @@
               </a:spcAft>
               <a:defRPr sz="1050" b="1">
                 <a:solidFill>
-                  <a:srgbClr val="7C3AED"/>
+                  <a:srgbClr val="0891B2"/>
                 </a:solidFill>
                 <a:latin typeface="Arial"/>
               </a:defRPr>
             </a:pPr>
             <a:r>
-              <a:t>Marginal Farmer Empowerment</a:t>
+              <a:t>Trust via Explainable AI</a:t>
             </a:r>
           </a:p>
           <a:p>
@@ -6546,127 +6547,6 @@
               </a:defRPr>
             </a:pPr>
             <a:r>
-              <a:t>Custom-tailored for 120M+ small &amp; marginal farmers, SC/ST rural entrepreneurs, and Women SHGs running localized farm-gate diagnostics.</a:t>
-            </a:r>
-          </a:p>
-        </p:txBody>
-      </p:sp>
-      <p:sp>
-        <p:nvSpPr>
-          <p:cNvPr id="21" name="Rounded Rectangle 20"/>
-          <p:cNvSpPr/>
-          <p:nvPr/>
-        </p:nvSpPr>
-        <p:spPr>
-          <a:xfrm>
-            <a:off x="8138160" y="3611880"/>
-            <a:ext cx="3566160" cy="2057400"/>
-          </a:xfrm>
-          <a:prstGeom prst="roundRect">
-            <a:avLst/>
-          </a:prstGeom>
-          <a:solidFill>
-            <a:srgbClr val="ECFEFF"/>
-          </a:solidFill>
-          <a:ln w="19050">
-            <a:solidFill>
-              <a:srgbClr val="0891B2"/>
-            </a:solidFill>
-          </a:ln>
-        </p:spPr>
-        <p:style>
-          <a:lnRef idx="1">
-            <a:schemeClr val="accent1"/>
-          </a:lnRef>
-          <a:fillRef idx="3">
-            <a:schemeClr val="accent1"/>
-          </a:fillRef>
-          <a:effectRef idx="2">
-            <a:schemeClr val="accent1"/>
-          </a:effectRef>
-          <a:fontRef idx="minor">
-            <a:schemeClr val="lt1"/>
-          </a:fontRef>
-        </p:style>
-        <p:txBody>
-          <a:bodyPr rtlCol="0" anchor="ctr"/>
-          <a:lstStyle/>
-          <a:p>
-            <a:pPr algn="ctr"/>
-          </a:p>
-        </p:txBody>
-      </p:sp>
-      <p:pic>
-        <p:nvPicPr>
-          <p:cNvPr id="22" name="Picture 21" descr="icon_explainable.png"/>
-          <p:cNvPicPr>
-            <a:picLocks noChangeAspect="1"/>
-          </p:cNvPicPr>
-          <p:nvPr/>
-        </p:nvPicPr>
-        <p:blipFill>
-          <a:blip r:embed="rId9"/>
-          <a:stretch>
-            <a:fillRect/>
-          </a:stretch>
-        </p:blipFill>
-        <p:spPr>
-          <a:xfrm>
-            <a:off x="8275320" y="3840480"/>
-            <a:ext cx="1051560" cy="1051560"/>
-          </a:xfrm>
-          <a:prstGeom prst="rect">
-            <a:avLst/>
-          </a:prstGeom>
-        </p:spPr>
-      </p:pic>
-      <p:sp>
-        <p:nvSpPr>
-          <p:cNvPr id="23" name="TextBox 22"/>
-          <p:cNvSpPr txBox="1"/>
-          <p:nvPr/>
-        </p:nvSpPr>
-        <p:spPr>
-          <a:xfrm>
-            <a:off x="9372600" y="3749040"/>
-            <a:ext cx="2240280" cy="1783080"/>
-          </a:xfrm>
-          <a:prstGeom prst="rect">
-            <a:avLst/>
-          </a:prstGeom>
-          <a:noFill/>
-        </p:spPr>
-        <p:txBody>
-          <a:bodyPr wrap="square">
-            <a:spAutoFit/>
-          </a:bodyPr>
-          <a:lstStyle/>
-          <a:p>
-            <a:pPr>
-              <a:spcAft>
-                <a:spcPts val="400"/>
-              </a:spcAft>
-              <a:defRPr sz="1050" b="1">
-                <a:solidFill>
-                  <a:srgbClr val="0891B2"/>
-                </a:solidFill>
-                <a:latin typeface="Arial"/>
-              </a:defRPr>
-            </a:pPr>
-            <a:r>
-              <a:t>Trust via Explainable AI</a:t>
-            </a:r>
-          </a:p>
-          <a:p>
-            <a:pPr>
-              <a:defRPr sz="850">
-                <a:solidFill>
-                  <a:srgbClr val="334155"/>
-                </a:solidFill>
-                <a:latin typeface="Arial"/>
-              </a:defRPr>
-            </a:pPr>
-            <a:r>
               <a:t>Every recommendation provides transparent 'WHY' causal reasoning, organic biological controls (Neem/Trichoderma), and government-approved chemical dosages.</a:t>
             </a:r>
           </a:p>
@@ -6674,7 +6554,7 @@
       </p:sp>
       <p:sp>
         <p:nvSpPr>
-          <p:cNvPr id="24" name="Rounded Rectangle 23"/>
+          <p:cNvPr id="23" name="Rounded Rectangle 22"/>
           <p:cNvSpPr/>
           <p:nvPr/>
         </p:nvSpPr>
@@ -6727,7 +6607,7 @@
       </p:sp>
       <p:sp>
         <p:nvSpPr>
-          <p:cNvPr id="25" name="Rectangle 24"/>
+          <p:cNvPr id="24" name="Rectangle 23"/>
           <p:cNvSpPr/>
           <p:nvPr/>
         </p:nvSpPr>
@@ -6773,7 +6653,7 @@
               </a:defRPr>
             </a:pPr>
             <a:r>
-              <a:t>@Qualcomm Snapdragon® AI Lab Build &amp; Present Challenge 2026  |  Project: Kisan Sahayak AI  |  Developer: MOHD UBES                 Page 5</a:t>
+              <a:t>Project: Kisan Sahayak AI   |   Developer: MOHD UBES   |   Snapdragon® AI Lab Build &amp; Present Challenge 2026                 Page 5</a:t>
             </a:r>
           </a:p>
         </p:txBody>
@@ -6828,8 +6708,8 @@
         </p:nvSpPr>
         <p:spPr>
           <a:xfrm>
-            <a:off x="1645920" y="274320"/>
-            <a:ext cx="8046720" cy="868680"/>
+            <a:off x="1463040" y="274320"/>
+            <a:ext cx="10241280" cy="868680"/>
           </a:xfrm>
           <a:prstGeom prst="rect">
             <a:avLst/>
@@ -6843,7 +6723,7 @@
           <a:lstStyle/>
           <a:p>
             <a:pPr algn="ctr">
-              <a:defRPr sz="2100" b="1">
+              <a:defRPr sz="2200" b="1">
                 <a:solidFill>
                   <a:srgbClr val="0F172A"/>
                 </a:solidFill>
@@ -6860,33 +6740,9 @@
           </a:p>
         </p:txBody>
       </p:sp>
-      <p:pic>
-        <p:nvPicPr>
-          <p:cNvPr id="4" name="Picture 3" descr="challenge_logo.png"/>
-          <p:cNvPicPr>
-            <a:picLocks noChangeAspect="1"/>
-          </p:cNvPicPr>
-          <p:nvPr/>
-        </p:nvPicPr>
-        <p:blipFill>
-          <a:blip r:embed="rId3"/>
-          <a:stretch>
-            <a:fillRect/>
-          </a:stretch>
-        </p:blipFill>
-        <p:spPr>
-          <a:xfrm>
-            <a:off x="10058400" y="228600"/>
-            <a:ext cx="1645920" cy="914400"/>
-          </a:xfrm>
-          <a:prstGeom prst="rect">
-            <a:avLst/>
-          </a:prstGeom>
-        </p:spPr>
-      </p:pic>
-      <p:sp>
-        <p:nvSpPr>
-          <p:cNvPr id="5" name="Rectangle 4"/>
+      <p:sp>
+        <p:nvSpPr>
+          <p:cNvPr id="4" name="Rectangle 3"/>
           <p:cNvSpPr/>
           <p:nvPr/>
         </p:nvSpPr>
@@ -6931,7 +6787,7 @@
       </p:sp>
       <p:sp>
         <p:nvSpPr>
-          <p:cNvPr id="6" name="Rounded Rectangle 5"/>
+          <p:cNvPr id="5" name="Rounded Rectangle 4"/>
           <p:cNvSpPr/>
           <p:nvPr/>
         </p:nvSpPr>
@@ -7041,7 +6897,7 @@
               </a:defRPr>
             </a:pPr>
             <a:r>
-              <a:t>• Jan Samarth Portal &amp; UMANG App: Unified government credit linkage and agricultural subsidy schemes.</a:t>
+              <a:t>• Jan Samarth Portal &amp; UMANG App: Unified government subsidy frameworks and credit linkage norms.</a:t>
             </a:r>
           </a:p>
           <a:p>
@@ -7078,7 +6934,7 @@
       </p:sp>
       <p:graphicFrame>
         <p:nvGraphicFramePr>
-          <p:cNvPr id="7" name="Table 6"/>
+          <p:cNvPr id="6" name="Table 5"/>
           <p:cNvGraphicFramePr>
             <a:graphicFrameLocks noGrp="1"/>
           </p:cNvGraphicFramePr>
@@ -7858,7 +7714,7 @@
       </p:graphicFrame>
       <p:sp>
         <p:nvSpPr>
-          <p:cNvPr id="8" name="Rectangle 7"/>
+          <p:cNvPr id="7" name="Rectangle 6"/>
           <p:cNvSpPr/>
           <p:nvPr/>
         </p:nvSpPr>
@@ -7904,7 +7760,7 @@
               </a:defRPr>
             </a:pPr>
             <a:r>
-              <a:t>@Qualcomm Snapdragon® AI Lab Build &amp; Present Challenge 2026  |  Project: Kisan Sahayak AI  |  Developer: MOHD UBES                 Page 6</a:t>
+              <a:t>Project: Kisan Sahayak AI   |   Developer: MOHD UBES   |   Snapdragon® AI Lab Build &amp; Present Challenge 2026                 Page 6</a:t>
             </a:r>
           </a:p>
         </p:txBody>
